--- a/docs/ship_energy_research/船舶控制与节能算法调研汇报.pptx
+++ b/docs/ship_energy_research/船舶控制与节能算法调研汇报.pptx
@@ -24,7 +24,6 @@
     <p:sldId id="272" r:id="rId23"/>
     <p:sldId id="273" r:id="rId24"/>
     <p:sldId id="274" r:id="rId25"/>
-    <p:sldId id="275" r:id="rId26"/>
   </p:sldIdLst>
   <p:sldSz cx="12191695" cy="6858000" type="screen4x3"/>
   <p:notesSz cx="6858000" cy="9144000"/>
@@ -3374,510 +3373,21 @@
                 </a:solidFill>
                 <a:latin typeface="Noto Sans CJK SC"/>
               </a:rPr>
-              <a:t>MPC vs PD 部署优缺点小结</a:t>
-            </a:r>
-          </a:p>
-        </p:txBody>
-      </p:sp>
-      <p:graphicFrame>
-        <p:nvGraphicFramePr>
-          <p:cNvPr id="4" name="Table 3"/>
-          <p:cNvGraphicFramePr>
-            <a:graphicFrameLocks noGrp="1"/>
-          </p:cNvGraphicFramePr>
-          <p:nvPr/>
-        </p:nvGraphicFramePr>
-        <p:xfrm>
-          <a:off x="457200" y="1463040"/>
-          <a:ext cx="11338558" cy="3566160"/>
-        </p:xfrm>
-        <a:graphic>
-          <a:graphicData uri="http://schemas.openxmlformats.org/drawingml/2006/table">
-            <a:tbl>
-              <a:tblPr firstRow="1" bandRow="1">
-                <a:tableStyleId>{5C22544A-7EE6-4342-B048-85BDC9FD1C3A}</a:tableStyleId>
-              </a:tblPr>
-              <a:tblGrid>
-                <a:gridCol w="1790298"/>
-                <a:gridCol w="4376286"/>
-                <a:gridCol w="5171974"/>
-              </a:tblGrid>
-              <a:tr h="594360">
-                <a:tc>
-                  <a:txBody>
-                    <a:bodyPr/>
-                    <a:lstStyle/>
-                    <a:p>
-                      <a:pPr>
-                        <a:lnSpc>
-                          <a:spcPct val="105000"/>
-                        </a:lnSpc>
-                      </a:pPr>
-                      <a:r>
-                        <a:rPr sz="1350" b="1">
-                          <a:solidFill>
-                            <a:srgbClr val="FFFFFF"/>
-                          </a:solidFill>
-                          <a:latin typeface="Noto Sans CJK SC"/>
-                        </a:rPr>
-                        <a:t>维度</a:t>
-                      </a:r>
-                    </a:p>
-                  </a:txBody>
-                  <a:tcPr marL="54864" marR="54864" marT="27432" marB="27432" anchor="ctr">
-                    <a:solidFill>
-                      <a:srgbClr val="1F77B4"/>
-                    </a:solidFill>
-                  </a:tcPr>
-                </a:tc>
-                <a:tc>
-                  <a:txBody>
-                    <a:bodyPr/>
-                    <a:lstStyle/>
-                    <a:p>
-                      <a:pPr>
-                        <a:lnSpc>
-                          <a:spcPct val="105000"/>
-                        </a:lnSpc>
-                      </a:pPr>
-                      <a:r>
-                        <a:rPr sz="1350" b="1">
-                          <a:solidFill>
-                            <a:srgbClr val="FFFFFF"/>
-                          </a:solidFill>
-                          <a:latin typeface="Noto Sans CJK SC"/>
-                        </a:rPr>
-                        <a:t>传统 PD/PID</a:t>
-                      </a:r>
-                    </a:p>
-                  </a:txBody>
-                  <a:tcPr marL="54864" marR="54864" marT="27432" marB="27432" anchor="ctr">
-                    <a:solidFill>
-                      <a:srgbClr val="1F77B4"/>
-                    </a:solidFill>
-                  </a:tcPr>
-                </a:tc>
-                <a:tc>
-                  <a:txBody>
-                    <a:bodyPr/>
-                    <a:lstStyle/>
-                    <a:p>
-                      <a:pPr>
-                        <a:lnSpc>
-                          <a:spcPct val="105000"/>
-                        </a:lnSpc>
-                      </a:pPr>
-                      <a:r>
-                        <a:rPr sz="1350" b="1">
-                          <a:solidFill>
-                            <a:srgbClr val="FFFFFF"/>
-                          </a:solidFill>
-                          <a:latin typeface="Noto Sans CJK SC"/>
-                        </a:rPr>
-                        <a:t>MPC</a:t>
-                      </a:r>
-                    </a:p>
-                  </a:txBody>
-                  <a:tcPr marL="54864" marR="54864" marT="27432" marB="27432" anchor="ctr">
-                    <a:solidFill>
-                      <a:srgbClr val="1F77B4"/>
-                    </a:solidFill>
-                  </a:tcPr>
-                </a:tc>
-              </a:tr>
-              <a:tr h="594360">
-                <a:tc>
-                  <a:txBody>
-                    <a:bodyPr/>
-                    <a:lstStyle/>
-                    <a:p>
-                      <a:pPr>
-                        <a:lnSpc>
-                          <a:spcPct val="105000"/>
-                        </a:lnSpc>
-                      </a:pPr>
-                      <a:r>
-                        <a:rPr sz="1300" b="0">
-                          <a:solidFill>
-                            <a:srgbClr val="1B2A4A"/>
-                          </a:solidFill>
-                          <a:latin typeface="Noto Sans CJK SC"/>
-                        </a:rPr>
-                        <a:t>控制效果</a:t>
-                      </a:r>
-                    </a:p>
-                  </a:txBody>
-                  <a:tcPr marL="54864" marR="54864" marT="27432" marB="27432" anchor="ctr"/>
-                </a:tc>
-                <a:tc>
-                  <a:txBody>
-                    <a:bodyPr/>
-                    <a:lstStyle/>
-                    <a:p>
-                      <a:pPr>
-                        <a:lnSpc>
-                          <a:spcPct val="105000"/>
-                        </a:lnSpc>
-                      </a:pPr>
-                      <a:r>
-                        <a:rPr sz="1300" b="0">
-                          <a:solidFill>
-                            <a:srgbClr val="1B2A4A"/>
-                          </a:solidFill>
-                          <a:latin typeface="Noto Sans CJK SC"/>
-                        </a:rPr>
-                        <a:t>无前瞻、海浪下易无效操舵</a:t>
-                      </a:r>
-                    </a:p>
-                  </a:txBody>
-                  <a:tcPr marL="54864" marR="54864" marT="27432" marB="27432" anchor="ctr"/>
-                </a:tc>
-                <a:tc>
-                  <a:txBody>
-                    <a:bodyPr/>
-                    <a:lstStyle/>
-                    <a:p>
-                      <a:pPr>
-                        <a:lnSpc>
-                          <a:spcPct val="105000"/>
-                        </a:lnSpc>
-                      </a:pPr>
-                      <a:r>
-                        <a:rPr sz="1300" b="0">
-                          <a:solidFill>
-                            <a:srgbClr val="1B2A4A"/>
-                          </a:solidFill>
-                          <a:latin typeface="Noto Sans CJK SC"/>
-                        </a:rPr>
-                        <a:t>响应快、超调小、抗扰强、特定工况舵动作更少</a:t>
-                      </a:r>
-                    </a:p>
-                  </a:txBody>
-                  <a:tcPr marL="54864" marR="54864" marT="27432" marB="27432" anchor="ctr"/>
-                </a:tc>
-              </a:tr>
-              <a:tr h="594360">
-                <a:tc>
-                  <a:txBody>
-                    <a:bodyPr/>
-                    <a:lstStyle/>
-                    <a:p>
-                      <a:pPr>
-                        <a:lnSpc>
-                          <a:spcPct val="105000"/>
-                        </a:lnSpc>
-                      </a:pPr>
-                      <a:r>
-                        <a:rPr sz="1300" b="0">
-                          <a:solidFill>
-                            <a:srgbClr val="1B2A4A"/>
-                          </a:solidFill>
-                          <a:latin typeface="Noto Sans CJK SC"/>
-                        </a:rPr>
-                        <a:t>调试难度</a:t>
-                      </a:r>
-                    </a:p>
-                  </a:txBody>
-                  <a:tcPr marL="54864" marR="54864" marT="27432" marB="27432" anchor="ctr">
-                    <a:solidFill>
-                      <a:srgbClr val="EEF3FA"/>
-                    </a:solidFill>
-                  </a:tcPr>
-                </a:tc>
-                <a:tc>
-                  <a:txBody>
-                    <a:bodyPr/>
-                    <a:lstStyle/>
-                    <a:p>
-                      <a:pPr>
-                        <a:lnSpc>
-                          <a:spcPct val="105000"/>
-                        </a:lnSpc>
-                      </a:pPr>
-                      <a:r>
-                        <a:rPr sz="1300" b="0">
-                          <a:solidFill>
-                            <a:srgbClr val="1B2A4A"/>
-                          </a:solidFill>
-                          <a:latin typeface="Noto Sans CJK SC"/>
-                        </a:rPr>
-                        <a:t>整定规则成熟，船员可现场整定</a:t>
-                      </a:r>
-                    </a:p>
-                  </a:txBody>
-                  <a:tcPr marL="54864" marR="54864" marT="27432" marB="27432" anchor="ctr">
-                    <a:solidFill>
-                      <a:srgbClr val="EEF3FA"/>
-                    </a:solidFill>
-                  </a:tcPr>
-                </a:tc>
-                <a:tc>
-                  <a:txBody>
-                    <a:bodyPr/>
-                    <a:lstStyle/>
-                    <a:p>
-                      <a:pPr>
-                        <a:lnSpc>
-                          <a:spcPct val="105000"/>
-                        </a:lnSpc>
-                      </a:pPr>
-                      <a:r>
-                        <a:rPr sz="1300" b="0">
-                          <a:solidFill>
-                            <a:srgbClr val="1B2A4A"/>
-                          </a:solidFill>
-                          <a:latin typeface="Noto Sans CJK SC"/>
-                        </a:rPr>
-                        <a:t>模型辨识是硬门槛；权重多靠 trial-and-error</a:t>
-                      </a:r>
-                    </a:p>
-                  </a:txBody>
-                  <a:tcPr marL="54864" marR="54864" marT="27432" marB="27432" anchor="ctr">
-                    <a:solidFill>
-                      <a:srgbClr val="EEF3FA"/>
-                    </a:solidFill>
-                  </a:tcPr>
-                </a:tc>
-              </a:tr>
-              <a:tr h="594360">
-                <a:tc>
-                  <a:txBody>
-                    <a:bodyPr/>
-                    <a:lstStyle/>
-                    <a:p>
-                      <a:pPr>
-                        <a:lnSpc>
-                          <a:spcPct val="105000"/>
-                        </a:lnSpc>
-                      </a:pPr>
-                      <a:r>
-                        <a:rPr sz="1300" b="0">
-                          <a:solidFill>
-                            <a:srgbClr val="1B2A4A"/>
-                          </a:solidFill>
-                          <a:latin typeface="Noto Sans CJK SC"/>
-                        </a:rPr>
-                        <a:t>实时计算</a:t>
-                      </a:r>
-                    </a:p>
-                  </a:txBody>
-                  <a:tcPr marL="54864" marR="54864" marT="27432" marB="27432" anchor="ctr"/>
-                </a:tc>
-                <a:tc>
-                  <a:txBody>
-                    <a:bodyPr/>
-                    <a:lstStyle/>
-                    <a:p>
-                      <a:pPr>
-                        <a:lnSpc>
-                          <a:spcPct val="105000"/>
-                        </a:lnSpc>
-                      </a:pPr>
-                      <a:r>
-                        <a:rPr sz="1300" b="0">
-                          <a:solidFill>
-                            <a:srgbClr val="1B2A4A"/>
-                          </a:solidFill>
-                          <a:latin typeface="Noto Sans CJK SC"/>
-                        </a:rPr>
-                        <a:t>几次乘加，单片机即可</a:t>
-                      </a:r>
-                    </a:p>
-                  </a:txBody>
-                  <a:tcPr marL="54864" marR="54864" marT="27432" marB="27432" anchor="ctr"/>
-                </a:tc>
-                <a:tc>
-                  <a:txBody>
-                    <a:bodyPr/>
-                    <a:lstStyle/>
-                    <a:p>
-                      <a:pPr>
-                        <a:lnSpc>
-                          <a:spcPct val="105000"/>
-                        </a:lnSpc>
-                      </a:pPr>
-                      <a:r>
-                        <a:rPr sz="1300" b="0">
-                          <a:solidFill>
-                            <a:srgbClr val="1B2A4A"/>
-                          </a:solidFill>
-                          <a:latin typeface="Noto Sans CJK SC"/>
-                        </a:rPr>
-                        <a:t>每周期解 QP/NLP；船舶慢动态下可行（实测 7 ms）</a:t>
-                      </a:r>
-                    </a:p>
-                  </a:txBody>
-                  <a:tcPr marL="54864" marR="54864" marT="27432" marB="27432" anchor="ctr"/>
-                </a:tc>
-              </a:tr>
-              <a:tr h="594360">
-                <a:tc>
-                  <a:txBody>
-                    <a:bodyPr/>
-                    <a:lstStyle/>
-                    <a:p>
-                      <a:pPr>
-                        <a:lnSpc>
-                          <a:spcPct val="105000"/>
-                        </a:lnSpc>
-                      </a:pPr>
-                      <a:r>
-                        <a:rPr sz="1300" b="0">
-                          <a:solidFill>
-                            <a:srgbClr val="1B2A4A"/>
-                          </a:solidFill>
-                          <a:latin typeface="Noto Sans CJK SC"/>
-                        </a:rPr>
-                        <a:t>约束/安全</a:t>
-                      </a:r>
-                    </a:p>
-                  </a:txBody>
-                  <a:tcPr marL="54864" marR="54864" marT="27432" marB="27432" anchor="ctr">
-                    <a:solidFill>
-                      <a:srgbClr val="EEF3FA"/>
-                    </a:solidFill>
-                  </a:tcPr>
-                </a:tc>
-                <a:tc>
-                  <a:txBody>
-                    <a:bodyPr/>
-                    <a:lstStyle/>
-                    <a:p>
-                      <a:pPr>
-                        <a:lnSpc>
-                          <a:spcPct val="105000"/>
-                        </a:lnSpc>
-                      </a:pPr>
-                      <a:r>
-                        <a:rPr sz="1300" b="0">
-                          <a:solidFill>
-                            <a:srgbClr val="1B2A4A"/>
-                          </a:solidFill>
-                          <a:latin typeface="Noto Sans CJK SC"/>
-                        </a:rPr>
-                        <a:t>事后饱和截断，约束下退化</a:t>
-                      </a:r>
-                    </a:p>
-                  </a:txBody>
-                  <a:tcPr marL="54864" marR="54864" marT="27432" marB="27432" anchor="ctr">
-                    <a:solidFill>
-                      <a:srgbClr val="EEF3FA"/>
-                    </a:solidFill>
-                  </a:tcPr>
-                </a:tc>
-                <a:tc>
-                  <a:txBody>
-                    <a:bodyPr/>
-                    <a:lstStyle/>
-                    <a:p>
-                      <a:pPr>
-                        <a:lnSpc>
-                          <a:spcPct val="105000"/>
-                        </a:lnSpc>
-                      </a:pPr>
-                      <a:r>
-                        <a:rPr sz="1300" b="0">
-                          <a:solidFill>
-                            <a:srgbClr val="1B2A4A"/>
-                          </a:solidFill>
-                          <a:latin typeface="Noto Sans CJK SC"/>
-                        </a:rPr>
-                        <a:t>舵角/舵速约束显式满足；稳定性需专门构造</a:t>
-                      </a:r>
-                    </a:p>
-                  </a:txBody>
-                  <a:tcPr marL="54864" marR="54864" marT="27432" marB="27432" anchor="ctr">
-                    <a:solidFill>
-                      <a:srgbClr val="EEF3FA"/>
-                    </a:solidFill>
-                  </a:tcPr>
-                </a:tc>
-              </a:tr>
-              <a:tr h="594360">
-                <a:tc>
-                  <a:txBody>
-                    <a:bodyPr/>
-                    <a:lstStyle/>
-                    <a:p>
-                      <a:pPr>
-                        <a:lnSpc>
-                          <a:spcPct val="105000"/>
-                        </a:lnSpc>
-                      </a:pPr>
-                      <a:r>
-                        <a:rPr sz="1300" b="0">
-                          <a:solidFill>
-                            <a:srgbClr val="1B2A4A"/>
-                          </a:solidFill>
-                          <a:latin typeface="Noto Sans CJK SC"/>
-                        </a:rPr>
-                        <a:t>认证与维护</a:t>
-                      </a:r>
-                    </a:p>
-                  </a:txBody>
-                  <a:tcPr marL="54864" marR="54864" marT="27432" marB="27432" anchor="ctr"/>
-                </a:tc>
-                <a:tc>
-                  <a:txBody>
-                    <a:bodyPr/>
-                    <a:lstStyle/>
-                    <a:p>
-                      <a:pPr>
-                        <a:lnSpc>
-                          <a:spcPct val="105000"/>
-                        </a:lnSpc>
-                      </a:pPr>
-                      <a:r>
-                        <a:rPr sz="1300" b="0">
-                          <a:solidFill>
-                            <a:srgbClr val="1B2A4A"/>
-                          </a:solidFill>
-                          <a:latin typeface="Noto Sans CJK SC"/>
-                        </a:rPr>
-                        <a:t>工业生态与船级社认证完备</a:t>
-                      </a:r>
-                    </a:p>
-                  </a:txBody>
-                  <a:tcPr marL="54864" marR="54864" marT="27432" marB="27432" anchor="ctr"/>
-                </a:tc>
-                <a:tc>
-                  <a:txBody>
-                    <a:bodyPr/>
-                    <a:lstStyle/>
-                    <a:p>
-                      <a:pPr>
-                        <a:lnSpc>
-                          <a:spcPct val="105000"/>
-                        </a:lnSpc>
-                      </a:pPr>
-                      <a:r>
-                        <a:rPr sz="1300" b="0">
-                          <a:solidFill>
-                            <a:srgbClr val="1B2A4A"/>
-                          </a:solidFill>
-                          <a:latin typeface="Noto Sans CJK SC"/>
-                        </a:rPr>
-                        <a:t>认证路径不成熟；需控制工程师维护</a:t>
-                      </a:r>
-                    </a:p>
-                  </a:txBody>
-                  <a:tcPr marL="54864" marR="54864" marT="27432" marB="27432" anchor="ctr"/>
-                </a:tc>
-              </a:tr>
-            </a:tbl>
-          </a:graphicData>
-        </a:graphic>
-      </p:graphicFrame>
-      <p:sp>
-        <p:nvSpPr>
-          <p:cNvPr id="5" name="TextBox 4"/>
+              <a:t>船舶节能五大路线：量级差异极大</a:t>
+            </a:r>
+          </a:p>
+        </p:txBody>
+      </p:sp>
+      <p:sp>
+        <p:nvSpPr>
+          <p:cNvPr id="4" name="TextBox 3"/>
           <p:cNvSpPr txBox="1"/>
           <p:nvPr/>
         </p:nvSpPr>
         <p:spPr>
           <a:xfrm>
-            <a:off x="457200" y="5303520"/>
-            <a:ext cx="11338560" cy="1188720"/>
+            <a:off x="475488" y="914400"/>
+            <a:ext cx="11247120" cy="457200"/>
           </a:xfrm>
           <a:prstGeom prst="rect">
             <a:avLst/>
@@ -3899,36 +3409,41 @@
               </a:spcAft>
             </a:pPr>
             <a:r>
-              <a:rPr sz="1700" b="1">
-                <a:solidFill>
-                  <a:srgbClr val="2CA02C"/>
-                </a:solidFill>
-                <a:latin typeface="Noto Sans CJK SC"/>
-              </a:rPr>
-              <a:t>结论性判断：PD/PID 打底保证可靠性，MPC 作为性能增强层；</a:t>
-            </a:r>
-          </a:p>
-          <a:p>
-            <a:pPr algn="l">
-              <a:lnSpc>
-                <a:spcPct val="115000"/>
-              </a:lnSpc>
-              <a:spcAft>
-                <a:spcPts val="600"/>
-              </a:spcAft>
-            </a:pPr>
-            <a:r>
-              <a:rPr sz="1700" b="1">
-                <a:solidFill>
-                  <a:srgbClr val="2CA02C"/>
-                </a:solidFill>
-                <a:latin typeface="Noto Sans CJK SC"/>
-              </a:rPr>
-              <a:t>模型辨识与整定自动化（本仓库 auto_tuning 流程）是 MPC 能否落地的前置条件。</a:t>
-            </a:r>
-          </a:p>
-        </p:txBody>
-      </p:sp>
+              <a:rPr sz="1400" b="0">
+                <a:solidFill>
+                  <a:srgbClr val="666666"/>
+                </a:solidFill>
+                <a:latin typeface="Noto Sans CJK SC"/>
+              </a:rPr>
+              <a:t>来源：IMO / 船级社 / 实船试航，均为已核对数据</a:t>
+            </a:r>
+          </a:p>
+        </p:txBody>
+      </p:sp>
+      <p:pic>
+        <p:nvPicPr>
+          <p:cNvPr id="5" name="Picture 4" descr="fig4_energy_measures.png"/>
+          <p:cNvPicPr>
+            <a:picLocks noChangeAspect="1"/>
+          </p:cNvPicPr>
+          <p:nvPr/>
+        </p:nvPicPr>
+        <p:blipFill>
+          <a:blip r:embed="rId2"/>
+          <a:stretch>
+            <a:fillRect/>
+          </a:stretch>
+        </p:blipFill>
+        <p:spPr>
+          <a:xfrm>
+            <a:off x="1658389" y="1554480"/>
+            <a:ext cx="8844741" cy="5120640"/>
+          </a:xfrm>
+          <a:prstGeom prst="rect">
+            <a:avLst/>
+          </a:prstGeom>
+        </p:spPr>
+      </p:pic>
       <p:sp>
         <p:nvSpPr>
           <p:cNvPr id="6" name="TextBox 5"/>
@@ -3966,7 +3481,7 @@
                 </a:solidFill>
                 <a:latin typeface="Noto Sans CJK SC"/>
               </a:rPr>
-              <a:t>10 / 20</a:t>
+              <a:t>10 / 19</a:t>
             </a:r>
           </a:p>
         </p:txBody>
@@ -4069,7 +3584,7 @@
                 </a:solidFill>
                 <a:latin typeface="Noto Sans CJK SC"/>
               </a:rPr>
-              <a:t>船舶节能五大路线：量级差异极大</a:t>
+              <a:t>节能方案优缺点（一）：决策层</a:t>
             </a:r>
           </a:p>
         </p:txBody>
@@ -4111,35 +3626,495 @@
                 </a:solidFill>
                 <a:latin typeface="Noto Sans CJK SC"/>
               </a:rPr>
-              <a:t>来源：IMO / 船级社 / 实船试航，均为已核对数据</a:t>
-            </a:r>
-          </a:p>
-        </p:txBody>
-      </p:sp>
-      <p:pic>
-        <p:nvPicPr>
-          <p:cNvPr id="5" name="Picture 4" descr="fig4_energy_measures.png"/>
-          <p:cNvPicPr>
-            <a:picLocks noChangeAspect="1"/>
-          </p:cNvPicPr>
+              <a:t>节能大头所在</a:t>
+            </a:r>
+          </a:p>
+        </p:txBody>
+      </p:sp>
+      <p:graphicFrame>
+        <p:nvGraphicFramePr>
+          <p:cNvPr id="5" name="Table 4"/>
+          <p:cNvGraphicFramePr>
+            <a:graphicFrameLocks noGrp="1"/>
+          </p:cNvGraphicFramePr>
           <p:nvPr/>
-        </p:nvPicPr>
-        <p:blipFill>
-          <a:blip r:embed="rId2"/>
-          <a:stretch>
-            <a:fillRect/>
-          </a:stretch>
-        </p:blipFill>
-        <p:spPr>
-          <a:xfrm>
-            <a:off x="1658389" y="1554480"/>
-            <a:ext cx="8844741" cy="5120640"/>
-          </a:xfrm>
-          <a:prstGeom prst="rect">
-            <a:avLst/>
-          </a:prstGeom>
-        </p:spPr>
-      </p:pic>
+        </p:nvGraphicFramePr>
+        <p:xfrm>
+          <a:off x="457200" y="1463040"/>
+          <a:ext cx="11338559" cy="4846320"/>
+        </p:xfrm>
+        <a:graphic>
+          <a:graphicData uri="http://schemas.openxmlformats.org/drawingml/2006/table">
+            <a:tbl>
+              <a:tblPr firstRow="1" bandRow="1">
+                <a:tableStyleId>{5C22544A-7EE6-4342-B048-85BDC9FD1C3A}</a:tableStyleId>
+              </a:tblPr>
+              <a:tblGrid>
+                <a:gridCol w="1553227"/>
+                <a:gridCol w="4038391"/>
+                <a:gridCol w="2795809"/>
+                <a:gridCol w="2951132"/>
+              </a:tblGrid>
+              <a:tr h="1211580">
+                <a:tc>
+                  <a:txBody>
+                    <a:bodyPr/>
+                    <a:lstStyle/>
+                    <a:p>
+                      <a:pPr>
+                        <a:lnSpc>
+                          <a:spcPct val="105000"/>
+                        </a:lnSpc>
+                      </a:pPr>
+                      <a:r>
+                        <a:rPr sz="1250" b="1">
+                          <a:solidFill>
+                            <a:srgbClr val="FFFFFF"/>
+                          </a:solidFill>
+                          <a:latin typeface="Noto Sans CJK SC"/>
+                        </a:rPr>
+                        <a:t>方案</a:t>
+                      </a:r>
+                    </a:p>
+                  </a:txBody>
+                  <a:tcPr marL="54864" marR="54864" marT="27432" marB="27432" anchor="ctr">
+                    <a:solidFill>
+                      <a:srgbClr val="1F77B4"/>
+                    </a:solidFill>
+                  </a:tcPr>
+                </a:tc>
+                <a:tc>
+                  <a:txBody>
+                    <a:bodyPr/>
+                    <a:lstStyle/>
+                    <a:p>
+                      <a:pPr>
+                        <a:lnSpc>
+                          <a:spcPct val="105000"/>
+                        </a:lnSpc>
+                      </a:pPr>
+                      <a:r>
+                        <a:rPr sz="1250" b="1">
+                          <a:solidFill>
+                            <a:srgbClr val="FFFFFF"/>
+                          </a:solidFill>
+                          <a:latin typeface="Noto Sans CJK SC"/>
+                        </a:rPr>
+                        <a:t>代表数据（已核对）</a:t>
+                      </a:r>
+                    </a:p>
+                  </a:txBody>
+                  <a:tcPr marL="54864" marR="54864" marT="27432" marB="27432" anchor="ctr">
+                    <a:solidFill>
+                      <a:srgbClr val="1F77B4"/>
+                    </a:solidFill>
+                  </a:tcPr>
+                </a:tc>
+                <a:tc>
+                  <a:txBody>
+                    <a:bodyPr/>
+                    <a:lstStyle/>
+                    <a:p>
+                      <a:pPr>
+                        <a:lnSpc>
+                          <a:spcPct val="105000"/>
+                        </a:lnSpc>
+                      </a:pPr>
+                      <a:r>
+                        <a:rPr sz="1250" b="1">
+                          <a:solidFill>
+                            <a:srgbClr val="FFFFFF"/>
+                          </a:solidFill>
+                          <a:latin typeface="Noto Sans CJK SC"/>
+                        </a:rPr>
+                        <a:t>优点</a:t>
+                      </a:r>
+                    </a:p>
+                  </a:txBody>
+                  <a:tcPr marL="54864" marR="54864" marT="27432" marB="27432" anchor="ctr">
+                    <a:solidFill>
+                      <a:srgbClr val="1F77B4"/>
+                    </a:solidFill>
+                  </a:tcPr>
+                </a:tc>
+                <a:tc>
+                  <a:txBody>
+                    <a:bodyPr/>
+                    <a:lstStyle/>
+                    <a:p>
+                      <a:pPr>
+                        <a:lnSpc>
+                          <a:spcPct val="105000"/>
+                        </a:lnSpc>
+                      </a:pPr>
+                      <a:r>
+                        <a:rPr sz="1250" b="1">
+                          <a:solidFill>
+                            <a:srgbClr val="FFFFFF"/>
+                          </a:solidFill>
+                          <a:latin typeface="Noto Sans CJK SC"/>
+                        </a:rPr>
+                        <a:t>缺点</a:t>
+                      </a:r>
+                    </a:p>
+                  </a:txBody>
+                  <a:tcPr marL="54864" marR="54864" marT="27432" marB="27432" anchor="ctr">
+                    <a:solidFill>
+                      <a:srgbClr val="1F77B4"/>
+                    </a:solidFill>
+                  </a:tcPr>
+                </a:tc>
+              </a:tr>
+              <a:tr h="1211580">
+                <a:tc>
+                  <a:txBody>
+                    <a:bodyPr/>
+                    <a:lstStyle/>
+                    <a:p>
+                      <a:pPr>
+                        <a:lnSpc>
+                          <a:spcPct val="105000"/>
+                        </a:lnSpc>
+                      </a:pPr>
+                      <a:r>
+                        <a:rPr sz="1200" b="0">
+                          <a:solidFill>
+                            <a:srgbClr val="1B2A4A"/>
+                          </a:solidFill>
+                          <a:latin typeface="Noto Sans CJK SC"/>
+                        </a:rPr>
+                        <a:t>减速航行</a:t>
+                      </a:r>
+                    </a:p>
+                  </a:txBody>
+                  <a:tcPr marL="54864" marR="54864" marT="27432" marB="27432" anchor="ctr"/>
+                </a:tc>
+                <a:tc>
+                  <a:txBody>
+                    <a:bodyPr/>
+                    <a:lstStyle/>
+                    <a:p>
+                      <a:pPr>
+                        <a:lnSpc>
+                          <a:spcPct val="105000"/>
+                        </a:lnSpc>
+                      </a:pPr>
+                      <a:r>
+                        <a:rPr sz="1200" b="0">
+                          <a:solidFill>
+                            <a:srgbClr val="1B2A4A"/>
+                          </a:solidFill>
+                          <a:latin typeface="Noto Sans CJK SC"/>
+                        </a:rPr>
+                        <a:t>23→12 kn 每海里油耗降 72–76%（Pelić 2023）</a:t>
+                      </a:r>
+                    </a:p>
+                    <a:p>
+                      <a:pPr>
+                        <a:lnSpc>
+                          <a:spcPct val="105000"/>
+                        </a:lnSpc>
+                      </a:pPr>
+                      <a:r>
+                        <a:rPr sz="1200" b="0">
+                          <a:solidFill>
+                            <a:srgbClr val="1B2A4A"/>
+                          </a:solidFill>
+                          <a:latin typeface="Noto Sans CJK SC"/>
+                        </a:rPr>
+                        <a:t>IMO：主机油耗潜力 10–50%，全船口径 3–12%</a:t>
+                      </a:r>
+                    </a:p>
+                  </a:txBody>
+                  <a:tcPr marL="54864" marR="54864" marT="27432" marB="27432" anchor="ctr"/>
+                </a:tc>
+                <a:tc>
+                  <a:txBody>
+                    <a:bodyPr/>
+                    <a:lstStyle/>
+                    <a:p>
+                      <a:pPr>
+                        <a:lnSpc>
+                          <a:spcPct val="105000"/>
+                        </a:lnSpc>
+                      </a:pPr>
+                      <a:r>
+                        <a:rPr sz="1200" b="0">
+                          <a:solidFill>
+                            <a:srgbClr val="1B2A4A"/>
+                          </a:solidFill>
+                          <a:latin typeface="Noto Sans CJK SC"/>
+                        </a:rPr>
+                        <a:t>杠杆最大；零硬件成本；单位运输功油耗直接下降</a:t>
+                      </a:r>
+                    </a:p>
+                  </a:txBody>
+                  <a:tcPr marL="54864" marR="54864" marT="27432" marB="27432" anchor="ctr"/>
+                </a:tc>
+                <a:tc>
+                  <a:txBody>
+                    <a:bodyPr/>
+                    <a:lstStyle/>
+                    <a:p>
+                      <a:pPr>
+                        <a:lnSpc>
+                          <a:spcPct val="105000"/>
+                        </a:lnSpc>
+                      </a:pPr>
+                      <a:r>
+                        <a:rPr sz="1200" b="0">
+                          <a:solidFill>
+                            <a:srgbClr val="1B2A4A"/>
+                          </a:solidFill>
+                          <a:latin typeface="Noto Sans CJK SC"/>
+                        </a:rPr>
+                        <a:t>牺牲船期；受租约约束；低速偏离主机最佳负荷点</a:t>
+                      </a:r>
+                    </a:p>
+                  </a:txBody>
+                  <a:tcPr marL="54864" marR="54864" marT="27432" marB="27432" anchor="ctr"/>
+                </a:tc>
+              </a:tr>
+              <a:tr h="1211580">
+                <a:tc>
+                  <a:txBody>
+                    <a:bodyPr/>
+                    <a:lstStyle/>
+                    <a:p>
+                      <a:pPr>
+                        <a:lnSpc>
+                          <a:spcPct val="105000"/>
+                        </a:lnSpc>
+                      </a:pPr>
+                      <a:r>
+                        <a:rPr sz="1200" b="0">
+                          <a:solidFill>
+                            <a:srgbClr val="1B2A4A"/>
+                          </a:solidFill>
+                          <a:latin typeface="Noto Sans CJK SC"/>
+                        </a:rPr>
+                        <a:t>气象航线优化</a:t>
+                      </a:r>
+                    </a:p>
+                  </a:txBody>
+                  <a:tcPr marL="54864" marR="54864" marT="27432" marB="27432" anchor="ctr">
+                    <a:solidFill>
+                      <a:srgbClr val="EEF3FA"/>
+                    </a:solidFill>
+                  </a:tcPr>
+                </a:tc>
+                <a:tc>
+                  <a:txBody>
+                    <a:bodyPr/>
+                    <a:lstStyle/>
+                    <a:p>
+                      <a:pPr>
+                        <a:lnSpc>
+                          <a:spcPct val="105000"/>
+                        </a:lnSpc>
+                      </a:pPr>
+                      <a:r>
+                        <a:rPr sz="1200" b="0">
+                          <a:solidFill>
+                            <a:srgbClr val="1B2A4A"/>
+                          </a:solidFill>
+                          <a:latin typeface="Noto Sans CJK SC"/>
+                        </a:rPr>
+                        <a:t>IMO 口径 ≥3%，集装箱船可达 10%</a:t>
+                      </a:r>
+                    </a:p>
+                    <a:p>
+                      <a:pPr>
+                        <a:lnSpc>
+                          <a:spcPct val="105000"/>
+                        </a:lnSpc>
+                      </a:pPr>
+                      <a:r>
+                        <a:rPr sz="1200" b="0">
+                          <a:solidFill>
+                            <a:srgbClr val="1B2A4A"/>
+                          </a:solidFill>
+                          <a:latin typeface="Noto Sans CJK SC"/>
+                        </a:rPr>
+                        <a:t>Li 2022 实船 2.1–5.2%（二手转引）</a:t>
+                      </a:r>
+                    </a:p>
+                  </a:txBody>
+                  <a:tcPr marL="54864" marR="54864" marT="27432" marB="27432" anchor="ctr">
+                    <a:solidFill>
+                      <a:srgbClr val="EEF3FA"/>
+                    </a:solidFill>
+                  </a:tcPr>
+                </a:tc>
+                <a:tc>
+                  <a:txBody>
+                    <a:bodyPr/>
+                    <a:lstStyle/>
+                    <a:p>
+                      <a:pPr>
+                        <a:lnSpc>
+                          <a:spcPct val="105000"/>
+                        </a:lnSpc>
+                      </a:pPr>
+                      <a:r>
+                        <a:rPr sz="1200" b="0">
+                          <a:solidFill>
+                            <a:srgbClr val="1B2A4A"/>
+                          </a:solidFill>
+                          <a:latin typeface="Noto Sans CJK SC"/>
+                        </a:rPr>
+                        <a:t>节能+避离恶劣海况兼得；商用服务成熟</a:t>
+                      </a:r>
+                    </a:p>
+                  </a:txBody>
+                  <a:tcPr marL="54864" marR="54864" marT="27432" marB="27432" anchor="ctr">
+                    <a:solidFill>
+                      <a:srgbClr val="EEF3FA"/>
+                    </a:solidFill>
+                  </a:tcPr>
+                </a:tc>
+                <a:tc>
+                  <a:txBody>
+                    <a:bodyPr/>
+                    <a:lstStyle/>
+                    <a:p>
+                      <a:pPr>
+                        <a:lnSpc>
+                          <a:spcPct val="105000"/>
+                        </a:lnSpc>
+                      </a:pPr>
+                      <a:r>
+                        <a:rPr sz="1200" b="0">
+                          <a:solidFill>
+                            <a:srgbClr val="1B2A4A"/>
+                          </a:solidFill>
+                          <a:latin typeface="Noto Sans CJK SC"/>
+                        </a:rPr>
+                        <a:t>依赖气象预报与增阻模型精度；收益随海况波动</a:t>
+                      </a:r>
+                    </a:p>
+                  </a:txBody>
+                  <a:tcPr marL="54864" marR="54864" marT="27432" marB="27432" anchor="ctr">
+                    <a:solidFill>
+                      <a:srgbClr val="EEF3FA"/>
+                    </a:solidFill>
+                  </a:tcPr>
+                </a:tc>
+              </a:tr>
+              <a:tr h="1211580">
+                <a:tc>
+                  <a:txBody>
+                    <a:bodyPr/>
+                    <a:lstStyle/>
+                    <a:p>
+                      <a:pPr>
+                        <a:lnSpc>
+                          <a:spcPct val="105000"/>
+                        </a:lnSpc>
+                      </a:pPr>
+                      <a:r>
+                        <a:rPr sz="1200" b="0">
+                          <a:solidFill>
+                            <a:srgbClr val="1B2A4A"/>
+                          </a:solidFill>
+                          <a:latin typeface="Noto Sans CJK SC"/>
+                        </a:rPr>
+                        <a:t>纵倾优化</a:t>
+                      </a:r>
+                    </a:p>
+                  </a:txBody>
+                  <a:tcPr marL="54864" marR="54864" marT="27432" marB="27432" anchor="ctr"/>
+                </a:tc>
+                <a:tc>
+                  <a:txBody>
+                    <a:bodyPr/>
+                    <a:lstStyle/>
+                    <a:p>
+                      <a:pPr>
+                        <a:lnSpc>
+                          <a:spcPct val="105000"/>
+                        </a:lnSpc>
+                      </a:pPr>
+                      <a:r>
+                        <a:rPr sz="1200" b="0">
+                          <a:solidFill>
+                            <a:srgbClr val="1B2A4A"/>
+                          </a:solidFill>
+                          <a:latin typeface="Noto Sans CJK SC"/>
+                        </a:rPr>
+                        <a:t>ClassNK-NAPA 实船试航：纵倾贡献 1.2%</a:t>
+                      </a:r>
+                    </a:p>
+                    <a:p>
+                      <a:pPr>
+                        <a:lnSpc>
+                          <a:spcPct val="105000"/>
+                        </a:lnSpc>
+                      </a:pPr>
+                      <a:r>
+                        <a:rPr sz="1200" b="0">
+                          <a:solidFill>
+                            <a:srgbClr val="1B2A4A"/>
+                          </a:solidFill>
+                          <a:latin typeface="Noto Sans CJK SC"/>
+                        </a:rPr>
+                        <a:t>专项研究最多 4%；Eniram 实测 1–5%</a:t>
+                      </a:r>
+                    </a:p>
+                  </a:txBody>
+                  <a:tcPr marL="54864" marR="54864" marT="27432" marB="27432" anchor="ctr"/>
+                </a:tc>
+                <a:tc>
+                  <a:txBody>
+                    <a:bodyPr/>
+                    <a:lstStyle/>
+                    <a:p>
+                      <a:pPr>
+                        <a:lnSpc>
+                          <a:spcPct val="105000"/>
+                        </a:lnSpc>
+                      </a:pPr>
+                      <a:r>
+                        <a:rPr sz="1200" b="0">
+                          <a:solidFill>
+                            <a:srgbClr val="1B2A4A"/>
+                          </a:solidFill>
+                          <a:latin typeface="Noto Sans CJK SC"/>
+                        </a:rPr>
+                        <a:t>几乎零成本（调压载水）；实船背书强</a:t>
+                      </a:r>
+                    </a:p>
+                  </a:txBody>
+                  <a:tcPr marL="54864" marR="54864" marT="27432" marB="27432" anchor="ctr"/>
+                </a:tc>
+                <a:tc>
+                  <a:txBody>
+                    <a:bodyPr/>
+                    <a:lstStyle/>
+                    <a:p>
+                      <a:pPr>
+                        <a:lnSpc>
+                          <a:spcPct val="105000"/>
+                        </a:lnSpc>
+                      </a:pPr>
+                      <a:r>
+                        <a:rPr sz="1200" b="0">
+                          <a:solidFill>
+                            <a:srgbClr val="1B2A4A"/>
+                          </a:solidFill>
+                          <a:latin typeface="Noto Sans CJK SC"/>
+                        </a:rPr>
+                        <a:t>最优纵倾随工况变化；受稳性/装卸约束；幅度偏小</a:t>
+                      </a:r>
+                    </a:p>
+                  </a:txBody>
+                  <a:tcPr marL="54864" marR="54864" marT="27432" marB="27432" anchor="ctr"/>
+                </a:tc>
+              </a:tr>
+            </a:tbl>
+          </a:graphicData>
+        </a:graphic>
+      </p:graphicFrame>
       <p:sp>
         <p:nvSpPr>
           <p:cNvPr id="6" name="TextBox 5"/>
@@ -4177,7 +4152,7 @@
                 </a:solidFill>
                 <a:latin typeface="Noto Sans CJK SC"/>
               </a:rPr>
-              <a:t>11 / 20</a:t>
+              <a:t>11 / 19</a:t>
             </a:r>
           </a:p>
         </p:txBody>
@@ -4280,7 +4255,7 @@
                 </a:solidFill>
                 <a:latin typeface="Noto Sans CJK SC"/>
               </a:rPr>
-              <a:t>节能方案优缺点（一）：决策层</a:t>
+              <a:t>节能方案关键数据补充</a:t>
             </a:r>
           </a:p>
         </p:txBody>
@@ -4322,7 +4297,7 @@
                 </a:solidFill>
                 <a:latin typeface="Noto Sans CJK SC"/>
               </a:rPr>
-              <a:t>节能大头所在</a:t>
+              <a:t>对比基线与口径已逐条核对，避免误读</a:t>
             </a:r>
           </a:p>
         </p:txBody>
@@ -4337,7 +4312,7 @@
         </p:nvGraphicFramePr>
         <p:xfrm>
           <a:off x="457200" y="1463040"/>
-          <a:ext cx="11338559" cy="4846320"/>
+          <a:ext cx="11338560" cy="4846320"/>
         </p:xfrm>
         <a:graphic>
           <a:graphicData uri="http://schemas.openxmlformats.org/drawingml/2006/table">
@@ -4346,12 +4321,11 @@
                 <a:tableStyleId>{5C22544A-7EE6-4342-B048-85BDC9FD1C3A}</a:tableStyleId>
               </a:tblPr>
               <a:tblGrid>
-                <a:gridCol w="1553227"/>
-                <a:gridCol w="4038391"/>
-                <a:gridCol w="2795809"/>
-                <a:gridCol w="2951132"/>
+                <a:gridCol w="1889760"/>
+                <a:gridCol w="6299200"/>
+                <a:gridCol w="3149600"/>
               </a:tblGrid>
-              <a:tr h="1211580">
+              <a:tr h="807720">
                 <a:tc>
                   <a:txBody>
                     <a:bodyPr/>
@@ -4363,7 +4337,7 @@
                         </a:lnSpc>
                       </a:pPr>
                       <a:r>
-                        <a:rPr sz="1250" b="1">
+                        <a:rPr sz="1200" b="1">
                           <a:solidFill>
                             <a:srgbClr val="FFFFFF"/>
                           </a:solidFill>
@@ -4390,13 +4364,13 @@
                         </a:lnSpc>
                       </a:pPr>
                       <a:r>
-                        <a:rPr sz="1250" b="1">
+                        <a:rPr sz="1200" b="1">
                           <a:solidFill>
                             <a:srgbClr val="FFFFFF"/>
                           </a:solidFill>
                           <a:latin typeface="Noto Sans CJK SC"/>
                         </a:rPr>
-                        <a:t>代表数据（已核对）</a:t>
+                        <a:t>补充数据（已核对）</a:t>
                       </a:r>
                     </a:p>
                   </a:txBody>
@@ -4417,40 +4391,13 @@
                         </a:lnSpc>
                       </a:pPr>
                       <a:r>
-                        <a:rPr sz="1250" b="1">
+                        <a:rPr sz="1200" b="1">
                           <a:solidFill>
                             <a:srgbClr val="FFFFFF"/>
                           </a:solidFill>
                           <a:latin typeface="Noto Sans CJK SC"/>
                         </a:rPr>
-                        <a:t>优点</a:t>
-                      </a:r>
-                    </a:p>
-                  </a:txBody>
-                  <a:tcPr marL="54864" marR="54864" marT="27432" marB="27432" anchor="ctr">
-                    <a:solidFill>
-                      <a:srgbClr val="1F77B4"/>
-                    </a:solidFill>
-                  </a:tcPr>
-                </a:tc>
-                <a:tc>
-                  <a:txBody>
-                    <a:bodyPr/>
-                    <a:lstStyle/>
-                    <a:p>
-                      <a:pPr>
-                        <a:lnSpc>
-                          <a:spcPct val="105000"/>
-                        </a:lnSpc>
-                      </a:pPr>
-                      <a:r>
-                        <a:rPr sz="1250" b="1">
-                          <a:solidFill>
-                            <a:srgbClr val="FFFFFF"/>
-                          </a:solidFill>
-                          <a:latin typeface="Noto Sans CJK SC"/>
-                        </a:rPr>
-                        <a:t>缺点</a:t>
+                        <a:t>口径说明</a:t>
                       </a:r>
                     </a:p>
                   </a:txBody>
@@ -4461,7 +4408,7 @@
                   </a:tcPr>
                 </a:tc>
               </a:tr>
-              <a:tr h="1211580">
+              <a:tr h="807720">
                 <a:tc>
                   <a:txBody>
                     <a:bodyPr/>
@@ -4473,7 +4420,7 @@
                         </a:lnSpc>
                       </a:pPr>
                       <a:r>
-                        <a:rPr sz="1200" b="0">
+                        <a:rPr sz="1150" b="0">
                           <a:solidFill>
                             <a:srgbClr val="1B2A4A"/>
                           </a:solidFill>
@@ -4496,29 +4443,29 @@
                         </a:lnSpc>
                       </a:pPr>
                       <a:r>
-                        <a:rPr sz="1200" b="0">
-                          <a:solidFill>
-                            <a:srgbClr val="1B2A4A"/>
-                          </a:solidFill>
-                          <a:latin typeface="Noto Sans CJK SC"/>
-                        </a:rPr>
-                        <a:t>23→12 kn 每海里油耗降 72–76%（Pelić 2023）</a:t>
-                      </a:r>
-                    </a:p>
-                    <a:p>
-                      <a:pPr>
-                        <a:lnSpc>
-                          <a:spcPct val="105000"/>
-                        </a:lnSpc>
-                      </a:pPr>
-                      <a:r>
-                        <a:rPr sz="1200" b="0">
-                          <a:solidFill>
-                            <a:srgbClr val="1B2A4A"/>
-                          </a:solidFill>
-                          <a:latin typeface="Noto Sans CJK SC"/>
-                        </a:rPr>
-                        <a:t>IMO：主机油耗潜力 10–50%，全船口径 3–12%</a:t>
+                        <a:rPr sz="1150" b="0">
+                          <a:solidFill>
+                            <a:srgbClr val="1B2A4A"/>
+                          </a:solidFill>
+                          <a:latin typeface="Noto Sans CJK SC"/>
+                        </a:rPr>
+                        <a:t>IMO 案例：56,000 DWT 敞舱口货船 13% 减速 → 日油耗 −34%；</a:t>
+                      </a:r>
+                    </a:p>
+                    <a:p>
+                      <a:pPr>
+                        <a:lnSpc>
+                          <a:spcPct val="105000"/>
+                        </a:lnSpc>
+                      </a:pPr>
+                      <a:r>
+                        <a:rPr sz="1150" b="0">
+                          <a:solidFill>
+                            <a:srgbClr val="1B2A4A"/>
+                          </a:solidFill>
+                          <a:latin typeface="Noto Sans CJK SC"/>
+                        </a:rPr>
+                        <a:t>10% 减速 → 功率 −27%，计入航时后航次总节油约 19%</a:t>
                       </a:r>
                     </a:p>
                   </a:txBody>
@@ -4535,18 +4482,36 @@
                         </a:lnSpc>
                       </a:pPr>
                       <a:r>
-                        <a:rPr sz="1200" b="0">
-                          <a:solidFill>
-                            <a:srgbClr val="1B2A4A"/>
-                          </a:solidFill>
-                          <a:latin typeface="Noto Sans CJK SC"/>
-                        </a:rPr>
-                        <a:t>杠杆最大；零硬件成本；直接改善 CII</a:t>
+                        <a:rPr sz="1150" b="0">
+                          <a:solidFill>
+                            <a:srgbClr val="1B2A4A"/>
+                          </a:solidFill>
+                          <a:latin typeface="Noto Sans CJK SC"/>
+                        </a:rPr>
+                        <a:t>特定船案例，非普适值；</a:t>
+                      </a:r>
+                    </a:p>
+                    <a:p>
+                      <a:pPr>
+                        <a:lnSpc>
+                          <a:spcPct val="105000"/>
+                        </a:lnSpc>
+                      </a:pPr>
+                      <a:r>
+                        <a:rPr sz="1150" b="0">
+                          <a:solidFill>
+                            <a:srgbClr val="1B2A4A"/>
+                          </a:solidFill>
+                          <a:latin typeface="Noto Sans CJK SC"/>
+                        </a:rPr>
+                        <a:t>主机口径 10–50% vs 全船 3–12%</a:t>
                       </a:r>
                     </a:p>
                   </a:txBody>
                   <a:tcPr marL="54864" marR="54864" marT="27432" marB="27432" anchor="ctr"/>
                 </a:tc>
+              </a:tr>
+              <a:tr h="807720">
                 <a:tc>
                   <a:txBody>
                     <a:bodyPr/>
@@ -4558,38 +4523,13 @@
                         </a:lnSpc>
                       </a:pPr>
                       <a:r>
-                        <a:rPr sz="1200" b="0">
-                          <a:solidFill>
-                            <a:srgbClr val="1B2A4A"/>
-                          </a:solidFill>
-                          <a:latin typeface="Noto Sans CJK SC"/>
-                        </a:rPr>
-                        <a:t>牺牲船期；受租约约束；低速偏离主机最佳负荷点</a:t>
-                      </a:r>
-                    </a:p>
-                  </a:txBody>
-                  <a:tcPr marL="54864" marR="54864" marT="27432" marB="27432" anchor="ctr"/>
-                </a:tc>
-              </a:tr>
-              <a:tr h="1211580">
-                <a:tc>
-                  <a:txBody>
-                    <a:bodyPr/>
-                    <a:lstStyle/>
-                    <a:p>
-                      <a:pPr>
-                        <a:lnSpc>
-                          <a:spcPct val="105000"/>
-                        </a:lnSpc>
-                      </a:pPr>
-                      <a:r>
-                        <a:rPr sz="1200" b="0">
-                          <a:solidFill>
-                            <a:srgbClr val="1B2A4A"/>
-                          </a:solidFill>
-                          <a:latin typeface="Noto Sans CJK SC"/>
-                        </a:rPr>
-                        <a:t>气象航线优化</a:t>
+                        <a:rPr sz="1150" b="0">
+                          <a:solidFill>
+                            <a:srgbClr val="1B2A4A"/>
+                          </a:solidFill>
+                          <a:latin typeface="Noto Sans CJK SC"/>
+                        </a:rPr>
+                        <a:t>航速+纵倾联合</a:t>
                       </a:r>
                     </a:p>
                   </a:txBody>
@@ -4610,29 +4550,29 @@
                         </a:lnSpc>
                       </a:pPr>
                       <a:r>
-                        <a:rPr sz="1200" b="0">
-                          <a:solidFill>
-                            <a:srgbClr val="1B2A4A"/>
-                          </a:solidFill>
-                          <a:latin typeface="Noto Sans CJK SC"/>
-                        </a:rPr>
-                        <a:t>IMO 口径 ≥3%，集装箱船可达 10%</a:t>
-                      </a:r>
-                    </a:p>
-                    <a:p>
-                      <a:pPr>
-                        <a:lnSpc>
-                          <a:spcPct val="105000"/>
-                        </a:lnSpc>
-                      </a:pPr>
-                      <a:r>
-                        <a:rPr sz="1200" b="0">
-                          <a:solidFill>
-                            <a:srgbClr val="1B2A4A"/>
-                          </a:solidFill>
-                          <a:latin typeface="Noto Sans CJK SC"/>
-                        </a:rPr>
-                        <a:t>Li 2022 实船 2.1–5.2%（二手转引）</a:t>
+                        <a:rPr sz="1150" b="0">
+                          <a:solidFill>
+                            <a:srgbClr val="1B2A4A"/>
+                          </a:solidFill>
+                          <a:latin typeface="Noto Sans CJK SC"/>
+                        </a:rPr>
+                        <a:t>Du 2019（实船数据+ANN 模型）：动态纵倾 C1 省 4.96%/5.83%；</a:t>
+                      </a:r>
+                    </a:p>
+                    <a:p>
+                      <a:pPr>
+                        <a:lnSpc>
+                          <a:spcPct val="105000"/>
+                        </a:lnSpc>
+                      </a:pPr>
+                      <a:r>
+                        <a:rPr sz="1150" b="0">
+                          <a:solidFill>
+                            <a:srgbClr val="1B2A4A"/>
+                          </a:solidFill>
+                          <a:latin typeface="Noto Sans CJK SC"/>
+                        </a:rPr>
+                        <a:t>ANN 航速优化 C2 省 7.63%/7.57%；综合 C3 平均省 8.25%</a:t>
                       </a:r>
                     </a:p>
                   </a:txBody>
@@ -4653,13 +4593,129 @@
                         </a:lnSpc>
                       </a:pPr>
                       <a:r>
-                        <a:rPr sz="1200" b="0">
-                          <a:solidFill>
-                            <a:srgbClr val="1B2A4A"/>
-                          </a:solidFill>
-                          <a:latin typeface="Noto Sans CJK SC"/>
-                        </a:rPr>
-                        <a:t>节能+避离恶劣海况兼得；商用服务成熟</a:t>
+                        <a:rPr sz="1150" b="0">
+                          <a:solidFill>
+                            <a:srgbClr val="1B2A4A"/>
+                          </a:solidFill>
+                          <a:latin typeface="Noto Sans CJK SC"/>
+                        </a:rPr>
+                        <a:t>0.57%/3.69% 是相对三次方定律的</a:t>
+                      </a:r>
+                    </a:p>
+                    <a:p>
+                      <a:pPr>
+                        <a:lnSpc>
+                          <a:spcPct val="105000"/>
+                        </a:lnSpc>
+                      </a:pPr>
+                      <a:r>
+                        <a:rPr sz="1150" b="0">
+                          <a:solidFill>
+                            <a:srgbClr val="1B2A4A"/>
+                          </a:solidFill>
+                          <a:latin typeface="Noto Sans CJK SC"/>
+                        </a:rPr>
+                        <a:t>额外节油，非总节油</a:t>
+                      </a:r>
+                    </a:p>
+                  </a:txBody>
+                  <a:tcPr marL="54864" marR="54864" marT="27432" marB="27432" anchor="ctr">
+                    <a:solidFill>
+                      <a:srgbClr val="EEF3FA"/>
+                    </a:solidFill>
+                  </a:tcPr>
+                </a:tc>
+              </a:tr>
+              <a:tr h="807720">
+                <a:tc>
+                  <a:txBody>
+                    <a:bodyPr/>
+                    <a:lstStyle/>
+                    <a:p>
+                      <a:pPr>
+                        <a:lnSpc>
+                          <a:spcPct val="105000"/>
+                        </a:lnSpc>
+                      </a:pPr>
+                      <a:r>
+                        <a:rPr sz="1150" b="0">
+                          <a:solidFill>
+                            <a:srgbClr val="1B2A4A"/>
+                          </a:solidFill>
+                          <a:latin typeface="Noto Sans CJK SC"/>
+                        </a:rPr>
+                        <a:t>纵倾优化</a:t>
+                      </a:r>
+                    </a:p>
+                  </a:txBody>
+                  <a:tcPr marL="54864" marR="54864" marT="27432" marB="27432" anchor="ctr"/>
+                </a:tc>
+                <a:tc>
+                  <a:txBody>
+                    <a:bodyPr/>
+                    <a:lstStyle/>
+                    <a:p>
+                      <a:pPr>
+                        <a:lnSpc>
+                          <a:spcPct val="105000"/>
+                        </a:lnSpc>
+                      </a:pPr>
+                      <a:r>
+                        <a:rPr sz="1150" b="0">
+                          <a:solidFill>
+                            <a:srgbClr val="1B2A4A"/>
+                          </a:solidFill>
+                          <a:latin typeface="Noto Sans CJK SC"/>
+                        </a:rPr>
+                        <a:t>ClassNK 两次印度洋横渡专项：最优纵倾最多再省 4%</a:t>
+                      </a:r>
+                    </a:p>
+                  </a:txBody>
+                  <a:tcPr marL="54864" marR="54864" marT="27432" marB="27432" anchor="ctr"/>
+                </a:tc>
+                <a:tc>
+                  <a:txBody>
+                    <a:bodyPr/>
+                    <a:lstStyle/>
+                    <a:p>
+                      <a:pPr>
+                        <a:lnSpc>
+                          <a:spcPct val="105000"/>
+                        </a:lnSpc>
+                      </a:pPr>
+                      <a:r>
+                        <a:rPr sz="1150" b="0">
+                          <a:solidFill>
+                            <a:srgbClr val="1B2A4A"/>
+                          </a:solidFill>
+                          <a:latin typeface="Noto Sans CJK SC"/>
+                        </a:rPr>
+                        <a:t>与航速/航程优化收益可叠加</a:t>
+                      </a:r>
+                    </a:p>
+                  </a:txBody>
+                  <a:tcPr marL="54864" marR="54864" marT="27432" marB="27432" anchor="ctr"/>
+                </a:tc>
+              </a:tr>
+              <a:tr h="807720">
+                <a:tc>
+                  <a:txBody>
+                    <a:bodyPr/>
+                    <a:lstStyle/>
+                    <a:p>
+                      <a:pPr>
+                        <a:lnSpc>
+                          <a:spcPct val="105000"/>
+                        </a:lnSpc>
+                      </a:pPr>
+                      <a:r>
+                        <a:rPr sz="1150" b="0">
+                          <a:solidFill>
+                            <a:srgbClr val="1B2A4A"/>
+                          </a:solidFill>
+                          <a:latin typeface="Noto Sans CJK SC"/>
+                        </a:rPr>
+                        <a:t>MPC 能量管理</a:t>
                       </a:r>
                     </a:p>
                   </a:txBody>
@@ -4680,13 +4736,72 @@
                         </a:lnSpc>
                       </a:pPr>
                       <a:r>
-                        <a:rPr sz="1200" b="0">
-                          <a:solidFill>
-                            <a:srgbClr val="1B2A4A"/>
-                          </a:solidFill>
-                          <a:latin typeface="Noto Sans CJK SC"/>
-                        </a:rPr>
-                        <a:t>依赖气象预报与增阻模型精度；收益随海况波动</a:t>
+                        <a:rPr sz="1150" b="0">
+                          <a:solidFill>
+                            <a:srgbClr val="1B2A4A"/>
+                          </a:solidFill>
+                          <a:latin typeface="Noto Sans CJK SC"/>
+                        </a:rPr>
+                        <a:t>Zhang 2022：双层 MPC 比传统单层 MPC 再省 17.2%（30 kW 柴电混合船）</a:t>
+                      </a:r>
+                    </a:p>
+                    <a:p>
+                      <a:pPr>
+                        <a:lnSpc>
+                          <a:spcPct val="105000"/>
+                        </a:lnSpc>
+                      </a:pPr>
+                      <a:r>
+                        <a:rPr sz="1150" b="0">
+                          <a:solidFill>
+                            <a:srgbClr val="1B2A4A"/>
+                          </a:solidFill>
+                          <a:latin typeface="Noto Sans CJK SC"/>
+                        </a:rPr>
+                        <a:t>周妍 2024：比规则控制省 4.85%（客滚船）</a:t>
+                      </a:r>
+                    </a:p>
+                  </a:txBody>
+                  <a:tcPr marL="54864" marR="54864" marT="27432" marB="27432" anchor="ctr">
+                    <a:solidFill>
+                      <a:srgbClr val="EEF3FA"/>
+                    </a:solidFill>
+                  </a:tcPr>
+                </a:tc>
+                <a:tc>
+                  <a:txBody>
+                    <a:bodyPr/>
+                    <a:lstStyle/>
+                    <a:p>
+                      <a:pPr>
+                        <a:lnSpc>
+                          <a:spcPct val="105000"/>
+                        </a:lnSpc>
+                      </a:pPr>
+                      <a:r>
+                        <a:rPr sz="1150" b="0">
+                          <a:solidFill>
+                            <a:srgbClr val="1B2A4A"/>
+                          </a:solidFill>
+                          <a:latin typeface="Noto Sans CJK SC"/>
+                        </a:rPr>
+                        <a:t>两者对比基线不同，不可互比；</a:t>
+                      </a:r>
+                    </a:p>
+                    <a:p>
+                      <a:pPr>
+                        <a:lnSpc>
+                          <a:spcPct val="105000"/>
+                        </a:lnSpc>
+                      </a:pPr>
+                      <a:r>
+                        <a:rPr sz="1150" b="0">
+                          <a:solidFill>
+                            <a:srgbClr val="1B2A4A"/>
+                          </a:solidFill>
+                          <a:latin typeface="Noto Sans CJK SC"/>
+                        </a:rPr>
+                        <a:t>均为仿真</a:t>
                       </a:r>
                     </a:p>
                   </a:txBody>
@@ -4697,7 +4812,7 @@
                   </a:tcPr>
                 </a:tc>
               </a:tr>
-              <a:tr h="1211580">
+              <a:tr h="807720">
                 <a:tc>
                   <a:txBody>
                     <a:bodyPr/>
@@ -4709,13 +4824,13 @@
                         </a:lnSpc>
                       </a:pPr>
                       <a:r>
-                        <a:rPr sz="1200" b="0">
-                          <a:solidFill>
-                            <a:srgbClr val="1B2A4A"/>
-                          </a:solidFill>
-                          <a:latin typeface="Noto Sans CJK SC"/>
-                        </a:rPr>
-                        <a:t>纵倾优化</a:t>
+                        <a:rPr sz="1150" b="0">
+                          <a:solidFill>
+                            <a:srgbClr val="1B2A4A"/>
+                          </a:solidFill>
+                          <a:latin typeface="Noto Sans CJK SC"/>
+                        </a:rPr>
+                        <a:t>气象航线</a:t>
                       </a:r>
                     </a:p>
                   </a:txBody>
@@ -4732,29 +4847,29 @@
                         </a:lnSpc>
                       </a:pPr>
                       <a:r>
-                        <a:rPr sz="1200" b="0">
-                          <a:solidFill>
-                            <a:srgbClr val="1B2A4A"/>
-                          </a:solidFill>
-                          <a:latin typeface="Noto Sans CJK SC"/>
-                        </a:rPr>
-                        <a:t>ClassNK-NAPA 实船试航：纵倾贡献 1.2%</a:t>
-                      </a:r>
-                    </a:p>
-                    <a:p>
-                      <a:pPr>
-                        <a:lnSpc>
-                          <a:spcPct val="105000"/>
-                        </a:lnSpc>
-                      </a:pPr>
-                      <a:r>
-                        <a:rPr sz="1200" b="0">
-                          <a:solidFill>
-                            <a:srgbClr val="1B2A4A"/>
-                          </a:solidFill>
-                          <a:latin typeface="Noto Sans CJK SC"/>
-                        </a:rPr>
-                        <a:t>专项研究最多 4%；Eniram 实测 1–5%</a:t>
+                        <a:rPr sz="1150" b="0">
+                          <a:solidFill>
+                            <a:srgbClr val="1B2A4A"/>
+                          </a:solidFill>
+                          <a:latin typeface="Noto Sans CJK SC"/>
+                        </a:rPr>
+                        <a:t>算法基准研究：Isochrone / Isopone / DP / 3D-DP / Dijkstra</a:t>
+                      </a:r>
+                    </a:p>
+                    <a:p>
+                      <a:pPr>
+                        <a:lnSpc>
+                          <a:spcPct val="105000"/>
+                        </a:lnSpc>
+                      </a:pPr>
+                      <a:r>
+                        <a:rPr sz="1150" b="0">
+                          <a:solidFill>
+                            <a:srgbClr val="1B2A4A"/>
+                          </a:solidFill>
+                          <a:latin typeface="Noto Sans CJK SC"/>
+                        </a:rPr>
+                        <a:t>五算法横向对比（Wang et al., Chalmers，北大西洋案例）</a:t>
                       </a:r>
                     </a:p>
                   </a:txBody>
@@ -4771,36 +4886,13 @@
                         </a:lnSpc>
                       </a:pPr>
                       <a:r>
-                        <a:rPr sz="1200" b="0">
-                          <a:solidFill>
-                            <a:srgbClr val="1B2A4A"/>
-                          </a:solidFill>
-                          <a:latin typeface="Noto Sans CJK SC"/>
-                        </a:rPr>
-                        <a:t>几乎零成本（调压载水）；实船背书强</a:t>
-                      </a:r>
-                    </a:p>
-                  </a:txBody>
-                  <a:tcPr marL="54864" marR="54864" marT="27432" marB="27432" anchor="ctr"/>
-                </a:tc>
-                <a:tc>
-                  <a:txBody>
-                    <a:bodyPr/>
-                    <a:lstStyle/>
-                    <a:p>
-                      <a:pPr>
-                        <a:lnSpc>
-                          <a:spcPct val="105000"/>
-                        </a:lnSpc>
-                      </a:pPr>
-                      <a:r>
-                        <a:rPr sz="1200" b="0">
-                          <a:solidFill>
-                            <a:srgbClr val="1B2A4A"/>
-                          </a:solidFill>
-                          <a:latin typeface="Noto Sans CJK SC"/>
-                        </a:rPr>
-                        <a:t>最优纵倾随工况变化；受稳性/装卸约束；幅度偏小</a:t>
+                        <a:rPr sz="1150" b="0">
+                          <a:solidFill>
+                            <a:srgbClr val="1B2A4A"/>
+                          </a:solidFill>
+                          <a:latin typeface="Noto Sans CJK SC"/>
+                        </a:rPr>
+                        <a:t>仿真基准，无单一最优算法</a:t>
                       </a:r>
                     </a:p>
                   </a:txBody>
@@ -4848,7 +4940,7 @@
                 </a:solidFill>
                 <a:latin typeface="Noto Sans CJK SC"/>
               </a:rPr>
-              <a:t>12 / 20</a:t>
+              <a:t>12 / 19</a:t>
             </a:r>
           </a:p>
         </p:txBody>
@@ -4951,56 +5043,14 @@
                 </a:solidFill>
                 <a:latin typeface="Noto Sans CJK SC"/>
               </a:rPr>
-              <a:t>节能方案关键数据补充</a:t>
-            </a:r>
-          </a:p>
-        </p:txBody>
-      </p:sp>
-      <p:sp>
-        <p:nvSpPr>
-          <p:cNvPr id="4" name="TextBox 3"/>
-          <p:cNvSpPr txBox="1"/>
-          <p:nvPr/>
-        </p:nvSpPr>
-        <p:spPr>
-          <a:xfrm>
-            <a:off x="475488" y="914400"/>
-            <a:ext cx="11247120" cy="457200"/>
-          </a:xfrm>
-          <a:prstGeom prst="rect">
-            <a:avLst/>
-          </a:prstGeom>
-          <a:noFill/>
-        </p:spPr>
-        <p:txBody>
-          <a:bodyPr wrap="square" anchor="t">
-            <a:spAutoFit/>
-          </a:bodyPr>
-          <a:lstStyle/>
-          <a:p>
-            <a:pPr algn="l">
-              <a:lnSpc>
-                <a:spcPct val="115000"/>
-              </a:lnSpc>
-              <a:spcAft>
-                <a:spcPts val="600"/>
-              </a:spcAft>
-            </a:pPr>
-            <a:r>
-              <a:rPr sz="1400" b="0">
-                <a:solidFill>
-                  <a:srgbClr val="666666"/>
-                </a:solidFill>
-                <a:latin typeface="Noto Sans CJK SC"/>
-              </a:rPr>
-              <a:t>对比基线与口径已逐条核对，避免误读</a:t>
+              <a:t>节能方案优缺点（二）：操作层与控制层</a:t>
             </a:r>
           </a:p>
         </p:txBody>
       </p:sp>
       <p:graphicFrame>
         <p:nvGraphicFramePr>
-          <p:cNvPr id="5" name="Table 4"/>
+          <p:cNvPr id="4" name="Table 3"/>
           <p:cNvGraphicFramePr>
             <a:graphicFrameLocks noGrp="1"/>
           </p:cNvGraphicFramePr>
@@ -5008,7 +5058,7 @@
         </p:nvGraphicFramePr>
         <p:xfrm>
           <a:off x="457200" y="1463040"/>
-          <a:ext cx="11338560" cy="4846320"/>
+          <a:ext cx="11338559" cy="4846320"/>
         </p:xfrm>
         <a:graphic>
           <a:graphicData uri="http://schemas.openxmlformats.org/drawingml/2006/table">
@@ -5017,11 +5067,12 @@
                 <a:tableStyleId>{5C22544A-7EE6-4342-B048-85BDC9FD1C3A}</a:tableStyleId>
               </a:tblPr>
               <a:tblGrid>
-                <a:gridCol w="1889760"/>
-                <a:gridCol w="6299200"/>
-                <a:gridCol w="3149600"/>
+                <a:gridCol w="1939490"/>
+                <a:gridCol w="3878981"/>
+                <a:gridCol w="2685448"/>
+                <a:gridCol w="2834640"/>
               </a:tblGrid>
-              <a:tr h="807720">
+              <a:tr h="1211580">
                 <a:tc>
                   <a:txBody>
                     <a:bodyPr/>
@@ -5033,7 +5084,7 @@
                         </a:lnSpc>
                       </a:pPr>
                       <a:r>
-                        <a:rPr sz="1200" b="1">
+                        <a:rPr sz="1250" b="1">
                           <a:solidFill>
                             <a:srgbClr val="FFFFFF"/>
                           </a:solidFill>
@@ -5060,13 +5111,13 @@
                         </a:lnSpc>
                       </a:pPr>
                       <a:r>
-                        <a:rPr sz="1200" b="1">
+                        <a:rPr sz="1250" b="1">
                           <a:solidFill>
                             <a:srgbClr val="FFFFFF"/>
                           </a:solidFill>
                           <a:latin typeface="Noto Sans CJK SC"/>
                         </a:rPr>
-                        <a:t>补充数据（已核对）</a:t>
+                        <a:t>代表数据（已核对）</a:t>
                       </a:r>
                     </a:p>
                   </a:txBody>
@@ -5087,13 +5138,40 @@
                         </a:lnSpc>
                       </a:pPr>
                       <a:r>
-                        <a:rPr sz="1200" b="1">
+                        <a:rPr sz="1250" b="1">
                           <a:solidFill>
                             <a:srgbClr val="FFFFFF"/>
                           </a:solidFill>
                           <a:latin typeface="Noto Sans CJK SC"/>
                         </a:rPr>
-                        <a:t>口径说明</a:t>
+                        <a:t>优点</a:t>
+                      </a:r>
+                    </a:p>
+                  </a:txBody>
+                  <a:tcPr marL="54864" marR="54864" marT="27432" marB="27432" anchor="ctr">
+                    <a:solidFill>
+                      <a:srgbClr val="1F77B4"/>
+                    </a:solidFill>
+                  </a:tcPr>
+                </a:tc>
+                <a:tc>
+                  <a:txBody>
+                    <a:bodyPr/>
+                    <a:lstStyle/>
+                    <a:p>
+                      <a:pPr>
+                        <a:lnSpc>
+                          <a:spcPct val="105000"/>
+                        </a:lnSpc>
+                      </a:pPr>
+                      <a:r>
+                        <a:rPr sz="1250" b="1">
+                          <a:solidFill>
+                            <a:srgbClr val="FFFFFF"/>
+                          </a:solidFill>
+                          <a:latin typeface="Noto Sans CJK SC"/>
+                        </a:rPr>
+                        <a:t>缺点</a:t>
                       </a:r>
                     </a:p>
                   </a:txBody>
@@ -5104,7 +5182,7 @@
                   </a:tcPr>
                 </a:tc>
               </a:tr>
-              <a:tr h="807720">
+              <a:tr h="1211580">
                 <a:tc>
                   <a:txBody>
                     <a:bodyPr/>
@@ -5116,13 +5194,29 @@
                         </a:lnSpc>
                       </a:pPr>
                       <a:r>
-                        <a:rPr sz="1150" b="0">
-                          <a:solidFill>
-                            <a:srgbClr val="1B2A4A"/>
-                          </a:solidFill>
-                          <a:latin typeface="Noto Sans CJK SC"/>
-                        </a:rPr>
-                        <a:t>减速航行</a:t>
+                        <a:rPr sz="1200" b="0">
+                          <a:solidFill>
+                            <a:srgbClr val="1B2A4A"/>
+                          </a:solidFill>
+                          <a:latin typeface="Noto Sans CJK SC"/>
+                        </a:rPr>
+                        <a:t>MPC 能量管理</a:t>
+                      </a:r>
+                    </a:p>
+                    <a:p>
+                      <a:pPr>
+                        <a:lnSpc>
+                          <a:spcPct val="105000"/>
+                        </a:lnSpc>
+                      </a:pPr>
+                      <a:r>
+                        <a:rPr sz="1200" b="0">
+                          <a:solidFill>
+                            <a:srgbClr val="1B2A4A"/>
+                          </a:solidFill>
+                          <a:latin typeface="Noto Sans CJK SC"/>
+                        </a:rPr>
+                        <a:t>(混合动力 EMS)</a:t>
                       </a:r>
                     </a:p>
                   </a:txBody>
@@ -5139,29 +5233,29 @@
                         </a:lnSpc>
                       </a:pPr>
                       <a:r>
-                        <a:rPr sz="1150" b="0">
-                          <a:solidFill>
-                            <a:srgbClr val="1B2A4A"/>
-                          </a:solidFill>
-                          <a:latin typeface="Noto Sans CJK SC"/>
-                        </a:rPr>
-                        <a:t>IMO 案例：56,000 DWT 敞舱口货船 13% 减速 → 日油耗 −34%；</a:t>
-                      </a:r>
-                    </a:p>
-                    <a:p>
-                      <a:pPr>
-                        <a:lnSpc>
-                          <a:spcPct val="105000"/>
-                        </a:lnSpc>
-                      </a:pPr>
-                      <a:r>
-                        <a:rPr sz="1150" b="0">
-                          <a:solidFill>
-                            <a:srgbClr val="1B2A4A"/>
-                          </a:solidFill>
-                          <a:latin typeface="Noto Sans CJK SC"/>
-                        </a:rPr>
-                        <a:t>10% 减速 → 功率 −27%，计入航时后航次总节油约 19%</a:t>
+                        <a:rPr sz="1200" b="0">
+                          <a:solidFill>
+                            <a:srgbClr val="1B2A4A"/>
+                          </a:solidFill>
+                          <a:latin typeface="Noto Sans CJK SC"/>
+                        </a:rPr>
+                        <a:t>双层 MPC 比传统 MPC 再省 17.2%（Zhang 2022）</a:t>
+                      </a:r>
+                    </a:p>
+                    <a:p>
+                      <a:pPr>
+                        <a:lnSpc>
+                          <a:spcPct val="105000"/>
+                        </a:lnSpc>
+                      </a:pPr>
+                      <a:r>
+                        <a:rPr sz="1200" b="0">
+                          <a:solidFill>
+                            <a:srgbClr val="1B2A4A"/>
+                          </a:solidFill>
+                          <a:latin typeface="Noto Sans CJK SC"/>
+                        </a:rPr>
+                        <a:t>客滚船 MPC-EMS 节油 4.85%（周妍 2024）</a:t>
                       </a:r>
                     </a:p>
                   </a:txBody>
@@ -5178,36 +5272,43 @@
                         </a:lnSpc>
                       </a:pPr>
                       <a:r>
-                        <a:rPr sz="1150" b="0">
-                          <a:solidFill>
-                            <a:srgbClr val="1B2A4A"/>
-                          </a:solidFill>
-                          <a:latin typeface="Noto Sans CJK SC"/>
-                        </a:rPr>
-                        <a:t>特定船案例，非普适值；</a:t>
-                      </a:r>
-                    </a:p>
-                    <a:p>
-                      <a:pPr>
-                        <a:lnSpc>
-                          <a:spcPct val="105000"/>
-                        </a:lnSpc>
-                      </a:pPr>
-                      <a:r>
-                        <a:rPr sz="1150" b="0">
-                          <a:solidFill>
-                            <a:srgbClr val="1B2A4A"/>
-                          </a:solidFill>
-                          <a:latin typeface="Noto Sans CJK SC"/>
-                        </a:rPr>
-                        <a:t>主机口径 10–50% vs 全船 3–12%</a:t>
+                        <a:rPr sz="1200" b="0">
+                          <a:solidFill>
+                            <a:srgbClr val="1B2A4A"/>
+                          </a:solidFill>
+                          <a:latin typeface="Noto Sans CJK SC"/>
+                        </a:rPr>
+                        <a:t>滚动时域天然适合负载预测；多目标可编码</a:t>
+                      </a:r>
+                    </a:p>
+                  </a:txBody>
+                  <a:tcPr marL="54864" marR="54864" marT="27432" marB="27432" anchor="ctr"/>
+                </a:tc>
+                <a:tc>
+                  <a:txBody>
+                    <a:bodyPr/>
+                    <a:lstStyle/>
+                    <a:p>
+                      <a:pPr>
+                        <a:lnSpc>
+                          <a:spcPct val="105000"/>
+                        </a:lnSpc>
+                      </a:pPr>
+                      <a:r>
+                        <a:rPr sz="1200" b="0">
+                          <a:solidFill>
+                            <a:srgbClr val="1B2A4A"/>
+                          </a:solidFill>
+                          <a:latin typeface="Noto Sans CJK SC"/>
+                        </a:rPr>
+                        <a:t>全部仿真验证无实船数据；仅限混合动力船型</a:t>
                       </a:r>
                     </a:p>
                   </a:txBody>
                   <a:tcPr marL="54864" marR="54864" marT="27432" marB="27432" anchor="ctr"/>
                 </a:tc>
               </a:tr>
-              <a:tr h="807720">
+              <a:tr h="1211580">
                 <a:tc>
                   <a:txBody>
                     <a:bodyPr/>
@@ -5219,13 +5320,29 @@
                         </a:lnSpc>
                       </a:pPr>
                       <a:r>
-                        <a:rPr sz="1150" b="0">
-                          <a:solidFill>
-                            <a:srgbClr val="1B2A4A"/>
-                          </a:solidFill>
-                          <a:latin typeface="Noto Sans CJK SC"/>
-                        </a:rPr>
-                        <a:t>航速+纵倾联合</a:t>
+                        <a:rPr sz="1200" b="0">
+                          <a:solidFill>
+                            <a:srgbClr val="1B2A4A"/>
+                          </a:solidFill>
+                          <a:latin typeface="Noto Sans CJK SC"/>
+                        </a:rPr>
+                        <a:t>自动舵节能</a:t>
+                      </a:r>
+                    </a:p>
+                    <a:p>
+                      <a:pPr>
+                        <a:lnSpc>
+                          <a:spcPct val="105000"/>
+                        </a:lnSpc>
+                      </a:pPr>
+                      <a:r>
+                        <a:rPr sz="1200" b="0">
+                          <a:solidFill>
+                            <a:srgbClr val="1B2A4A"/>
+                          </a:solidFill>
+                          <a:latin typeface="Noto Sans CJK SC"/>
+                        </a:rPr>
+                        <a:t>(减少无效操舵)</a:t>
                       </a:r>
                     </a:p>
                   </a:txBody>
@@ -5246,29 +5363,29 @@
                         </a:lnSpc>
                       </a:pPr>
                       <a:r>
-                        <a:rPr sz="1150" b="0">
-                          <a:solidFill>
-                            <a:srgbClr val="1B2A4A"/>
-                          </a:solidFill>
-                          <a:latin typeface="Noto Sans CJK SC"/>
-                        </a:rPr>
-                        <a:t>Du 2019（实船数据+ANN 模型）：动态纵倾 C1 省 4.96%/5.83%；</a:t>
-                      </a:r>
-                    </a:p>
-                    <a:p>
-                      <a:pPr>
-                        <a:lnSpc>
-                          <a:spcPct val="105000"/>
-                        </a:lnSpc>
-                      </a:pPr>
-                      <a:r>
-                        <a:rPr sz="1150" b="0">
-                          <a:solidFill>
-                            <a:srgbClr val="1B2A4A"/>
-                          </a:solidFill>
-                          <a:latin typeface="Noto Sans CJK SC"/>
-                        </a:rPr>
-                        <a:t>ANN 航速优化 C2 省 7.63%/7.57%；综合 C3 平均省 8.25%</a:t>
+                        <a:rPr sz="1200" b="0">
+                          <a:solidFill>
+                            <a:srgbClr val="1B2A4A"/>
+                          </a:solidFill>
+                          <a:latin typeface="Noto Sans CJK SC"/>
+                        </a:rPr>
+                        <a:t>IMO：0.1–1.0%；ABS：最高 1%、改造成本 $2 万</a:t>
+                      </a:r>
+                    </a:p>
+                    <a:p>
+                      <a:pPr>
+                        <a:lnSpc>
+                          <a:spcPct val="105000"/>
+                        </a:lnSpc>
+                      </a:pPr>
+                      <a:r>
+                        <a:rPr sz="1200" b="0">
+                          <a:solidFill>
+                            <a:srgbClr val="1B2A4A"/>
+                          </a:solidFill>
+                          <a:latin typeface="Noto Sans CJK SC"/>
+                        </a:rPr>
+                        <a:t>MRAS 实船试验 1–3%（van Amerongen 经典）</a:t>
                       </a:r>
                     </a:p>
                   </a:txBody>
@@ -5289,129 +5406,13 @@
                         </a:lnSpc>
                       </a:pPr>
                       <a:r>
-                        <a:rPr sz="1150" b="0">
-                          <a:solidFill>
-                            <a:srgbClr val="1B2A4A"/>
-                          </a:solidFill>
-                          <a:latin typeface="Noto Sans CJK SC"/>
-                        </a:rPr>
-                        <a:t>0.57%/3.69% 是相对三次方定律的</a:t>
-                      </a:r>
-                    </a:p>
-                    <a:p>
-                      <a:pPr>
-                        <a:lnSpc>
-                          <a:spcPct val="105000"/>
-                        </a:lnSpc>
-                      </a:pPr>
-                      <a:r>
-                        <a:rPr sz="1150" b="0">
-                          <a:solidFill>
-                            <a:srgbClr val="1B2A4A"/>
-                          </a:solidFill>
-                          <a:latin typeface="Noto Sans CJK SC"/>
-                        </a:rPr>
-                        <a:t>额外节油，非总节油</a:t>
-                      </a:r>
-                    </a:p>
-                  </a:txBody>
-                  <a:tcPr marL="54864" marR="54864" marT="27432" marB="27432" anchor="ctr">
-                    <a:solidFill>
-                      <a:srgbClr val="EEF3FA"/>
-                    </a:solidFill>
-                  </a:tcPr>
-                </a:tc>
-              </a:tr>
-              <a:tr h="807720">
-                <a:tc>
-                  <a:txBody>
-                    <a:bodyPr/>
-                    <a:lstStyle/>
-                    <a:p>
-                      <a:pPr>
-                        <a:lnSpc>
-                          <a:spcPct val="105000"/>
-                        </a:lnSpc>
-                      </a:pPr>
-                      <a:r>
-                        <a:rPr sz="1150" b="0">
-                          <a:solidFill>
-                            <a:srgbClr val="1B2A4A"/>
-                          </a:solidFill>
-                          <a:latin typeface="Noto Sans CJK SC"/>
-                        </a:rPr>
-                        <a:t>纵倾优化</a:t>
-                      </a:r>
-                    </a:p>
-                  </a:txBody>
-                  <a:tcPr marL="54864" marR="54864" marT="27432" marB="27432" anchor="ctr"/>
-                </a:tc>
-                <a:tc>
-                  <a:txBody>
-                    <a:bodyPr/>
-                    <a:lstStyle/>
-                    <a:p>
-                      <a:pPr>
-                        <a:lnSpc>
-                          <a:spcPct val="105000"/>
-                        </a:lnSpc>
-                      </a:pPr>
-                      <a:r>
-                        <a:rPr sz="1150" b="0">
-                          <a:solidFill>
-                            <a:srgbClr val="1B2A4A"/>
-                          </a:solidFill>
-                          <a:latin typeface="Noto Sans CJK SC"/>
-                        </a:rPr>
-                        <a:t>ClassNK 两次印度洋横渡专项：最优纵倾最多再省 4%</a:t>
-                      </a:r>
-                    </a:p>
-                  </a:txBody>
-                  <a:tcPr marL="54864" marR="54864" marT="27432" marB="27432" anchor="ctr"/>
-                </a:tc>
-                <a:tc>
-                  <a:txBody>
-                    <a:bodyPr/>
-                    <a:lstStyle/>
-                    <a:p>
-                      <a:pPr>
-                        <a:lnSpc>
-                          <a:spcPct val="105000"/>
-                        </a:lnSpc>
-                      </a:pPr>
-                      <a:r>
-                        <a:rPr sz="1150" b="0">
-                          <a:solidFill>
-                            <a:srgbClr val="1B2A4A"/>
-                          </a:solidFill>
-                          <a:latin typeface="Noto Sans CJK SC"/>
-                        </a:rPr>
-                        <a:t>与航速/航程优化收益可叠加</a:t>
-                      </a:r>
-                    </a:p>
-                  </a:txBody>
-                  <a:tcPr marL="54864" marR="54864" marT="27432" marB="27432" anchor="ctr"/>
-                </a:tc>
-              </a:tr>
-              <a:tr h="807720">
-                <a:tc>
-                  <a:txBody>
-                    <a:bodyPr/>
-                    <a:lstStyle/>
-                    <a:p>
-                      <a:pPr>
-                        <a:lnSpc>
-                          <a:spcPct val="105000"/>
-                        </a:lnSpc>
-                      </a:pPr>
-                      <a:r>
-                        <a:rPr sz="1150" b="0">
-                          <a:solidFill>
-                            <a:srgbClr val="1B2A4A"/>
-                          </a:solidFill>
-                          <a:latin typeface="Noto Sans CJK SC"/>
-                        </a:rPr>
-                        <a:t>MPC 能量管理</a:t>
+                        <a:rPr sz="1200" b="0">
+                          <a:solidFill>
+                            <a:srgbClr val="1B2A4A"/>
+                          </a:solidFill>
+                          <a:latin typeface="Noto Sans CJK SC"/>
+                        </a:rPr>
+                        <a:t>实施成本最低（软件级）；兼降舵机磨损</a:t>
                       </a:r>
                     </a:p>
                   </a:txBody>
@@ -5432,72 +5433,13 @@
                         </a:lnSpc>
                       </a:pPr>
                       <a:r>
-                        <a:rPr sz="1150" b="0">
-                          <a:solidFill>
-                            <a:srgbClr val="1B2A4A"/>
-                          </a:solidFill>
-                          <a:latin typeface="Noto Sans CJK SC"/>
-                        </a:rPr>
-                        <a:t>Zhang 2022：双层 MPC 比传统单层 MPC 再省 17.2%（30 kW 柴电混合船）</a:t>
-                      </a:r>
-                    </a:p>
-                    <a:p>
-                      <a:pPr>
-                        <a:lnSpc>
-                          <a:spcPct val="105000"/>
-                        </a:lnSpc>
-                      </a:pPr>
-                      <a:r>
-                        <a:rPr sz="1150" b="0">
-                          <a:solidFill>
-                            <a:srgbClr val="1B2A4A"/>
-                          </a:solidFill>
-                          <a:latin typeface="Noto Sans CJK SC"/>
-                        </a:rPr>
-                        <a:t>周妍 2024：比规则控制省 4.85%（客滚船）</a:t>
-                      </a:r>
-                    </a:p>
-                  </a:txBody>
-                  <a:tcPr marL="54864" marR="54864" marT="27432" marB="27432" anchor="ctr">
-                    <a:solidFill>
-                      <a:srgbClr val="EEF3FA"/>
-                    </a:solidFill>
-                  </a:tcPr>
-                </a:tc>
-                <a:tc>
-                  <a:txBody>
-                    <a:bodyPr/>
-                    <a:lstStyle/>
-                    <a:p>
-                      <a:pPr>
-                        <a:lnSpc>
-                          <a:spcPct val="105000"/>
-                        </a:lnSpc>
-                      </a:pPr>
-                      <a:r>
-                        <a:rPr sz="1150" b="0">
-                          <a:solidFill>
-                            <a:srgbClr val="1B2A4A"/>
-                          </a:solidFill>
-                          <a:latin typeface="Noto Sans CJK SC"/>
-                        </a:rPr>
-                        <a:t>两者对比基线不同，不可互比；</a:t>
-                      </a:r>
-                    </a:p>
-                    <a:p>
-                      <a:pPr>
-                        <a:lnSpc>
-                          <a:spcPct val="105000"/>
-                        </a:lnSpc>
-                      </a:pPr>
-                      <a:r>
-                        <a:rPr sz="1150" b="0">
-                          <a:solidFill>
-                            <a:srgbClr val="1B2A4A"/>
-                          </a:solidFill>
-                          <a:latin typeface="Noto Sans CJK SC"/>
-                        </a:rPr>
-                        <a:t>均为仿真</a:t>
+                        <a:rPr sz="1200" b="0">
+                          <a:solidFill>
+                            <a:srgbClr val="1B2A4A"/>
+                          </a:solidFill>
+                          <a:latin typeface="Noto Sans CJK SC"/>
+                        </a:rPr>
+                        <a:t>单项幅度最小；收益依赖海况</a:t>
                       </a:r>
                     </a:p>
                   </a:txBody>
@@ -5508,7 +5450,7 @@
                   </a:tcPr>
                 </a:tc>
               </a:tr>
-              <a:tr h="807720">
+              <a:tr h="1211580">
                 <a:tc>
                   <a:txBody>
                     <a:bodyPr/>
@@ -5520,13 +5462,29 @@
                         </a:lnSpc>
                       </a:pPr>
                       <a:r>
-                        <a:rPr sz="1150" b="0">
-                          <a:solidFill>
-                            <a:srgbClr val="1B2A4A"/>
-                          </a:solidFill>
-                          <a:latin typeface="Noto Sans CJK SC"/>
-                        </a:rPr>
-                        <a:t>气象航线</a:t>
+                        <a:rPr sz="1200" b="0">
+                          <a:solidFill>
+                            <a:srgbClr val="1B2A4A"/>
+                          </a:solidFill>
+                          <a:latin typeface="Noto Sans CJK SC"/>
+                        </a:rPr>
+                        <a:t>双舵 Toe Angle</a:t>
+                      </a:r>
+                    </a:p>
+                    <a:p>
+                      <a:pPr>
+                        <a:lnSpc>
+                          <a:spcPct val="105000"/>
+                        </a:lnSpc>
+                      </a:pPr>
+                      <a:r>
+                        <a:rPr sz="1200" b="0">
+                          <a:solidFill>
+                            <a:srgbClr val="1B2A4A"/>
+                          </a:solidFill>
+                          <a:latin typeface="Noto Sans CJK SC"/>
+                        </a:rPr>
+                        <a:t>(舵系水动力优化)</a:t>
                       </a:r>
                     </a:p>
                   </a:txBody>
@@ -5543,29 +5501,29 @@
                         </a:lnSpc>
                       </a:pPr>
                       <a:r>
-                        <a:rPr sz="1150" b="0">
-                          <a:solidFill>
-                            <a:srgbClr val="1B2A4A"/>
-                          </a:solidFill>
-                          <a:latin typeface="Noto Sans CJK SC"/>
-                        </a:rPr>
-                        <a:t>算法基准研究：Isochrone / Isopone / DP / 3D-DP / Dijkstra</a:t>
-                      </a:r>
-                    </a:p>
-                    <a:p>
-                      <a:pPr>
-                        <a:lnSpc>
-                          <a:spcPct val="105000"/>
-                        </a:lnSpc>
-                      </a:pPr>
-                      <a:r>
-                        <a:rPr sz="1150" b="0">
-                          <a:solidFill>
-                            <a:srgbClr val="1B2A4A"/>
-                          </a:solidFill>
-                          <a:latin typeface="Noto Sans CJK SC"/>
-                        </a:rPr>
-                        <a:t>五算法横向对比（Wang et al., Chalmers，北大西洋案例）</a:t>
+                        <a:rPr sz="1200" b="0">
+                          <a:solidFill>
+                            <a:srgbClr val="1B2A4A"/>
+                          </a:solidFill>
+                          <a:latin typeface="Noto Sans CJK SC"/>
+                        </a:rPr>
+                        <a:t>Anschütz 实测最大 4.7%、平均约 2%（宣称 ≤5%）</a:t>
+                      </a:r>
+                    </a:p>
+                    <a:p>
+                      <a:pPr>
+                        <a:lnSpc>
+                          <a:spcPct val="105000"/>
+                        </a:lnSpc>
+                      </a:pPr>
+                      <a:r>
+                        <a:rPr sz="1200" b="0">
+                          <a:solidFill>
+                            <a:srgbClr val="1B2A4A"/>
+                          </a:solidFill>
+                          <a:latin typeface="Noto Sans CJK SC"/>
+                        </a:rPr>
+                        <a:t>自适应模式平均减少舵动作 25%</a:t>
                       </a:r>
                     </a:p>
                   </a:txBody>
@@ -5582,13 +5540,36 @@
                         </a:lnSpc>
                       </a:pPr>
                       <a:r>
-                        <a:rPr sz="1150" b="0">
-                          <a:solidFill>
-                            <a:srgbClr val="1B2A4A"/>
-                          </a:solidFill>
-                          <a:latin typeface="Noto Sans CJK SC"/>
-                        </a:rPr>
-                        <a:t>仿真基准，无单一最优算法</a:t>
+                        <a:rPr sz="1200" b="0">
+                          <a:solidFill>
+                            <a:srgbClr val="1B2A4A"/>
+                          </a:solidFill>
+                          <a:latin typeface="Noto Sans CJK SC"/>
+                        </a:rPr>
+                        <a:t>双舵船额外收益；已有商用产品</a:t>
+                      </a:r>
+                    </a:p>
+                  </a:txBody>
+                  <a:tcPr marL="54864" marR="54864" marT="27432" marB="27432" anchor="ctr"/>
+                </a:tc>
+                <a:tc>
+                  <a:txBody>
+                    <a:bodyPr/>
+                    <a:lstStyle/>
+                    <a:p>
+                      <a:pPr>
+                        <a:lnSpc>
+                          <a:spcPct val="105000"/>
+                        </a:lnSpc>
+                      </a:pPr>
+                      <a:r>
+                        <a:rPr sz="1200" b="0">
+                          <a:solidFill>
+                            <a:srgbClr val="1B2A4A"/>
+                          </a:solidFill>
+                          <a:latin typeface="Noto Sans CJK SC"/>
+                        </a:rPr>
+                        <a:t>仅适用双舵船；厂商数据待第三方复核</a:t>
                       </a:r>
                     </a:p>
                   </a:txBody>
@@ -5601,7 +5582,7 @@
       </p:graphicFrame>
       <p:sp>
         <p:nvSpPr>
-          <p:cNvPr id="6" name="TextBox 5"/>
+          <p:cNvPr id="5" name="TextBox 4"/>
           <p:cNvSpPr txBox="1"/>
           <p:nvPr/>
         </p:nvSpPr>
@@ -5636,7 +5617,7 @@
                 </a:solidFill>
                 <a:latin typeface="Noto Sans CJK SC"/>
               </a:rPr>
-              <a:t>13 / 20</a:t>
+              <a:t>13 / 19</a:t>
             </a:r>
           </a:p>
         </p:txBody>
@@ -5739,546 +5720,255 @@
                 </a:solidFill>
                 <a:latin typeface="Noto Sans CJK SC"/>
               </a:rPr>
-              <a:t>节能方案优缺点（二）：操作层与控制层</a:t>
-            </a:r>
-          </a:p>
-        </p:txBody>
-      </p:sp>
-      <p:graphicFrame>
-        <p:nvGraphicFramePr>
-          <p:cNvPr id="4" name="Table 3"/>
-          <p:cNvGraphicFramePr>
-            <a:graphicFrameLocks noGrp="1"/>
-          </p:cNvGraphicFramePr>
+              <a:t>工业部署案例（一）：第三方实测集中在 3–10%</a:t>
+            </a:r>
+          </a:p>
+        </p:txBody>
+      </p:sp>
+      <p:sp>
+        <p:nvSpPr>
+          <p:cNvPr id="4" name="TextBox 3"/>
+          <p:cNvSpPr txBox="1"/>
           <p:nvPr/>
-        </p:nvGraphicFramePr>
-        <p:xfrm>
-          <a:off x="457200" y="1463040"/>
-          <a:ext cx="11338559" cy="4846320"/>
-        </p:xfrm>
-        <a:graphic>
-          <a:graphicData uri="http://schemas.openxmlformats.org/drawingml/2006/table">
-            <a:tbl>
-              <a:tblPr firstRow="1" bandRow="1">
-                <a:tableStyleId>{5C22544A-7EE6-4342-B048-85BDC9FD1C3A}</a:tableStyleId>
-              </a:tblPr>
-              <a:tblGrid>
-                <a:gridCol w="1939490"/>
-                <a:gridCol w="3878981"/>
-                <a:gridCol w="2685448"/>
-                <a:gridCol w="2834640"/>
-              </a:tblGrid>
-              <a:tr h="1211580">
-                <a:tc>
-                  <a:txBody>
-                    <a:bodyPr/>
-                    <a:lstStyle/>
-                    <a:p>
-                      <a:pPr>
-                        <a:lnSpc>
-                          <a:spcPct val="105000"/>
-                        </a:lnSpc>
-                      </a:pPr>
-                      <a:r>
-                        <a:rPr sz="1250" b="1">
-                          <a:solidFill>
-                            <a:srgbClr val="FFFFFF"/>
-                          </a:solidFill>
-                          <a:latin typeface="Noto Sans CJK SC"/>
-                        </a:rPr>
-                        <a:t>方案</a:t>
-                      </a:r>
-                    </a:p>
-                  </a:txBody>
-                  <a:tcPr marL="54864" marR="54864" marT="27432" marB="27432" anchor="ctr">
-                    <a:solidFill>
-                      <a:srgbClr val="1F77B4"/>
-                    </a:solidFill>
-                  </a:tcPr>
-                </a:tc>
-                <a:tc>
-                  <a:txBody>
-                    <a:bodyPr/>
-                    <a:lstStyle/>
-                    <a:p>
-                      <a:pPr>
-                        <a:lnSpc>
-                          <a:spcPct val="105000"/>
-                        </a:lnSpc>
-                      </a:pPr>
-                      <a:r>
-                        <a:rPr sz="1250" b="1">
-                          <a:solidFill>
-                            <a:srgbClr val="FFFFFF"/>
-                          </a:solidFill>
-                          <a:latin typeface="Noto Sans CJK SC"/>
-                        </a:rPr>
-                        <a:t>代表数据（已核对）</a:t>
-                      </a:r>
-                    </a:p>
-                  </a:txBody>
-                  <a:tcPr marL="54864" marR="54864" marT="27432" marB="27432" anchor="ctr">
-                    <a:solidFill>
-                      <a:srgbClr val="1F77B4"/>
-                    </a:solidFill>
-                  </a:tcPr>
-                </a:tc>
-                <a:tc>
-                  <a:txBody>
-                    <a:bodyPr/>
-                    <a:lstStyle/>
-                    <a:p>
-                      <a:pPr>
-                        <a:lnSpc>
-                          <a:spcPct val="105000"/>
-                        </a:lnSpc>
-                      </a:pPr>
-                      <a:r>
-                        <a:rPr sz="1250" b="1">
-                          <a:solidFill>
-                            <a:srgbClr val="FFFFFF"/>
-                          </a:solidFill>
-                          <a:latin typeface="Noto Sans CJK SC"/>
-                        </a:rPr>
-                        <a:t>优点</a:t>
-                      </a:r>
-                    </a:p>
-                  </a:txBody>
-                  <a:tcPr marL="54864" marR="54864" marT="27432" marB="27432" anchor="ctr">
-                    <a:solidFill>
-                      <a:srgbClr val="1F77B4"/>
-                    </a:solidFill>
-                  </a:tcPr>
-                </a:tc>
-                <a:tc>
-                  <a:txBody>
-                    <a:bodyPr/>
-                    <a:lstStyle/>
-                    <a:p>
-                      <a:pPr>
-                        <a:lnSpc>
-                          <a:spcPct val="105000"/>
-                        </a:lnSpc>
-                      </a:pPr>
-                      <a:r>
-                        <a:rPr sz="1250" b="1">
-                          <a:solidFill>
-                            <a:srgbClr val="FFFFFF"/>
-                          </a:solidFill>
-                          <a:latin typeface="Noto Sans CJK SC"/>
-                        </a:rPr>
-                        <a:t>缺点</a:t>
-                      </a:r>
-                    </a:p>
-                  </a:txBody>
-                  <a:tcPr marL="54864" marR="54864" marT="27432" marB="27432" anchor="ctr">
-                    <a:solidFill>
-                      <a:srgbClr val="1F77B4"/>
-                    </a:solidFill>
-                  </a:tcPr>
-                </a:tc>
-              </a:tr>
-              <a:tr h="1211580">
-                <a:tc>
-                  <a:txBody>
-                    <a:bodyPr/>
-                    <a:lstStyle/>
-                    <a:p>
-                      <a:pPr>
-                        <a:lnSpc>
-                          <a:spcPct val="105000"/>
-                        </a:lnSpc>
-                      </a:pPr>
-                      <a:r>
-                        <a:rPr sz="1200" b="0">
-                          <a:solidFill>
-                            <a:srgbClr val="1B2A4A"/>
-                          </a:solidFill>
-                          <a:latin typeface="Noto Sans CJK SC"/>
-                        </a:rPr>
-                        <a:t>MPC 能量管理</a:t>
-                      </a:r>
-                    </a:p>
-                    <a:p>
-                      <a:pPr>
-                        <a:lnSpc>
-                          <a:spcPct val="105000"/>
-                        </a:lnSpc>
-                      </a:pPr>
-                      <a:r>
-                        <a:rPr sz="1200" b="0">
-                          <a:solidFill>
-                            <a:srgbClr val="1B2A4A"/>
-                          </a:solidFill>
-                          <a:latin typeface="Noto Sans CJK SC"/>
-                        </a:rPr>
-                        <a:t>(混合动力 EMS)</a:t>
-                      </a:r>
-                    </a:p>
-                  </a:txBody>
-                  <a:tcPr marL="54864" marR="54864" marT="27432" marB="27432" anchor="ctr"/>
-                </a:tc>
-                <a:tc>
-                  <a:txBody>
-                    <a:bodyPr/>
-                    <a:lstStyle/>
-                    <a:p>
-                      <a:pPr>
-                        <a:lnSpc>
-                          <a:spcPct val="105000"/>
-                        </a:lnSpc>
-                      </a:pPr>
-                      <a:r>
-                        <a:rPr sz="1200" b="0">
-                          <a:solidFill>
-                            <a:srgbClr val="1B2A4A"/>
-                          </a:solidFill>
-                          <a:latin typeface="Noto Sans CJK SC"/>
-                        </a:rPr>
-                        <a:t>双层 MPC 比传统 MPC 再省 17.2%（Zhang 2022）</a:t>
-                      </a:r>
-                    </a:p>
-                    <a:p>
-                      <a:pPr>
-                        <a:lnSpc>
-                          <a:spcPct val="105000"/>
-                        </a:lnSpc>
-                      </a:pPr>
-                      <a:r>
-                        <a:rPr sz="1200" b="0">
-                          <a:solidFill>
-                            <a:srgbClr val="1B2A4A"/>
-                          </a:solidFill>
-                          <a:latin typeface="Noto Sans CJK SC"/>
-                        </a:rPr>
-                        <a:t>客滚船 MPC-EMS 节油 4.85%（周妍 2024）</a:t>
-                      </a:r>
-                    </a:p>
-                  </a:txBody>
-                  <a:tcPr marL="54864" marR="54864" marT="27432" marB="27432" anchor="ctr"/>
-                </a:tc>
-                <a:tc>
-                  <a:txBody>
-                    <a:bodyPr/>
-                    <a:lstStyle/>
-                    <a:p>
-                      <a:pPr>
-                        <a:lnSpc>
-                          <a:spcPct val="105000"/>
-                        </a:lnSpc>
-                      </a:pPr>
-                      <a:r>
-                        <a:rPr sz="1200" b="0">
-                          <a:solidFill>
-                            <a:srgbClr val="1B2A4A"/>
-                          </a:solidFill>
-                          <a:latin typeface="Noto Sans CJK SC"/>
-                        </a:rPr>
-                        <a:t>滚动时域天然适合负载预测；多目标可编码</a:t>
-                      </a:r>
-                    </a:p>
-                  </a:txBody>
-                  <a:tcPr marL="54864" marR="54864" marT="27432" marB="27432" anchor="ctr"/>
-                </a:tc>
-                <a:tc>
-                  <a:txBody>
-                    <a:bodyPr/>
-                    <a:lstStyle/>
-                    <a:p>
-                      <a:pPr>
-                        <a:lnSpc>
-                          <a:spcPct val="105000"/>
-                        </a:lnSpc>
-                      </a:pPr>
-                      <a:r>
-                        <a:rPr sz="1200" b="0">
-                          <a:solidFill>
-                            <a:srgbClr val="1B2A4A"/>
-                          </a:solidFill>
-                          <a:latin typeface="Noto Sans CJK SC"/>
-                        </a:rPr>
-                        <a:t>全部仿真验证无实船数据；仅限混合动力船型</a:t>
-                      </a:r>
-                    </a:p>
-                  </a:txBody>
-                  <a:tcPr marL="54864" marR="54864" marT="27432" marB="27432" anchor="ctr"/>
-                </a:tc>
-              </a:tr>
-              <a:tr h="1211580">
-                <a:tc>
-                  <a:txBody>
-                    <a:bodyPr/>
-                    <a:lstStyle/>
-                    <a:p>
-                      <a:pPr>
-                        <a:lnSpc>
-                          <a:spcPct val="105000"/>
-                        </a:lnSpc>
-                      </a:pPr>
-                      <a:r>
-                        <a:rPr sz="1200" b="0">
-                          <a:solidFill>
-                            <a:srgbClr val="1B2A4A"/>
-                          </a:solidFill>
-                          <a:latin typeface="Noto Sans CJK SC"/>
-                        </a:rPr>
-                        <a:t>自动舵节能</a:t>
-                      </a:r>
-                    </a:p>
-                    <a:p>
-                      <a:pPr>
-                        <a:lnSpc>
-                          <a:spcPct val="105000"/>
-                        </a:lnSpc>
-                      </a:pPr>
-                      <a:r>
-                        <a:rPr sz="1200" b="0">
-                          <a:solidFill>
-                            <a:srgbClr val="1B2A4A"/>
-                          </a:solidFill>
-                          <a:latin typeface="Noto Sans CJK SC"/>
-                        </a:rPr>
-                        <a:t>(减少无效操舵)</a:t>
-                      </a:r>
-                    </a:p>
-                  </a:txBody>
-                  <a:tcPr marL="54864" marR="54864" marT="27432" marB="27432" anchor="ctr">
-                    <a:solidFill>
-                      <a:srgbClr val="EEF3FA"/>
-                    </a:solidFill>
-                  </a:tcPr>
-                </a:tc>
-                <a:tc>
-                  <a:txBody>
-                    <a:bodyPr/>
-                    <a:lstStyle/>
-                    <a:p>
-                      <a:pPr>
-                        <a:lnSpc>
-                          <a:spcPct val="105000"/>
-                        </a:lnSpc>
-                      </a:pPr>
-                      <a:r>
-                        <a:rPr sz="1200" b="0">
-                          <a:solidFill>
-                            <a:srgbClr val="1B2A4A"/>
-                          </a:solidFill>
-                          <a:latin typeface="Noto Sans CJK SC"/>
-                        </a:rPr>
-                        <a:t>IMO：0.1–1.0%；ABS：最高 1%、改造成本 $2 万</a:t>
-                      </a:r>
-                    </a:p>
-                    <a:p>
-                      <a:pPr>
-                        <a:lnSpc>
-                          <a:spcPct val="105000"/>
-                        </a:lnSpc>
-                      </a:pPr>
-                      <a:r>
-                        <a:rPr sz="1200" b="0">
-                          <a:solidFill>
-                            <a:srgbClr val="1B2A4A"/>
-                          </a:solidFill>
-                          <a:latin typeface="Noto Sans CJK SC"/>
-                        </a:rPr>
-                        <a:t>MRAS 实船试验 1–3%（van Amerongen 经典）</a:t>
-                      </a:r>
-                    </a:p>
-                  </a:txBody>
-                  <a:tcPr marL="54864" marR="54864" marT="27432" marB="27432" anchor="ctr">
-                    <a:solidFill>
-                      <a:srgbClr val="EEF3FA"/>
-                    </a:solidFill>
-                  </a:tcPr>
-                </a:tc>
-                <a:tc>
-                  <a:txBody>
-                    <a:bodyPr/>
-                    <a:lstStyle/>
-                    <a:p>
-                      <a:pPr>
-                        <a:lnSpc>
-                          <a:spcPct val="105000"/>
-                        </a:lnSpc>
-                      </a:pPr>
-                      <a:r>
-                        <a:rPr sz="1200" b="0">
-                          <a:solidFill>
-                            <a:srgbClr val="1B2A4A"/>
-                          </a:solidFill>
-                          <a:latin typeface="Noto Sans CJK SC"/>
-                        </a:rPr>
-                        <a:t>实施成本最低（软件级）；兼降舵机磨损</a:t>
-                      </a:r>
-                    </a:p>
-                  </a:txBody>
-                  <a:tcPr marL="54864" marR="54864" marT="27432" marB="27432" anchor="ctr">
-                    <a:solidFill>
-                      <a:srgbClr val="EEF3FA"/>
-                    </a:solidFill>
-                  </a:tcPr>
-                </a:tc>
-                <a:tc>
-                  <a:txBody>
-                    <a:bodyPr/>
-                    <a:lstStyle/>
-                    <a:p>
-                      <a:pPr>
-                        <a:lnSpc>
-                          <a:spcPct val="105000"/>
-                        </a:lnSpc>
-                      </a:pPr>
-                      <a:r>
-                        <a:rPr sz="1200" b="0">
-                          <a:solidFill>
-                            <a:srgbClr val="1B2A4A"/>
-                          </a:solidFill>
-                          <a:latin typeface="Noto Sans CJK SC"/>
-                        </a:rPr>
-                        <a:t>单项幅度最小；收益依赖海况</a:t>
-                      </a:r>
-                    </a:p>
-                  </a:txBody>
-                  <a:tcPr marL="54864" marR="54864" marT="27432" marB="27432" anchor="ctr">
-                    <a:solidFill>
-                      <a:srgbClr val="EEF3FA"/>
-                    </a:solidFill>
-                  </a:tcPr>
-                </a:tc>
-              </a:tr>
-              <a:tr h="1211580">
-                <a:tc>
-                  <a:txBody>
-                    <a:bodyPr/>
-                    <a:lstStyle/>
-                    <a:p>
-                      <a:pPr>
-                        <a:lnSpc>
-                          <a:spcPct val="105000"/>
-                        </a:lnSpc>
-                      </a:pPr>
-                      <a:r>
-                        <a:rPr sz="1200" b="0">
-                          <a:solidFill>
-                            <a:srgbClr val="1B2A4A"/>
-                          </a:solidFill>
-                          <a:latin typeface="Noto Sans CJK SC"/>
-                        </a:rPr>
-                        <a:t>双舵 Toe Angle</a:t>
-                      </a:r>
-                    </a:p>
-                    <a:p>
-                      <a:pPr>
-                        <a:lnSpc>
-                          <a:spcPct val="105000"/>
-                        </a:lnSpc>
-                      </a:pPr>
-                      <a:r>
-                        <a:rPr sz="1200" b="0">
-                          <a:solidFill>
-                            <a:srgbClr val="1B2A4A"/>
-                          </a:solidFill>
-                          <a:latin typeface="Noto Sans CJK SC"/>
-                        </a:rPr>
-                        <a:t>(舵系水动力优化)</a:t>
-                      </a:r>
-                    </a:p>
-                  </a:txBody>
-                  <a:tcPr marL="54864" marR="54864" marT="27432" marB="27432" anchor="ctr"/>
-                </a:tc>
-                <a:tc>
-                  <a:txBody>
-                    <a:bodyPr/>
-                    <a:lstStyle/>
-                    <a:p>
-                      <a:pPr>
-                        <a:lnSpc>
-                          <a:spcPct val="105000"/>
-                        </a:lnSpc>
-                      </a:pPr>
-                      <a:r>
-                        <a:rPr sz="1200" b="0">
-                          <a:solidFill>
-                            <a:srgbClr val="1B2A4A"/>
-                          </a:solidFill>
-                          <a:latin typeface="Noto Sans CJK SC"/>
-                        </a:rPr>
-                        <a:t>Anschütz 实测最大 4.7%、平均约 2%（宣称 ≤5%）</a:t>
-                      </a:r>
-                    </a:p>
-                    <a:p>
-                      <a:pPr>
-                        <a:lnSpc>
-                          <a:spcPct val="105000"/>
-                        </a:lnSpc>
-                      </a:pPr>
-                      <a:r>
-                        <a:rPr sz="1200" b="0">
-                          <a:solidFill>
-                            <a:srgbClr val="1B2A4A"/>
-                          </a:solidFill>
-                          <a:latin typeface="Noto Sans CJK SC"/>
-                        </a:rPr>
-                        <a:t>自适应模式平均减少舵动作 25%</a:t>
-                      </a:r>
-                    </a:p>
-                  </a:txBody>
-                  <a:tcPr marL="54864" marR="54864" marT="27432" marB="27432" anchor="ctr"/>
-                </a:tc>
-                <a:tc>
-                  <a:txBody>
-                    <a:bodyPr/>
-                    <a:lstStyle/>
-                    <a:p>
-                      <a:pPr>
-                        <a:lnSpc>
-                          <a:spcPct val="105000"/>
-                        </a:lnSpc>
-                      </a:pPr>
-                      <a:r>
-                        <a:rPr sz="1200" b="0">
-                          <a:solidFill>
-                            <a:srgbClr val="1B2A4A"/>
-                          </a:solidFill>
-                          <a:latin typeface="Noto Sans CJK SC"/>
-                        </a:rPr>
-                        <a:t>双舵船额外收益；已有商用产品</a:t>
-                      </a:r>
-                    </a:p>
-                  </a:txBody>
-                  <a:tcPr marL="54864" marR="54864" marT="27432" marB="27432" anchor="ctr"/>
-                </a:tc>
-                <a:tc>
-                  <a:txBody>
-                    <a:bodyPr/>
-                    <a:lstStyle/>
-                    <a:p>
-                      <a:pPr>
-                        <a:lnSpc>
-                          <a:spcPct val="105000"/>
-                        </a:lnSpc>
-                      </a:pPr>
-                      <a:r>
-                        <a:rPr sz="1200" b="0">
-                          <a:solidFill>
-                            <a:srgbClr val="1B2A4A"/>
-                          </a:solidFill>
-                          <a:latin typeface="Noto Sans CJK SC"/>
-                        </a:rPr>
-                        <a:t>仅适用双舵船；厂商数据待第三方复核</a:t>
-                      </a:r>
-                    </a:p>
-                  </a:txBody>
-                  <a:tcPr marL="54864" marR="54864" marT="27432" marB="27432" anchor="ctr"/>
-                </a:tc>
-              </a:tr>
-            </a:tbl>
-          </a:graphicData>
-        </a:graphic>
-      </p:graphicFrame>
-      <p:sp>
-        <p:nvSpPr>
-          <p:cNvPr id="5" name="TextBox 4"/>
+        </p:nvSpPr>
+        <p:spPr>
+          <a:xfrm>
+            <a:off x="475488" y="914400"/>
+            <a:ext cx="11247120" cy="457200"/>
+          </a:xfrm>
+          <a:prstGeom prst="rect">
+            <a:avLst/>
+          </a:prstGeom>
+          <a:noFill/>
+        </p:spPr>
+        <p:txBody>
+          <a:bodyPr wrap="square" anchor="t">
+            <a:spAutoFit/>
+          </a:bodyPr>
+          <a:lstStyle/>
+          <a:p>
+            <a:pPr algn="l">
+              <a:lnSpc>
+                <a:spcPct val="115000"/>
+              </a:lnSpc>
+              <a:spcAft>
+                <a:spcPts val="600"/>
+              </a:spcAft>
+            </a:pPr>
+            <a:r>
+              <a:rPr sz="1400" b="0">
+                <a:solidFill>
+                  <a:srgbClr val="666666"/>
+                </a:solidFill>
+                <a:latin typeface="Noto Sans CJK SC"/>
+              </a:rPr>
+              <a:t>厂商宣称值普遍高于实测，引用以船级社/试航数据为准</a:t>
+            </a:r>
+          </a:p>
+        </p:txBody>
+      </p:sp>
+      <p:pic>
+        <p:nvPicPr>
+          <p:cNvPr id="5" name="Picture 4" descr="fig5_deploy_cases.png"/>
+          <p:cNvPicPr>
+            <a:picLocks noChangeAspect="1"/>
+          </p:cNvPicPr>
+          <p:nvPr/>
+        </p:nvPicPr>
+        <p:blipFill>
+          <a:blip r:embed="rId2"/>
+          <a:stretch>
+            <a:fillRect/>
+          </a:stretch>
+        </p:blipFill>
+        <p:spPr>
+          <a:xfrm>
+            <a:off x="365760" y="2125066"/>
+            <a:ext cx="6949440" cy="3613708"/>
+          </a:xfrm>
+          <a:prstGeom prst="rect">
+            <a:avLst/>
+          </a:prstGeom>
+        </p:spPr>
+      </p:pic>
+      <p:sp>
+        <p:nvSpPr>
+          <p:cNvPr id="6" name="TextBox 5"/>
+          <p:cNvSpPr txBox="1"/>
+          <p:nvPr/>
+        </p:nvSpPr>
+        <p:spPr>
+          <a:xfrm>
+            <a:off x="7498079" y="1554480"/>
+            <a:ext cx="4480560" cy="5120640"/>
+          </a:xfrm>
+          <a:prstGeom prst="rect">
+            <a:avLst/>
+          </a:prstGeom>
+          <a:noFill/>
+        </p:spPr>
+        <p:txBody>
+          <a:bodyPr wrap="square" anchor="t">
+            <a:spAutoFit/>
+          </a:bodyPr>
+          <a:lstStyle/>
+          <a:p>
+            <a:pPr algn="l">
+              <a:lnSpc>
+                <a:spcPct val="115000"/>
+              </a:lnSpc>
+              <a:spcAft>
+                <a:spcPts val="800"/>
+              </a:spcAft>
+            </a:pPr>
+            <a:r>
+              <a:rPr sz="1400" b="1">
+                <a:solidFill>
+                  <a:srgbClr val="1F77B4"/>
+                </a:solidFill>
+                <a:latin typeface="Noto Sans CJK SC"/>
+              </a:rPr>
+              <a:t>▪ 规模化部署</a:t>
+            </a:r>
+          </a:p>
+          <a:p>
+            <a:pPr algn="l">
+              <a:lnSpc>
+                <a:spcPct val="115000"/>
+              </a:lnSpc>
+              <a:spcAft>
+                <a:spcPts val="400"/>
+              </a:spcAft>
+            </a:pPr>
+            <a:r>
+              <a:rPr sz="1250" b="0">
+                <a:solidFill>
+                  <a:srgbClr val="1B2A4A"/>
+                </a:solidFill>
+                <a:latin typeface="Noto Sans CJK SC"/>
+              </a:rPr>
+              <a:t>    – ABB OCTOPUS：1000+ 船，回收期仅几个月</a:t>
+            </a:r>
+          </a:p>
+          <a:p>
+            <a:pPr algn="l">
+              <a:lnSpc>
+                <a:spcPct val="115000"/>
+              </a:lnSpc>
+              <a:spcAft>
+                <a:spcPts val="400"/>
+              </a:spcAft>
+            </a:pPr>
+            <a:r>
+              <a:rPr sz="1250" b="0">
+                <a:solidFill>
+                  <a:srgbClr val="1B2A4A"/>
+                </a:solidFill>
+                <a:latin typeface="Noto Sans CJK SC"/>
+              </a:rPr>
+              <a:t>    – DeepSea：EPS 全船队 300 艘，油耗预报误差 0.8%</a:t>
+            </a:r>
+          </a:p>
+          <a:p>
+            <a:pPr algn="l">
+              <a:lnSpc>
+                <a:spcPct val="115000"/>
+              </a:lnSpc>
+              <a:spcAft>
+                <a:spcPts val="400"/>
+              </a:spcAft>
+            </a:pPr>
+            <a:r>
+              <a:rPr sz="1250" b="0">
+                <a:solidFill>
+                  <a:srgbClr val="1B2A4A"/>
+                </a:solidFill>
+                <a:latin typeface="Noto Sans CJK SC"/>
+              </a:rPr>
+              <a:t>    – Orca AI：Seaspan 267+ 船，单船年省约 $10 万</a:t>
+            </a:r>
+          </a:p>
+          <a:p>
+            <a:pPr algn="l">
+              <a:lnSpc>
+                <a:spcPct val="115000"/>
+              </a:lnSpc>
+              <a:spcAft>
+                <a:spcPts val="800"/>
+              </a:spcAft>
+            </a:pPr>
+            <a:r>
+              <a:rPr sz="1400" b="1">
+                <a:solidFill>
+                  <a:srgbClr val="2CA02C"/>
+                </a:solidFill>
+                <a:latin typeface="Noto Sans CJK SC"/>
+              </a:rPr>
+              <a:t>▪ 控制层现状</a:t>
+            </a:r>
+          </a:p>
+          <a:p>
+            <a:pPr algn="l">
+              <a:lnSpc>
+                <a:spcPct val="115000"/>
+              </a:lnSpc>
+              <a:spcAft>
+                <a:spcPts val="400"/>
+              </a:spcAft>
+            </a:pPr>
+            <a:r>
+              <a:rPr sz="1250" b="0">
+                <a:solidFill>
+                  <a:srgbClr val="1B2A4A"/>
+                </a:solidFill>
+                <a:latin typeface="Noto Sans CJK SC"/>
+              </a:rPr>
+              <a:t>    – 节能自动舵 = 自适应+海浪滤波（Anschütz ECO）</a:t>
+            </a:r>
+          </a:p>
+          <a:p>
+            <a:pPr algn="l">
+              <a:lnSpc>
+                <a:spcPct val="115000"/>
+              </a:lnSpc>
+              <a:spcAft>
+                <a:spcPts val="400"/>
+              </a:spcAft>
+            </a:pPr>
+            <a:r>
+              <a:rPr sz="1250" b="0">
+                <a:solidFill>
+                  <a:srgbClr val="1B2A4A"/>
+                </a:solidFill>
+                <a:latin typeface="Noto Sans CJK SC"/>
+              </a:rPr>
+              <a:t>    – 无公开的 MPC 实船自动舵部署案例</a:t>
+            </a:r>
+          </a:p>
+          <a:p>
+            <a:pPr algn="l">
+              <a:lnSpc>
+                <a:spcPct val="115000"/>
+              </a:lnSpc>
+              <a:spcAft>
+                <a:spcPts val="400"/>
+              </a:spcAft>
+            </a:pPr>
+            <a:r>
+              <a:rPr sz="1250" b="0">
+                <a:solidFill>
+                  <a:srgbClr val="1B2A4A"/>
+                </a:solidFill>
+                <a:latin typeface="Noto Sans CJK SC"/>
+              </a:rPr>
+              <a:t>    – 印证：门槛不在算力，在模型获取与整定</a:t>
+            </a:r>
+          </a:p>
+        </p:txBody>
+      </p:sp>
+      <p:sp>
+        <p:nvSpPr>
+          <p:cNvPr id="7" name="TextBox 6"/>
           <p:cNvSpPr txBox="1"/>
           <p:nvPr/>
         </p:nvSpPr>
@@ -6313,7 +6003,7 @@
                 </a:solidFill>
                 <a:latin typeface="Noto Sans CJK SC"/>
               </a:rPr>
-              <a:t>14 / 20</a:t>
+              <a:t>14 / 19</a:t>
             </a:r>
           </a:p>
         </p:txBody>
@@ -6416,7 +6106,7 @@
                 </a:solidFill>
                 <a:latin typeface="Noto Sans CJK SC"/>
               </a:rPr>
-              <a:t>工业部署案例（一）：第三方实测集中在 3–10%</a:t>
+              <a:t>工业部署案例（二）：实测细节与口径</a:t>
             </a:r>
           </a:p>
         </p:txBody>
@@ -6458,35 +6148,660 @@
                 </a:solidFill>
                 <a:latin typeface="Noto Sans CJK SC"/>
               </a:rPr>
-              <a:t>厂商宣称值普遍高于实测，引用以船级社/试航数据为准</a:t>
-            </a:r>
-          </a:p>
-        </p:txBody>
-      </p:sp>
-      <p:pic>
-        <p:nvPicPr>
-          <p:cNvPr id="5" name="Picture 4" descr="fig5_deploy_cases.png"/>
-          <p:cNvPicPr>
-            <a:picLocks noChangeAspect="1"/>
-          </p:cNvPicPr>
+              <a:t>注意：各案例节油路径不同，不可直接横向比较</a:t>
+            </a:r>
+          </a:p>
+        </p:txBody>
+      </p:sp>
+      <p:graphicFrame>
+        <p:nvGraphicFramePr>
+          <p:cNvPr id="5" name="Table 4"/>
+          <p:cNvGraphicFramePr>
+            <a:graphicFrameLocks noGrp="1"/>
+          </p:cNvGraphicFramePr>
           <p:nvPr/>
-        </p:nvPicPr>
-        <p:blipFill>
-          <a:blip r:embed="rId2"/>
-          <a:stretch>
-            <a:fillRect/>
-          </a:stretch>
-        </p:blipFill>
-        <p:spPr>
-          <a:xfrm>
-            <a:off x="365760" y="2125066"/>
-            <a:ext cx="6949440" cy="3613708"/>
-          </a:xfrm>
-          <a:prstGeom prst="rect">
-            <a:avLst/>
-          </a:prstGeom>
-        </p:spPr>
-      </p:pic>
+        </p:nvGraphicFramePr>
+        <p:xfrm>
+          <a:off x="457200" y="1463040"/>
+          <a:ext cx="11338558" cy="4206240"/>
+        </p:xfrm>
+        <a:graphic>
+          <a:graphicData uri="http://schemas.openxmlformats.org/drawingml/2006/table">
+            <a:tbl>
+              <a:tblPr firstRow="1" bandRow="1">
+                <a:tableStyleId>{5C22544A-7EE6-4342-B048-85BDC9FD1C3A}</a:tableStyleId>
+              </a:tblPr>
+              <a:tblGrid>
+                <a:gridCol w="2538483"/>
+                <a:gridCol w="6092360"/>
+                <a:gridCol w="2707715"/>
+              </a:tblGrid>
+              <a:tr h="701040">
+                <a:tc>
+                  <a:txBody>
+                    <a:bodyPr/>
+                    <a:lstStyle/>
+                    <a:p>
+                      <a:pPr>
+                        <a:lnSpc>
+                          <a:spcPct val="105000"/>
+                        </a:lnSpc>
+                      </a:pPr>
+                      <a:r>
+                        <a:rPr sz="1200" b="1">
+                          <a:solidFill>
+                            <a:srgbClr val="FFFFFF"/>
+                          </a:solidFill>
+                          <a:latin typeface="Noto Sans CJK SC"/>
+                        </a:rPr>
+                        <a:t>案例</a:t>
+                      </a:r>
+                    </a:p>
+                  </a:txBody>
+                  <a:tcPr marL="54864" marR="54864" marT="27432" marB="27432" anchor="ctr">
+                    <a:solidFill>
+                      <a:srgbClr val="1F77B4"/>
+                    </a:solidFill>
+                  </a:tcPr>
+                </a:tc>
+                <a:tc>
+                  <a:txBody>
+                    <a:bodyPr/>
+                    <a:lstStyle/>
+                    <a:p>
+                      <a:pPr>
+                        <a:lnSpc>
+                          <a:spcPct val="105000"/>
+                        </a:lnSpc>
+                      </a:pPr>
+                      <a:r>
+                        <a:rPr sz="1200" b="1">
+                          <a:solidFill>
+                            <a:srgbClr val="FFFFFF"/>
+                          </a:solidFill>
+                          <a:latin typeface="Noto Sans CJK SC"/>
+                        </a:rPr>
+                        <a:t>实测细节（已核对）</a:t>
+                      </a:r>
+                    </a:p>
+                  </a:txBody>
+                  <a:tcPr marL="54864" marR="54864" marT="27432" marB="27432" anchor="ctr">
+                    <a:solidFill>
+                      <a:srgbClr val="1F77B4"/>
+                    </a:solidFill>
+                  </a:tcPr>
+                </a:tc>
+                <a:tc>
+                  <a:txBody>
+                    <a:bodyPr/>
+                    <a:lstStyle/>
+                    <a:p>
+                      <a:pPr>
+                        <a:lnSpc>
+                          <a:spcPct val="105000"/>
+                        </a:lnSpc>
+                      </a:pPr>
+                      <a:r>
+                        <a:rPr sz="1200" b="1">
+                          <a:solidFill>
+                            <a:srgbClr val="FFFFFF"/>
+                          </a:solidFill>
+                          <a:latin typeface="Noto Sans CJK SC"/>
+                        </a:rPr>
+                        <a:t>节油路径</a:t>
+                      </a:r>
+                    </a:p>
+                  </a:txBody>
+                  <a:tcPr marL="54864" marR="54864" marT="27432" marB="27432" anchor="ctr">
+                    <a:solidFill>
+                      <a:srgbClr val="1F77B4"/>
+                    </a:solidFill>
+                  </a:tcPr>
+                </a:tc>
+              </a:tr>
+              <a:tr h="701040">
+                <a:tc>
+                  <a:txBody>
+                    <a:bodyPr/>
+                    <a:lstStyle/>
+                    <a:p>
+                      <a:pPr>
+                        <a:lnSpc>
+                          <a:spcPct val="105000"/>
+                        </a:lnSpc>
+                      </a:pPr>
+                      <a:r>
+                        <a:rPr sz="1150" b="0">
+                          <a:solidFill>
+                            <a:srgbClr val="1B2A4A"/>
+                          </a:solidFill>
+                          <a:latin typeface="Noto Sans CJK SC"/>
+                        </a:rPr>
+                        <a:t>Wärtsilä/Eniram</a:t>
+                      </a:r>
+                    </a:p>
+                    <a:p>
+                      <a:pPr>
+                        <a:lnSpc>
+                          <a:spcPct val="105000"/>
+                        </a:lnSpc>
+                      </a:pPr>
+                      <a:r>
+                        <a:rPr sz="1150" b="0">
+                          <a:solidFill>
+                            <a:srgbClr val="1B2A4A"/>
+                          </a:solidFill>
+                          <a:latin typeface="Noto Sans CJK SC"/>
+                        </a:rPr>
+                        <a:t>VLCC 案例</a:t>
+                      </a:r>
+                    </a:p>
+                  </a:txBody>
+                  <a:tcPr marL="54864" marR="54864" marT="27432" marB="27432" anchor="ctr"/>
+                </a:tc>
+                <a:tc>
+                  <a:txBody>
+                    <a:bodyPr/>
+                    <a:lstStyle/>
+                    <a:p>
+                      <a:pPr>
+                        <a:lnSpc>
+                          <a:spcPct val="105000"/>
+                        </a:lnSpc>
+                      </a:pPr>
+                      <a:r>
+                        <a:rPr sz="1150" b="0">
+                          <a:solidFill>
+                            <a:srgbClr val="1B2A4A"/>
+                          </a:solidFill>
+                          <a:latin typeface="Noto Sans CJK SC"/>
+                        </a:rPr>
+                        <a:t>320,000+ DWT、450 天数据：年燃油成本 −2.6%</a:t>
+                      </a:r>
+                    </a:p>
+                    <a:p>
+                      <a:pPr>
+                        <a:lnSpc>
+                          <a:spcPct val="105000"/>
+                        </a:lnSpc>
+                      </a:pPr>
+                      <a:r>
+                        <a:rPr sz="1150" b="0">
+                          <a:solidFill>
+                            <a:srgbClr val="1B2A4A"/>
+                          </a:solidFill>
+                          <a:latin typeface="Noto Sans CJK SC"/>
+                        </a:rPr>
+                        <a:t>（≈48.2 万美元 / 730 吨燃油）</a:t>
+                      </a:r>
+                    </a:p>
+                  </a:txBody>
+                  <a:tcPr marL="54864" marR="54864" marT="27432" marB="27432" anchor="ctr"/>
+                </a:tc>
+                <a:tc>
+                  <a:txBody>
+                    <a:bodyPr/>
+                    <a:lstStyle/>
+                    <a:p>
+                      <a:pPr>
+                        <a:lnSpc>
+                          <a:spcPct val="105000"/>
+                        </a:lnSpc>
+                      </a:pPr>
+                      <a:r>
+                        <a:rPr sz="1150" b="0">
+                          <a:solidFill>
+                            <a:srgbClr val="1B2A4A"/>
+                          </a:solidFill>
+                          <a:latin typeface="Noto Sans CJK SC"/>
+                        </a:rPr>
+                        <a:t>纵倾优化 + 污底评估</a:t>
+                      </a:r>
+                    </a:p>
+                  </a:txBody>
+                  <a:tcPr marL="54864" marR="54864" marT="27432" marB="27432" anchor="ctr"/>
+                </a:tc>
+              </a:tr>
+              <a:tr h="701040">
+                <a:tc>
+                  <a:txBody>
+                    <a:bodyPr/>
+                    <a:lstStyle/>
+                    <a:p>
+                      <a:pPr>
+                        <a:lnSpc>
+                          <a:spcPct val="105000"/>
+                        </a:lnSpc>
+                      </a:pPr>
+                      <a:r>
+                        <a:rPr sz="1150" b="0">
+                          <a:solidFill>
+                            <a:srgbClr val="1B2A4A"/>
+                          </a:solidFill>
+                          <a:latin typeface="Noto Sans CJK SC"/>
+                        </a:rPr>
+                        <a:t>Yara FuelOpt</a:t>
+                      </a:r>
+                    </a:p>
+                    <a:p>
+                      <a:pPr>
+                        <a:lnSpc>
+                          <a:spcPct val="105000"/>
+                        </a:lnSpc>
+                      </a:pPr>
+                      <a:r>
+                        <a:rPr sz="1150" b="0">
+                          <a:solidFill>
+                            <a:srgbClr val="1B2A4A"/>
+                          </a:solidFill>
+                          <a:latin typeface="Noto Sans CJK SC"/>
+                        </a:rPr>
+                        <a:t>（独立复核）</a:t>
+                      </a:r>
+                    </a:p>
+                  </a:txBody>
+                  <a:tcPr marL="54864" marR="54864" marT="27432" marB="27432" anchor="ctr">
+                    <a:solidFill>
+                      <a:srgbClr val="EEF3FA"/>
+                    </a:solidFill>
+                  </a:tcPr>
+                </a:tc>
+                <a:tc>
+                  <a:txBody>
+                    <a:bodyPr/>
+                    <a:lstStyle/>
+                    <a:p>
+                      <a:pPr>
+                        <a:lnSpc>
+                          <a:spcPct val="105000"/>
+                        </a:lnSpc>
+                      </a:pPr>
+                      <a:r>
+                        <a:rPr sz="1150" b="0">
+                          <a:solidFill>
+                            <a:srgbClr val="1B2A4A"/>
+                          </a:solidFill>
+                          <a:latin typeface="Noto Sans CJK SC"/>
+                        </a:rPr>
+                        <a:t>NAPA 独立分析确认 10–18%：</a:t>
+                      </a:r>
+                    </a:p>
+                    <a:p>
+                      <a:pPr>
+                        <a:lnSpc>
+                          <a:spcPct val="105000"/>
+                        </a:lnSpc>
+                      </a:pPr>
+                      <a:r>
+                        <a:rPr sz="1150" b="0">
+                          <a:solidFill>
+                            <a:srgbClr val="1B2A4A"/>
+                          </a:solidFill>
+                          <a:latin typeface="Noto Sans CJK SC"/>
+                        </a:rPr>
+                        <a:t>Sten Bothnia 12 个月 17.9%、Ekfjord 24 个月 10.3%</a:t>
+                      </a:r>
+                    </a:p>
+                  </a:txBody>
+                  <a:tcPr marL="54864" marR="54864" marT="27432" marB="27432" anchor="ctr">
+                    <a:solidFill>
+                      <a:srgbClr val="EEF3FA"/>
+                    </a:solidFill>
+                  </a:tcPr>
+                </a:tc>
+                <a:tc>
+                  <a:txBody>
+                    <a:bodyPr/>
+                    <a:lstStyle/>
+                    <a:p>
+                      <a:pPr>
+                        <a:lnSpc>
+                          <a:spcPct val="105000"/>
+                        </a:lnSpc>
+                      </a:pPr>
+                      <a:r>
+                        <a:rPr sz="1150" b="0">
+                          <a:solidFill>
+                            <a:srgbClr val="1B2A4A"/>
+                          </a:solidFill>
+                          <a:latin typeface="Noto Sans CJK SC"/>
+                        </a:rPr>
+                        <a:t>推进功率闭环优化</a:t>
+                      </a:r>
+                    </a:p>
+                  </a:txBody>
+                  <a:tcPr marL="54864" marR="54864" marT="27432" marB="27432" anchor="ctr">
+                    <a:solidFill>
+                      <a:srgbClr val="EEF3FA"/>
+                    </a:solidFill>
+                  </a:tcPr>
+                </a:tc>
+              </a:tr>
+              <a:tr h="701040">
+                <a:tc>
+                  <a:txBody>
+                    <a:bodyPr/>
+                    <a:lstStyle/>
+                    <a:p>
+                      <a:pPr>
+                        <a:lnSpc>
+                          <a:spcPct val="105000"/>
+                        </a:lnSpc>
+                      </a:pPr>
+                      <a:r>
+                        <a:rPr sz="1150" b="0">
+                          <a:solidFill>
+                            <a:srgbClr val="1B2A4A"/>
+                          </a:solidFill>
+                          <a:latin typeface="Noto Sans CJK SC"/>
+                        </a:rPr>
+                        <a:t>NAPA × Norsepower</a:t>
+                      </a:r>
+                    </a:p>
+                    <a:p>
+                      <a:pPr>
+                        <a:lnSpc>
+                          <a:spcPct val="105000"/>
+                        </a:lnSpc>
+                      </a:pPr>
+                      <a:r>
+                        <a:rPr sz="1150" b="0">
+                          <a:solidFill>
+                            <a:srgbClr val="1B2A4A"/>
+                          </a:solidFill>
+                          <a:latin typeface="Noto Sans CJK SC"/>
+                        </a:rPr>
+                        <a:t>× SHI-ME</a:t>
+                      </a:r>
+                    </a:p>
+                  </a:txBody>
+                  <a:tcPr marL="54864" marR="54864" marT="27432" marB="27432" anchor="ctr"/>
+                </a:tc>
+                <a:tc>
+                  <a:txBody>
+                    <a:bodyPr/>
+                    <a:lstStyle/>
+                    <a:p>
+                      <a:pPr>
+                        <a:lnSpc>
+                          <a:spcPct val="105000"/>
+                        </a:lnSpc>
+                      </a:pPr>
+                      <a:r>
+                        <a:rPr sz="1150" b="0">
+                          <a:solidFill>
+                            <a:srgbClr val="1B2A4A"/>
+                          </a:solidFill>
+                          <a:latin typeface="Noto Sans CJK SC"/>
+                        </a:rPr>
+                        <a:t>转筒帆+航程优化六条航线平均 CO2 −19%</a:t>
+                      </a:r>
+                    </a:p>
+                    <a:p>
+                      <a:pPr>
+                        <a:lnSpc>
+                          <a:spcPct val="105000"/>
+                        </a:lnSpc>
+                      </a:pPr>
+                      <a:r>
+                        <a:rPr sz="1150" b="0">
+                          <a:solidFill>
+                            <a:srgbClr val="1B2A4A"/>
+                          </a:solidFill>
+                          <a:latin typeface="Noto Sans CJK SC"/>
+                        </a:rPr>
+                        <a:t>（纽约–阿姆斯特丹线 28%，NAPA 贡献 10–12 个百分点）</a:t>
+                      </a:r>
+                    </a:p>
+                  </a:txBody>
+                  <a:tcPr marL="54864" marR="54864" marT="27432" marB="27432" anchor="ctr"/>
+                </a:tc>
+                <a:tc>
+                  <a:txBody>
+                    <a:bodyPr/>
+                    <a:lstStyle/>
+                    <a:p>
+                      <a:pPr>
+                        <a:lnSpc>
+                          <a:spcPct val="105000"/>
+                        </a:lnSpc>
+                      </a:pPr>
+                      <a:r>
+                        <a:rPr sz="1150" b="0">
+                          <a:solidFill>
+                            <a:srgbClr val="1B2A4A"/>
+                          </a:solidFill>
+                          <a:latin typeface="Noto Sans CJK SC"/>
+                        </a:rPr>
+                        <a:t>风助推 + 航程优化</a:t>
+                      </a:r>
+                    </a:p>
+                  </a:txBody>
+                  <a:tcPr marL="54864" marR="54864" marT="27432" marB="27432" anchor="ctr"/>
+                </a:tc>
+              </a:tr>
+              <a:tr h="701040">
+                <a:tc>
+                  <a:txBody>
+                    <a:bodyPr/>
+                    <a:lstStyle/>
+                    <a:p>
+                      <a:pPr>
+                        <a:lnSpc>
+                          <a:spcPct val="105000"/>
+                        </a:lnSpc>
+                      </a:pPr>
+                      <a:r>
+                        <a:rPr sz="1150" b="0">
+                          <a:solidFill>
+                            <a:srgbClr val="1B2A4A"/>
+                          </a:solidFill>
+                          <a:latin typeface="Noto Sans CJK SC"/>
+                        </a:rPr>
+                        <a:t>Orca AI</a:t>
+                      </a:r>
+                    </a:p>
+                    <a:p>
+                      <a:pPr>
+                        <a:lnSpc>
+                          <a:spcPct val="105000"/>
+                        </a:lnSpc>
+                      </a:pPr>
+                      <a:r>
+                        <a:rPr sz="1150" b="0">
+                          <a:solidFill>
+                            <a:srgbClr val="1B2A4A"/>
+                          </a:solidFill>
+                          <a:latin typeface="Noto Sans CJK SC"/>
+                        </a:rPr>
+                        <a:t>（Seaspan）</a:t>
+                      </a:r>
+                    </a:p>
+                  </a:txBody>
+                  <a:tcPr marL="54864" marR="54864" marT="27432" marB="27432" anchor="ctr">
+                    <a:solidFill>
+                      <a:srgbClr val="EEF3FA"/>
+                    </a:solidFill>
+                  </a:tcPr>
+                </a:tc>
+                <a:tc>
+                  <a:txBody>
+                    <a:bodyPr/>
+                    <a:lstStyle/>
+                    <a:p>
+                      <a:pPr>
+                        <a:lnSpc>
+                          <a:spcPct val="105000"/>
+                        </a:lnSpc>
+                      </a:pPr>
+                      <a:r>
+                        <a:rPr sz="1150" b="0">
+                          <a:solidFill>
+                            <a:srgbClr val="1B2A4A"/>
+                          </a:solidFill>
+                          <a:latin typeface="Noto Sans CJK SC"/>
+                        </a:rPr>
+                        <a:t>近距遭遇事件 −54%；2024 年合计减排约 19.5 万吨 CO2；</a:t>
+                      </a:r>
+                    </a:p>
+                    <a:p>
+                      <a:pPr>
+                        <a:lnSpc>
+                          <a:spcPct val="105000"/>
+                        </a:lnSpc>
+                      </a:pPr>
+                      <a:r>
+                        <a:rPr sz="1150" b="0">
+                          <a:solidFill>
+                            <a:srgbClr val="1B2A4A"/>
+                          </a:solidFill>
+                          <a:latin typeface="Noto Sans CJK SC"/>
+                        </a:rPr>
+                        <a:t>单船年省约 $10 万 / 减 500 t CO2</a:t>
+                      </a:r>
+                    </a:p>
+                  </a:txBody>
+                  <a:tcPr marL="54864" marR="54864" marT="27432" marB="27432" anchor="ctr">
+                    <a:solidFill>
+                      <a:srgbClr val="EEF3FA"/>
+                    </a:solidFill>
+                  </a:tcPr>
+                </a:tc>
+                <a:tc>
+                  <a:txBody>
+                    <a:bodyPr/>
+                    <a:lstStyle/>
+                    <a:p>
+                      <a:pPr>
+                        <a:lnSpc>
+                          <a:spcPct val="105000"/>
+                        </a:lnSpc>
+                      </a:pPr>
+                      <a:r>
+                        <a:rPr sz="1150" b="0">
+                          <a:solidFill>
+                            <a:srgbClr val="1B2A4A"/>
+                          </a:solidFill>
+                          <a:latin typeface="Noto Sans CJK SC"/>
+                        </a:rPr>
+                        <a:t>减少避碰机动与无谓变速</a:t>
+                      </a:r>
+                    </a:p>
+                  </a:txBody>
+                  <a:tcPr marL="54864" marR="54864" marT="27432" marB="27432" anchor="ctr">
+                    <a:solidFill>
+                      <a:srgbClr val="EEF3FA"/>
+                    </a:solidFill>
+                  </a:tcPr>
+                </a:tc>
+              </a:tr>
+              <a:tr h="701040">
+                <a:tc>
+                  <a:txBody>
+                    <a:bodyPr/>
+                    <a:lstStyle/>
+                    <a:p>
+                      <a:pPr>
+                        <a:lnSpc>
+                          <a:spcPct val="105000"/>
+                        </a:lnSpc>
+                      </a:pPr>
+                      <a:r>
+                        <a:rPr sz="1150" b="0">
+                          <a:solidFill>
+                            <a:srgbClr val="1B2A4A"/>
+                          </a:solidFill>
+                          <a:latin typeface="Noto Sans CJK SC"/>
+                        </a:rPr>
+                        <a:t>Kongsberg</a:t>
+                      </a:r>
+                    </a:p>
+                    <a:p>
+                      <a:pPr>
+                        <a:lnSpc>
+                          <a:spcPct val="105000"/>
+                        </a:lnSpc>
+                      </a:pPr>
+                      <a:r>
+                        <a:rPr sz="1150" b="0">
+                          <a:solidFill>
+                            <a:srgbClr val="1B2A4A"/>
+                          </a:solidFill>
+                          <a:latin typeface="Noto Sans CJK SC"/>
+                        </a:rPr>
+                        <a:t>EcoAdvisor</a:t>
+                      </a:r>
+                    </a:p>
+                  </a:txBody>
+                  <a:tcPr marL="54864" marR="54864" marT="27432" marB="27432" anchor="ctr"/>
+                </a:tc>
+                <a:tc>
+                  <a:txBody>
+                    <a:bodyPr/>
+                    <a:lstStyle/>
+                    <a:p>
+                      <a:pPr>
+                        <a:lnSpc>
+                          <a:spcPct val="105000"/>
+                        </a:lnSpc>
+                      </a:pPr>
+                      <a:r>
+                        <a:rPr sz="1150" b="0">
+                          <a:solidFill>
+                            <a:srgbClr val="1B2A4A"/>
+                          </a:solidFill>
+                          <a:latin typeface="Noto Sans CJK SC"/>
+                        </a:rPr>
+                        <a:t>DP 工况主机/推进器停机建议工具（DOF 试点）；</a:t>
+                      </a:r>
+                    </a:p>
+                    <a:p>
+                      <a:pPr>
+                        <a:lnSpc>
+                          <a:spcPct val="105000"/>
+                        </a:lnSpc>
+                      </a:pPr>
+                      <a:r>
+                        <a:rPr sz="1150" b="0">
+                          <a:solidFill>
+                            <a:srgbClr val="1B2A4A"/>
+                          </a:solidFill>
+                          <a:latin typeface="Noto Sans CJK SC"/>
+                        </a:rPr>
+                        <a:t>官方未公布定量节油数据（流传的 8–10% 无法证实，已弃用）</a:t>
+                      </a:r>
+                    </a:p>
+                  </a:txBody>
+                  <a:tcPr marL="54864" marR="54864" marT="27432" marB="27432" anchor="ctr"/>
+                </a:tc>
+                <a:tc>
+                  <a:txBody>
+                    <a:bodyPr/>
+                    <a:lstStyle/>
+                    <a:p>
+                      <a:pPr>
+                        <a:lnSpc>
+                          <a:spcPct val="105000"/>
+                        </a:lnSpc>
+                      </a:pPr>
+                      <a:r>
+                        <a:rPr sz="1150" b="0">
+                          <a:solidFill>
+                            <a:srgbClr val="1B2A4A"/>
+                          </a:solidFill>
+                          <a:latin typeface="Noto Sans CJK SC"/>
+                        </a:rPr>
+                        <a:t>动力定位能耗优化</a:t>
+                      </a:r>
+                    </a:p>
+                  </a:txBody>
+                  <a:tcPr marL="54864" marR="54864" marT="27432" marB="27432" anchor="ctr"/>
+                </a:tc>
+              </a:tr>
+            </a:tbl>
+          </a:graphicData>
+        </a:graphic>
+      </p:graphicFrame>
       <p:sp>
         <p:nvSpPr>
           <p:cNvPr id="6" name="TextBox 5"/>
@@ -6495,8 +6810,8 @@
         </p:nvSpPr>
         <p:spPr>
           <a:xfrm>
-            <a:off x="7498079" y="1554480"/>
-            <a:ext cx="4480560" cy="5120640"/>
+            <a:off x="457200" y="5897880"/>
+            <a:ext cx="11338560" cy="731520"/>
           </a:xfrm>
           <a:prstGeom prst="rect">
             <a:avLst/>
@@ -6514,150 +6829,17 @@
                 <a:spcPct val="115000"/>
               </a:lnSpc>
               <a:spcAft>
-                <a:spcPts val="800"/>
-              </a:spcAft>
-            </a:pPr>
-            <a:r>
-              <a:rPr sz="1400" b="1">
-                <a:solidFill>
-                  <a:srgbClr val="1F77B4"/>
-                </a:solidFill>
-                <a:latin typeface="Noto Sans CJK SC"/>
-              </a:rPr>
-              <a:t>▪ 规模化部署</a:t>
-            </a:r>
-          </a:p>
-          <a:p>
-            <a:pPr algn="l">
-              <a:lnSpc>
-                <a:spcPct val="115000"/>
-              </a:lnSpc>
-              <a:spcAft>
-                <a:spcPts val="400"/>
-              </a:spcAft>
-            </a:pPr>
-            <a:r>
-              <a:rPr sz="1250" b="0">
-                <a:solidFill>
-                  <a:srgbClr val="1B2A4A"/>
-                </a:solidFill>
-                <a:latin typeface="Noto Sans CJK SC"/>
-              </a:rPr>
-              <a:t>    – ABB OCTOPUS：1000+ 船，回收期仅几个月</a:t>
-            </a:r>
-          </a:p>
-          <a:p>
-            <a:pPr algn="l">
-              <a:lnSpc>
-                <a:spcPct val="115000"/>
-              </a:lnSpc>
-              <a:spcAft>
-                <a:spcPts val="400"/>
-              </a:spcAft>
-            </a:pPr>
-            <a:r>
-              <a:rPr sz="1250" b="0">
-                <a:solidFill>
-                  <a:srgbClr val="1B2A4A"/>
-                </a:solidFill>
-                <a:latin typeface="Noto Sans CJK SC"/>
-              </a:rPr>
-              <a:t>    – DeepSea：EPS 全船队 300 艘，油耗预报误差 0.8%</a:t>
-            </a:r>
-          </a:p>
-          <a:p>
-            <a:pPr algn="l">
-              <a:lnSpc>
-                <a:spcPct val="115000"/>
-              </a:lnSpc>
-              <a:spcAft>
-                <a:spcPts val="400"/>
-              </a:spcAft>
-            </a:pPr>
-            <a:r>
-              <a:rPr sz="1250" b="0">
-                <a:solidFill>
-                  <a:srgbClr val="1B2A4A"/>
-                </a:solidFill>
-                <a:latin typeface="Noto Sans CJK SC"/>
-              </a:rPr>
-              <a:t>    – Orca AI：Seaspan 267+ 船，单船年省约 $10 万</a:t>
-            </a:r>
-          </a:p>
-          <a:p>
-            <a:pPr algn="l">
-              <a:lnSpc>
-                <a:spcPct val="115000"/>
-              </a:lnSpc>
-              <a:spcAft>
-                <a:spcPts val="800"/>
-              </a:spcAft>
-            </a:pPr>
-            <a:r>
-              <a:rPr sz="1400" b="1">
-                <a:solidFill>
-                  <a:srgbClr val="2CA02C"/>
-                </a:solidFill>
-                <a:latin typeface="Noto Sans CJK SC"/>
-              </a:rPr>
-              <a:t>▪ 控制层现状</a:t>
-            </a:r>
-          </a:p>
-          <a:p>
-            <a:pPr algn="l">
-              <a:lnSpc>
-                <a:spcPct val="115000"/>
-              </a:lnSpc>
-              <a:spcAft>
-                <a:spcPts val="400"/>
-              </a:spcAft>
-            </a:pPr>
-            <a:r>
-              <a:rPr sz="1250" b="0">
-                <a:solidFill>
-                  <a:srgbClr val="1B2A4A"/>
-                </a:solidFill>
-                <a:latin typeface="Noto Sans CJK SC"/>
-              </a:rPr>
-              <a:t>    – 节能自动舵 = 自适应+海浪滤波（Anschütz ECO）</a:t>
-            </a:r>
-          </a:p>
-          <a:p>
-            <a:pPr algn="l">
-              <a:lnSpc>
-                <a:spcPct val="115000"/>
-              </a:lnSpc>
-              <a:spcAft>
-                <a:spcPts val="400"/>
-              </a:spcAft>
-            </a:pPr>
-            <a:r>
-              <a:rPr sz="1250" b="0">
-                <a:solidFill>
-                  <a:srgbClr val="1B2A4A"/>
-                </a:solidFill>
-                <a:latin typeface="Noto Sans CJK SC"/>
-              </a:rPr>
-              <a:t>    – 无公开的 MPC 实船自动舵部署案例</a:t>
-            </a:r>
-          </a:p>
-          <a:p>
-            <a:pPr algn="l">
-              <a:lnSpc>
-                <a:spcPct val="115000"/>
-              </a:lnSpc>
-              <a:spcAft>
-                <a:spcPts val="400"/>
-              </a:spcAft>
-            </a:pPr>
-            <a:r>
-              <a:rPr sz="1250" b="0">
-                <a:solidFill>
-                  <a:srgbClr val="1B2A4A"/>
-                </a:solidFill>
-                <a:latin typeface="Noto Sans CJK SC"/>
-              </a:rPr>
-              <a:t>    – 印证：门槛不在算力，在模型获取与整定</a:t>
+                <a:spcPts val="600"/>
+              </a:spcAft>
+            </a:pPr>
+            <a:r>
+              <a:rPr sz="1300" b="0">
+                <a:solidFill>
+                  <a:srgbClr val="666666"/>
+                </a:solidFill>
+                <a:latin typeface="Noto Sans CJK SC"/>
+              </a:rPr>
+              <a:t>Anschütz 补充：自适应 ECO 模式平均减少舵动作约 25%（多年运营数据分析），案例折算节油约 4%。</a:t>
             </a:r>
           </a:p>
         </p:txBody>
@@ -6699,7 +6881,7 @@
                 </a:solidFill>
                 <a:latin typeface="Noto Sans CJK SC"/>
               </a:rPr>
-              <a:t>15 / 20</a:t>
+              <a:t>15 / 19</a:t>
             </a:r>
           </a:p>
         </p:txBody>
@@ -6802,7 +6984,7 @@
                 </a:solidFill>
                 <a:latin typeface="Noto Sans CJK SC"/>
               </a:rPr>
-              <a:t>工业部署案例（二）：实测细节与口径</a:t>
+              <a:t>技术趋势判断</a:t>
             </a:r>
           </a:p>
         </p:txBody>
@@ -6844,670 +7026,21 @@
                 </a:solidFill>
                 <a:latin typeface="Noto Sans CJK SC"/>
               </a:rPr>
-              <a:t>注意：各案例节油路径不同，不可直接横向比较</a:t>
-            </a:r>
-          </a:p>
-        </p:txBody>
-      </p:sp>
-      <p:graphicFrame>
-        <p:nvGraphicFramePr>
-          <p:cNvPr id="5" name="Table 4"/>
-          <p:cNvGraphicFramePr>
-            <a:graphicFrameLocks noGrp="1"/>
-          </p:cNvGraphicFramePr>
-          <p:nvPr/>
-        </p:nvGraphicFramePr>
-        <p:xfrm>
-          <a:off x="457200" y="1463040"/>
-          <a:ext cx="11338558" cy="4206240"/>
-        </p:xfrm>
-        <a:graphic>
-          <a:graphicData uri="http://schemas.openxmlformats.org/drawingml/2006/table">
-            <a:tbl>
-              <a:tblPr firstRow="1" bandRow="1">
-                <a:tableStyleId>{5C22544A-7EE6-4342-B048-85BDC9FD1C3A}</a:tableStyleId>
-              </a:tblPr>
-              <a:tblGrid>
-                <a:gridCol w="2538483"/>
-                <a:gridCol w="6092360"/>
-                <a:gridCol w="2707715"/>
-              </a:tblGrid>
-              <a:tr h="701040">
-                <a:tc>
-                  <a:txBody>
-                    <a:bodyPr/>
-                    <a:lstStyle/>
-                    <a:p>
-                      <a:pPr>
-                        <a:lnSpc>
-                          <a:spcPct val="105000"/>
-                        </a:lnSpc>
-                      </a:pPr>
-                      <a:r>
-                        <a:rPr sz="1200" b="1">
-                          <a:solidFill>
-                            <a:srgbClr val="FFFFFF"/>
-                          </a:solidFill>
-                          <a:latin typeface="Noto Sans CJK SC"/>
-                        </a:rPr>
-                        <a:t>案例</a:t>
-                      </a:r>
-                    </a:p>
-                  </a:txBody>
-                  <a:tcPr marL="54864" marR="54864" marT="27432" marB="27432" anchor="ctr">
-                    <a:solidFill>
-                      <a:srgbClr val="1F77B4"/>
-                    </a:solidFill>
-                  </a:tcPr>
-                </a:tc>
-                <a:tc>
-                  <a:txBody>
-                    <a:bodyPr/>
-                    <a:lstStyle/>
-                    <a:p>
-                      <a:pPr>
-                        <a:lnSpc>
-                          <a:spcPct val="105000"/>
-                        </a:lnSpc>
-                      </a:pPr>
-                      <a:r>
-                        <a:rPr sz="1200" b="1">
-                          <a:solidFill>
-                            <a:srgbClr val="FFFFFF"/>
-                          </a:solidFill>
-                          <a:latin typeface="Noto Sans CJK SC"/>
-                        </a:rPr>
-                        <a:t>实测细节（已核对）</a:t>
-                      </a:r>
-                    </a:p>
-                  </a:txBody>
-                  <a:tcPr marL="54864" marR="54864" marT="27432" marB="27432" anchor="ctr">
-                    <a:solidFill>
-                      <a:srgbClr val="1F77B4"/>
-                    </a:solidFill>
-                  </a:tcPr>
-                </a:tc>
-                <a:tc>
-                  <a:txBody>
-                    <a:bodyPr/>
-                    <a:lstStyle/>
-                    <a:p>
-                      <a:pPr>
-                        <a:lnSpc>
-                          <a:spcPct val="105000"/>
-                        </a:lnSpc>
-                      </a:pPr>
-                      <a:r>
-                        <a:rPr sz="1200" b="1">
-                          <a:solidFill>
-                            <a:srgbClr val="FFFFFF"/>
-                          </a:solidFill>
-                          <a:latin typeface="Noto Sans CJK SC"/>
-                        </a:rPr>
-                        <a:t>节油路径</a:t>
-                      </a:r>
-                    </a:p>
-                  </a:txBody>
-                  <a:tcPr marL="54864" marR="54864" marT="27432" marB="27432" anchor="ctr">
-                    <a:solidFill>
-                      <a:srgbClr val="1F77B4"/>
-                    </a:solidFill>
-                  </a:tcPr>
-                </a:tc>
-              </a:tr>
-              <a:tr h="701040">
-                <a:tc>
-                  <a:txBody>
-                    <a:bodyPr/>
-                    <a:lstStyle/>
-                    <a:p>
-                      <a:pPr>
-                        <a:lnSpc>
-                          <a:spcPct val="105000"/>
-                        </a:lnSpc>
-                      </a:pPr>
-                      <a:r>
-                        <a:rPr sz="1150" b="0">
-                          <a:solidFill>
-                            <a:srgbClr val="1B2A4A"/>
-                          </a:solidFill>
-                          <a:latin typeface="Noto Sans CJK SC"/>
-                        </a:rPr>
-                        <a:t>Wärtsilä/Eniram</a:t>
-                      </a:r>
-                    </a:p>
-                    <a:p>
-                      <a:pPr>
-                        <a:lnSpc>
-                          <a:spcPct val="105000"/>
-                        </a:lnSpc>
-                      </a:pPr>
-                      <a:r>
-                        <a:rPr sz="1150" b="0">
-                          <a:solidFill>
-                            <a:srgbClr val="1B2A4A"/>
-                          </a:solidFill>
-                          <a:latin typeface="Noto Sans CJK SC"/>
-                        </a:rPr>
-                        <a:t>VLCC 案例</a:t>
-                      </a:r>
-                    </a:p>
-                  </a:txBody>
-                  <a:tcPr marL="54864" marR="54864" marT="27432" marB="27432" anchor="ctr"/>
-                </a:tc>
-                <a:tc>
-                  <a:txBody>
-                    <a:bodyPr/>
-                    <a:lstStyle/>
-                    <a:p>
-                      <a:pPr>
-                        <a:lnSpc>
-                          <a:spcPct val="105000"/>
-                        </a:lnSpc>
-                      </a:pPr>
-                      <a:r>
-                        <a:rPr sz="1150" b="0">
-                          <a:solidFill>
-                            <a:srgbClr val="1B2A4A"/>
-                          </a:solidFill>
-                          <a:latin typeface="Noto Sans CJK SC"/>
-                        </a:rPr>
-                        <a:t>320,000+ DWT、450 天数据：年燃油成本 −2.6%</a:t>
-                      </a:r>
-                    </a:p>
-                    <a:p>
-                      <a:pPr>
-                        <a:lnSpc>
-                          <a:spcPct val="105000"/>
-                        </a:lnSpc>
-                      </a:pPr>
-                      <a:r>
-                        <a:rPr sz="1150" b="0">
-                          <a:solidFill>
-                            <a:srgbClr val="1B2A4A"/>
-                          </a:solidFill>
-                          <a:latin typeface="Noto Sans CJK SC"/>
-                        </a:rPr>
-                        <a:t>（≈48.2 万美元 / 730 吨燃油）</a:t>
-                      </a:r>
-                    </a:p>
-                  </a:txBody>
-                  <a:tcPr marL="54864" marR="54864" marT="27432" marB="27432" anchor="ctr"/>
-                </a:tc>
-                <a:tc>
-                  <a:txBody>
-                    <a:bodyPr/>
-                    <a:lstStyle/>
-                    <a:p>
-                      <a:pPr>
-                        <a:lnSpc>
-                          <a:spcPct val="105000"/>
-                        </a:lnSpc>
-                      </a:pPr>
-                      <a:r>
-                        <a:rPr sz="1150" b="0">
-                          <a:solidFill>
-                            <a:srgbClr val="1B2A4A"/>
-                          </a:solidFill>
-                          <a:latin typeface="Noto Sans CJK SC"/>
-                        </a:rPr>
-                        <a:t>纵倾优化 + 污底评估</a:t>
-                      </a:r>
-                    </a:p>
-                  </a:txBody>
-                  <a:tcPr marL="54864" marR="54864" marT="27432" marB="27432" anchor="ctr"/>
-                </a:tc>
-              </a:tr>
-              <a:tr h="701040">
-                <a:tc>
-                  <a:txBody>
-                    <a:bodyPr/>
-                    <a:lstStyle/>
-                    <a:p>
-                      <a:pPr>
-                        <a:lnSpc>
-                          <a:spcPct val="105000"/>
-                        </a:lnSpc>
-                      </a:pPr>
-                      <a:r>
-                        <a:rPr sz="1150" b="0">
-                          <a:solidFill>
-                            <a:srgbClr val="1B2A4A"/>
-                          </a:solidFill>
-                          <a:latin typeface="Noto Sans CJK SC"/>
-                        </a:rPr>
-                        <a:t>Yara FuelOpt</a:t>
-                      </a:r>
-                    </a:p>
-                    <a:p>
-                      <a:pPr>
-                        <a:lnSpc>
-                          <a:spcPct val="105000"/>
-                        </a:lnSpc>
-                      </a:pPr>
-                      <a:r>
-                        <a:rPr sz="1150" b="0">
-                          <a:solidFill>
-                            <a:srgbClr val="1B2A4A"/>
-                          </a:solidFill>
-                          <a:latin typeface="Noto Sans CJK SC"/>
-                        </a:rPr>
-                        <a:t>（独立复核）</a:t>
-                      </a:r>
-                    </a:p>
-                  </a:txBody>
-                  <a:tcPr marL="54864" marR="54864" marT="27432" marB="27432" anchor="ctr">
-                    <a:solidFill>
-                      <a:srgbClr val="EEF3FA"/>
-                    </a:solidFill>
-                  </a:tcPr>
-                </a:tc>
-                <a:tc>
-                  <a:txBody>
-                    <a:bodyPr/>
-                    <a:lstStyle/>
-                    <a:p>
-                      <a:pPr>
-                        <a:lnSpc>
-                          <a:spcPct val="105000"/>
-                        </a:lnSpc>
-                      </a:pPr>
-                      <a:r>
-                        <a:rPr sz="1150" b="0">
-                          <a:solidFill>
-                            <a:srgbClr val="1B2A4A"/>
-                          </a:solidFill>
-                          <a:latin typeface="Noto Sans CJK SC"/>
-                        </a:rPr>
-                        <a:t>NAPA 独立分析确认 10–18%：</a:t>
-                      </a:r>
-                    </a:p>
-                    <a:p>
-                      <a:pPr>
-                        <a:lnSpc>
-                          <a:spcPct val="105000"/>
-                        </a:lnSpc>
-                      </a:pPr>
-                      <a:r>
-                        <a:rPr sz="1150" b="0">
-                          <a:solidFill>
-                            <a:srgbClr val="1B2A4A"/>
-                          </a:solidFill>
-                          <a:latin typeface="Noto Sans CJK SC"/>
-                        </a:rPr>
-                        <a:t>Sten Bothnia 12 个月 17.9%、Ekfjord 24 个月 10.3%</a:t>
-                      </a:r>
-                    </a:p>
-                  </a:txBody>
-                  <a:tcPr marL="54864" marR="54864" marT="27432" marB="27432" anchor="ctr">
-                    <a:solidFill>
-                      <a:srgbClr val="EEF3FA"/>
-                    </a:solidFill>
-                  </a:tcPr>
-                </a:tc>
-                <a:tc>
-                  <a:txBody>
-                    <a:bodyPr/>
-                    <a:lstStyle/>
-                    <a:p>
-                      <a:pPr>
-                        <a:lnSpc>
-                          <a:spcPct val="105000"/>
-                        </a:lnSpc>
-                      </a:pPr>
-                      <a:r>
-                        <a:rPr sz="1150" b="0">
-                          <a:solidFill>
-                            <a:srgbClr val="1B2A4A"/>
-                          </a:solidFill>
-                          <a:latin typeface="Noto Sans CJK SC"/>
-                        </a:rPr>
-                        <a:t>推进功率闭环优化</a:t>
-                      </a:r>
-                    </a:p>
-                  </a:txBody>
-                  <a:tcPr marL="54864" marR="54864" marT="27432" marB="27432" anchor="ctr">
-                    <a:solidFill>
-                      <a:srgbClr val="EEF3FA"/>
-                    </a:solidFill>
-                  </a:tcPr>
-                </a:tc>
-              </a:tr>
-              <a:tr h="701040">
-                <a:tc>
-                  <a:txBody>
-                    <a:bodyPr/>
-                    <a:lstStyle/>
-                    <a:p>
-                      <a:pPr>
-                        <a:lnSpc>
-                          <a:spcPct val="105000"/>
-                        </a:lnSpc>
-                      </a:pPr>
-                      <a:r>
-                        <a:rPr sz="1150" b="0">
-                          <a:solidFill>
-                            <a:srgbClr val="1B2A4A"/>
-                          </a:solidFill>
-                          <a:latin typeface="Noto Sans CJK SC"/>
-                        </a:rPr>
-                        <a:t>NAPA × Norsepower</a:t>
-                      </a:r>
-                    </a:p>
-                    <a:p>
-                      <a:pPr>
-                        <a:lnSpc>
-                          <a:spcPct val="105000"/>
-                        </a:lnSpc>
-                      </a:pPr>
-                      <a:r>
-                        <a:rPr sz="1150" b="0">
-                          <a:solidFill>
-                            <a:srgbClr val="1B2A4A"/>
-                          </a:solidFill>
-                          <a:latin typeface="Noto Sans CJK SC"/>
-                        </a:rPr>
-                        <a:t>× SHI-ME</a:t>
-                      </a:r>
-                    </a:p>
-                  </a:txBody>
-                  <a:tcPr marL="54864" marR="54864" marT="27432" marB="27432" anchor="ctr"/>
-                </a:tc>
-                <a:tc>
-                  <a:txBody>
-                    <a:bodyPr/>
-                    <a:lstStyle/>
-                    <a:p>
-                      <a:pPr>
-                        <a:lnSpc>
-                          <a:spcPct val="105000"/>
-                        </a:lnSpc>
-                      </a:pPr>
-                      <a:r>
-                        <a:rPr sz="1150" b="0">
-                          <a:solidFill>
-                            <a:srgbClr val="1B2A4A"/>
-                          </a:solidFill>
-                          <a:latin typeface="Noto Sans CJK SC"/>
-                        </a:rPr>
-                        <a:t>转筒帆+航程优化六条航线平均 CO2 −19%</a:t>
-                      </a:r>
-                    </a:p>
-                    <a:p>
-                      <a:pPr>
-                        <a:lnSpc>
-                          <a:spcPct val="105000"/>
-                        </a:lnSpc>
-                      </a:pPr>
-                      <a:r>
-                        <a:rPr sz="1150" b="0">
-                          <a:solidFill>
-                            <a:srgbClr val="1B2A4A"/>
-                          </a:solidFill>
-                          <a:latin typeface="Noto Sans CJK SC"/>
-                        </a:rPr>
-                        <a:t>（纽约–阿姆斯特丹线 28%，NAPA 贡献 10–12 个百分点）</a:t>
-                      </a:r>
-                    </a:p>
-                  </a:txBody>
-                  <a:tcPr marL="54864" marR="54864" marT="27432" marB="27432" anchor="ctr"/>
-                </a:tc>
-                <a:tc>
-                  <a:txBody>
-                    <a:bodyPr/>
-                    <a:lstStyle/>
-                    <a:p>
-                      <a:pPr>
-                        <a:lnSpc>
-                          <a:spcPct val="105000"/>
-                        </a:lnSpc>
-                      </a:pPr>
-                      <a:r>
-                        <a:rPr sz="1150" b="0">
-                          <a:solidFill>
-                            <a:srgbClr val="1B2A4A"/>
-                          </a:solidFill>
-                          <a:latin typeface="Noto Sans CJK SC"/>
-                        </a:rPr>
-                        <a:t>风助推 + 航程优化</a:t>
-                      </a:r>
-                    </a:p>
-                  </a:txBody>
-                  <a:tcPr marL="54864" marR="54864" marT="27432" marB="27432" anchor="ctr"/>
-                </a:tc>
-              </a:tr>
-              <a:tr h="701040">
-                <a:tc>
-                  <a:txBody>
-                    <a:bodyPr/>
-                    <a:lstStyle/>
-                    <a:p>
-                      <a:pPr>
-                        <a:lnSpc>
-                          <a:spcPct val="105000"/>
-                        </a:lnSpc>
-                      </a:pPr>
-                      <a:r>
-                        <a:rPr sz="1150" b="0">
-                          <a:solidFill>
-                            <a:srgbClr val="1B2A4A"/>
-                          </a:solidFill>
-                          <a:latin typeface="Noto Sans CJK SC"/>
-                        </a:rPr>
-                        <a:t>Orca AI</a:t>
-                      </a:r>
-                    </a:p>
-                    <a:p>
-                      <a:pPr>
-                        <a:lnSpc>
-                          <a:spcPct val="105000"/>
-                        </a:lnSpc>
-                      </a:pPr>
-                      <a:r>
-                        <a:rPr sz="1150" b="0">
-                          <a:solidFill>
-                            <a:srgbClr val="1B2A4A"/>
-                          </a:solidFill>
-                          <a:latin typeface="Noto Sans CJK SC"/>
-                        </a:rPr>
-                        <a:t>（Seaspan）</a:t>
-                      </a:r>
-                    </a:p>
-                  </a:txBody>
-                  <a:tcPr marL="54864" marR="54864" marT="27432" marB="27432" anchor="ctr">
-                    <a:solidFill>
-                      <a:srgbClr val="EEF3FA"/>
-                    </a:solidFill>
-                  </a:tcPr>
-                </a:tc>
-                <a:tc>
-                  <a:txBody>
-                    <a:bodyPr/>
-                    <a:lstStyle/>
-                    <a:p>
-                      <a:pPr>
-                        <a:lnSpc>
-                          <a:spcPct val="105000"/>
-                        </a:lnSpc>
-                      </a:pPr>
-                      <a:r>
-                        <a:rPr sz="1150" b="0">
-                          <a:solidFill>
-                            <a:srgbClr val="1B2A4A"/>
-                          </a:solidFill>
-                          <a:latin typeface="Noto Sans CJK SC"/>
-                        </a:rPr>
-                        <a:t>近距遭遇事件 −54%；2024 年合计减排约 19.5 万吨 CO2；</a:t>
-                      </a:r>
-                    </a:p>
-                    <a:p>
-                      <a:pPr>
-                        <a:lnSpc>
-                          <a:spcPct val="105000"/>
-                        </a:lnSpc>
-                      </a:pPr>
-                      <a:r>
-                        <a:rPr sz="1150" b="0">
-                          <a:solidFill>
-                            <a:srgbClr val="1B2A4A"/>
-                          </a:solidFill>
-                          <a:latin typeface="Noto Sans CJK SC"/>
-                        </a:rPr>
-                        <a:t>单船年省约 $10 万 / 减 500 t CO2</a:t>
-                      </a:r>
-                    </a:p>
-                  </a:txBody>
-                  <a:tcPr marL="54864" marR="54864" marT="27432" marB="27432" anchor="ctr">
-                    <a:solidFill>
-                      <a:srgbClr val="EEF3FA"/>
-                    </a:solidFill>
-                  </a:tcPr>
-                </a:tc>
-                <a:tc>
-                  <a:txBody>
-                    <a:bodyPr/>
-                    <a:lstStyle/>
-                    <a:p>
-                      <a:pPr>
-                        <a:lnSpc>
-                          <a:spcPct val="105000"/>
-                        </a:lnSpc>
-                      </a:pPr>
-                      <a:r>
-                        <a:rPr sz="1150" b="0">
-                          <a:solidFill>
-                            <a:srgbClr val="1B2A4A"/>
-                          </a:solidFill>
-                          <a:latin typeface="Noto Sans CJK SC"/>
-                        </a:rPr>
-                        <a:t>减少避碰机动与无谓变速</a:t>
-                      </a:r>
-                    </a:p>
-                  </a:txBody>
-                  <a:tcPr marL="54864" marR="54864" marT="27432" marB="27432" anchor="ctr">
-                    <a:solidFill>
-                      <a:srgbClr val="EEF3FA"/>
-                    </a:solidFill>
-                  </a:tcPr>
-                </a:tc>
-              </a:tr>
-              <a:tr h="701040">
-                <a:tc>
-                  <a:txBody>
-                    <a:bodyPr/>
-                    <a:lstStyle/>
-                    <a:p>
-                      <a:pPr>
-                        <a:lnSpc>
-                          <a:spcPct val="105000"/>
-                        </a:lnSpc>
-                      </a:pPr>
-                      <a:r>
-                        <a:rPr sz="1150" b="0">
-                          <a:solidFill>
-                            <a:srgbClr val="1B2A4A"/>
-                          </a:solidFill>
-                          <a:latin typeface="Noto Sans CJK SC"/>
-                        </a:rPr>
-                        <a:t>Kongsberg</a:t>
-                      </a:r>
-                    </a:p>
-                    <a:p>
-                      <a:pPr>
-                        <a:lnSpc>
-                          <a:spcPct val="105000"/>
-                        </a:lnSpc>
-                      </a:pPr>
-                      <a:r>
-                        <a:rPr sz="1150" b="0">
-                          <a:solidFill>
-                            <a:srgbClr val="1B2A4A"/>
-                          </a:solidFill>
-                          <a:latin typeface="Noto Sans CJK SC"/>
-                        </a:rPr>
-                        <a:t>EcoAdvisor</a:t>
-                      </a:r>
-                    </a:p>
-                  </a:txBody>
-                  <a:tcPr marL="54864" marR="54864" marT="27432" marB="27432" anchor="ctr"/>
-                </a:tc>
-                <a:tc>
-                  <a:txBody>
-                    <a:bodyPr/>
-                    <a:lstStyle/>
-                    <a:p>
-                      <a:pPr>
-                        <a:lnSpc>
-                          <a:spcPct val="105000"/>
-                        </a:lnSpc>
-                      </a:pPr>
-                      <a:r>
-                        <a:rPr sz="1150" b="0">
-                          <a:solidFill>
-                            <a:srgbClr val="1B2A4A"/>
-                          </a:solidFill>
-                          <a:latin typeface="Noto Sans CJK SC"/>
-                        </a:rPr>
-                        <a:t>DP 工况主机/推进器停机建议工具（DOF 试点）；</a:t>
-                      </a:r>
-                    </a:p>
-                    <a:p>
-                      <a:pPr>
-                        <a:lnSpc>
-                          <a:spcPct val="105000"/>
-                        </a:lnSpc>
-                      </a:pPr>
-                      <a:r>
-                        <a:rPr sz="1150" b="0">
-                          <a:solidFill>
-                            <a:srgbClr val="1B2A4A"/>
-                          </a:solidFill>
-                          <a:latin typeface="Noto Sans CJK SC"/>
-                        </a:rPr>
-                        <a:t>官方未公布定量节油数据（流传的 8–10% 无法证实，已弃用）</a:t>
-                      </a:r>
-                    </a:p>
-                  </a:txBody>
-                  <a:tcPr marL="54864" marR="54864" marT="27432" marB="27432" anchor="ctr"/>
-                </a:tc>
-                <a:tc>
-                  <a:txBody>
-                    <a:bodyPr/>
-                    <a:lstStyle/>
-                    <a:p>
-                      <a:pPr>
-                        <a:lnSpc>
-                          <a:spcPct val="105000"/>
-                        </a:lnSpc>
-                      </a:pPr>
-                      <a:r>
-                        <a:rPr sz="1150" b="0">
-                          <a:solidFill>
-                            <a:srgbClr val="1B2A4A"/>
-                          </a:solidFill>
-                          <a:latin typeface="Noto Sans CJK SC"/>
-                        </a:rPr>
-                        <a:t>动力定位能耗优化</a:t>
-                      </a:r>
-                    </a:p>
-                  </a:txBody>
-                  <a:tcPr marL="54864" marR="54864" marT="27432" marB="27432" anchor="ctr"/>
-                </a:tc>
-              </a:tr>
-            </a:tbl>
-          </a:graphicData>
-        </a:graphic>
-      </p:graphicFrame>
-      <p:sp>
-        <p:nvSpPr>
-          <p:cNvPr id="6" name="TextBox 5"/>
+              <a:t>基于两轮来源核对的四条判断</a:t>
+            </a:r>
+          </a:p>
+        </p:txBody>
+      </p:sp>
+      <p:sp>
+        <p:nvSpPr>
+          <p:cNvPr id="5" name="TextBox 4"/>
           <p:cNvSpPr txBox="1"/>
           <p:nvPr/>
         </p:nvSpPr>
         <p:spPr>
           <a:xfrm>
-            <a:off x="457200" y="5897880"/>
-            <a:ext cx="11338560" cy="731520"/>
+            <a:off x="731520" y="1645920"/>
+            <a:ext cx="10789920" cy="4937760"/>
           </a:xfrm>
           <a:prstGeom prst="rect">
             <a:avLst/>
@@ -7525,24 +7058,157 @@
                 <a:spcPct val="115000"/>
               </a:lnSpc>
               <a:spcAft>
-                <a:spcPts val="600"/>
-              </a:spcAft>
-            </a:pPr>
-            <a:r>
-              <a:rPr sz="1300" b="0">
-                <a:solidFill>
-                  <a:srgbClr val="666666"/>
-                </a:solidFill>
-                <a:latin typeface="Noto Sans CJK SC"/>
-              </a:rPr>
-              <a:t>Anschütz 补充：自适应 ECO 模式平均减少舵动作约 25%（多年运营数据分析），案例折算节油约 4%。</a:t>
-            </a:r>
-          </a:p>
-        </p:txBody>
-      </p:sp>
-      <p:sp>
-        <p:nvSpPr>
-          <p:cNvPr id="7" name="TextBox 6"/>
+                <a:spcPts val="800"/>
+              </a:spcAft>
+            </a:pPr>
+            <a:r>
+              <a:rPr sz="1600" b="1">
+                <a:solidFill>
+                  <a:srgbClr val="1F77B4"/>
+                </a:solidFill>
+                <a:latin typeface="Noto Sans CJK SC"/>
+              </a:rPr>
+              <a:t>▪ ① 节能大头在决策层，控制层价值在「少损耗」</a:t>
+            </a:r>
+          </a:p>
+          <a:p>
+            <a:pPr algn="l">
+              <a:lnSpc>
+                <a:spcPct val="115000"/>
+              </a:lnSpc>
+              <a:spcAft>
+                <a:spcPts val="400"/>
+              </a:spcAft>
+            </a:pPr>
+            <a:r>
+              <a:rPr sz="1450" b="0">
+                <a:solidFill>
+                  <a:srgbClr val="1B2A4A"/>
+                </a:solidFill>
+                <a:latin typeface="Noto Sans CJK SC"/>
+              </a:rPr>
+              <a:t>    – 自动舵贡献 0.1–1.0%（IMO 口径），但 7×24 在线、几乎零边际成本，兼降舵机磨损</a:t>
+            </a:r>
+          </a:p>
+          <a:p>
+            <a:pPr algn="l">
+              <a:lnSpc>
+                <a:spcPct val="115000"/>
+              </a:lnSpc>
+              <a:spcAft>
+                <a:spcPts val="800"/>
+              </a:spcAft>
+            </a:pPr>
+            <a:r>
+              <a:rPr sz="1600" b="1">
+                <a:solidFill>
+                  <a:srgbClr val="1F77B4"/>
+                </a:solidFill>
+                <a:latin typeface="Noto Sans CJK SC"/>
+              </a:rPr>
+              <a:t>▪ ② MPC 可行域正在打开，瓶颈不是算力</a:t>
+            </a:r>
+          </a:p>
+          <a:p>
+            <a:pPr algn="l">
+              <a:lnSpc>
+                <a:spcPct val="115000"/>
+              </a:lnSpc>
+              <a:spcAft>
+                <a:spcPts val="400"/>
+              </a:spcAft>
+            </a:pPr>
+            <a:r>
+              <a:rPr sz="1450" b="0">
+                <a:solidFill>
+                  <a:srgbClr val="1B2A4A"/>
+                </a:solidFill>
+                <a:latin typeface="Noto Sans CJK SC"/>
+              </a:rPr>
+              <a:t>    – 嵌入式求解器毫秒级（7 ms @ 20 Hz）；真正门槛是模型辨识与整定自动化</a:t>
+            </a:r>
+          </a:p>
+          <a:p>
+            <a:pPr algn="l">
+              <a:lnSpc>
+                <a:spcPct val="115000"/>
+              </a:lnSpc>
+              <a:spcAft>
+                <a:spcPts val="800"/>
+              </a:spcAft>
+            </a:pPr>
+            <a:r>
+              <a:rPr sz="1600" b="1">
+                <a:solidFill>
+                  <a:srgbClr val="1F77B4"/>
+                </a:solidFill>
+                <a:latin typeface="Noto Sans CJK SC"/>
+              </a:rPr>
+              <a:t>▪ ③ 数据驱动自学习模型成为商用标配</a:t>
+            </a:r>
+          </a:p>
+          <a:p>
+            <a:pPr algn="l">
+              <a:lnSpc>
+                <a:spcPct val="115000"/>
+              </a:lnSpc>
+              <a:spcAft>
+                <a:spcPts val="400"/>
+              </a:spcAft>
+            </a:pPr>
+            <a:r>
+              <a:rPr sz="1450" b="0">
+                <a:solidFill>
+                  <a:srgbClr val="1B2A4A"/>
+                </a:solidFill>
+                <a:latin typeface="Noto Sans CJK SC"/>
+              </a:rPr>
+              <a:t>    – ClassNK-NAPA 油耗预测精度 99.6%；DeepSea 周油耗预报误差 0.8%；纯机理模型路线已少见</a:t>
+            </a:r>
+          </a:p>
+          <a:p>
+            <a:pPr algn="l">
+              <a:lnSpc>
+                <a:spcPct val="115000"/>
+              </a:lnSpc>
+              <a:spcAft>
+                <a:spcPts val="800"/>
+              </a:spcAft>
+            </a:pPr>
+            <a:r>
+              <a:rPr sz="1600" b="1">
+                <a:solidFill>
+                  <a:srgbClr val="1F77B4"/>
+                </a:solidFill>
+                <a:latin typeface="Noto Sans CJK SC"/>
+              </a:rPr>
+              <a:t>▪ ④ 分层协同：决策层优化与控制层执行正在打通</a:t>
+            </a:r>
+          </a:p>
+          <a:p>
+            <a:pPr algn="l">
+              <a:lnSpc>
+                <a:spcPct val="115000"/>
+              </a:lnSpc>
+              <a:spcAft>
+                <a:spcPts val="400"/>
+              </a:spcAft>
+            </a:pPr>
+            <a:r>
+              <a:rPr sz="1450" b="0">
+                <a:solidFill>
+                  <a:srgbClr val="1B2A4A"/>
+                </a:solidFill>
+                <a:latin typeface="Noto Sans CJK SC"/>
+              </a:rPr>
+              <a:t>    – MPC 代价函数可直接计入操舵能量项；自动舵可向上输出舵机磨损/能耗统计，形成闭环</a:t>
+            </a:r>
+          </a:p>
+        </p:txBody>
+      </p:sp>
+      <p:sp>
+        <p:nvSpPr>
+          <p:cNvPr id="6" name="TextBox 5"/>
           <p:cNvSpPr txBox="1"/>
           <p:nvPr/>
         </p:nvSpPr>
@@ -7577,7 +7243,7 @@
                 </a:solidFill>
                 <a:latin typeface="Noto Sans CJK SC"/>
               </a:rPr>
-              <a:t>16 / 20</a:t>
+              <a:t>16 / 19</a:t>
             </a:r>
           </a:p>
         </p:txBody>
@@ -7680,21 +7346,452 @@
                 </a:solidFill>
                 <a:latin typeface="Noto Sans CJK SC"/>
               </a:rPr>
-              <a:t>技术趋势判断</a:t>
-            </a:r>
-          </a:p>
-        </p:txBody>
-      </p:sp>
-      <p:sp>
-        <p:nvSpPr>
-          <p:cNvPr id="4" name="TextBox 3"/>
+              <a:t>对本项目（auto_rudder）的落地建议</a:t>
+            </a:r>
+          </a:p>
+        </p:txBody>
+      </p:sp>
+      <p:graphicFrame>
+        <p:nvGraphicFramePr>
+          <p:cNvPr id="4" name="Table 3"/>
+          <p:cNvGraphicFramePr>
+            <a:graphicFrameLocks noGrp="1"/>
+          </p:cNvGraphicFramePr>
+          <p:nvPr/>
+        </p:nvGraphicFramePr>
+        <p:xfrm>
+          <a:off x="457200" y="1463040"/>
+          <a:ext cx="11338559" cy="3840480"/>
+        </p:xfrm>
+        <a:graphic>
+          <a:graphicData uri="http://schemas.openxmlformats.org/drawingml/2006/table">
+            <a:tbl>
+              <a:tblPr firstRow="1" bandRow="1">
+                <a:tableStyleId>{5C22544A-7EE6-4342-B048-85BDC9FD1C3A}</a:tableStyleId>
+              </a:tblPr>
+              <a:tblGrid>
+                <a:gridCol w="1619794"/>
+                <a:gridCol w="2519680"/>
+                <a:gridCol w="7199085"/>
+              </a:tblGrid>
+              <a:tr h="960120">
+                <a:tc>
+                  <a:txBody>
+                    <a:bodyPr/>
+                    <a:lstStyle/>
+                    <a:p>
+                      <a:pPr>
+                        <a:lnSpc>
+                          <a:spcPct val="105000"/>
+                        </a:lnSpc>
+                      </a:pPr>
+                      <a:r>
+                        <a:rPr sz="1350" b="1">
+                          <a:solidFill>
+                            <a:srgbClr val="FFFFFF"/>
+                          </a:solidFill>
+                          <a:latin typeface="Noto Sans CJK SC"/>
+                        </a:rPr>
+                        <a:t>阶段</a:t>
+                      </a:r>
+                    </a:p>
+                  </a:txBody>
+                  <a:tcPr marL="54864" marR="54864" marT="27432" marB="27432" anchor="ctr">
+                    <a:solidFill>
+                      <a:srgbClr val="1F77B4"/>
+                    </a:solidFill>
+                  </a:tcPr>
+                </a:tc>
+                <a:tc>
+                  <a:txBody>
+                    <a:bodyPr/>
+                    <a:lstStyle/>
+                    <a:p>
+                      <a:pPr>
+                        <a:lnSpc>
+                          <a:spcPct val="105000"/>
+                        </a:lnSpc>
+                      </a:pPr>
+                      <a:r>
+                        <a:rPr sz="1350" b="1">
+                          <a:solidFill>
+                            <a:srgbClr val="FFFFFF"/>
+                          </a:solidFill>
+                          <a:latin typeface="Noto Sans CJK SC"/>
+                        </a:rPr>
+                        <a:t>目标</a:t>
+                      </a:r>
+                    </a:p>
+                  </a:txBody>
+                  <a:tcPr marL="54864" marR="54864" marT="27432" marB="27432" anchor="ctr">
+                    <a:solidFill>
+                      <a:srgbClr val="1F77B4"/>
+                    </a:solidFill>
+                  </a:tcPr>
+                </a:tc>
+                <a:tc>
+                  <a:txBody>
+                    <a:bodyPr/>
+                    <a:lstStyle/>
+                    <a:p>
+                      <a:pPr>
+                        <a:lnSpc>
+                          <a:spcPct val="105000"/>
+                        </a:lnSpc>
+                      </a:pPr>
+                      <a:r>
+                        <a:rPr sz="1350" b="1">
+                          <a:solidFill>
+                            <a:srgbClr val="FFFFFF"/>
+                          </a:solidFill>
+                          <a:latin typeface="Noto Sans CJK SC"/>
+                        </a:rPr>
+                        <a:t>关键动作</a:t>
+                      </a:r>
+                    </a:p>
+                  </a:txBody>
+                  <a:tcPr marL="54864" marR="54864" marT="27432" marB="27432" anchor="ctr">
+                    <a:solidFill>
+                      <a:srgbClr val="1F77B4"/>
+                    </a:solidFill>
+                  </a:tcPr>
+                </a:tc>
+              </a:tr>
+              <a:tr h="960120">
+                <a:tc>
+                  <a:txBody>
+                    <a:bodyPr/>
+                    <a:lstStyle/>
+                    <a:p>
+                      <a:pPr>
+                        <a:lnSpc>
+                          <a:spcPct val="105000"/>
+                        </a:lnSpc>
+                      </a:pPr>
+                      <a:r>
+                        <a:rPr sz="1300" b="0">
+                          <a:solidFill>
+                            <a:srgbClr val="1B2A4A"/>
+                          </a:solidFill>
+                          <a:latin typeface="Noto Sans CJK SC"/>
+                        </a:rPr>
+                        <a:t>短期</a:t>
+                      </a:r>
+                    </a:p>
+                    <a:p>
+                      <a:pPr>
+                        <a:lnSpc>
+                          <a:spcPct val="105000"/>
+                        </a:lnSpc>
+                      </a:pPr>
+                      <a:r>
+                        <a:rPr sz="1300" b="0">
+                          <a:solidFill>
+                            <a:srgbClr val="1B2A4A"/>
+                          </a:solidFill>
+                          <a:latin typeface="Noto Sans CJK SC"/>
+                        </a:rPr>
+                        <a:t>1–3 个月</a:t>
+                      </a:r>
+                    </a:p>
+                  </a:txBody>
+                  <a:tcPr marL="54864" marR="54864" marT="27432" marB="27432" anchor="ctr"/>
+                </a:tc>
+                <a:tc>
+                  <a:txBody>
+                    <a:bodyPr/>
+                    <a:lstStyle/>
+                    <a:p>
+                      <a:pPr>
+                        <a:lnSpc>
+                          <a:spcPct val="105000"/>
+                        </a:lnSpc>
+                      </a:pPr>
+                      <a:r>
+                        <a:rPr sz="1300" b="0">
+                          <a:solidFill>
+                            <a:srgbClr val="1B2A4A"/>
+                          </a:solidFill>
+                          <a:latin typeface="Noto Sans CJK SC"/>
+                        </a:rPr>
+                        <a:t>PD 基线交付</a:t>
+                      </a:r>
+                    </a:p>
+                  </a:txBody>
+                  <a:tcPr marL="54864" marR="54864" marT="27432" marB="27432" anchor="ctr"/>
+                </a:tc>
+                <a:tc>
+                  <a:txBody>
+                    <a:bodyPr/>
+                    <a:lstStyle/>
+                    <a:p>
+                      <a:pPr>
+                        <a:lnSpc>
+                          <a:spcPct val="105000"/>
+                        </a:lnSpc>
+                      </a:pPr>
+                      <a:r>
+                        <a:rPr sz="1300" b="0">
+                          <a:solidFill>
+                            <a:srgbClr val="1B2A4A"/>
+                          </a:solidFill>
+                          <a:latin typeface="Noto Sans CJK SC"/>
+                        </a:rPr>
+                        <a:t>Nomoto 极点配置整定（Kp=ωn²T/K，ζ≈1）；</a:t>
+                      </a:r>
+                    </a:p>
+                    <a:p>
+                      <a:pPr>
+                        <a:lnSpc>
+                          <a:spcPct val="105000"/>
+                        </a:lnSpc>
+                      </a:pPr>
+                      <a:r>
+                        <a:rPr sz="1300" b="0">
+                          <a:solidFill>
+                            <a:srgbClr val="1B2A4A"/>
+                          </a:solidFill>
+                          <a:latin typeface="Noto Sans CJK SC"/>
+                        </a:rPr>
+                        <a:t>海浪滤波+死区抑制无效操舵（对标 IMO 0.1–1.0% 收益）</a:t>
+                      </a:r>
+                    </a:p>
+                  </a:txBody>
+                  <a:tcPr marL="54864" marR="54864" marT="27432" marB="27432" anchor="ctr"/>
+                </a:tc>
+              </a:tr>
+              <a:tr h="960120">
+                <a:tc>
+                  <a:txBody>
+                    <a:bodyPr/>
+                    <a:lstStyle/>
+                    <a:p>
+                      <a:pPr>
+                        <a:lnSpc>
+                          <a:spcPct val="105000"/>
+                        </a:lnSpc>
+                      </a:pPr>
+                      <a:r>
+                        <a:rPr sz="1300" b="0">
+                          <a:solidFill>
+                            <a:srgbClr val="1B2A4A"/>
+                          </a:solidFill>
+                          <a:latin typeface="Noto Sans CJK SC"/>
+                        </a:rPr>
+                        <a:t>中期</a:t>
+                      </a:r>
+                    </a:p>
+                    <a:p>
+                      <a:pPr>
+                        <a:lnSpc>
+                          <a:spcPct val="105000"/>
+                        </a:lnSpc>
+                      </a:pPr>
+                      <a:r>
+                        <a:rPr sz="1300" b="0">
+                          <a:solidFill>
+                            <a:srgbClr val="1B2A4A"/>
+                          </a:solidFill>
+                          <a:latin typeface="Noto Sans CJK SC"/>
+                        </a:rPr>
+                        <a:t>3–6 个月</a:t>
+                      </a:r>
+                    </a:p>
+                  </a:txBody>
+                  <a:tcPr marL="54864" marR="54864" marT="27432" marB="27432" anchor="ctr">
+                    <a:solidFill>
+                      <a:srgbClr val="EEF3FA"/>
+                    </a:solidFill>
+                  </a:tcPr>
+                </a:tc>
+                <a:tc>
+                  <a:txBody>
+                    <a:bodyPr/>
+                    <a:lstStyle/>
+                    <a:p>
+                      <a:pPr>
+                        <a:lnSpc>
+                          <a:spcPct val="105000"/>
+                        </a:lnSpc>
+                      </a:pPr>
+                      <a:r>
+                        <a:rPr sz="1300" b="0">
+                          <a:solidFill>
+                            <a:srgbClr val="1B2A4A"/>
+                          </a:solidFill>
+                          <a:latin typeface="Noto Sans CJK SC"/>
+                        </a:rPr>
+                        <a:t>MPC 增强层开发</a:t>
+                      </a:r>
+                    </a:p>
+                  </a:txBody>
+                  <a:tcPr marL="54864" marR="54864" marT="27432" marB="27432" anchor="ctr">
+                    <a:solidFill>
+                      <a:srgbClr val="EEF3FA"/>
+                    </a:solidFill>
+                  </a:tcPr>
+                </a:tc>
+                <a:tc>
+                  <a:txBody>
+                    <a:bodyPr/>
+                    <a:lstStyle/>
+                    <a:p>
+                      <a:pPr>
+                        <a:lnSpc>
+                          <a:spcPct val="105000"/>
+                        </a:lnSpc>
+                      </a:pPr>
+                      <a:r>
+                        <a:rPr sz="1300" b="0">
+                          <a:solidFill>
+                            <a:srgbClr val="1B2A4A"/>
+                          </a:solidFill>
+                          <a:latin typeface="Noto Sans CJK SC"/>
+                        </a:rPr>
+                        <a:t>攻克模型在线辨识与权重整定工具化；</a:t>
+                      </a:r>
+                    </a:p>
+                    <a:p>
+                      <a:pPr>
+                        <a:lnSpc>
+                          <a:spcPct val="105000"/>
+                        </a:lnSpc>
+                      </a:pPr>
+                      <a:r>
+                        <a:rPr sz="1300" b="0">
+                          <a:solidFill>
+                            <a:srgbClr val="1B2A4A"/>
+                          </a:solidFill>
+                          <a:latin typeface="Noto Sans CJK SC"/>
+                        </a:rPr>
+                        <a:t>嵌入式求解器选型（acados/OSQP）；与 PD 基线 A/B 对比</a:t>
+                      </a:r>
+                    </a:p>
+                  </a:txBody>
+                  <a:tcPr marL="54864" marR="54864" marT="27432" marB="27432" anchor="ctr">
+                    <a:solidFill>
+                      <a:srgbClr val="EEF3FA"/>
+                    </a:solidFill>
+                  </a:tcPr>
+                </a:tc>
+              </a:tr>
+              <a:tr h="960120">
+                <a:tc>
+                  <a:txBody>
+                    <a:bodyPr/>
+                    <a:lstStyle/>
+                    <a:p>
+                      <a:pPr>
+                        <a:lnSpc>
+                          <a:spcPct val="105000"/>
+                        </a:lnSpc>
+                      </a:pPr>
+                      <a:r>
+                        <a:rPr sz="1300" b="0">
+                          <a:solidFill>
+                            <a:srgbClr val="1B2A4A"/>
+                          </a:solidFill>
+                          <a:latin typeface="Noto Sans CJK SC"/>
+                        </a:rPr>
+                        <a:t>长期</a:t>
+                      </a:r>
+                    </a:p>
+                    <a:p>
+                      <a:pPr>
+                        <a:lnSpc>
+                          <a:spcPct val="105000"/>
+                        </a:lnSpc>
+                      </a:pPr>
+                      <a:r>
+                        <a:rPr sz="1300" b="0">
+                          <a:solidFill>
+                            <a:srgbClr val="1B2A4A"/>
+                          </a:solidFill>
+                          <a:latin typeface="Noto Sans CJK SC"/>
+                        </a:rPr>
+                        <a:t>6–12 个月</a:t>
+                      </a:r>
+                    </a:p>
+                  </a:txBody>
+                  <a:tcPr marL="54864" marR="54864" marT="27432" marB="27432" anchor="ctr"/>
+                </a:tc>
+                <a:tc>
+                  <a:txBody>
+                    <a:bodyPr/>
+                    <a:lstStyle/>
+                    <a:p>
+                      <a:pPr>
+                        <a:lnSpc>
+                          <a:spcPct val="105000"/>
+                        </a:lnSpc>
+                      </a:pPr>
+                      <a:r>
+                        <a:rPr sz="1300" b="0">
+                          <a:solidFill>
+                            <a:srgbClr val="1B2A4A"/>
+                          </a:solidFill>
+                          <a:latin typeface="Noto Sans CJK SC"/>
+                        </a:rPr>
+                        <a:t>分层节能架构</a:t>
+                      </a:r>
+                    </a:p>
+                  </a:txBody>
+                  <a:tcPr marL="54864" marR="54864" marT="27432" marB="27432" anchor="ctr"/>
+                </a:tc>
+                <a:tc>
+                  <a:txBody>
+                    <a:bodyPr/>
+                    <a:lstStyle/>
+                    <a:p>
+                      <a:pPr>
+                        <a:lnSpc>
+                          <a:spcPct val="105000"/>
+                        </a:lnSpc>
+                      </a:pPr>
+                      <a:r>
+                        <a:rPr sz="1300" b="0">
+                          <a:solidFill>
+                            <a:srgbClr val="1B2A4A"/>
+                          </a:solidFill>
+                          <a:latin typeface="Noto Sans CJK SC"/>
+                        </a:rPr>
+                        <a:t>MPC 代价函数计入操舵能量，对接航速/纵倾优化指令；</a:t>
+                      </a:r>
+                    </a:p>
+                    <a:p>
+                      <a:pPr>
+                        <a:lnSpc>
+                          <a:spcPct val="105000"/>
+                        </a:lnSpc>
+                      </a:pPr>
+                      <a:r>
+                        <a:rPr sz="1300" b="0">
+                          <a:solidFill>
+                            <a:srgbClr val="1B2A4A"/>
+                          </a:solidFill>
+                          <a:latin typeface="Noto Sans CJK SC"/>
+                        </a:rPr>
+                        <a:t>输出舵机磨损/能耗统计；Lyapunov-based MPC 保稳定性</a:t>
+                      </a:r>
+                    </a:p>
+                  </a:txBody>
+                  <a:tcPr marL="54864" marR="54864" marT="27432" marB="27432" anchor="ctr"/>
+                </a:tc>
+              </a:tr>
+            </a:tbl>
+          </a:graphicData>
+        </a:graphic>
+      </p:graphicFrame>
+      <p:sp>
+        <p:nvSpPr>
+          <p:cNvPr id="5" name="TextBox 4"/>
           <p:cNvSpPr txBox="1"/>
           <p:nvPr/>
         </p:nvSpPr>
         <p:spPr>
           <a:xfrm>
-            <a:off x="475488" y="914400"/>
-            <a:ext cx="11247120" cy="457200"/>
+            <a:off x="457200" y="5577840"/>
+            <a:ext cx="11338560" cy="914400"/>
           </a:xfrm>
           <a:prstGeom prst="rect">
             <a:avLst/>
@@ -7716,188 +7813,32 @@
               </a:spcAft>
             </a:pPr>
             <a:r>
-              <a:rPr sz="1400" b="0">
-                <a:solidFill>
-                  <a:srgbClr val="666666"/>
-                </a:solidFill>
-                <a:latin typeface="Noto Sans CJK SC"/>
-              </a:rPr>
-              <a:t>基于两轮来源核对的四条判断</a:t>
-            </a:r>
-          </a:p>
-        </p:txBody>
-      </p:sp>
-      <p:sp>
-        <p:nvSpPr>
-          <p:cNvPr id="5" name="TextBox 4"/>
-          <p:cNvSpPr txBox="1"/>
-          <p:nvPr/>
-        </p:nvSpPr>
-        <p:spPr>
-          <a:xfrm>
-            <a:off x="731520" y="1645920"/>
-            <a:ext cx="10789920" cy="4937760"/>
-          </a:xfrm>
-          <a:prstGeom prst="rect">
-            <a:avLst/>
-          </a:prstGeom>
-          <a:noFill/>
-        </p:spPr>
-        <p:txBody>
-          <a:bodyPr wrap="square" anchor="t">
-            <a:spAutoFit/>
-          </a:bodyPr>
-          <a:lstStyle/>
+              <a:rPr sz="1500" b="0">
+                <a:solidFill>
+                  <a:srgbClr val="1B2A4A"/>
+                </a:solidFill>
+                <a:latin typeface="Noto Sans CJK SC"/>
+              </a:rPr>
+              <a:t>核心逻辑：节能大头在决策层（气象航线 3–10%、减速航行主机口径可达 50%），控制层贡献 0.1–1% 但几乎零成本；</a:t>
+            </a:r>
+          </a:p>
           <a:p>
             <a:pPr algn="l">
               <a:lnSpc>
                 <a:spcPct val="115000"/>
               </a:lnSpc>
               <a:spcAft>
-                <a:spcPts val="800"/>
-              </a:spcAft>
-            </a:pPr>
-            <a:r>
-              <a:rPr sz="1600" b="1">
-                <a:solidFill>
-                  <a:srgbClr val="1F77B4"/>
-                </a:solidFill>
-                <a:latin typeface="Noto Sans CJK SC"/>
-              </a:rPr>
-              <a:t>▪ ① 节能大头在决策层，控制层价值在「少损耗」</a:t>
-            </a:r>
-          </a:p>
-          <a:p>
-            <a:pPr algn="l">
-              <a:lnSpc>
-                <a:spcPct val="115000"/>
-              </a:lnSpc>
-              <a:spcAft>
-                <a:spcPts val="400"/>
-              </a:spcAft>
-            </a:pPr>
-            <a:r>
-              <a:rPr sz="1450" b="0">
+                <a:spcPts val="600"/>
+              </a:spcAft>
+            </a:pPr>
+            <a:r>
+              <a:rPr sz="1500" b="0">
                 <a:solidFill>
                   <a:srgbClr val="1B2A4A"/>
                 </a:solidFill>
                 <a:latin typeface="Noto Sans CJK SC"/>
               </a:rPr>
-              <a:t>    – 自动舵贡献 0.1–1.0%（IMO 口径），但 7×24 在线、几乎零边际成本，兼降舵机磨损</a:t>
-            </a:r>
-          </a:p>
-          <a:p>
-            <a:pPr algn="l">
-              <a:lnSpc>
-                <a:spcPct val="115000"/>
-              </a:lnSpc>
-              <a:spcAft>
-                <a:spcPts val="800"/>
-              </a:spcAft>
-            </a:pPr>
-            <a:r>
-              <a:rPr sz="1600" b="1">
-                <a:solidFill>
-                  <a:srgbClr val="1F77B4"/>
-                </a:solidFill>
-                <a:latin typeface="Noto Sans CJK SC"/>
-              </a:rPr>
-              <a:t>▪ ② MPC 可行域正在打开，瓶颈不是算力</a:t>
-            </a:r>
-          </a:p>
-          <a:p>
-            <a:pPr algn="l">
-              <a:lnSpc>
-                <a:spcPct val="115000"/>
-              </a:lnSpc>
-              <a:spcAft>
-                <a:spcPts val="400"/>
-              </a:spcAft>
-            </a:pPr>
-            <a:r>
-              <a:rPr sz="1450" b="0">
-                <a:solidFill>
-                  <a:srgbClr val="1B2A4A"/>
-                </a:solidFill>
-                <a:latin typeface="Noto Sans CJK SC"/>
-              </a:rPr>
-              <a:t>    – 嵌入式求解器毫秒级（7 ms @ 20 Hz）；真正门槛是模型辨识与整定自动化</a:t>
-            </a:r>
-          </a:p>
-          <a:p>
-            <a:pPr algn="l">
-              <a:lnSpc>
-                <a:spcPct val="115000"/>
-              </a:lnSpc>
-              <a:spcAft>
-                <a:spcPts val="800"/>
-              </a:spcAft>
-            </a:pPr>
-            <a:r>
-              <a:rPr sz="1600" b="1">
-                <a:solidFill>
-                  <a:srgbClr val="1F77B4"/>
-                </a:solidFill>
-                <a:latin typeface="Noto Sans CJK SC"/>
-              </a:rPr>
-              <a:t>▪ ③ 数据驱动自学习模型成为商用标配</a:t>
-            </a:r>
-          </a:p>
-          <a:p>
-            <a:pPr algn="l">
-              <a:lnSpc>
-                <a:spcPct val="115000"/>
-              </a:lnSpc>
-              <a:spcAft>
-                <a:spcPts val="400"/>
-              </a:spcAft>
-            </a:pPr>
-            <a:r>
-              <a:rPr sz="1450" b="0">
-                <a:solidFill>
-                  <a:srgbClr val="1B2A4A"/>
-                </a:solidFill>
-                <a:latin typeface="Noto Sans CJK SC"/>
-              </a:rPr>
-              <a:t>    – ClassNK-NAPA 油耗预测精度 99.6%；DeepSea 周油耗预报误差 0.8%；纯机理模型路线已少见</a:t>
-            </a:r>
-          </a:p>
-          <a:p>
-            <a:pPr algn="l">
-              <a:lnSpc>
-                <a:spcPct val="115000"/>
-              </a:lnSpc>
-              <a:spcAft>
-                <a:spcPts val="800"/>
-              </a:spcAft>
-            </a:pPr>
-            <a:r>
-              <a:rPr sz="1600" b="1">
-                <a:solidFill>
-                  <a:srgbClr val="1F77B4"/>
-                </a:solidFill>
-                <a:latin typeface="Noto Sans CJK SC"/>
-              </a:rPr>
-              <a:t>▪ ④ 法规持续加码，合规刚需取代节油回本逻辑</a:t>
-            </a:r>
-          </a:p>
-          <a:p>
-            <a:pPr algn="l">
-              <a:lnSpc>
-                <a:spcPct val="115000"/>
-              </a:lnSpc>
-              <a:spcAft>
-                <a:spcPts val="400"/>
-              </a:spcAft>
-            </a:pPr>
-            <a:r>
-              <a:rPr sz="1450" b="0">
-                <a:solidFill>
-                  <a:srgbClr val="1B2A4A"/>
-                </a:solidFill>
-                <a:latin typeface="Noto Sans CJK SC"/>
-              </a:rPr>
-              <a:t>    – CII 纠正计划机制 + 2026 年法规复审可能进一步收紧；EU ETS 碳成本显性化</a:t>
+              <a:t>先把 PD 整定与辨识流程工具化，再让 MPC 平滑接管性能增强。</a:t>
             </a:r>
           </a:p>
         </p:txBody>
@@ -7939,7 +7880,7 @@
                 </a:solidFill>
                 <a:latin typeface="Noto Sans CJK SC"/>
               </a:rPr>
-              <a:t>17 / 20</a:t>
+              <a:t>17 / 19</a:t>
             </a:r>
           </a:p>
         </p:txBody>
@@ -8042,452 +7983,21 @@
                 </a:solidFill>
                 <a:latin typeface="Noto Sans CJK SC"/>
               </a:rPr>
-              <a:t>对本项目（auto_rudder）的落地建议</a:t>
-            </a:r>
-          </a:p>
-        </p:txBody>
-      </p:sp>
-      <p:graphicFrame>
-        <p:nvGraphicFramePr>
-          <p:cNvPr id="4" name="Table 3"/>
-          <p:cNvGraphicFramePr>
-            <a:graphicFrameLocks noGrp="1"/>
-          </p:cNvGraphicFramePr>
-          <p:nvPr/>
-        </p:nvGraphicFramePr>
-        <p:xfrm>
-          <a:off x="457200" y="1463040"/>
-          <a:ext cx="11338559" cy="3840480"/>
-        </p:xfrm>
-        <a:graphic>
-          <a:graphicData uri="http://schemas.openxmlformats.org/drawingml/2006/table">
-            <a:tbl>
-              <a:tblPr firstRow="1" bandRow="1">
-                <a:tableStyleId>{5C22544A-7EE6-4342-B048-85BDC9FD1C3A}</a:tableStyleId>
-              </a:tblPr>
-              <a:tblGrid>
-                <a:gridCol w="1619794"/>
-                <a:gridCol w="2519680"/>
-                <a:gridCol w="7199085"/>
-              </a:tblGrid>
-              <a:tr h="960120">
-                <a:tc>
-                  <a:txBody>
-                    <a:bodyPr/>
-                    <a:lstStyle/>
-                    <a:p>
-                      <a:pPr>
-                        <a:lnSpc>
-                          <a:spcPct val="105000"/>
-                        </a:lnSpc>
-                      </a:pPr>
-                      <a:r>
-                        <a:rPr sz="1350" b="1">
-                          <a:solidFill>
-                            <a:srgbClr val="FFFFFF"/>
-                          </a:solidFill>
-                          <a:latin typeface="Noto Sans CJK SC"/>
-                        </a:rPr>
-                        <a:t>阶段</a:t>
-                      </a:r>
-                    </a:p>
-                  </a:txBody>
-                  <a:tcPr marL="54864" marR="54864" marT="27432" marB="27432" anchor="ctr">
-                    <a:solidFill>
-                      <a:srgbClr val="1F77B4"/>
-                    </a:solidFill>
-                  </a:tcPr>
-                </a:tc>
-                <a:tc>
-                  <a:txBody>
-                    <a:bodyPr/>
-                    <a:lstStyle/>
-                    <a:p>
-                      <a:pPr>
-                        <a:lnSpc>
-                          <a:spcPct val="105000"/>
-                        </a:lnSpc>
-                      </a:pPr>
-                      <a:r>
-                        <a:rPr sz="1350" b="1">
-                          <a:solidFill>
-                            <a:srgbClr val="FFFFFF"/>
-                          </a:solidFill>
-                          <a:latin typeface="Noto Sans CJK SC"/>
-                        </a:rPr>
-                        <a:t>目标</a:t>
-                      </a:r>
-                    </a:p>
-                  </a:txBody>
-                  <a:tcPr marL="54864" marR="54864" marT="27432" marB="27432" anchor="ctr">
-                    <a:solidFill>
-                      <a:srgbClr val="1F77B4"/>
-                    </a:solidFill>
-                  </a:tcPr>
-                </a:tc>
-                <a:tc>
-                  <a:txBody>
-                    <a:bodyPr/>
-                    <a:lstStyle/>
-                    <a:p>
-                      <a:pPr>
-                        <a:lnSpc>
-                          <a:spcPct val="105000"/>
-                        </a:lnSpc>
-                      </a:pPr>
-                      <a:r>
-                        <a:rPr sz="1350" b="1">
-                          <a:solidFill>
-                            <a:srgbClr val="FFFFFF"/>
-                          </a:solidFill>
-                          <a:latin typeface="Noto Sans CJK SC"/>
-                        </a:rPr>
-                        <a:t>关键动作</a:t>
-                      </a:r>
-                    </a:p>
-                  </a:txBody>
-                  <a:tcPr marL="54864" marR="54864" marT="27432" marB="27432" anchor="ctr">
-                    <a:solidFill>
-                      <a:srgbClr val="1F77B4"/>
-                    </a:solidFill>
-                  </a:tcPr>
-                </a:tc>
-              </a:tr>
-              <a:tr h="960120">
-                <a:tc>
-                  <a:txBody>
-                    <a:bodyPr/>
-                    <a:lstStyle/>
-                    <a:p>
-                      <a:pPr>
-                        <a:lnSpc>
-                          <a:spcPct val="105000"/>
-                        </a:lnSpc>
-                      </a:pPr>
-                      <a:r>
-                        <a:rPr sz="1300" b="0">
-                          <a:solidFill>
-                            <a:srgbClr val="1B2A4A"/>
-                          </a:solidFill>
-                          <a:latin typeface="Noto Sans CJK SC"/>
-                        </a:rPr>
-                        <a:t>短期</a:t>
-                      </a:r>
-                    </a:p>
-                    <a:p>
-                      <a:pPr>
-                        <a:lnSpc>
-                          <a:spcPct val="105000"/>
-                        </a:lnSpc>
-                      </a:pPr>
-                      <a:r>
-                        <a:rPr sz="1300" b="0">
-                          <a:solidFill>
-                            <a:srgbClr val="1B2A4A"/>
-                          </a:solidFill>
-                          <a:latin typeface="Noto Sans CJK SC"/>
-                        </a:rPr>
-                        <a:t>1–3 个月</a:t>
-                      </a:r>
-                    </a:p>
-                  </a:txBody>
-                  <a:tcPr marL="54864" marR="54864" marT="27432" marB="27432" anchor="ctr"/>
-                </a:tc>
-                <a:tc>
-                  <a:txBody>
-                    <a:bodyPr/>
-                    <a:lstStyle/>
-                    <a:p>
-                      <a:pPr>
-                        <a:lnSpc>
-                          <a:spcPct val="105000"/>
-                        </a:lnSpc>
-                      </a:pPr>
-                      <a:r>
-                        <a:rPr sz="1300" b="0">
-                          <a:solidFill>
-                            <a:srgbClr val="1B2A4A"/>
-                          </a:solidFill>
-                          <a:latin typeface="Noto Sans CJK SC"/>
-                        </a:rPr>
-                        <a:t>PD 基线交付</a:t>
-                      </a:r>
-                    </a:p>
-                  </a:txBody>
-                  <a:tcPr marL="54864" marR="54864" marT="27432" marB="27432" anchor="ctr"/>
-                </a:tc>
-                <a:tc>
-                  <a:txBody>
-                    <a:bodyPr/>
-                    <a:lstStyle/>
-                    <a:p>
-                      <a:pPr>
-                        <a:lnSpc>
-                          <a:spcPct val="105000"/>
-                        </a:lnSpc>
-                      </a:pPr>
-                      <a:r>
-                        <a:rPr sz="1300" b="0">
-                          <a:solidFill>
-                            <a:srgbClr val="1B2A4A"/>
-                          </a:solidFill>
-                          <a:latin typeface="Noto Sans CJK SC"/>
-                        </a:rPr>
-                        <a:t>Nomoto 极点配置整定（Kp=ωn²T/K，ζ≈1）；</a:t>
-                      </a:r>
-                    </a:p>
-                    <a:p>
-                      <a:pPr>
-                        <a:lnSpc>
-                          <a:spcPct val="105000"/>
-                        </a:lnSpc>
-                      </a:pPr>
-                      <a:r>
-                        <a:rPr sz="1300" b="0">
-                          <a:solidFill>
-                            <a:srgbClr val="1B2A4A"/>
-                          </a:solidFill>
-                          <a:latin typeface="Noto Sans CJK SC"/>
-                        </a:rPr>
-                        <a:t>海浪滤波+死区抑制无效操舵（对标 IMO 0.1–1.0% 收益）</a:t>
-                      </a:r>
-                    </a:p>
-                  </a:txBody>
-                  <a:tcPr marL="54864" marR="54864" marT="27432" marB="27432" anchor="ctr"/>
-                </a:tc>
-              </a:tr>
-              <a:tr h="960120">
-                <a:tc>
-                  <a:txBody>
-                    <a:bodyPr/>
-                    <a:lstStyle/>
-                    <a:p>
-                      <a:pPr>
-                        <a:lnSpc>
-                          <a:spcPct val="105000"/>
-                        </a:lnSpc>
-                      </a:pPr>
-                      <a:r>
-                        <a:rPr sz="1300" b="0">
-                          <a:solidFill>
-                            <a:srgbClr val="1B2A4A"/>
-                          </a:solidFill>
-                          <a:latin typeface="Noto Sans CJK SC"/>
-                        </a:rPr>
-                        <a:t>中期</a:t>
-                      </a:r>
-                    </a:p>
-                    <a:p>
-                      <a:pPr>
-                        <a:lnSpc>
-                          <a:spcPct val="105000"/>
-                        </a:lnSpc>
-                      </a:pPr>
-                      <a:r>
-                        <a:rPr sz="1300" b="0">
-                          <a:solidFill>
-                            <a:srgbClr val="1B2A4A"/>
-                          </a:solidFill>
-                          <a:latin typeface="Noto Sans CJK SC"/>
-                        </a:rPr>
-                        <a:t>3–6 个月</a:t>
-                      </a:r>
-                    </a:p>
-                  </a:txBody>
-                  <a:tcPr marL="54864" marR="54864" marT="27432" marB="27432" anchor="ctr">
-                    <a:solidFill>
-                      <a:srgbClr val="EEF3FA"/>
-                    </a:solidFill>
-                  </a:tcPr>
-                </a:tc>
-                <a:tc>
-                  <a:txBody>
-                    <a:bodyPr/>
-                    <a:lstStyle/>
-                    <a:p>
-                      <a:pPr>
-                        <a:lnSpc>
-                          <a:spcPct val="105000"/>
-                        </a:lnSpc>
-                      </a:pPr>
-                      <a:r>
-                        <a:rPr sz="1300" b="0">
-                          <a:solidFill>
-                            <a:srgbClr val="1B2A4A"/>
-                          </a:solidFill>
-                          <a:latin typeface="Noto Sans CJK SC"/>
-                        </a:rPr>
-                        <a:t>MPC 增强层开发</a:t>
-                      </a:r>
-                    </a:p>
-                  </a:txBody>
-                  <a:tcPr marL="54864" marR="54864" marT="27432" marB="27432" anchor="ctr">
-                    <a:solidFill>
-                      <a:srgbClr val="EEF3FA"/>
-                    </a:solidFill>
-                  </a:tcPr>
-                </a:tc>
-                <a:tc>
-                  <a:txBody>
-                    <a:bodyPr/>
-                    <a:lstStyle/>
-                    <a:p>
-                      <a:pPr>
-                        <a:lnSpc>
-                          <a:spcPct val="105000"/>
-                        </a:lnSpc>
-                      </a:pPr>
-                      <a:r>
-                        <a:rPr sz="1300" b="0">
-                          <a:solidFill>
-                            <a:srgbClr val="1B2A4A"/>
-                          </a:solidFill>
-                          <a:latin typeface="Noto Sans CJK SC"/>
-                        </a:rPr>
-                        <a:t>攻克模型在线辨识与权重整定工具化；</a:t>
-                      </a:r>
-                    </a:p>
-                    <a:p>
-                      <a:pPr>
-                        <a:lnSpc>
-                          <a:spcPct val="105000"/>
-                        </a:lnSpc>
-                      </a:pPr>
-                      <a:r>
-                        <a:rPr sz="1300" b="0">
-                          <a:solidFill>
-                            <a:srgbClr val="1B2A4A"/>
-                          </a:solidFill>
-                          <a:latin typeface="Noto Sans CJK SC"/>
-                        </a:rPr>
-                        <a:t>嵌入式求解器选型（acados/OSQP）；与 PD 基线 A/B 对比</a:t>
-                      </a:r>
-                    </a:p>
-                  </a:txBody>
-                  <a:tcPr marL="54864" marR="54864" marT="27432" marB="27432" anchor="ctr">
-                    <a:solidFill>
-                      <a:srgbClr val="EEF3FA"/>
-                    </a:solidFill>
-                  </a:tcPr>
-                </a:tc>
-              </a:tr>
-              <a:tr h="960120">
-                <a:tc>
-                  <a:txBody>
-                    <a:bodyPr/>
-                    <a:lstStyle/>
-                    <a:p>
-                      <a:pPr>
-                        <a:lnSpc>
-                          <a:spcPct val="105000"/>
-                        </a:lnSpc>
-                      </a:pPr>
-                      <a:r>
-                        <a:rPr sz="1300" b="0">
-                          <a:solidFill>
-                            <a:srgbClr val="1B2A4A"/>
-                          </a:solidFill>
-                          <a:latin typeface="Noto Sans CJK SC"/>
-                        </a:rPr>
-                        <a:t>长期</a:t>
-                      </a:r>
-                    </a:p>
-                    <a:p>
-                      <a:pPr>
-                        <a:lnSpc>
-                          <a:spcPct val="105000"/>
-                        </a:lnSpc>
-                      </a:pPr>
-                      <a:r>
-                        <a:rPr sz="1300" b="0">
-                          <a:solidFill>
-                            <a:srgbClr val="1B2A4A"/>
-                          </a:solidFill>
-                          <a:latin typeface="Noto Sans CJK SC"/>
-                        </a:rPr>
-                        <a:t>6–12 个月</a:t>
-                      </a:r>
-                    </a:p>
-                  </a:txBody>
-                  <a:tcPr marL="54864" marR="54864" marT="27432" marB="27432" anchor="ctr"/>
-                </a:tc>
-                <a:tc>
-                  <a:txBody>
-                    <a:bodyPr/>
-                    <a:lstStyle/>
-                    <a:p>
-                      <a:pPr>
-                        <a:lnSpc>
-                          <a:spcPct val="105000"/>
-                        </a:lnSpc>
-                      </a:pPr>
-                      <a:r>
-                        <a:rPr sz="1300" b="0">
-                          <a:solidFill>
-                            <a:srgbClr val="1B2A4A"/>
-                          </a:solidFill>
-                          <a:latin typeface="Noto Sans CJK SC"/>
-                        </a:rPr>
-                        <a:t>分层节能架构</a:t>
-                      </a:r>
-                    </a:p>
-                  </a:txBody>
-                  <a:tcPr marL="54864" marR="54864" marT="27432" marB="27432" anchor="ctr"/>
-                </a:tc>
-                <a:tc>
-                  <a:txBody>
-                    <a:bodyPr/>
-                    <a:lstStyle/>
-                    <a:p>
-                      <a:pPr>
-                        <a:lnSpc>
-                          <a:spcPct val="105000"/>
-                        </a:lnSpc>
-                      </a:pPr>
-                      <a:r>
-                        <a:rPr sz="1300" b="0">
-                          <a:solidFill>
-                            <a:srgbClr val="1B2A4A"/>
-                          </a:solidFill>
-                          <a:latin typeface="Noto Sans CJK SC"/>
-                        </a:rPr>
-                        <a:t>MPC 代价函数计入操舵能量，对接航速/纵倾优化指令；</a:t>
-                      </a:r>
-                    </a:p>
-                    <a:p>
-                      <a:pPr>
-                        <a:lnSpc>
-                          <a:spcPct val="105000"/>
-                        </a:lnSpc>
-                      </a:pPr>
-                      <a:r>
-                        <a:rPr sz="1300" b="0">
-                          <a:solidFill>
-                            <a:srgbClr val="1B2A4A"/>
-                          </a:solidFill>
-                          <a:latin typeface="Noto Sans CJK SC"/>
-                        </a:rPr>
-                        <a:t>输出舵机磨损/能耗统计；Lyapunov-based MPC 保稳定性</a:t>
-                      </a:r>
-                    </a:p>
-                  </a:txBody>
-                  <a:tcPr marL="54864" marR="54864" marT="27432" marB="27432" anchor="ctr"/>
-                </a:tc>
-              </a:tr>
-            </a:tbl>
-          </a:graphicData>
-        </a:graphic>
-      </p:graphicFrame>
-      <p:sp>
-        <p:nvSpPr>
-          <p:cNvPr id="5" name="TextBox 4"/>
+              <a:t>主要数据来源</a:t>
+            </a:r>
+          </a:p>
+        </p:txBody>
+      </p:sp>
+      <p:sp>
+        <p:nvSpPr>
+          <p:cNvPr id="4" name="TextBox 3"/>
           <p:cNvSpPr txBox="1"/>
           <p:nvPr/>
         </p:nvSpPr>
         <p:spPr>
           <a:xfrm>
-            <a:off x="457200" y="5577840"/>
-            <a:ext cx="11338560" cy="914400"/>
+            <a:off x="475488" y="914400"/>
+            <a:ext cx="11247120" cy="457200"/>
           </a:xfrm>
           <a:prstGeom prst="rect">
             <a:avLst/>
@@ -8509,13 +8019,74 @@
               </a:spcAft>
             </a:pPr>
             <a:r>
-              <a:rPr sz="1500" b="0">
+              <a:rPr sz="1400" b="0">
+                <a:solidFill>
+                  <a:srgbClr val="666666"/>
+                </a:solidFill>
+                <a:latin typeface="Noto Sans CJK SC"/>
+              </a:rPr>
+              <a:t>完整 45 条参考文献见调研文档；所有定量数据经两轮原文核对</a:t>
+            </a:r>
+          </a:p>
+        </p:txBody>
+      </p:sp>
+      <p:sp>
+        <p:nvSpPr>
+          <p:cNvPr id="5" name="TextBox 4"/>
+          <p:cNvSpPr txBox="1"/>
+          <p:nvPr/>
+        </p:nvSpPr>
+        <p:spPr>
+          <a:xfrm>
+            <a:off x="548640" y="1554480"/>
+            <a:ext cx="5577840" cy="5029200"/>
+          </a:xfrm>
+          <a:prstGeom prst="rect">
+            <a:avLst/>
+          </a:prstGeom>
+          <a:noFill/>
+        </p:spPr>
+        <p:txBody>
+          <a:bodyPr wrap="square" anchor="t">
+            <a:spAutoFit/>
+          </a:bodyPr>
+          <a:lstStyle/>
+          <a:p>
+            <a:pPr algn="l">
+              <a:lnSpc>
+                <a:spcPct val="115000"/>
+              </a:lnSpc>
+              <a:spcAft>
+                <a:spcPts val="800"/>
+              </a:spcAft>
+            </a:pPr>
+            <a:r>
+              <a:rPr sz="1300" b="1">
+                <a:solidFill>
+                  <a:srgbClr val="1F77B4"/>
+                </a:solidFill>
+                <a:latin typeface="Noto Sans CJK SC"/>
+              </a:rPr>
+              <a:t>▪ 控制对比研究</a:t>
+            </a:r>
+          </a:p>
+          <a:p>
+            <a:pPr algn="l">
+              <a:lnSpc>
+                <a:spcPct val="115000"/>
+              </a:lnSpc>
+              <a:spcAft>
+                <a:spcPts val="400"/>
+              </a:spcAft>
+            </a:pPr>
+            <a:r>
+              <a:rPr sz="1150" b="0">
                 <a:solidFill>
                   <a:srgbClr val="1B2A4A"/>
                 </a:solidFill>
                 <a:latin typeface="Noto Sans CJK SC"/>
               </a:rPr>
-              <a:t>核心逻辑：节能大头在决策层（气象航线 3–10%、减速航行主机口径可达 50%），控制层贡献 0.1–1% 但几乎零成本；</a:t>
+              <a:t>    – Jannaty et al., 2023, Kadikma 14(3)</a:t>
             </a:r>
           </a:p>
           <a:p>
@@ -8524,17 +8095,131 @@
                 <a:spcPct val="115000"/>
               </a:lnSpc>
               <a:spcAft>
-                <a:spcPts val="600"/>
-              </a:spcAft>
-            </a:pPr>
-            <a:r>
-              <a:rPr sz="1500" b="0">
+                <a:spcPts val="400"/>
+              </a:spcAft>
+            </a:pPr>
+            <a:r>
+              <a:rPr sz="1150" b="0">
                 <a:solidFill>
                   <a:srgbClr val="1B2A4A"/>
                 </a:solidFill>
                 <a:latin typeface="Noto Sans CJK SC"/>
               </a:rPr>
-              <a:t>先把 PD 整定与辨识流程工具化，再让 MPC 平滑接管性能增强。</a:t>
+              <a:t>    – Zhang et al., 2025, Ocean Engineering 334:121592</a:t>
+            </a:r>
+          </a:p>
+          <a:p>
+            <a:pPr algn="l">
+              <a:lnSpc>
+                <a:spcPct val="115000"/>
+              </a:lnSpc>
+              <a:spcAft>
+                <a:spcPts val="400"/>
+              </a:spcAft>
+            </a:pPr>
+            <a:r>
+              <a:rPr sz="1150" b="0">
+                <a:solidFill>
+                  <a:srgbClr val="1B2A4A"/>
+                </a:solidFill>
+                <a:latin typeface="Noto Sans CJK SC"/>
+              </a:rPr>
+              <a:t>    – He et al., 2023, Ocean Engineering（船模实验）</a:t>
+            </a:r>
+          </a:p>
+          <a:p>
+            <a:pPr algn="l">
+              <a:lnSpc>
+                <a:spcPct val="115000"/>
+              </a:lnSpc>
+              <a:spcAft>
+                <a:spcPts val="400"/>
+              </a:spcAft>
+            </a:pPr>
+            <a:r>
+              <a:rPr sz="1150" b="0">
+                <a:solidFill>
+                  <a:srgbClr val="1B2A4A"/>
+                </a:solidFill>
+                <a:latin typeface="Noto Sans CJK SC"/>
+              </a:rPr>
+              <a:t>    – Zheng et al., 2025, JMSE 13(5):851（自动舵综述）</a:t>
+            </a:r>
+          </a:p>
+          <a:p>
+            <a:pPr algn="l">
+              <a:lnSpc>
+                <a:spcPct val="115000"/>
+              </a:lnSpc>
+              <a:spcAft>
+                <a:spcPts val="800"/>
+              </a:spcAft>
+            </a:pPr>
+            <a:r>
+              <a:rPr sz="1300" b="1">
+                <a:solidFill>
+                  <a:srgbClr val="1F77B4"/>
+                </a:solidFill>
+                <a:latin typeface="Noto Sans CJK SC"/>
+              </a:rPr>
+              <a:t>▪ 整定 / 实时 / 稳定性</a:t>
+            </a:r>
+          </a:p>
+          <a:p>
+            <a:pPr algn="l">
+              <a:lnSpc>
+                <a:spcPct val="115000"/>
+              </a:lnSpc>
+              <a:spcAft>
+                <a:spcPts val="400"/>
+              </a:spcAft>
+            </a:pPr>
+            <a:r>
+              <a:rPr sz="1150" b="0">
+                <a:solidFill>
+                  <a:srgbClr val="1B2A4A"/>
+                </a:solidFill>
+                <a:latin typeface="Noto Sans CJK SC"/>
+              </a:rPr>
+              <a:t>    – Christensen et al., 2025, arXiv:2509.11235</a:t>
+            </a:r>
+          </a:p>
+          <a:p>
+            <a:pPr algn="l">
+              <a:lnSpc>
+                <a:spcPct val="115000"/>
+              </a:lnSpc>
+              <a:spcAft>
+                <a:spcPts val="400"/>
+              </a:spcAft>
+            </a:pPr>
+            <a:r>
+              <a:rPr sz="1150" b="0">
+                <a:solidFill>
+                  <a:srgbClr val="1B2A4A"/>
+                </a:solidFill>
+                <a:latin typeface="Noto Sans CJK SC"/>
+              </a:rPr>
+              <a:t>    – Hu et al., 2024, JMSE 12(1):94（acados 实测）</a:t>
+            </a:r>
+          </a:p>
+          <a:p>
+            <a:pPr algn="l">
+              <a:lnSpc>
+                <a:spcPct val="115000"/>
+              </a:lnSpc>
+              <a:spcAft>
+                <a:spcPts val="400"/>
+              </a:spcAft>
+            </a:pPr>
+            <a:r>
+              <a:rPr sz="1150" b="0">
+                <a:solidFill>
+                  <a:srgbClr val="1B2A4A"/>
+                </a:solidFill>
+                <a:latin typeface="Noto Sans CJK SC"/>
+              </a:rPr>
+              <a:t>    – Mayne et al., 2000, Automatica 36(6)</a:t>
             </a:r>
           </a:p>
         </p:txBody>
@@ -8542,6 +8227,181 @@
       <p:sp>
         <p:nvSpPr>
           <p:cNvPr id="6" name="TextBox 5"/>
+          <p:cNvSpPr txBox="1"/>
+          <p:nvPr/>
+        </p:nvSpPr>
+        <p:spPr>
+          <a:xfrm>
+            <a:off x="6309360" y="1554480"/>
+            <a:ext cx="5577840" cy="5029200"/>
+          </a:xfrm>
+          <a:prstGeom prst="rect">
+            <a:avLst/>
+          </a:prstGeom>
+          <a:noFill/>
+        </p:spPr>
+        <p:txBody>
+          <a:bodyPr wrap="square" anchor="t">
+            <a:spAutoFit/>
+          </a:bodyPr>
+          <a:lstStyle/>
+          <a:p>
+            <a:pPr algn="l">
+              <a:lnSpc>
+                <a:spcPct val="115000"/>
+              </a:lnSpc>
+              <a:spcAft>
+                <a:spcPts val="800"/>
+              </a:spcAft>
+            </a:pPr>
+            <a:r>
+              <a:rPr sz="1300" b="1">
+                <a:solidFill>
+                  <a:srgbClr val="2CA02C"/>
+                </a:solidFill>
+                <a:latin typeface="Noto Sans CJK SC"/>
+              </a:rPr>
+              <a:t>▪ 节能算法</a:t>
+            </a:r>
+          </a:p>
+          <a:p>
+            <a:pPr algn="l">
+              <a:lnSpc>
+                <a:spcPct val="115000"/>
+              </a:lnSpc>
+              <a:spcAft>
+                <a:spcPts val="400"/>
+              </a:spcAft>
+            </a:pPr>
+            <a:r>
+              <a:rPr sz="1150" b="0">
+                <a:solidFill>
+                  <a:srgbClr val="1B2A4A"/>
+                </a:solidFill>
+                <a:latin typeface="Noto Sans CJK SC"/>
+              </a:rPr>
+              <a:t>    – Pelić et al., 2023, JMSE 11(3):675</a:t>
+            </a:r>
+          </a:p>
+          <a:p>
+            <a:pPr algn="l">
+              <a:lnSpc>
+                <a:spcPct val="115000"/>
+              </a:lnSpc>
+              <a:spcAft>
+                <a:spcPts val="400"/>
+              </a:spcAft>
+            </a:pPr>
+            <a:r>
+              <a:rPr sz="1150" b="0">
+                <a:solidFill>
+                  <a:srgbClr val="1B2A4A"/>
+                </a:solidFill>
+                <a:latin typeface="Noto Sans CJK SC"/>
+              </a:rPr>
+              <a:t>    – Du et al., 2019, TR-B 121:88–114</a:t>
+            </a:r>
+          </a:p>
+          <a:p>
+            <a:pPr algn="l">
+              <a:lnSpc>
+                <a:spcPct val="115000"/>
+              </a:lnSpc>
+              <a:spcAft>
+                <a:spcPts val="400"/>
+              </a:spcAft>
+            </a:pPr>
+            <a:r>
+              <a:rPr sz="1150" b="0">
+                <a:solidFill>
+                  <a:srgbClr val="1B2A4A"/>
+                </a:solidFill>
+                <a:latin typeface="Noto Sans CJK SC"/>
+              </a:rPr>
+              <a:t>    – IMO GreenVoyage2050 / GloMEEP 官方技术评估</a:t>
+            </a:r>
+          </a:p>
+          <a:p>
+            <a:pPr algn="l">
+              <a:lnSpc>
+                <a:spcPct val="115000"/>
+              </a:lnSpc>
+              <a:spcAft>
+                <a:spcPts val="400"/>
+              </a:spcAft>
+            </a:pPr>
+            <a:r>
+              <a:rPr sz="1150" b="0">
+                <a:solidFill>
+                  <a:srgbClr val="1B2A4A"/>
+                </a:solidFill>
+                <a:latin typeface="Noto Sans CJK SC"/>
+              </a:rPr>
+              <a:t>    – ClassNK-NAPA 全尺度试航（2014）</a:t>
+            </a:r>
+          </a:p>
+          <a:p>
+            <a:pPr algn="l">
+              <a:lnSpc>
+                <a:spcPct val="115000"/>
+              </a:lnSpc>
+              <a:spcAft>
+                <a:spcPts val="800"/>
+              </a:spcAft>
+            </a:pPr>
+            <a:r>
+              <a:rPr sz="1300" b="1">
+                <a:solidFill>
+                  <a:srgbClr val="2CA02C"/>
+                </a:solidFill>
+                <a:latin typeface="Noto Sans CJK SC"/>
+              </a:rPr>
+              <a:t>▪ 部署案例</a:t>
+            </a:r>
+          </a:p>
+          <a:p>
+            <a:pPr algn="l">
+              <a:lnSpc>
+                <a:spcPct val="115000"/>
+              </a:lnSpc>
+              <a:spcAft>
+                <a:spcPts val="400"/>
+              </a:spcAft>
+            </a:pPr>
+            <a:r>
+              <a:rPr sz="1150" b="0">
+                <a:solidFill>
+                  <a:srgbClr val="1B2A4A"/>
+                </a:solidFill>
+                <a:latin typeface="Noto Sans CJK SC"/>
+              </a:rPr>
+              <a:t>    – ABB / Wärtsilä-Eniram / Yara / Kongsberg / NAPA / DeepSea / Anschütz / Orca AI 官方资料</a:t>
+            </a:r>
+          </a:p>
+          <a:p>
+            <a:pPr algn="l">
+              <a:lnSpc>
+                <a:spcPct val="115000"/>
+              </a:lnSpc>
+              <a:spcAft>
+                <a:spcPts val="400"/>
+              </a:spcAft>
+            </a:pPr>
+            <a:r>
+              <a:rPr sz="1150" b="0">
+                <a:solidFill>
+                  <a:srgbClr val="1B2A4A"/>
+                </a:solidFill>
+                <a:latin typeface="Noto Sans CJK SC"/>
+              </a:rPr>
+              <a:t>    – ABS 船舶能效措施咨询报告</a:t>
+            </a:r>
+          </a:p>
+        </p:txBody>
+      </p:sp>
+      <p:sp>
+        <p:nvSpPr>
+          <p:cNvPr id="7" name="TextBox 6"/>
           <p:cNvSpPr txBox="1"/>
           <p:nvPr/>
         </p:nvSpPr>
@@ -8576,7 +8436,7 @@
                 </a:solidFill>
                 <a:latin typeface="Noto Sans CJK SC"/>
               </a:rPr>
-              <a:t>18 / 20</a:t>
+              <a:t>18 / 19</a:t>
             </a:r>
           </a:p>
         </p:txBody>
@@ -8590,6 +8450,170 @@
 </file>
 
 <file path=ppt/slides/slide19.xml><?xml version="1.0" encoding="utf-8"?>
+<p:sld xmlns:a="http://schemas.openxmlformats.org/drawingml/2006/main" xmlns:p="http://schemas.openxmlformats.org/presentationml/2006/main" xmlns:r="http://schemas.openxmlformats.org/officeDocument/2006/relationships">
+  <p:cSld>
+    <p:spTree>
+      <p:nvGrpSpPr>
+        <p:cNvPr id="1" name=""/>
+        <p:cNvGrpSpPr/>
+        <p:nvPr/>
+      </p:nvGrpSpPr>
+      <p:grpSpPr/>
+      <p:sp>
+        <p:nvSpPr>
+          <p:cNvPr id="2" name="Rectangle 1"/>
+          <p:cNvSpPr/>
+          <p:nvPr/>
+        </p:nvSpPr>
+        <p:spPr>
+          <a:xfrm>
+            <a:off x="0" y="0"/>
+            <a:ext cx="12191695" cy="6858000"/>
+          </a:xfrm>
+          <a:prstGeom prst="rect">
+            <a:avLst/>
+          </a:prstGeom>
+          <a:solidFill>
+            <a:srgbClr val="1B2A4A"/>
+          </a:solidFill>
+          <a:ln>
+            <a:noFill/>
+          </a:ln>
+        </p:spPr>
+        <p:style>
+          <a:lnRef idx="1">
+            <a:schemeClr val="accent1"/>
+          </a:lnRef>
+          <a:fillRef idx="3">
+            <a:schemeClr val="accent1"/>
+          </a:fillRef>
+          <a:effectRef idx="2">
+            <a:schemeClr val="accent1"/>
+          </a:effectRef>
+          <a:fontRef idx="minor">
+            <a:schemeClr val="lt1"/>
+          </a:fontRef>
+        </p:style>
+        <p:txBody>
+          <a:bodyPr rtlCol="0" anchor="ctr"/>
+          <a:lstStyle/>
+          <a:p>
+            <a:pPr algn="ctr"/>
+          </a:p>
+        </p:txBody>
+      </p:sp>
+      <p:sp>
+        <p:nvSpPr>
+          <p:cNvPr id="3" name="TextBox 2"/>
+          <p:cNvSpPr txBox="1"/>
+          <p:nvPr/>
+        </p:nvSpPr>
+        <p:spPr>
+          <a:xfrm>
+            <a:off x="914400" y="2377440"/>
+            <a:ext cx="10332720" cy="1097280"/>
+          </a:xfrm>
+          <a:prstGeom prst="rect">
+            <a:avLst/>
+          </a:prstGeom>
+          <a:noFill/>
+        </p:spPr>
+        <p:txBody>
+          <a:bodyPr wrap="square" anchor="t">
+            <a:spAutoFit/>
+          </a:bodyPr>
+          <a:lstStyle/>
+          <a:p>
+            <a:pPr algn="ctr">
+              <a:lnSpc>
+                <a:spcPct val="115000"/>
+              </a:lnSpc>
+              <a:spcAft>
+                <a:spcPts val="600"/>
+              </a:spcAft>
+            </a:pPr>
+            <a:r>
+              <a:rPr sz="4800" b="1">
+                <a:solidFill>
+                  <a:srgbClr val="FFFFFF"/>
+                </a:solidFill>
+                <a:latin typeface="Noto Sans CJK SC"/>
+              </a:rPr>
+              <a:t>谢 谢</a:t>
+            </a:r>
+          </a:p>
+        </p:txBody>
+      </p:sp>
+      <p:sp>
+        <p:nvSpPr>
+          <p:cNvPr id="4" name="TextBox 3"/>
+          <p:cNvSpPr txBox="1"/>
+          <p:nvPr/>
+        </p:nvSpPr>
+        <p:spPr>
+          <a:xfrm>
+            <a:off x="914400" y="3840480"/>
+            <a:ext cx="10332720" cy="1371600"/>
+          </a:xfrm>
+          <a:prstGeom prst="rect">
+            <a:avLst/>
+          </a:prstGeom>
+          <a:noFill/>
+        </p:spPr>
+        <p:txBody>
+          <a:bodyPr wrap="square" anchor="t">
+            <a:spAutoFit/>
+          </a:bodyPr>
+          <a:lstStyle/>
+          <a:p>
+            <a:pPr algn="ctr">
+              <a:lnSpc>
+                <a:spcPct val="115000"/>
+              </a:lnSpc>
+              <a:spcAft>
+                <a:spcPts val="600"/>
+              </a:spcAft>
+            </a:pPr>
+            <a:r>
+              <a:rPr sz="1500" b="0">
+                <a:solidFill>
+                  <a:srgbClr val="9FC5E8"/>
+                </a:solidFill>
+                <a:latin typeface="Noto Sans CJK SC"/>
+              </a:rPr>
+              <a:t>完整数据与 45 条参考文献：docs/ship_energy_research/MPC与船舶节能算法调研文档.md</a:t>
+            </a:r>
+          </a:p>
+          <a:p>
+            <a:pPr algn="ctr">
+              <a:lnSpc>
+                <a:spcPct val="115000"/>
+              </a:lnSpc>
+              <a:spcAft>
+                <a:spcPts val="600"/>
+              </a:spcAft>
+            </a:pPr>
+            <a:r>
+              <a:rPr sz="1500" b="0">
+                <a:solidFill>
+                  <a:srgbClr val="9FC5E8"/>
+                </a:solidFill>
+                <a:latin typeface="Noto Sans CJK SC"/>
+              </a:rPr>
+              <a:t>所有定量数据经两轮来源核对，修正记录见文档附录 A</a:t>
+            </a:r>
+          </a:p>
+        </p:txBody>
+      </p:sp>
+    </p:spTree>
+  </p:cSld>
+  <p:clrMapOvr>
+    <a:masterClrMapping/>
+  </p:clrMapOvr>
+</p:sld>
+</file>
+
+<file path=ppt/slides/slide2.xml><?xml version="1.0" encoding="utf-8"?>
 <p:sld xmlns:a="http://schemas.openxmlformats.org/drawingml/2006/main" xmlns:p="http://schemas.openxmlformats.org/presentationml/2006/main" xmlns:r="http://schemas.openxmlformats.org/officeDocument/2006/relationships">
   <p:cSld>
     <p:spTree>
@@ -8679,7 +8703,7 @@
                 </a:solidFill>
                 <a:latin typeface="Noto Sans CJK SC"/>
               </a:rPr>
-              <a:t>主要数据来源</a:t>
+              <a:t>汇报提纲</a:t>
             </a:r>
           </a:p>
         </p:txBody>
@@ -8692,8 +8716,8 @@
         </p:nvSpPr>
         <p:spPr>
           <a:xfrm>
-            <a:off x="475488" y="914400"/>
-            <a:ext cx="11247120" cy="457200"/>
+            <a:off x="914400" y="1463040"/>
+            <a:ext cx="10058400" cy="5029200"/>
           </a:xfrm>
           <a:prstGeom prst="rect">
             <a:avLst/>
@@ -8711,17 +8735,93 @@
                 <a:spcPct val="115000"/>
               </a:lnSpc>
               <a:spcAft>
-                <a:spcPts val="600"/>
-              </a:spcAft>
-            </a:pPr>
-            <a:r>
-              <a:rPr sz="1400" b="0">
-                <a:solidFill>
-                  <a:srgbClr val="666666"/>
-                </a:solidFill>
-                <a:latin typeface="Noto Sans CJK SC"/>
-              </a:rPr>
-              <a:t>完整 45 条参考文献见调研文档；所有定量数据经两轮原文核对</a:t>
+                <a:spcPts val="800"/>
+              </a:spcAft>
+            </a:pPr>
+            <a:r>
+              <a:rPr sz="1900" b="0">
+                <a:solidFill>
+                  <a:srgbClr val="1B2A4A"/>
+                </a:solidFill>
+                <a:latin typeface="Noto Sans CJK SC"/>
+              </a:rPr>
+              <a:t>▪ 01  技术背景：船舶节能的能耗痛点与 MPC 控制的下沉机遇</a:t>
+            </a:r>
+          </a:p>
+          <a:p>
+            <a:pPr algn="l">
+              <a:lnSpc>
+                <a:spcPct val="115000"/>
+              </a:lnSpc>
+              <a:spcAft>
+                <a:spcPts val="800"/>
+              </a:spcAft>
+            </a:pPr>
+            <a:r>
+              <a:rPr sz="1900" b="0">
+                <a:solidFill>
+                  <a:srgbClr val="1B2A4A"/>
+                </a:solidFill>
+                <a:latin typeface="Noto Sans CJK SC"/>
+              </a:rPr>
+              <a:t>▪ 02  MPC vs PD 自动舵：原理、控制效果、证据强度、调试难度、实时性与稳定性</a:t>
+            </a:r>
+          </a:p>
+          <a:p>
+            <a:pPr algn="l">
+              <a:lnSpc>
+                <a:spcPct val="115000"/>
+              </a:lnSpc>
+              <a:spcAft>
+                <a:spcPts val="800"/>
+              </a:spcAft>
+            </a:pPr>
+            <a:r>
+              <a:rPr sz="1900" b="0">
+                <a:solidFill>
+                  <a:srgbClr val="1B2A4A"/>
+                </a:solidFill>
+                <a:latin typeface="Noto Sans CJK SC"/>
+              </a:rPr>
+              <a:t>▪ 03  船舶节能五大算法路线：节能率、关键数据、优缺点</a:t>
+            </a:r>
+          </a:p>
+          <a:p>
+            <a:pPr algn="l">
+              <a:lnSpc>
+                <a:spcPct val="115000"/>
+              </a:lnSpc>
+              <a:spcAft>
+                <a:spcPts val="800"/>
+              </a:spcAft>
+            </a:pPr>
+            <a:r>
+              <a:rPr sz="1900" b="0">
+                <a:solidFill>
+                  <a:srgbClr val="1B2A4A"/>
+                </a:solidFill>
+                <a:latin typeface="Noto Sans CJK SC"/>
+              </a:rPr>
+              <a:t>▪ 04  工业部署案例：规模化部署与实测细节</a:t>
+            </a:r>
+          </a:p>
+          <a:p>
+            <a:pPr algn="l">
+              <a:lnSpc>
+                <a:spcPct val="115000"/>
+              </a:lnSpc>
+              <a:spcAft>
+                <a:spcPts val="800"/>
+              </a:spcAft>
+            </a:pPr>
+            <a:r>
+              <a:rPr sz="1900" b="0">
+                <a:solidFill>
+                  <a:srgbClr val="1B2A4A"/>
+                </a:solidFill>
+                <a:latin typeface="Noto Sans CJK SC"/>
+              </a:rPr>
+              <a:t>▪ 05  技术趋势判断与本项目落地建议</a:t>
             </a:r>
           </a:p>
         </p:txBody>
@@ -8729,375 +8829,6 @@
       <p:sp>
         <p:nvSpPr>
           <p:cNvPr id="5" name="TextBox 4"/>
-          <p:cNvSpPr txBox="1"/>
-          <p:nvPr/>
-        </p:nvSpPr>
-        <p:spPr>
-          <a:xfrm>
-            <a:off x="548640" y="1554480"/>
-            <a:ext cx="5577840" cy="5029200"/>
-          </a:xfrm>
-          <a:prstGeom prst="rect">
-            <a:avLst/>
-          </a:prstGeom>
-          <a:noFill/>
-        </p:spPr>
-        <p:txBody>
-          <a:bodyPr wrap="square" anchor="t">
-            <a:spAutoFit/>
-          </a:bodyPr>
-          <a:lstStyle/>
-          <a:p>
-            <a:pPr algn="l">
-              <a:lnSpc>
-                <a:spcPct val="115000"/>
-              </a:lnSpc>
-              <a:spcAft>
-                <a:spcPts val="800"/>
-              </a:spcAft>
-            </a:pPr>
-            <a:r>
-              <a:rPr sz="1300" b="1">
-                <a:solidFill>
-                  <a:srgbClr val="1F77B4"/>
-                </a:solidFill>
-                <a:latin typeface="Noto Sans CJK SC"/>
-              </a:rPr>
-              <a:t>▪ 控制对比研究</a:t>
-            </a:r>
-          </a:p>
-          <a:p>
-            <a:pPr algn="l">
-              <a:lnSpc>
-                <a:spcPct val="115000"/>
-              </a:lnSpc>
-              <a:spcAft>
-                <a:spcPts val="400"/>
-              </a:spcAft>
-            </a:pPr>
-            <a:r>
-              <a:rPr sz="1150" b="0">
-                <a:solidFill>
-                  <a:srgbClr val="1B2A4A"/>
-                </a:solidFill>
-                <a:latin typeface="Noto Sans CJK SC"/>
-              </a:rPr>
-              <a:t>    – Jannaty et al., 2023, Kadikma 14(3)</a:t>
-            </a:r>
-          </a:p>
-          <a:p>
-            <a:pPr algn="l">
-              <a:lnSpc>
-                <a:spcPct val="115000"/>
-              </a:lnSpc>
-              <a:spcAft>
-                <a:spcPts val="400"/>
-              </a:spcAft>
-            </a:pPr>
-            <a:r>
-              <a:rPr sz="1150" b="0">
-                <a:solidFill>
-                  <a:srgbClr val="1B2A4A"/>
-                </a:solidFill>
-                <a:latin typeface="Noto Sans CJK SC"/>
-              </a:rPr>
-              <a:t>    – Zhang et al., 2025, Ocean Engineering 334:121592</a:t>
-            </a:r>
-          </a:p>
-          <a:p>
-            <a:pPr algn="l">
-              <a:lnSpc>
-                <a:spcPct val="115000"/>
-              </a:lnSpc>
-              <a:spcAft>
-                <a:spcPts val="400"/>
-              </a:spcAft>
-            </a:pPr>
-            <a:r>
-              <a:rPr sz="1150" b="0">
-                <a:solidFill>
-                  <a:srgbClr val="1B2A4A"/>
-                </a:solidFill>
-                <a:latin typeface="Noto Sans CJK SC"/>
-              </a:rPr>
-              <a:t>    – He et al., 2023, Ocean Engineering（船模实验）</a:t>
-            </a:r>
-          </a:p>
-          <a:p>
-            <a:pPr algn="l">
-              <a:lnSpc>
-                <a:spcPct val="115000"/>
-              </a:lnSpc>
-              <a:spcAft>
-                <a:spcPts val="400"/>
-              </a:spcAft>
-            </a:pPr>
-            <a:r>
-              <a:rPr sz="1150" b="0">
-                <a:solidFill>
-                  <a:srgbClr val="1B2A4A"/>
-                </a:solidFill>
-                <a:latin typeface="Noto Sans CJK SC"/>
-              </a:rPr>
-              <a:t>    – Zheng et al., 2025, JMSE 13(5):851（自动舵综述）</a:t>
-            </a:r>
-          </a:p>
-          <a:p>
-            <a:pPr algn="l">
-              <a:lnSpc>
-                <a:spcPct val="115000"/>
-              </a:lnSpc>
-              <a:spcAft>
-                <a:spcPts val="800"/>
-              </a:spcAft>
-            </a:pPr>
-            <a:r>
-              <a:rPr sz="1300" b="1">
-                <a:solidFill>
-                  <a:srgbClr val="1F77B4"/>
-                </a:solidFill>
-                <a:latin typeface="Noto Sans CJK SC"/>
-              </a:rPr>
-              <a:t>▪ 整定 / 实时 / 稳定性</a:t>
-            </a:r>
-          </a:p>
-          <a:p>
-            <a:pPr algn="l">
-              <a:lnSpc>
-                <a:spcPct val="115000"/>
-              </a:lnSpc>
-              <a:spcAft>
-                <a:spcPts val="400"/>
-              </a:spcAft>
-            </a:pPr>
-            <a:r>
-              <a:rPr sz="1150" b="0">
-                <a:solidFill>
-                  <a:srgbClr val="1B2A4A"/>
-                </a:solidFill>
-                <a:latin typeface="Noto Sans CJK SC"/>
-              </a:rPr>
-              <a:t>    – Christensen et al., 2025, arXiv:2509.11235</a:t>
-            </a:r>
-          </a:p>
-          <a:p>
-            <a:pPr algn="l">
-              <a:lnSpc>
-                <a:spcPct val="115000"/>
-              </a:lnSpc>
-              <a:spcAft>
-                <a:spcPts val="400"/>
-              </a:spcAft>
-            </a:pPr>
-            <a:r>
-              <a:rPr sz="1150" b="0">
-                <a:solidFill>
-                  <a:srgbClr val="1B2A4A"/>
-                </a:solidFill>
-                <a:latin typeface="Noto Sans CJK SC"/>
-              </a:rPr>
-              <a:t>    – Hu et al., 2024, JMSE 12(1):94（acados 实测）</a:t>
-            </a:r>
-          </a:p>
-          <a:p>
-            <a:pPr algn="l">
-              <a:lnSpc>
-                <a:spcPct val="115000"/>
-              </a:lnSpc>
-              <a:spcAft>
-                <a:spcPts val="400"/>
-              </a:spcAft>
-            </a:pPr>
-            <a:r>
-              <a:rPr sz="1150" b="0">
-                <a:solidFill>
-                  <a:srgbClr val="1B2A4A"/>
-                </a:solidFill>
-                <a:latin typeface="Noto Sans CJK SC"/>
-              </a:rPr>
-              <a:t>    – Mayne et al., 2000, Automatica 36(6)</a:t>
-            </a:r>
-          </a:p>
-        </p:txBody>
-      </p:sp>
-      <p:sp>
-        <p:nvSpPr>
-          <p:cNvPr id="6" name="TextBox 5"/>
-          <p:cNvSpPr txBox="1"/>
-          <p:nvPr/>
-        </p:nvSpPr>
-        <p:spPr>
-          <a:xfrm>
-            <a:off x="6309360" y="1554480"/>
-            <a:ext cx="5577840" cy="5029200"/>
-          </a:xfrm>
-          <a:prstGeom prst="rect">
-            <a:avLst/>
-          </a:prstGeom>
-          <a:noFill/>
-        </p:spPr>
-        <p:txBody>
-          <a:bodyPr wrap="square" anchor="t">
-            <a:spAutoFit/>
-          </a:bodyPr>
-          <a:lstStyle/>
-          <a:p>
-            <a:pPr algn="l">
-              <a:lnSpc>
-                <a:spcPct val="115000"/>
-              </a:lnSpc>
-              <a:spcAft>
-                <a:spcPts val="800"/>
-              </a:spcAft>
-            </a:pPr>
-            <a:r>
-              <a:rPr sz="1300" b="1">
-                <a:solidFill>
-                  <a:srgbClr val="2CA02C"/>
-                </a:solidFill>
-                <a:latin typeface="Noto Sans CJK SC"/>
-              </a:rPr>
-              <a:t>▪ 节能算法</a:t>
-            </a:r>
-          </a:p>
-          <a:p>
-            <a:pPr algn="l">
-              <a:lnSpc>
-                <a:spcPct val="115000"/>
-              </a:lnSpc>
-              <a:spcAft>
-                <a:spcPts val="400"/>
-              </a:spcAft>
-            </a:pPr>
-            <a:r>
-              <a:rPr sz="1150" b="0">
-                <a:solidFill>
-                  <a:srgbClr val="1B2A4A"/>
-                </a:solidFill>
-                <a:latin typeface="Noto Sans CJK SC"/>
-              </a:rPr>
-              <a:t>    – Pelić et al., 2023, JMSE 11(3):675</a:t>
-            </a:r>
-          </a:p>
-          <a:p>
-            <a:pPr algn="l">
-              <a:lnSpc>
-                <a:spcPct val="115000"/>
-              </a:lnSpc>
-              <a:spcAft>
-                <a:spcPts val="400"/>
-              </a:spcAft>
-            </a:pPr>
-            <a:r>
-              <a:rPr sz="1150" b="0">
-                <a:solidFill>
-                  <a:srgbClr val="1B2A4A"/>
-                </a:solidFill>
-                <a:latin typeface="Noto Sans CJK SC"/>
-              </a:rPr>
-              <a:t>    – Du et al., 2019, TR-B 121:88–114</a:t>
-            </a:r>
-          </a:p>
-          <a:p>
-            <a:pPr algn="l">
-              <a:lnSpc>
-                <a:spcPct val="115000"/>
-              </a:lnSpc>
-              <a:spcAft>
-                <a:spcPts val="400"/>
-              </a:spcAft>
-            </a:pPr>
-            <a:r>
-              <a:rPr sz="1150" b="0">
-                <a:solidFill>
-                  <a:srgbClr val="1B2A4A"/>
-                </a:solidFill>
-                <a:latin typeface="Noto Sans CJK SC"/>
-              </a:rPr>
-              <a:t>    – IMO GreenVoyage2050 / GloMEEP 官方评估</a:t>
-            </a:r>
-          </a:p>
-          <a:p>
-            <a:pPr algn="l">
-              <a:lnSpc>
-                <a:spcPct val="115000"/>
-              </a:lnSpc>
-              <a:spcAft>
-                <a:spcPts val="400"/>
-              </a:spcAft>
-            </a:pPr>
-            <a:r>
-              <a:rPr sz="1150" b="0">
-                <a:solidFill>
-                  <a:srgbClr val="1B2A4A"/>
-                </a:solidFill>
-                <a:latin typeface="Noto Sans CJK SC"/>
-              </a:rPr>
-              <a:t>    – ClassNK-NAPA 全尺度试航（2014）</a:t>
-            </a:r>
-          </a:p>
-          <a:p>
-            <a:pPr algn="l">
-              <a:lnSpc>
-                <a:spcPct val="115000"/>
-              </a:lnSpc>
-              <a:spcAft>
-                <a:spcPts val="800"/>
-              </a:spcAft>
-            </a:pPr>
-            <a:r>
-              <a:rPr sz="1300" b="1">
-                <a:solidFill>
-                  <a:srgbClr val="2CA02C"/>
-                </a:solidFill>
-                <a:latin typeface="Noto Sans CJK SC"/>
-              </a:rPr>
-              <a:t>▪ 部署案例与法规</a:t>
-            </a:r>
-          </a:p>
-          <a:p>
-            <a:pPr algn="l">
-              <a:lnSpc>
-                <a:spcPct val="115000"/>
-              </a:lnSpc>
-              <a:spcAft>
-                <a:spcPts val="400"/>
-              </a:spcAft>
-            </a:pPr>
-            <a:r>
-              <a:rPr sz="1150" b="0">
-                <a:solidFill>
-                  <a:srgbClr val="1B2A4A"/>
-                </a:solidFill>
-                <a:latin typeface="Noto Sans CJK SC"/>
-              </a:rPr>
-              <a:t>    – ABB / Wärtsilä-Eniram / Yara / Kongsberg / NAPA / DeepSea / Anschütz / Orca AI 官方资料</a:t>
-            </a:r>
-          </a:p>
-          <a:p>
-            <a:pPr algn="l">
-              <a:lnSpc>
-                <a:spcPct val="115000"/>
-              </a:lnSpc>
-              <a:spcAft>
-                <a:spcPts val="400"/>
-              </a:spcAft>
-            </a:pPr>
-            <a:r>
-              <a:rPr sz="1150" b="0">
-                <a:solidFill>
-                  <a:srgbClr val="1B2A4A"/>
-                </a:solidFill>
-                <a:latin typeface="Noto Sans CJK SC"/>
-              </a:rPr>
-              <a:t>    – IMO EEXI/CII 官方 FAQ（MEPC.328(76) 等）</a:t>
-            </a:r>
-          </a:p>
-        </p:txBody>
-      </p:sp>
-      <p:sp>
-        <p:nvSpPr>
-          <p:cNvPr id="7" name="TextBox 6"/>
           <p:cNvSpPr txBox="1"/>
           <p:nvPr/>
         </p:nvSpPr>
@@ -9132,7 +8863,7 @@
                 </a:solidFill>
                 <a:latin typeface="Noto Sans CJK SC"/>
               </a:rPr>
-              <a:t>19 / 20</a:t>
+              <a:t>2 / 19</a:t>
             </a:r>
           </a:p>
         </p:txBody>
@@ -9145,7 +8876,7 @@
 </p:sld>
 </file>
 
-<file path=ppt/slides/slide2.xml><?xml version="1.0" encoding="utf-8"?>
+<file path=ppt/slides/slide3.xml><?xml version="1.0" encoding="utf-8"?>
 <p:sld xmlns:a="http://schemas.openxmlformats.org/drawingml/2006/main" xmlns:p="http://schemas.openxmlformats.org/presentationml/2006/main" xmlns:r="http://schemas.openxmlformats.org/officeDocument/2006/relationships">
   <p:cSld>
     <p:spTree>
@@ -9235,7 +8966,7 @@
                 </a:solidFill>
                 <a:latin typeface="Noto Sans CJK SC"/>
               </a:rPr>
-              <a:t>汇报提纲</a:t>
+              <a:t>技术背景：船舶节能与先进控制的双重机遇</a:t>
             </a:r>
           </a:p>
         </p:txBody>
@@ -9248,8 +8979,8 @@
         </p:nvSpPr>
         <p:spPr>
           <a:xfrm>
-            <a:off x="914400" y="1463040"/>
-            <a:ext cx="10058400" cy="5029200"/>
+            <a:off x="475488" y="914400"/>
+            <a:ext cx="11247120" cy="457200"/>
           </a:xfrm>
           <a:prstGeom prst="rect">
             <a:avLst/>
@@ -9267,17 +8998,78 @@
                 <a:spcPct val="115000"/>
               </a:lnSpc>
               <a:spcAft>
+                <a:spcPts val="600"/>
+              </a:spcAft>
+            </a:pPr>
+            <a:r>
+              <a:rPr sz="1400" b="0">
+                <a:solidFill>
+                  <a:srgbClr val="666666"/>
+                </a:solidFill>
+                <a:latin typeface="Noto Sans CJK SC"/>
+              </a:rPr>
+              <a:t>能耗痛点 + 控制理论下沉</a:t>
+            </a:r>
+          </a:p>
+        </p:txBody>
+      </p:sp>
+      <p:sp>
+        <p:nvSpPr>
+          <p:cNvPr id="5" name="TextBox 4"/>
+          <p:cNvSpPr txBox="1"/>
+          <p:nvPr/>
+        </p:nvSpPr>
+        <p:spPr>
+          <a:xfrm>
+            <a:off x="548640" y="1554480"/>
+            <a:ext cx="5852160" cy="4937760"/>
+          </a:xfrm>
+          <a:prstGeom prst="rect">
+            <a:avLst/>
+          </a:prstGeom>
+          <a:noFill/>
+        </p:spPr>
+        <p:txBody>
+          <a:bodyPr wrap="square" anchor="t">
+            <a:spAutoFit/>
+          </a:bodyPr>
+          <a:lstStyle/>
+          <a:p>
+            <a:pPr algn="l">
+              <a:lnSpc>
+                <a:spcPct val="115000"/>
+              </a:lnSpc>
+              <a:spcAft>
                 <a:spcPts val="800"/>
               </a:spcAft>
             </a:pPr>
             <a:r>
-              <a:rPr sz="1900" b="0">
+              <a:rPr sz="1500" b="1">
+                <a:solidFill>
+                  <a:srgbClr val="1F77B4"/>
+                </a:solidFill>
+                <a:latin typeface="Noto Sans CJK SC"/>
+              </a:rPr>
+              <a:t>▪ 船舶运营中的能耗痛点</a:t>
+            </a:r>
+          </a:p>
+          <a:p>
+            <a:pPr algn="l">
+              <a:lnSpc>
+                <a:spcPct val="115000"/>
+              </a:lnSpc>
+              <a:spcAft>
+                <a:spcPts val="400"/>
+              </a:spcAft>
+            </a:pPr>
+            <a:r>
+              <a:rPr sz="1350" b="0">
                 <a:solidFill>
                   <a:srgbClr val="1B2A4A"/>
                 </a:solidFill>
                 <a:latin typeface="Noto Sans CJK SC"/>
               </a:rPr>
-              <a:t>▪ 01  背景与法规驱动：EEXI/CII 机制详解，MPC 向船舶控制下沉</a:t>
+              <a:t>    – 推进能耗是船舶运营能耗的主体，效率提升直接折算为成本下降</a:t>
             </a:r>
           </a:p>
           <a:p>
@@ -9286,17 +9078,74 @@
                 <a:spcPct val="115000"/>
               </a:lnSpc>
               <a:spcAft>
+                <a:spcPts val="400"/>
+              </a:spcAft>
+            </a:pPr>
+            <a:r>
+              <a:rPr sz="1350" b="0">
+                <a:solidFill>
+                  <a:srgbClr val="1B2A4A"/>
+                </a:solidFill>
+                <a:latin typeface="Noto Sans CJK SC"/>
+              </a:rPr>
+              <a:t>    – 无效操舵增加舵致附加阻力与舵机磨损：自适应操舵平均减少舵动作约 25%（Anschütz 运营数据）</a:t>
+            </a:r>
+          </a:p>
+          <a:p>
+            <a:pPr algn="l">
+              <a:lnSpc>
+                <a:spcPct val="115000"/>
+              </a:lnSpc>
+              <a:spcAft>
+                <a:spcPts val="400"/>
+              </a:spcAft>
+            </a:pPr>
+            <a:r>
+              <a:rPr sz="1350" b="0">
+                <a:solidFill>
+                  <a:srgbClr val="1B2A4A"/>
+                </a:solidFill>
+                <a:latin typeface="Noto Sans CJK SC"/>
+              </a:rPr>
+              <a:t>    – 风浪流干扰下的航向/航迹偏差放大实际航程</a:t>
+            </a:r>
+          </a:p>
+          <a:p>
+            <a:pPr algn="l">
+              <a:lnSpc>
+                <a:spcPct val="115000"/>
+              </a:lnSpc>
+              <a:spcAft>
                 <a:spcPts val="800"/>
               </a:spcAft>
             </a:pPr>
             <a:r>
-              <a:rPr sz="1900" b="0">
+              <a:rPr sz="1500" b="1">
+                <a:solidFill>
+                  <a:srgbClr val="1F77B4"/>
+                </a:solidFill>
+                <a:latin typeface="Noto Sans CJK SC"/>
+              </a:rPr>
+              <a:t>▪ MPC 向船舶控制下沉</a:t>
+            </a:r>
+          </a:p>
+          <a:p>
+            <a:pPr algn="l">
+              <a:lnSpc>
+                <a:spcPct val="115000"/>
+              </a:lnSpc>
+              <a:spcAft>
+                <a:spcPts val="400"/>
+              </a:spcAft>
+            </a:pPr>
+            <a:r>
+              <a:rPr sz="1350" b="0">
                 <a:solidFill>
                   <a:srgbClr val="1B2A4A"/>
                 </a:solidFill>
                 <a:latin typeface="Noto Sans CJK SC"/>
               </a:rPr>
-              <a:t>▪ 02  MPC vs PD 自动舵：原理、控制效果、证据强度、调试难度、实时性与稳定性</a:t>
+              <a:t>    – 嵌入式 QP 求解器成熟：水下机器人实测 7 ms @ 20 Hz（acados，JMSE 2024）</a:t>
             </a:r>
           </a:p>
           <a:p>
@@ -9305,17 +9154,17 @@
                 <a:spcPct val="115000"/>
               </a:lnSpc>
               <a:spcAft>
-                <a:spcPts val="800"/>
-              </a:spcAft>
-            </a:pPr>
-            <a:r>
-              <a:rPr sz="1900" b="0">
+                <a:spcPts val="400"/>
+              </a:spcAft>
+            </a:pPr>
+            <a:r>
+              <a:rPr sz="1350" b="0">
                 <a:solidFill>
                   <a:srgbClr val="1B2A4A"/>
                 </a:solidFill>
                 <a:latin typeface="Noto Sans CJK SC"/>
               </a:rPr>
-              <a:t>▪ 03  船舶节能五大算法路线：节能率、关键数据、优缺点</a:t>
+              <a:t>    – 船舶航向动态慢（控制周期 0.1–0.2 s），算力足够</a:t>
             </a:r>
           </a:p>
           <a:p>
@@ -9324,43 +9173,90 @@
                 <a:spcPct val="115000"/>
               </a:lnSpc>
               <a:spcAft>
-                <a:spcPts val="800"/>
-              </a:spcAft>
-            </a:pPr>
-            <a:r>
-              <a:rPr sz="1900" b="0">
+                <a:spcPts val="400"/>
+              </a:spcAft>
+            </a:pPr>
+            <a:r>
+              <a:rPr sz="1350" b="0">
                 <a:solidFill>
                   <a:srgbClr val="1B2A4A"/>
                 </a:solidFill>
                 <a:latin typeface="Noto Sans CJK SC"/>
               </a:rPr>
-              <a:t>▪ 04  工业部署案例：规模化部署与实测细节</a:t>
-            </a:r>
-          </a:p>
-          <a:p>
-            <a:pPr algn="l">
-              <a:lnSpc>
-                <a:spcPct val="115000"/>
-              </a:lnSpc>
-              <a:spcAft>
-                <a:spcPts val="800"/>
-              </a:spcAft>
-            </a:pPr>
-            <a:r>
-              <a:rPr sz="1900" b="0">
-                <a:solidFill>
-                  <a:srgbClr val="1B2A4A"/>
-                </a:solidFill>
-                <a:latin typeface="Noto Sans CJK SC"/>
-              </a:rPr>
-              <a:t>▪ 05  技术趋势判断与本项目落地建议</a:t>
-            </a:r>
-          </a:p>
-        </p:txBody>
-      </p:sp>
-      <p:sp>
-        <p:nvSpPr>
-          <p:cNvPr id="5" name="TextBox 4"/>
+              <a:t>    – 学术界大量仿真/船模成果，实船落地仍少</a:t>
+            </a:r>
+          </a:p>
+        </p:txBody>
+      </p:sp>
+      <p:pic>
+        <p:nvPicPr>
+          <p:cNvPr id="6" name="Picture 5" descr="fig6_architecture.png"/>
+          <p:cNvPicPr>
+            <a:picLocks noChangeAspect="1"/>
+          </p:cNvPicPr>
+          <p:nvPr/>
+        </p:nvPicPr>
+        <p:blipFill>
+          <a:blip r:embed="rId2"/>
+          <a:stretch>
+            <a:fillRect/>
+          </a:stretch>
+        </p:blipFill>
+        <p:spPr>
+          <a:xfrm>
+            <a:off x="6492240" y="2359152"/>
+            <a:ext cx="5394960" cy="3236976"/>
+          </a:xfrm>
+          <a:prstGeom prst="rect">
+            <a:avLst/>
+          </a:prstGeom>
+        </p:spPr>
+      </p:pic>
+      <p:sp>
+        <p:nvSpPr>
+          <p:cNvPr id="7" name="TextBox 6"/>
+          <p:cNvSpPr txBox="1"/>
+          <p:nvPr/>
+        </p:nvSpPr>
+        <p:spPr>
+          <a:xfrm>
+            <a:off x="6492240" y="6309360"/>
+            <a:ext cx="5394960" cy="365760"/>
+          </a:xfrm>
+          <a:prstGeom prst="rect">
+            <a:avLst/>
+          </a:prstGeom>
+          <a:noFill/>
+        </p:spPr>
+        <p:txBody>
+          <a:bodyPr wrap="square" anchor="t">
+            <a:spAutoFit/>
+          </a:bodyPr>
+          <a:lstStyle/>
+          <a:p>
+            <a:pPr algn="ctr">
+              <a:lnSpc>
+                <a:spcPct val="115000"/>
+              </a:lnSpc>
+              <a:spcAft>
+                <a:spcPts val="600"/>
+              </a:spcAft>
+            </a:pPr>
+            <a:r>
+              <a:rPr sz="1200" b="0">
+                <a:solidFill>
+                  <a:srgbClr val="666666"/>
+                </a:solidFill>
+                <a:latin typeface="Noto Sans CJK SC"/>
+              </a:rPr>
+              <a:t>船舶节能分层架构总览</a:t>
+            </a:r>
+          </a:p>
+        </p:txBody>
+      </p:sp>
+      <p:sp>
+        <p:nvSpPr>
+          <p:cNvPr id="8" name="TextBox 7"/>
           <p:cNvSpPr txBox="1"/>
           <p:nvPr/>
         </p:nvSpPr>
@@ -9395,7 +9291,7 @@
                 </a:solidFill>
                 <a:latin typeface="Noto Sans CJK SC"/>
               </a:rPr>
-              <a:t>2 / 20</a:t>
+              <a:t>3 / 19</a:t>
             </a:r>
           </a:p>
         </p:txBody>
@@ -9408,171 +9304,7 @@
 </p:sld>
 </file>
 
-<file path=ppt/slides/slide20.xml><?xml version="1.0" encoding="utf-8"?>
-<p:sld xmlns:a="http://schemas.openxmlformats.org/drawingml/2006/main" xmlns:p="http://schemas.openxmlformats.org/presentationml/2006/main" xmlns:r="http://schemas.openxmlformats.org/officeDocument/2006/relationships">
-  <p:cSld>
-    <p:spTree>
-      <p:nvGrpSpPr>
-        <p:cNvPr id="1" name=""/>
-        <p:cNvGrpSpPr/>
-        <p:nvPr/>
-      </p:nvGrpSpPr>
-      <p:grpSpPr/>
-      <p:sp>
-        <p:nvSpPr>
-          <p:cNvPr id="2" name="Rectangle 1"/>
-          <p:cNvSpPr/>
-          <p:nvPr/>
-        </p:nvSpPr>
-        <p:spPr>
-          <a:xfrm>
-            <a:off x="0" y="0"/>
-            <a:ext cx="12191695" cy="6858000"/>
-          </a:xfrm>
-          <a:prstGeom prst="rect">
-            <a:avLst/>
-          </a:prstGeom>
-          <a:solidFill>
-            <a:srgbClr val="1B2A4A"/>
-          </a:solidFill>
-          <a:ln>
-            <a:noFill/>
-          </a:ln>
-        </p:spPr>
-        <p:style>
-          <a:lnRef idx="1">
-            <a:schemeClr val="accent1"/>
-          </a:lnRef>
-          <a:fillRef idx="3">
-            <a:schemeClr val="accent1"/>
-          </a:fillRef>
-          <a:effectRef idx="2">
-            <a:schemeClr val="accent1"/>
-          </a:effectRef>
-          <a:fontRef idx="minor">
-            <a:schemeClr val="lt1"/>
-          </a:fontRef>
-        </p:style>
-        <p:txBody>
-          <a:bodyPr rtlCol="0" anchor="ctr"/>
-          <a:lstStyle/>
-          <a:p>
-            <a:pPr algn="ctr"/>
-          </a:p>
-        </p:txBody>
-      </p:sp>
-      <p:sp>
-        <p:nvSpPr>
-          <p:cNvPr id="3" name="TextBox 2"/>
-          <p:cNvSpPr txBox="1"/>
-          <p:nvPr/>
-        </p:nvSpPr>
-        <p:spPr>
-          <a:xfrm>
-            <a:off x="914400" y="2377440"/>
-            <a:ext cx="10332720" cy="1097280"/>
-          </a:xfrm>
-          <a:prstGeom prst="rect">
-            <a:avLst/>
-          </a:prstGeom>
-          <a:noFill/>
-        </p:spPr>
-        <p:txBody>
-          <a:bodyPr wrap="square" anchor="t">
-            <a:spAutoFit/>
-          </a:bodyPr>
-          <a:lstStyle/>
-          <a:p>
-            <a:pPr algn="ctr">
-              <a:lnSpc>
-                <a:spcPct val="115000"/>
-              </a:lnSpc>
-              <a:spcAft>
-                <a:spcPts val="600"/>
-              </a:spcAft>
-            </a:pPr>
-            <a:r>
-              <a:rPr sz="4800" b="1">
-                <a:solidFill>
-                  <a:srgbClr val="FFFFFF"/>
-                </a:solidFill>
-                <a:latin typeface="Noto Sans CJK SC"/>
-              </a:rPr>
-              <a:t>谢 谢</a:t>
-            </a:r>
-          </a:p>
-        </p:txBody>
-      </p:sp>
-      <p:sp>
-        <p:nvSpPr>
-          <p:cNvPr id="4" name="TextBox 3"/>
-          <p:cNvSpPr txBox="1"/>
-          <p:nvPr/>
-        </p:nvSpPr>
-        <p:spPr>
-          <a:xfrm>
-            <a:off x="914400" y="3840480"/>
-            <a:ext cx="10332720" cy="1371600"/>
-          </a:xfrm>
-          <a:prstGeom prst="rect">
-            <a:avLst/>
-          </a:prstGeom>
-          <a:noFill/>
-        </p:spPr>
-        <p:txBody>
-          <a:bodyPr wrap="square" anchor="t">
-            <a:spAutoFit/>
-          </a:bodyPr>
-          <a:lstStyle/>
-          <a:p>
-            <a:pPr algn="ctr">
-              <a:lnSpc>
-                <a:spcPct val="115000"/>
-              </a:lnSpc>
-              <a:spcAft>
-                <a:spcPts val="600"/>
-              </a:spcAft>
-            </a:pPr>
-            <a:r>
-              <a:rPr sz="1500" b="0">
-                <a:solidFill>
-                  <a:srgbClr val="9FC5E8"/>
-                </a:solidFill>
-                <a:latin typeface="Noto Sans CJK SC"/>
-              </a:rPr>
-              <a:t>完整数据与 45 条参考文献：docs/ship_energy_research/MPC与船舶节能算法调研文档.md</a:t>
-            </a:r>
-          </a:p>
-          <a:p>
-            <a:pPr algn="ctr">
-              <a:lnSpc>
-                <a:spcPct val="115000"/>
-              </a:lnSpc>
-              <a:spcAft>
-                <a:spcPts val="600"/>
-              </a:spcAft>
-            </a:pPr>
-            <a:r>
-              <a:rPr sz="1500" b="0">
-                <a:solidFill>
-                  <a:srgbClr val="9FC5E8"/>
-                </a:solidFill>
-                <a:latin typeface="Noto Sans CJK SC"/>
-              </a:rPr>
-              <a:t>所有定量数据经两轮来源核对，修正记录见文档附录 A</a:t>
-            </a:r>
-          </a:p>
-        </p:txBody>
-      </p:sp>
-    </p:spTree>
-  </p:cSld>
-  <p:clrMapOvr>
-    <a:masterClrMapping/>
-  </p:clrMapOvr>
-</p:sld>
-</file>
-
-<file path=ppt/slides/slide3.xml><?xml version="1.0" encoding="utf-8"?>
+<file path=ppt/slides/slide4.xml><?xml version="1.0" encoding="utf-8"?>
 <p:sld xmlns:a="http://schemas.openxmlformats.org/drawingml/2006/main" xmlns:p="http://schemas.openxmlformats.org/presentationml/2006/main" xmlns:r="http://schemas.openxmlformats.org/officeDocument/2006/relationships">
   <p:cSld>
     <p:spTree>
@@ -9662,1215 +9394,6 @@
                 </a:solidFill>
                 <a:latin typeface="Noto Sans CJK SC"/>
               </a:rPr>
-              <a:t>背景：节能从「可选项」变为「合规刚需」</a:t>
-            </a:r>
-          </a:p>
-        </p:txBody>
-      </p:sp>
-      <p:sp>
-        <p:nvSpPr>
-          <p:cNvPr id="4" name="TextBox 3"/>
-          <p:cNvSpPr txBox="1"/>
-          <p:nvPr/>
-        </p:nvSpPr>
-        <p:spPr>
-          <a:xfrm>
-            <a:off x="475488" y="914400"/>
-            <a:ext cx="11247120" cy="457200"/>
-          </a:xfrm>
-          <a:prstGeom prst="rect">
-            <a:avLst/>
-          </a:prstGeom>
-          <a:noFill/>
-        </p:spPr>
-        <p:txBody>
-          <a:bodyPr wrap="square" anchor="t">
-            <a:spAutoFit/>
-          </a:bodyPr>
-          <a:lstStyle/>
-          <a:p>
-            <a:pPr algn="l">
-              <a:lnSpc>
-                <a:spcPct val="115000"/>
-              </a:lnSpc>
-              <a:spcAft>
-                <a:spcPts val="600"/>
-              </a:spcAft>
-            </a:pPr>
-            <a:r>
-              <a:rPr sz="1400" b="0">
-                <a:solidFill>
-                  <a:srgbClr val="666666"/>
-                </a:solidFill>
-                <a:latin typeface="Noto Sans CJK SC"/>
-              </a:rPr>
-              <a:t>法规 + 控制理论双重驱动</a:t>
-            </a:r>
-          </a:p>
-        </p:txBody>
-      </p:sp>
-      <p:sp>
-        <p:nvSpPr>
-          <p:cNvPr id="5" name="TextBox 4"/>
-          <p:cNvSpPr txBox="1"/>
-          <p:nvPr/>
-        </p:nvSpPr>
-        <p:spPr>
-          <a:xfrm>
-            <a:off x="548640" y="1554480"/>
-            <a:ext cx="5852160" cy="4937760"/>
-          </a:xfrm>
-          <a:prstGeom prst="rect">
-            <a:avLst/>
-          </a:prstGeom>
-          <a:noFill/>
-        </p:spPr>
-        <p:txBody>
-          <a:bodyPr wrap="square" anchor="t">
-            <a:spAutoFit/>
-          </a:bodyPr>
-          <a:lstStyle/>
-          <a:p>
-            <a:pPr algn="l">
-              <a:lnSpc>
-                <a:spcPct val="115000"/>
-              </a:lnSpc>
-              <a:spcAft>
-                <a:spcPts val="800"/>
-              </a:spcAft>
-            </a:pPr>
-            <a:r>
-              <a:rPr sz="1500" b="1">
-                <a:solidFill>
-                  <a:srgbClr val="1F77B4"/>
-                </a:solidFill>
-                <a:latin typeface="Noto Sans CJK SC"/>
-              </a:rPr>
-              <a:t>▪ IMO EEXI / CII 强制生效（2023-01-01）</a:t>
-            </a:r>
-          </a:p>
-          <a:p>
-            <a:pPr algn="l">
-              <a:lnSpc>
-                <a:spcPct val="115000"/>
-              </a:lnSpc>
-              <a:spcAft>
-                <a:spcPts val="400"/>
-              </a:spcAft>
-            </a:pPr>
-            <a:r>
-              <a:rPr sz="1350" b="0">
-                <a:solidFill>
-                  <a:srgbClr val="1B2A4A"/>
-                </a:solidFill>
-                <a:latin typeface="Noto Sans CJK SC"/>
-              </a:rPr>
-              <a:t>    – EEXI：≥400 GT，一次性技术能效合规</a:t>
-            </a:r>
-          </a:p>
-          <a:p>
-            <a:pPr algn="l">
-              <a:lnSpc>
-                <a:spcPct val="115000"/>
-              </a:lnSpc>
-              <a:spcAft>
-                <a:spcPts val="400"/>
-              </a:spcAft>
-            </a:pPr>
-            <a:r>
-              <a:rPr sz="1350" b="0">
-                <a:solidFill>
-                  <a:srgbClr val="1B2A4A"/>
-                </a:solidFill>
-                <a:latin typeface="Noto Sans CJK SC"/>
-              </a:rPr>
-              <a:t>    – CII：≥5,000 GT，年度碳强度 A–E 评级</a:t>
-            </a:r>
-          </a:p>
-          <a:p>
-            <a:pPr algn="l">
-              <a:lnSpc>
-                <a:spcPct val="115000"/>
-              </a:lnSpc>
-              <a:spcAft>
-                <a:spcPts val="400"/>
-              </a:spcAft>
-            </a:pPr>
-            <a:r>
-              <a:rPr sz="1350" b="0">
-                <a:solidFill>
-                  <a:srgbClr val="1B2A4A"/>
-                </a:solidFill>
-                <a:latin typeface="Noto Sans CJK SC"/>
-              </a:rPr>
-              <a:t>    – 连续 3 年 D 或 1 年 E → 必须提交纠正计划</a:t>
-            </a:r>
-          </a:p>
-          <a:p>
-            <a:pPr algn="l">
-              <a:lnSpc>
-                <a:spcPct val="115000"/>
-              </a:lnSpc>
-              <a:spcAft>
-                <a:spcPts val="400"/>
-              </a:spcAft>
-            </a:pPr>
-            <a:r>
-              <a:rPr sz="1350" b="0">
-                <a:solidFill>
-                  <a:srgbClr val="1B2A4A"/>
-                </a:solidFill>
-                <a:latin typeface="Noto Sans CJK SC"/>
-              </a:rPr>
-              <a:t>    – EU ETS 2024 年起纳入航运，碳成本显性化</a:t>
-            </a:r>
-          </a:p>
-          <a:p>
-            <a:pPr algn="l">
-              <a:lnSpc>
-                <a:spcPct val="115000"/>
-              </a:lnSpc>
-              <a:spcAft>
-                <a:spcPts val="800"/>
-              </a:spcAft>
-            </a:pPr>
-            <a:r>
-              <a:rPr sz="1500" b="1">
-                <a:solidFill>
-                  <a:srgbClr val="1F77B4"/>
-                </a:solidFill>
-                <a:latin typeface="Noto Sans CJK SC"/>
-              </a:rPr>
-              <a:t>▪ MPC 向船舶控制下沉</a:t>
-            </a:r>
-          </a:p>
-          <a:p>
-            <a:pPr algn="l">
-              <a:lnSpc>
-                <a:spcPct val="115000"/>
-              </a:lnSpc>
-              <a:spcAft>
-                <a:spcPts val="400"/>
-              </a:spcAft>
-            </a:pPr>
-            <a:r>
-              <a:rPr sz="1350" b="0">
-                <a:solidFill>
-                  <a:srgbClr val="1B2A4A"/>
-                </a:solidFill>
-                <a:latin typeface="Noto Sans CJK SC"/>
-              </a:rPr>
-              <a:t>    – 嵌入式 QP 求解器成熟：水下机器人实测 7 ms @ 20 Hz（acados，JMSE 2024）</a:t>
-            </a:r>
-          </a:p>
-          <a:p>
-            <a:pPr algn="l">
-              <a:lnSpc>
-                <a:spcPct val="115000"/>
-              </a:lnSpc>
-              <a:spcAft>
-                <a:spcPts val="400"/>
-              </a:spcAft>
-            </a:pPr>
-            <a:r>
-              <a:rPr sz="1350" b="0">
-                <a:solidFill>
-                  <a:srgbClr val="1B2A4A"/>
-                </a:solidFill>
-                <a:latin typeface="Noto Sans CJK SC"/>
-              </a:rPr>
-              <a:t>    – 船舶航向动态慢（控制周期 0.1–0.2 s），算力足够</a:t>
-            </a:r>
-          </a:p>
-          <a:p>
-            <a:pPr algn="l">
-              <a:lnSpc>
-                <a:spcPct val="115000"/>
-              </a:lnSpc>
-              <a:spcAft>
-                <a:spcPts val="400"/>
-              </a:spcAft>
-            </a:pPr>
-            <a:r>
-              <a:rPr sz="1350" b="0">
-                <a:solidFill>
-                  <a:srgbClr val="1B2A4A"/>
-                </a:solidFill>
-                <a:latin typeface="Noto Sans CJK SC"/>
-              </a:rPr>
-              <a:t>    – 学术界大量仿真/船模成果，实船落地仍少</a:t>
-            </a:r>
-          </a:p>
-        </p:txBody>
-      </p:sp>
-      <p:pic>
-        <p:nvPicPr>
-          <p:cNvPr id="6" name="Picture 5" descr="fig6_architecture.png"/>
-          <p:cNvPicPr>
-            <a:picLocks noChangeAspect="1"/>
-          </p:cNvPicPr>
-          <p:nvPr/>
-        </p:nvPicPr>
-        <p:blipFill>
-          <a:blip r:embed="rId2"/>
-          <a:stretch>
-            <a:fillRect/>
-          </a:stretch>
-        </p:blipFill>
-        <p:spPr>
-          <a:xfrm>
-            <a:off x="6492240" y="2359152"/>
-            <a:ext cx="5394960" cy="3236976"/>
-          </a:xfrm>
-          <a:prstGeom prst="rect">
-            <a:avLst/>
-          </a:prstGeom>
-        </p:spPr>
-      </p:pic>
-      <p:sp>
-        <p:nvSpPr>
-          <p:cNvPr id="7" name="TextBox 6"/>
-          <p:cNvSpPr txBox="1"/>
-          <p:nvPr/>
-        </p:nvSpPr>
-        <p:spPr>
-          <a:xfrm>
-            <a:off x="6492240" y="6309360"/>
-            <a:ext cx="5394960" cy="365760"/>
-          </a:xfrm>
-          <a:prstGeom prst="rect">
-            <a:avLst/>
-          </a:prstGeom>
-          <a:noFill/>
-        </p:spPr>
-        <p:txBody>
-          <a:bodyPr wrap="square" anchor="t">
-            <a:spAutoFit/>
-          </a:bodyPr>
-          <a:lstStyle/>
-          <a:p>
-            <a:pPr algn="ctr">
-              <a:lnSpc>
-                <a:spcPct val="115000"/>
-              </a:lnSpc>
-              <a:spcAft>
-                <a:spcPts val="600"/>
-              </a:spcAft>
-            </a:pPr>
-            <a:r>
-              <a:rPr sz="1200" b="0">
-                <a:solidFill>
-                  <a:srgbClr val="666666"/>
-                </a:solidFill>
-                <a:latin typeface="Noto Sans CJK SC"/>
-              </a:rPr>
-              <a:t>船舶节能分层架构总览</a:t>
-            </a:r>
-          </a:p>
-        </p:txBody>
-      </p:sp>
-      <p:sp>
-        <p:nvSpPr>
-          <p:cNvPr id="8" name="TextBox 7"/>
-          <p:cNvSpPr txBox="1"/>
-          <p:nvPr/>
-        </p:nvSpPr>
-        <p:spPr>
-          <a:xfrm>
-            <a:off x="11475720" y="6473952"/>
-            <a:ext cx="640080" cy="320040"/>
-          </a:xfrm>
-          <a:prstGeom prst="rect">
-            <a:avLst/>
-          </a:prstGeom>
-          <a:noFill/>
-        </p:spPr>
-        <p:txBody>
-          <a:bodyPr wrap="square" anchor="t">
-            <a:spAutoFit/>
-          </a:bodyPr>
-          <a:lstStyle/>
-          <a:p>
-            <a:pPr algn="r">
-              <a:lnSpc>
-                <a:spcPct val="115000"/>
-              </a:lnSpc>
-              <a:spcAft>
-                <a:spcPts val="600"/>
-              </a:spcAft>
-            </a:pPr>
-            <a:r>
-              <a:rPr sz="1100" b="0">
-                <a:solidFill>
-                  <a:srgbClr val="666666"/>
-                </a:solidFill>
-                <a:latin typeface="Noto Sans CJK SC"/>
-              </a:rPr>
-              <a:t>3 / 20</a:t>
-            </a:r>
-          </a:p>
-        </p:txBody>
-      </p:sp>
-    </p:spTree>
-  </p:cSld>
-  <p:clrMapOvr>
-    <a:masterClrMapping/>
-  </p:clrMapOvr>
-</p:sld>
-</file>
-
-<file path=ppt/slides/slide4.xml><?xml version="1.0" encoding="utf-8"?>
-<p:sld xmlns:a="http://schemas.openxmlformats.org/drawingml/2006/main" xmlns:p="http://schemas.openxmlformats.org/presentationml/2006/main" xmlns:r="http://schemas.openxmlformats.org/officeDocument/2006/relationships">
-  <p:cSld>
-    <p:spTree>
-      <p:nvGrpSpPr>
-        <p:cNvPr id="1" name=""/>
-        <p:cNvGrpSpPr/>
-        <p:nvPr/>
-      </p:nvGrpSpPr>
-      <p:grpSpPr/>
-      <p:sp>
-        <p:nvSpPr>
-          <p:cNvPr id="2" name="Rectangle 1"/>
-          <p:cNvSpPr/>
-          <p:nvPr/>
-        </p:nvSpPr>
-        <p:spPr>
-          <a:xfrm>
-            <a:off x="0" y="0"/>
-            <a:ext cx="12191695" cy="109728"/>
-          </a:xfrm>
-          <a:prstGeom prst="rect">
-            <a:avLst/>
-          </a:prstGeom>
-          <a:solidFill>
-            <a:srgbClr val="1F77B4"/>
-          </a:solidFill>
-          <a:ln>
-            <a:noFill/>
-          </a:ln>
-        </p:spPr>
-        <p:style>
-          <a:lnRef idx="1">
-            <a:schemeClr val="accent1"/>
-          </a:lnRef>
-          <a:fillRef idx="3">
-            <a:schemeClr val="accent1"/>
-          </a:fillRef>
-          <a:effectRef idx="2">
-            <a:schemeClr val="accent1"/>
-          </a:effectRef>
-          <a:fontRef idx="minor">
-            <a:schemeClr val="lt1"/>
-          </a:fontRef>
-        </p:style>
-        <p:txBody>
-          <a:bodyPr rtlCol="0" anchor="ctr"/>
-          <a:lstStyle/>
-          <a:p>
-            <a:pPr algn="ctr"/>
-          </a:p>
-        </p:txBody>
-      </p:sp>
-      <p:sp>
-        <p:nvSpPr>
-          <p:cNvPr id="3" name="TextBox 2"/>
-          <p:cNvSpPr txBox="1"/>
-          <p:nvPr/>
-        </p:nvSpPr>
-        <p:spPr>
-          <a:xfrm>
-            <a:off x="457200" y="256032"/>
-            <a:ext cx="11247120" cy="822960"/>
-          </a:xfrm>
-          <a:prstGeom prst="rect">
-            <a:avLst/>
-          </a:prstGeom>
-          <a:noFill/>
-        </p:spPr>
-        <p:txBody>
-          <a:bodyPr wrap="square" anchor="t">
-            <a:spAutoFit/>
-          </a:bodyPr>
-          <a:lstStyle/>
-          <a:p>
-            <a:pPr algn="l">
-              <a:lnSpc>
-                <a:spcPct val="115000"/>
-              </a:lnSpc>
-              <a:spcAft>
-                <a:spcPts val="600"/>
-              </a:spcAft>
-            </a:pPr>
-            <a:r>
-              <a:rPr sz="3000" b="1">
-                <a:solidFill>
-                  <a:srgbClr val="1B2A4A"/>
-                </a:solidFill>
-                <a:latin typeface="Noto Sans CJK SC"/>
-              </a:rPr>
-              <a:t>法规背景详解：EEXI 与 CII 的约束机制</a:t>
-            </a:r>
-          </a:p>
-        </p:txBody>
-      </p:sp>
-      <p:sp>
-        <p:nvSpPr>
-          <p:cNvPr id="4" name="TextBox 3"/>
-          <p:cNvSpPr txBox="1"/>
-          <p:nvPr/>
-        </p:nvSpPr>
-        <p:spPr>
-          <a:xfrm>
-            <a:off x="475488" y="914400"/>
-            <a:ext cx="11247120" cy="457200"/>
-          </a:xfrm>
-          <a:prstGeom prst="rect">
-            <a:avLst/>
-          </a:prstGeom>
-          <a:noFill/>
-        </p:spPr>
-        <p:txBody>
-          <a:bodyPr wrap="square" anchor="t">
-            <a:spAutoFit/>
-          </a:bodyPr>
-          <a:lstStyle/>
-          <a:p>
-            <a:pPr algn="l">
-              <a:lnSpc>
-                <a:spcPct val="115000"/>
-              </a:lnSpc>
-              <a:spcAft>
-                <a:spcPts val="600"/>
-              </a:spcAft>
-            </a:pPr>
-            <a:r>
-              <a:rPr sz="1400" b="0">
-                <a:solidFill>
-                  <a:srgbClr val="666666"/>
-                </a:solidFill>
-                <a:latin typeface="Noto Sans CJK SC"/>
-              </a:rPr>
-              <a:t>MARPOL 附则 VI 修正案（MEPC.328(76)），IMO 官方 FAQ 口径</a:t>
-            </a:r>
-          </a:p>
-        </p:txBody>
-      </p:sp>
-      <p:graphicFrame>
-        <p:nvGraphicFramePr>
-          <p:cNvPr id="5" name="Table 4"/>
-          <p:cNvGraphicFramePr>
-            <a:graphicFrameLocks noGrp="1"/>
-          </p:cNvGraphicFramePr>
-          <p:nvPr/>
-        </p:nvGraphicFramePr>
-        <p:xfrm>
-          <a:off x="457200" y="1554480"/>
-          <a:ext cx="11338560" cy="3291840"/>
-        </p:xfrm>
-        <a:graphic>
-          <a:graphicData uri="http://schemas.openxmlformats.org/drawingml/2006/table">
-            <a:tbl>
-              <a:tblPr firstRow="1" bandRow="1">
-                <a:tableStyleId>{5C22544A-7EE6-4342-B048-85BDC9FD1C3A}</a:tableStyleId>
-              </a:tblPr>
-              <a:tblGrid>
-                <a:gridCol w="1700784"/>
-                <a:gridCol w="4535424"/>
-                <a:gridCol w="5102352"/>
-              </a:tblGrid>
-              <a:tr h="658368">
-                <a:tc>
-                  <a:txBody>
-                    <a:bodyPr/>
-                    <a:lstStyle/>
-                    <a:p>
-                      <a:pPr>
-                        <a:lnSpc>
-                          <a:spcPct val="105000"/>
-                        </a:lnSpc>
-                      </a:pPr>
-                      <a:r>
-                        <a:rPr sz="1250" b="1">
-                          <a:solidFill>
-                            <a:srgbClr val="FFFFFF"/>
-                          </a:solidFill>
-                          <a:latin typeface="Noto Sans CJK SC"/>
-                        </a:rPr>
-                        <a:t>项目</a:t>
-                      </a:r>
-                    </a:p>
-                  </a:txBody>
-                  <a:tcPr marL="54864" marR="54864" marT="27432" marB="27432" anchor="ctr">
-                    <a:solidFill>
-                      <a:srgbClr val="1F77B4"/>
-                    </a:solidFill>
-                  </a:tcPr>
-                </a:tc>
-                <a:tc>
-                  <a:txBody>
-                    <a:bodyPr/>
-                    <a:lstStyle/>
-                    <a:p>
-                      <a:pPr>
-                        <a:lnSpc>
-                          <a:spcPct val="105000"/>
-                        </a:lnSpc>
-                      </a:pPr>
-                      <a:r>
-                        <a:rPr sz="1250" b="1">
-                          <a:solidFill>
-                            <a:srgbClr val="FFFFFF"/>
-                          </a:solidFill>
-                          <a:latin typeface="Noto Sans CJK SC"/>
-                        </a:rPr>
-                        <a:t>EEXI（技术能效指数）</a:t>
-                      </a:r>
-                    </a:p>
-                  </a:txBody>
-                  <a:tcPr marL="54864" marR="54864" marT="27432" marB="27432" anchor="ctr">
-                    <a:solidFill>
-                      <a:srgbClr val="1F77B4"/>
-                    </a:solidFill>
-                  </a:tcPr>
-                </a:tc>
-                <a:tc>
-                  <a:txBody>
-                    <a:bodyPr/>
-                    <a:lstStyle/>
-                    <a:p>
-                      <a:pPr>
-                        <a:lnSpc>
-                          <a:spcPct val="105000"/>
-                        </a:lnSpc>
-                      </a:pPr>
-                      <a:r>
-                        <a:rPr sz="1250" b="1">
-                          <a:solidFill>
-                            <a:srgbClr val="FFFFFF"/>
-                          </a:solidFill>
-                          <a:latin typeface="Noto Sans CJK SC"/>
-                        </a:rPr>
-                        <a:t>CII（营运碳强度指标）</a:t>
-                      </a:r>
-                    </a:p>
-                  </a:txBody>
-                  <a:tcPr marL="54864" marR="54864" marT="27432" marB="27432" anchor="ctr">
-                    <a:solidFill>
-                      <a:srgbClr val="1F77B4"/>
-                    </a:solidFill>
-                  </a:tcPr>
-                </a:tc>
-              </a:tr>
-              <a:tr h="658368">
-                <a:tc>
-                  <a:txBody>
-                    <a:bodyPr/>
-                    <a:lstStyle/>
-                    <a:p>
-                      <a:pPr>
-                        <a:lnSpc>
-                          <a:spcPct val="105000"/>
-                        </a:lnSpc>
-                      </a:pPr>
-                      <a:r>
-                        <a:rPr sz="1200" b="0">
-                          <a:solidFill>
-                            <a:srgbClr val="1B2A4A"/>
-                          </a:solidFill>
-                          <a:latin typeface="Noto Sans CJK SC"/>
-                        </a:rPr>
-                        <a:t>适用船舶</a:t>
-                      </a:r>
-                    </a:p>
-                  </a:txBody>
-                  <a:tcPr marL="54864" marR="54864" marT="27432" marB="27432" anchor="ctr"/>
-                </a:tc>
-                <a:tc>
-                  <a:txBody>
-                    <a:bodyPr/>
-                    <a:lstStyle/>
-                    <a:p>
-                      <a:pPr>
-                        <a:lnSpc>
-                          <a:spcPct val="105000"/>
-                        </a:lnSpc>
-                      </a:pPr>
-                      <a:r>
-                        <a:rPr sz="1200" b="0">
-                          <a:solidFill>
-                            <a:srgbClr val="1B2A4A"/>
-                          </a:solidFill>
-                          <a:latin typeface="Noto Sans CJK SC"/>
-                        </a:rPr>
-                        <a:t>≥400 GT 各船型</a:t>
-                      </a:r>
-                    </a:p>
-                  </a:txBody>
-                  <a:tcPr marL="54864" marR="54864" marT="27432" marB="27432" anchor="ctr"/>
-                </a:tc>
-                <a:tc>
-                  <a:txBody>
-                    <a:bodyPr/>
-                    <a:lstStyle/>
-                    <a:p>
-                      <a:pPr>
-                        <a:lnSpc>
-                          <a:spcPct val="105000"/>
-                        </a:lnSpc>
-                      </a:pPr>
-                      <a:r>
-                        <a:rPr sz="1200" b="0">
-                          <a:solidFill>
-                            <a:srgbClr val="1B2A4A"/>
-                          </a:solidFill>
-                          <a:latin typeface="Noto Sans CJK SC"/>
-                        </a:rPr>
-                        <a:t>≥5,000 GT 各船型</a:t>
-                      </a:r>
-                    </a:p>
-                  </a:txBody>
-                  <a:tcPr marL="54864" marR="54864" marT="27432" marB="27432" anchor="ctr"/>
-                </a:tc>
-              </a:tr>
-              <a:tr h="658368">
-                <a:tc>
-                  <a:txBody>
-                    <a:bodyPr/>
-                    <a:lstStyle/>
-                    <a:p>
-                      <a:pPr>
-                        <a:lnSpc>
-                          <a:spcPct val="105000"/>
-                        </a:lnSpc>
-                      </a:pPr>
-                      <a:r>
-                        <a:rPr sz="1200" b="0">
-                          <a:solidFill>
-                            <a:srgbClr val="1B2A4A"/>
-                          </a:solidFill>
-                          <a:latin typeface="Noto Sans CJK SC"/>
-                        </a:rPr>
-                        <a:t>核心机制</a:t>
-                      </a:r>
-                    </a:p>
-                  </a:txBody>
-                  <a:tcPr marL="54864" marR="54864" marT="27432" marB="27432" anchor="ctr">
-                    <a:solidFill>
-                      <a:srgbClr val="EEF3FA"/>
-                    </a:solidFill>
-                  </a:tcPr>
-                </a:tc>
-                <a:tc>
-                  <a:txBody>
-                    <a:bodyPr/>
-                    <a:lstStyle/>
-                    <a:p>
-                      <a:pPr>
-                        <a:lnSpc>
-                          <a:spcPct val="105000"/>
-                        </a:lnSpc>
-                      </a:pPr>
-                      <a:r>
-                        <a:rPr sz="1200" b="0">
-                          <a:solidFill>
-                            <a:srgbClr val="1B2A4A"/>
-                          </a:solidFill>
-                          <a:latin typeface="Noto Sans CJK SC"/>
-                        </a:rPr>
-                        <a:t>实际值 attained ≤ 要求值 required</a:t>
-                      </a:r>
-                    </a:p>
-                    <a:p>
-                      <a:pPr>
-                        <a:lnSpc>
-                          <a:spcPct val="105000"/>
-                        </a:lnSpc>
-                      </a:pPr>
-                      <a:r>
-                        <a:rPr sz="1200" b="0">
-                          <a:solidFill>
-                            <a:srgbClr val="1B2A4A"/>
-                          </a:solidFill>
-                          <a:latin typeface="Noto Sans CJK SC"/>
-                        </a:rPr>
-                        <a:t>（required 按船型/吨位以折减系数确定）</a:t>
-                      </a:r>
-                    </a:p>
-                  </a:txBody>
-                  <a:tcPr marL="54864" marR="54864" marT="27432" marB="27432" anchor="ctr">
-                    <a:solidFill>
-                      <a:srgbClr val="EEF3FA"/>
-                    </a:solidFill>
-                  </a:tcPr>
-                </a:tc>
-                <a:tc>
-                  <a:txBody>
-                    <a:bodyPr/>
-                    <a:lstStyle/>
-                    <a:p>
-                      <a:pPr>
-                        <a:lnSpc>
-                          <a:spcPct val="105000"/>
-                        </a:lnSpc>
-                      </a:pPr>
-                      <a:r>
-                        <a:rPr sz="1200" b="0">
-                          <a:solidFill>
-                            <a:srgbClr val="1B2A4A"/>
-                          </a:solidFill>
-                          <a:latin typeface="Noto Sans CJK SC"/>
-                        </a:rPr>
-                        <a:t>年度营运碳强度（AER，单位运输功 CO2）</a:t>
-                      </a:r>
-                    </a:p>
-                    <a:p>
-                      <a:pPr>
-                        <a:lnSpc>
-                          <a:spcPct val="105000"/>
-                        </a:lnSpc>
-                      </a:pPr>
-                      <a:r>
-                        <a:rPr sz="1200" b="0">
-                          <a:solidFill>
-                            <a:srgbClr val="1B2A4A"/>
-                          </a:solidFill>
-                          <a:latin typeface="Noto Sans CJK SC"/>
-                        </a:rPr>
-                        <a:t>对照 G2 参考线 + G3 逐年折减系数</a:t>
-                      </a:r>
-                    </a:p>
-                  </a:txBody>
-                  <a:tcPr marL="54864" marR="54864" marT="27432" marB="27432" anchor="ctr">
-                    <a:solidFill>
-                      <a:srgbClr val="EEF3FA"/>
-                    </a:solidFill>
-                  </a:tcPr>
-                </a:tc>
-              </a:tr>
-              <a:tr h="658368">
-                <a:tc>
-                  <a:txBody>
-                    <a:bodyPr/>
-                    <a:lstStyle/>
-                    <a:p>
-                      <a:pPr>
-                        <a:lnSpc>
-                          <a:spcPct val="105000"/>
-                        </a:lnSpc>
-                      </a:pPr>
-                      <a:r>
-                        <a:rPr sz="1200" b="0">
-                          <a:solidFill>
-                            <a:srgbClr val="1B2A4A"/>
-                          </a:solidFill>
-                          <a:latin typeface="Noto Sans CJK SC"/>
-                        </a:rPr>
-                        <a:t>合规方式</a:t>
-                      </a:r>
-                    </a:p>
-                  </a:txBody>
-                  <a:tcPr marL="54864" marR="54864" marT="27432" marB="27432" anchor="ctr"/>
-                </a:tc>
-                <a:tc>
-                  <a:txBody>
-                    <a:bodyPr/>
-                    <a:lstStyle/>
-                    <a:p>
-                      <a:pPr>
-                        <a:lnSpc>
-                          <a:spcPct val="105000"/>
-                        </a:lnSpc>
-                      </a:pPr>
-                      <a:r>
-                        <a:rPr sz="1200" b="0">
-                          <a:solidFill>
-                            <a:srgbClr val="1B2A4A"/>
-                          </a:solidFill>
-                          <a:latin typeface="Noto Sans CJK SC"/>
-                        </a:rPr>
-                        <a:t>一次性技术验证；</a:t>
-                      </a:r>
-                    </a:p>
-                    <a:p>
-                      <a:pPr>
-                        <a:lnSpc>
-                          <a:spcPct val="105000"/>
-                        </a:lnSpc>
-                      </a:pPr>
-                      <a:r>
-                        <a:rPr sz="1200" b="0">
-                          <a:solidFill>
-                            <a:srgbClr val="1B2A4A"/>
-                          </a:solidFill>
-                          <a:latin typeface="Noto Sans CJK SC"/>
-                        </a:rPr>
-                        <a:t>常用轴/主机功率限制（ShaPoLi/EPL）</a:t>
-                      </a:r>
-                    </a:p>
-                  </a:txBody>
-                  <a:tcPr marL="54864" marR="54864" marT="27432" marB="27432" anchor="ctr"/>
-                </a:tc>
-                <a:tc>
-                  <a:txBody>
-                    <a:bodyPr/>
-                    <a:lstStyle/>
-                    <a:p>
-                      <a:pPr>
-                        <a:lnSpc>
-                          <a:spcPct val="105000"/>
-                        </a:lnSpc>
-                      </a:pPr>
-                      <a:r>
-                        <a:rPr sz="1200" b="0">
-                          <a:solidFill>
-                            <a:srgbClr val="1B2A4A"/>
-                          </a:solidFill>
-                          <a:latin typeface="Noto Sans CJK SC"/>
-                        </a:rPr>
-                        <a:t>按 G4 边界评 A–E 级；连续 3 年 D 或 1 年 E</a:t>
-                      </a:r>
-                    </a:p>
-                    <a:p>
-                      <a:pPr>
-                        <a:lnSpc>
-                          <a:spcPct val="105000"/>
-                        </a:lnSpc>
-                      </a:pPr>
-                      <a:r>
-                        <a:rPr sz="1200" b="0">
-                          <a:solidFill>
-                            <a:srgbClr val="1B2A4A"/>
-                          </a:solidFill>
-                          <a:latin typeface="Noto Sans CJK SC"/>
-                        </a:rPr>
-                        <a:t>须在 SEEMP Part III 提交纠正措施计划</a:t>
-                      </a:r>
-                    </a:p>
-                  </a:txBody>
-                  <a:tcPr marL="54864" marR="54864" marT="27432" marB="27432" anchor="ctr"/>
-                </a:tc>
-              </a:tr>
-              <a:tr h="658368">
-                <a:tc>
-                  <a:txBody>
-                    <a:bodyPr/>
-                    <a:lstStyle/>
-                    <a:p>
-                      <a:pPr>
-                        <a:lnSpc>
-                          <a:spcPct val="105000"/>
-                        </a:lnSpc>
-                      </a:pPr>
-                      <a:r>
-                        <a:rPr sz="1200" b="0">
-                          <a:solidFill>
-                            <a:srgbClr val="1B2A4A"/>
-                          </a:solidFill>
-                          <a:latin typeface="Noto Sans CJK SC"/>
-                        </a:rPr>
-                        <a:t>关键时间线</a:t>
-                      </a:r>
-                    </a:p>
-                  </a:txBody>
-                  <a:tcPr marL="54864" marR="54864" marT="27432" marB="27432" anchor="ctr">
-                    <a:solidFill>
-                      <a:srgbClr val="EEF3FA"/>
-                    </a:solidFill>
-                  </a:tcPr>
-                </a:tc>
-                <a:tc>
-                  <a:txBody>
-                    <a:bodyPr/>
-                    <a:lstStyle/>
-                    <a:p>
-                      <a:pPr>
-                        <a:lnSpc>
-                          <a:spcPct val="105000"/>
-                        </a:lnSpc>
-                      </a:pPr>
-                      <a:r>
-                        <a:rPr sz="1200" b="0">
-                          <a:solidFill>
-                            <a:srgbClr val="1B2A4A"/>
-                          </a:solidFill>
-                          <a:latin typeface="Noto Sans CJK SC"/>
-                        </a:rPr>
-                        <a:t>2022-11-01 生效</a:t>
-                      </a:r>
-                    </a:p>
-                    <a:p>
-                      <a:pPr>
-                        <a:lnSpc>
-                          <a:spcPct val="105000"/>
-                        </a:lnSpc>
-                      </a:pPr>
-                      <a:r>
-                        <a:rPr sz="1200" b="0">
-                          <a:solidFill>
-                            <a:srgbClr val="1B2A4A"/>
-                          </a:solidFill>
-                          <a:latin typeface="Noto Sans CJK SC"/>
-                        </a:rPr>
-                        <a:t>2023-01-01 起须计算 attained EEXI</a:t>
-                      </a:r>
-                    </a:p>
-                  </a:txBody>
-                  <a:tcPr marL="54864" marR="54864" marT="27432" marB="27432" anchor="ctr">
-                    <a:solidFill>
-                      <a:srgbClr val="EEF3FA"/>
-                    </a:solidFill>
-                  </a:tcPr>
-                </a:tc>
-                <a:tc>
-                  <a:txBody>
-                    <a:bodyPr/>
-                    <a:lstStyle/>
-                    <a:p>
-                      <a:pPr>
-                        <a:lnSpc>
-                          <a:spcPct val="105000"/>
-                        </a:lnSpc>
-                      </a:pPr>
-                      <a:r>
-                        <a:rPr sz="1200" b="0">
-                          <a:solidFill>
-                            <a:srgbClr val="1B2A4A"/>
-                          </a:solidFill>
-                          <a:latin typeface="Noto Sans CJK SC"/>
-                        </a:rPr>
-                        <a:t>2023 年起数据收集，2024 年首次评级</a:t>
-                      </a:r>
-                    </a:p>
-                    <a:p>
-                      <a:pPr>
-                        <a:lnSpc>
-                          <a:spcPct val="105000"/>
-                        </a:lnSpc>
-                      </a:pPr>
-                      <a:r>
-                        <a:rPr sz="1200" b="0">
-                          <a:solidFill>
-                            <a:srgbClr val="1B2A4A"/>
-                          </a:solidFill>
-                          <a:latin typeface="Noto Sans CJK SC"/>
-                        </a:rPr>
-                        <a:t>法规要求 2026-01-01 前完成复审</a:t>
-                      </a:r>
-                    </a:p>
-                  </a:txBody>
-                  <a:tcPr marL="54864" marR="54864" marT="27432" marB="27432" anchor="ctr">
-                    <a:solidFill>
-                      <a:srgbClr val="EEF3FA"/>
-                    </a:solidFill>
-                  </a:tcPr>
-                </a:tc>
-              </a:tr>
-            </a:tbl>
-          </a:graphicData>
-        </a:graphic>
-      </p:graphicFrame>
-      <p:sp>
-        <p:nvSpPr>
-          <p:cNvPr id="6" name="TextBox 5"/>
-          <p:cNvSpPr txBox="1"/>
-          <p:nvPr/>
-        </p:nvSpPr>
-        <p:spPr>
-          <a:xfrm>
-            <a:off x="548640" y="5120640"/>
-            <a:ext cx="11155680" cy="1554480"/>
-          </a:xfrm>
-          <a:prstGeom prst="rect">
-            <a:avLst/>
-          </a:prstGeom>
-          <a:noFill/>
-        </p:spPr>
-        <p:txBody>
-          <a:bodyPr wrap="square" anchor="t">
-            <a:spAutoFit/>
-          </a:bodyPr>
-          <a:lstStyle/>
-          <a:p>
-            <a:pPr algn="l">
-              <a:lnSpc>
-                <a:spcPct val="115000"/>
-              </a:lnSpc>
-              <a:spcAft>
-                <a:spcPts val="800"/>
-              </a:spcAft>
-            </a:pPr>
-            <a:r>
-              <a:rPr sz="1400" b="0">
-                <a:solidFill>
-                  <a:srgbClr val="1B2A4A"/>
-                </a:solidFill>
-                <a:latin typeface="Noto Sans CJK SC"/>
-              </a:rPr>
-              <a:t>▪ 对节能技术选型的驱动：船东自 2022 年起集中评估船队并规划改装；EU ETS 自 2024 年纳入航运，碳成本显性化；</a:t>
-            </a:r>
-          </a:p>
-          <a:p>
-            <a:pPr algn="l">
-              <a:lnSpc>
-                <a:spcPct val="115000"/>
-              </a:lnSpc>
-              <a:spcAft>
-                <a:spcPts val="800"/>
-              </a:spcAft>
-            </a:pPr>
-            <a:r>
-              <a:rPr sz="1400" b="0">
-                <a:solidFill>
-                  <a:srgbClr val="1B2A4A"/>
-                </a:solidFill>
-                <a:latin typeface="Noto Sans CJK SC"/>
-              </a:rPr>
-              <a:t>▪ 厂商已直接以「改善 CII 评级」作为产品卖点（Anschütz、Yara 等）——节能软件从「节油回本」变为「合规刚需」。</a:t>
-            </a:r>
-          </a:p>
-        </p:txBody>
-      </p:sp>
-      <p:sp>
-        <p:nvSpPr>
-          <p:cNvPr id="7" name="TextBox 6"/>
-          <p:cNvSpPr txBox="1"/>
-          <p:nvPr/>
-        </p:nvSpPr>
-        <p:spPr>
-          <a:xfrm>
-            <a:off x="11475720" y="6473952"/>
-            <a:ext cx="640080" cy="320040"/>
-          </a:xfrm>
-          <a:prstGeom prst="rect">
-            <a:avLst/>
-          </a:prstGeom>
-          <a:noFill/>
-        </p:spPr>
-        <p:txBody>
-          <a:bodyPr wrap="square" anchor="t">
-            <a:spAutoFit/>
-          </a:bodyPr>
-          <a:lstStyle/>
-          <a:p>
-            <a:pPr algn="r">
-              <a:lnSpc>
-                <a:spcPct val="115000"/>
-              </a:lnSpc>
-              <a:spcAft>
-                <a:spcPts val="600"/>
-              </a:spcAft>
-            </a:pPr>
-            <a:r>
-              <a:rPr sz="1100" b="0">
-                <a:solidFill>
-                  <a:srgbClr val="666666"/>
-                </a:solidFill>
-                <a:latin typeface="Noto Sans CJK SC"/>
-              </a:rPr>
-              <a:t>4 / 20</a:t>
-            </a:r>
-          </a:p>
-        </p:txBody>
-      </p:sp>
-    </p:spTree>
-  </p:cSld>
-  <p:clrMapOvr>
-    <a:masterClrMapping/>
-  </p:clrMapOvr>
-</p:sld>
-</file>
-
-<file path=ppt/slides/slide5.xml><?xml version="1.0" encoding="utf-8"?>
-<p:sld xmlns:a="http://schemas.openxmlformats.org/drawingml/2006/main" xmlns:p="http://schemas.openxmlformats.org/presentationml/2006/main" xmlns:r="http://schemas.openxmlformats.org/officeDocument/2006/relationships">
-  <p:cSld>
-    <p:spTree>
-      <p:nvGrpSpPr>
-        <p:cNvPr id="1" name=""/>
-        <p:cNvGrpSpPr/>
-        <p:nvPr/>
-      </p:nvGrpSpPr>
-      <p:grpSpPr/>
-      <p:sp>
-        <p:nvSpPr>
-          <p:cNvPr id="2" name="Rectangle 1"/>
-          <p:cNvSpPr/>
-          <p:nvPr/>
-        </p:nvSpPr>
-        <p:spPr>
-          <a:xfrm>
-            <a:off x="0" y="0"/>
-            <a:ext cx="12191695" cy="109728"/>
-          </a:xfrm>
-          <a:prstGeom prst="rect">
-            <a:avLst/>
-          </a:prstGeom>
-          <a:solidFill>
-            <a:srgbClr val="1F77B4"/>
-          </a:solidFill>
-          <a:ln>
-            <a:noFill/>
-          </a:ln>
-        </p:spPr>
-        <p:style>
-          <a:lnRef idx="1">
-            <a:schemeClr val="accent1"/>
-          </a:lnRef>
-          <a:fillRef idx="3">
-            <a:schemeClr val="accent1"/>
-          </a:fillRef>
-          <a:effectRef idx="2">
-            <a:schemeClr val="accent1"/>
-          </a:effectRef>
-          <a:fontRef idx="minor">
-            <a:schemeClr val="lt1"/>
-          </a:fontRef>
-        </p:style>
-        <p:txBody>
-          <a:bodyPr rtlCol="0" anchor="ctr"/>
-          <a:lstStyle/>
-          <a:p>
-            <a:pPr algn="ctr"/>
-          </a:p>
-        </p:txBody>
-      </p:sp>
-      <p:sp>
-        <p:nvSpPr>
-          <p:cNvPr id="3" name="TextBox 2"/>
-          <p:cNvSpPr txBox="1"/>
-          <p:nvPr/>
-        </p:nvSpPr>
-        <p:spPr>
-          <a:xfrm>
-            <a:off x="457200" y="256032"/>
-            <a:ext cx="11247120" cy="822960"/>
-          </a:xfrm>
-          <a:prstGeom prst="rect">
-            <a:avLst/>
-          </a:prstGeom>
-          <a:noFill/>
-        </p:spPr>
-        <p:txBody>
-          <a:bodyPr wrap="square" anchor="t">
-            <a:spAutoFit/>
-          </a:bodyPr>
-          <a:lstStyle/>
-          <a:p>
-            <a:pPr algn="l">
-              <a:lnSpc>
-                <a:spcPct val="115000"/>
-              </a:lnSpc>
-              <a:spcAft>
-                <a:spcPts val="600"/>
-              </a:spcAft>
-            </a:pPr>
-            <a:r>
-              <a:rPr sz="3000" b="1">
-                <a:solidFill>
-                  <a:srgbClr val="1B2A4A"/>
-                </a:solidFill>
-                <a:latin typeface="Noto Sans CJK SC"/>
-              </a:rPr>
               <a:t>MPC vs PD：原理差异</a:t>
             </a:r>
           </a:p>
@@ -11173,7 +9696,7 @@
                 </a:solidFill>
                 <a:latin typeface="Noto Sans CJK SC"/>
               </a:rPr>
-              <a:t>5 / 20</a:t>
+              <a:t>4 / 19</a:t>
             </a:r>
           </a:p>
         </p:txBody>
@@ -11186,7 +9709,7 @@
 </p:sld>
 </file>
 
-<file path=ppt/slides/slide6.xml><?xml version="1.0" encoding="utf-8"?>
+<file path=ppt/slides/slide5.xml><?xml version="1.0" encoding="utf-8"?>
 <p:sld xmlns:a="http://schemas.openxmlformats.org/drawingml/2006/main" xmlns:p="http://schemas.openxmlformats.org/presentationml/2006/main" xmlns:r="http://schemas.openxmlformats.org/officeDocument/2006/relationships">
   <p:cSld>
     <p:spTree>
@@ -11863,7 +10386,7 @@
                 </a:solidFill>
                 <a:latin typeface="Noto Sans CJK SC"/>
               </a:rPr>
-              <a:t>6 / 20</a:t>
+              <a:t>5 / 19</a:t>
             </a:r>
           </a:p>
         </p:txBody>
@@ -11876,7 +10399,7 @@
 </p:sld>
 </file>
 
-<file path=ppt/slides/slide7.xml><?xml version="1.0" encoding="utf-8"?>
+<file path=ppt/slides/slide6.xml><?xml version="1.0" encoding="utf-8"?>
 <p:sld xmlns:a="http://schemas.openxmlformats.org/drawingml/2006/main" xmlns:p="http://schemas.openxmlformats.org/presentationml/2006/main" xmlns:r="http://schemas.openxmlformats.org/officeDocument/2006/relationships">
   <p:cSld>
     <p:spTree>
@@ -12613,7 +11136,7 @@
                 </a:solidFill>
                 <a:latin typeface="Noto Sans CJK SC"/>
               </a:rPr>
-              <a:t>7 / 20</a:t>
+              <a:t>6 / 19</a:t>
             </a:r>
           </a:p>
         </p:txBody>
@@ -12626,7 +11149,7 @@
 </p:sld>
 </file>
 
-<file path=ppt/slides/slide8.xml><?xml version="1.0" encoding="utf-8"?>
+<file path=ppt/slides/slide7.xml><?xml version="1.0" encoding="utf-8"?>
 <p:sld xmlns:a="http://schemas.openxmlformats.org/drawingml/2006/main" xmlns:p="http://schemas.openxmlformats.org/presentationml/2006/main" xmlns:r="http://schemas.openxmlformats.org/officeDocument/2006/relationships">
   <p:cSld>
     <p:spTree>
@@ -13018,7 +11541,7 @@
                 </a:solidFill>
                 <a:latin typeface="Noto Sans CJK SC"/>
               </a:rPr>
-              <a:t>8 / 20</a:t>
+              <a:t>7 / 19</a:t>
             </a:r>
           </a:p>
         </p:txBody>
@@ -13031,7 +11554,7 @@
 </p:sld>
 </file>
 
-<file path=ppt/slides/slide9.xml><?xml version="1.0" encoding="utf-8"?>
+<file path=ppt/slides/slide8.xml><?xml version="1.0" encoding="utf-8"?>
 <p:sld xmlns:a="http://schemas.openxmlformats.org/drawingml/2006/main" xmlns:p="http://schemas.openxmlformats.org/presentationml/2006/main" xmlns:r="http://schemas.openxmlformats.org/officeDocument/2006/relationships">
   <p:cSld>
     <p:spTree>
@@ -13498,7 +12021,702 @@
                 </a:solidFill>
                 <a:latin typeface="Noto Sans CJK SC"/>
               </a:rPr>
-              <a:t>9 / 20</a:t>
+              <a:t>8 / 19</a:t>
+            </a:r>
+          </a:p>
+        </p:txBody>
+      </p:sp>
+    </p:spTree>
+  </p:cSld>
+  <p:clrMapOvr>
+    <a:masterClrMapping/>
+  </p:clrMapOvr>
+</p:sld>
+</file>
+
+<file path=ppt/slides/slide9.xml><?xml version="1.0" encoding="utf-8"?>
+<p:sld xmlns:a="http://schemas.openxmlformats.org/drawingml/2006/main" xmlns:p="http://schemas.openxmlformats.org/presentationml/2006/main" xmlns:r="http://schemas.openxmlformats.org/officeDocument/2006/relationships">
+  <p:cSld>
+    <p:spTree>
+      <p:nvGrpSpPr>
+        <p:cNvPr id="1" name=""/>
+        <p:cNvGrpSpPr/>
+        <p:nvPr/>
+      </p:nvGrpSpPr>
+      <p:grpSpPr/>
+      <p:sp>
+        <p:nvSpPr>
+          <p:cNvPr id="2" name="Rectangle 1"/>
+          <p:cNvSpPr/>
+          <p:nvPr/>
+        </p:nvSpPr>
+        <p:spPr>
+          <a:xfrm>
+            <a:off x="0" y="0"/>
+            <a:ext cx="12191695" cy="109728"/>
+          </a:xfrm>
+          <a:prstGeom prst="rect">
+            <a:avLst/>
+          </a:prstGeom>
+          <a:solidFill>
+            <a:srgbClr val="1F77B4"/>
+          </a:solidFill>
+          <a:ln>
+            <a:noFill/>
+          </a:ln>
+        </p:spPr>
+        <p:style>
+          <a:lnRef idx="1">
+            <a:schemeClr val="accent1"/>
+          </a:lnRef>
+          <a:fillRef idx="3">
+            <a:schemeClr val="accent1"/>
+          </a:fillRef>
+          <a:effectRef idx="2">
+            <a:schemeClr val="accent1"/>
+          </a:effectRef>
+          <a:fontRef idx="minor">
+            <a:schemeClr val="lt1"/>
+          </a:fontRef>
+        </p:style>
+        <p:txBody>
+          <a:bodyPr rtlCol="0" anchor="ctr"/>
+          <a:lstStyle/>
+          <a:p>
+            <a:pPr algn="ctr"/>
+          </a:p>
+        </p:txBody>
+      </p:sp>
+      <p:sp>
+        <p:nvSpPr>
+          <p:cNvPr id="3" name="TextBox 2"/>
+          <p:cNvSpPr txBox="1"/>
+          <p:nvPr/>
+        </p:nvSpPr>
+        <p:spPr>
+          <a:xfrm>
+            <a:off x="457200" y="256032"/>
+            <a:ext cx="11247120" cy="822960"/>
+          </a:xfrm>
+          <a:prstGeom prst="rect">
+            <a:avLst/>
+          </a:prstGeom>
+          <a:noFill/>
+        </p:spPr>
+        <p:txBody>
+          <a:bodyPr wrap="square" anchor="t">
+            <a:spAutoFit/>
+          </a:bodyPr>
+          <a:lstStyle/>
+          <a:p>
+            <a:pPr algn="l">
+              <a:lnSpc>
+                <a:spcPct val="115000"/>
+              </a:lnSpc>
+              <a:spcAft>
+                <a:spcPts val="600"/>
+              </a:spcAft>
+            </a:pPr>
+            <a:r>
+              <a:rPr sz="3000" b="1">
+                <a:solidFill>
+                  <a:srgbClr val="1B2A4A"/>
+                </a:solidFill>
+                <a:latin typeface="Noto Sans CJK SC"/>
+              </a:rPr>
+              <a:t>MPC vs PD 部署优缺点小结</a:t>
+            </a:r>
+          </a:p>
+        </p:txBody>
+      </p:sp>
+      <p:graphicFrame>
+        <p:nvGraphicFramePr>
+          <p:cNvPr id="4" name="Table 3"/>
+          <p:cNvGraphicFramePr>
+            <a:graphicFrameLocks noGrp="1"/>
+          </p:cNvGraphicFramePr>
+          <p:nvPr/>
+        </p:nvGraphicFramePr>
+        <p:xfrm>
+          <a:off x="457200" y="1463040"/>
+          <a:ext cx="11338558" cy="3566160"/>
+        </p:xfrm>
+        <a:graphic>
+          <a:graphicData uri="http://schemas.openxmlformats.org/drawingml/2006/table">
+            <a:tbl>
+              <a:tblPr firstRow="1" bandRow="1">
+                <a:tableStyleId>{5C22544A-7EE6-4342-B048-85BDC9FD1C3A}</a:tableStyleId>
+              </a:tblPr>
+              <a:tblGrid>
+                <a:gridCol w="1790298"/>
+                <a:gridCol w="4376286"/>
+                <a:gridCol w="5171974"/>
+              </a:tblGrid>
+              <a:tr h="594360">
+                <a:tc>
+                  <a:txBody>
+                    <a:bodyPr/>
+                    <a:lstStyle/>
+                    <a:p>
+                      <a:pPr>
+                        <a:lnSpc>
+                          <a:spcPct val="105000"/>
+                        </a:lnSpc>
+                      </a:pPr>
+                      <a:r>
+                        <a:rPr sz="1350" b="1">
+                          <a:solidFill>
+                            <a:srgbClr val="FFFFFF"/>
+                          </a:solidFill>
+                          <a:latin typeface="Noto Sans CJK SC"/>
+                        </a:rPr>
+                        <a:t>维度</a:t>
+                      </a:r>
+                    </a:p>
+                  </a:txBody>
+                  <a:tcPr marL="54864" marR="54864" marT="27432" marB="27432" anchor="ctr">
+                    <a:solidFill>
+                      <a:srgbClr val="1F77B4"/>
+                    </a:solidFill>
+                  </a:tcPr>
+                </a:tc>
+                <a:tc>
+                  <a:txBody>
+                    <a:bodyPr/>
+                    <a:lstStyle/>
+                    <a:p>
+                      <a:pPr>
+                        <a:lnSpc>
+                          <a:spcPct val="105000"/>
+                        </a:lnSpc>
+                      </a:pPr>
+                      <a:r>
+                        <a:rPr sz="1350" b="1">
+                          <a:solidFill>
+                            <a:srgbClr val="FFFFFF"/>
+                          </a:solidFill>
+                          <a:latin typeface="Noto Sans CJK SC"/>
+                        </a:rPr>
+                        <a:t>传统 PD/PID</a:t>
+                      </a:r>
+                    </a:p>
+                  </a:txBody>
+                  <a:tcPr marL="54864" marR="54864" marT="27432" marB="27432" anchor="ctr">
+                    <a:solidFill>
+                      <a:srgbClr val="1F77B4"/>
+                    </a:solidFill>
+                  </a:tcPr>
+                </a:tc>
+                <a:tc>
+                  <a:txBody>
+                    <a:bodyPr/>
+                    <a:lstStyle/>
+                    <a:p>
+                      <a:pPr>
+                        <a:lnSpc>
+                          <a:spcPct val="105000"/>
+                        </a:lnSpc>
+                      </a:pPr>
+                      <a:r>
+                        <a:rPr sz="1350" b="1">
+                          <a:solidFill>
+                            <a:srgbClr val="FFFFFF"/>
+                          </a:solidFill>
+                          <a:latin typeface="Noto Sans CJK SC"/>
+                        </a:rPr>
+                        <a:t>MPC</a:t>
+                      </a:r>
+                    </a:p>
+                  </a:txBody>
+                  <a:tcPr marL="54864" marR="54864" marT="27432" marB="27432" anchor="ctr">
+                    <a:solidFill>
+                      <a:srgbClr val="1F77B4"/>
+                    </a:solidFill>
+                  </a:tcPr>
+                </a:tc>
+              </a:tr>
+              <a:tr h="594360">
+                <a:tc>
+                  <a:txBody>
+                    <a:bodyPr/>
+                    <a:lstStyle/>
+                    <a:p>
+                      <a:pPr>
+                        <a:lnSpc>
+                          <a:spcPct val="105000"/>
+                        </a:lnSpc>
+                      </a:pPr>
+                      <a:r>
+                        <a:rPr sz="1300" b="0">
+                          <a:solidFill>
+                            <a:srgbClr val="1B2A4A"/>
+                          </a:solidFill>
+                          <a:latin typeface="Noto Sans CJK SC"/>
+                        </a:rPr>
+                        <a:t>控制效果</a:t>
+                      </a:r>
+                    </a:p>
+                  </a:txBody>
+                  <a:tcPr marL="54864" marR="54864" marT="27432" marB="27432" anchor="ctr"/>
+                </a:tc>
+                <a:tc>
+                  <a:txBody>
+                    <a:bodyPr/>
+                    <a:lstStyle/>
+                    <a:p>
+                      <a:pPr>
+                        <a:lnSpc>
+                          <a:spcPct val="105000"/>
+                        </a:lnSpc>
+                      </a:pPr>
+                      <a:r>
+                        <a:rPr sz="1300" b="0">
+                          <a:solidFill>
+                            <a:srgbClr val="1B2A4A"/>
+                          </a:solidFill>
+                          <a:latin typeface="Noto Sans CJK SC"/>
+                        </a:rPr>
+                        <a:t>无前瞻、海浪下易无效操舵</a:t>
+                      </a:r>
+                    </a:p>
+                  </a:txBody>
+                  <a:tcPr marL="54864" marR="54864" marT="27432" marB="27432" anchor="ctr"/>
+                </a:tc>
+                <a:tc>
+                  <a:txBody>
+                    <a:bodyPr/>
+                    <a:lstStyle/>
+                    <a:p>
+                      <a:pPr>
+                        <a:lnSpc>
+                          <a:spcPct val="105000"/>
+                        </a:lnSpc>
+                      </a:pPr>
+                      <a:r>
+                        <a:rPr sz="1300" b="0">
+                          <a:solidFill>
+                            <a:srgbClr val="1B2A4A"/>
+                          </a:solidFill>
+                          <a:latin typeface="Noto Sans CJK SC"/>
+                        </a:rPr>
+                        <a:t>响应快、超调小、抗扰强、特定工况舵动作更少</a:t>
+                      </a:r>
+                    </a:p>
+                  </a:txBody>
+                  <a:tcPr marL="54864" marR="54864" marT="27432" marB="27432" anchor="ctr"/>
+                </a:tc>
+              </a:tr>
+              <a:tr h="594360">
+                <a:tc>
+                  <a:txBody>
+                    <a:bodyPr/>
+                    <a:lstStyle/>
+                    <a:p>
+                      <a:pPr>
+                        <a:lnSpc>
+                          <a:spcPct val="105000"/>
+                        </a:lnSpc>
+                      </a:pPr>
+                      <a:r>
+                        <a:rPr sz="1300" b="0">
+                          <a:solidFill>
+                            <a:srgbClr val="1B2A4A"/>
+                          </a:solidFill>
+                          <a:latin typeface="Noto Sans CJK SC"/>
+                        </a:rPr>
+                        <a:t>调试难度</a:t>
+                      </a:r>
+                    </a:p>
+                  </a:txBody>
+                  <a:tcPr marL="54864" marR="54864" marT="27432" marB="27432" anchor="ctr">
+                    <a:solidFill>
+                      <a:srgbClr val="EEF3FA"/>
+                    </a:solidFill>
+                  </a:tcPr>
+                </a:tc>
+                <a:tc>
+                  <a:txBody>
+                    <a:bodyPr/>
+                    <a:lstStyle/>
+                    <a:p>
+                      <a:pPr>
+                        <a:lnSpc>
+                          <a:spcPct val="105000"/>
+                        </a:lnSpc>
+                      </a:pPr>
+                      <a:r>
+                        <a:rPr sz="1300" b="0">
+                          <a:solidFill>
+                            <a:srgbClr val="1B2A4A"/>
+                          </a:solidFill>
+                          <a:latin typeface="Noto Sans CJK SC"/>
+                        </a:rPr>
+                        <a:t>整定规则成熟，船员可现场整定</a:t>
+                      </a:r>
+                    </a:p>
+                  </a:txBody>
+                  <a:tcPr marL="54864" marR="54864" marT="27432" marB="27432" anchor="ctr">
+                    <a:solidFill>
+                      <a:srgbClr val="EEF3FA"/>
+                    </a:solidFill>
+                  </a:tcPr>
+                </a:tc>
+                <a:tc>
+                  <a:txBody>
+                    <a:bodyPr/>
+                    <a:lstStyle/>
+                    <a:p>
+                      <a:pPr>
+                        <a:lnSpc>
+                          <a:spcPct val="105000"/>
+                        </a:lnSpc>
+                      </a:pPr>
+                      <a:r>
+                        <a:rPr sz="1300" b="0">
+                          <a:solidFill>
+                            <a:srgbClr val="1B2A4A"/>
+                          </a:solidFill>
+                          <a:latin typeface="Noto Sans CJK SC"/>
+                        </a:rPr>
+                        <a:t>模型辨识是硬门槛；权重多靠 trial-and-error</a:t>
+                      </a:r>
+                    </a:p>
+                  </a:txBody>
+                  <a:tcPr marL="54864" marR="54864" marT="27432" marB="27432" anchor="ctr">
+                    <a:solidFill>
+                      <a:srgbClr val="EEF3FA"/>
+                    </a:solidFill>
+                  </a:tcPr>
+                </a:tc>
+              </a:tr>
+              <a:tr h="594360">
+                <a:tc>
+                  <a:txBody>
+                    <a:bodyPr/>
+                    <a:lstStyle/>
+                    <a:p>
+                      <a:pPr>
+                        <a:lnSpc>
+                          <a:spcPct val="105000"/>
+                        </a:lnSpc>
+                      </a:pPr>
+                      <a:r>
+                        <a:rPr sz="1300" b="0">
+                          <a:solidFill>
+                            <a:srgbClr val="1B2A4A"/>
+                          </a:solidFill>
+                          <a:latin typeface="Noto Sans CJK SC"/>
+                        </a:rPr>
+                        <a:t>实时计算</a:t>
+                      </a:r>
+                    </a:p>
+                  </a:txBody>
+                  <a:tcPr marL="54864" marR="54864" marT="27432" marB="27432" anchor="ctr"/>
+                </a:tc>
+                <a:tc>
+                  <a:txBody>
+                    <a:bodyPr/>
+                    <a:lstStyle/>
+                    <a:p>
+                      <a:pPr>
+                        <a:lnSpc>
+                          <a:spcPct val="105000"/>
+                        </a:lnSpc>
+                      </a:pPr>
+                      <a:r>
+                        <a:rPr sz="1300" b="0">
+                          <a:solidFill>
+                            <a:srgbClr val="1B2A4A"/>
+                          </a:solidFill>
+                          <a:latin typeface="Noto Sans CJK SC"/>
+                        </a:rPr>
+                        <a:t>几次乘加，单片机即可</a:t>
+                      </a:r>
+                    </a:p>
+                  </a:txBody>
+                  <a:tcPr marL="54864" marR="54864" marT="27432" marB="27432" anchor="ctr"/>
+                </a:tc>
+                <a:tc>
+                  <a:txBody>
+                    <a:bodyPr/>
+                    <a:lstStyle/>
+                    <a:p>
+                      <a:pPr>
+                        <a:lnSpc>
+                          <a:spcPct val="105000"/>
+                        </a:lnSpc>
+                      </a:pPr>
+                      <a:r>
+                        <a:rPr sz="1300" b="0">
+                          <a:solidFill>
+                            <a:srgbClr val="1B2A4A"/>
+                          </a:solidFill>
+                          <a:latin typeface="Noto Sans CJK SC"/>
+                        </a:rPr>
+                        <a:t>每周期解 QP/NLP；船舶慢动态下可行（实测 7 ms）</a:t>
+                      </a:r>
+                    </a:p>
+                  </a:txBody>
+                  <a:tcPr marL="54864" marR="54864" marT="27432" marB="27432" anchor="ctr"/>
+                </a:tc>
+              </a:tr>
+              <a:tr h="594360">
+                <a:tc>
+                  <a:txBody>
+                    <a:bodyPr/>
+                    <a:lstStyle/>
+                    <a:p>
+                      <a:pPr>
+                        <a:lnSpc>
+                          <a:spcPct val="105000"/>
+                        </a:lnSpc>
+                      </a:pPr>
+                      <a:r>
+                        <a:rPr sz="1300" b="0">
+                          <a:solidFill>
+                            <a:srgbClr val="1B2A4A"/>
+                          </a:solidFill>
+                          <a:latin typeface="Noto Sans CJK SC"/>
+                        </a:rPr>
+                        <a:t>约束/安全</a:t>
+                      </a:r>
+                    </a:p>
+                  </a:txBody>
+                  <a:tcPr marL="54864" marR="54864" marT="27432" marB="27432" anchor="ctr">
+                    <a:solidFill>
+                      <a:srgbClr val="EEF3FA"/>
+                    </a:solidFill>
+                  </a:tcPr>
+                </a:tc>
+                <a:tc>
+                  <a:txBody>
+                    <a:bodyPr/>
+                    <a:lstStyle/>
+                    <a:p>
+                      <a:pPr>
+                        <a:lnSpc>
+                          <a:spcPct val="105000"/>
+                        </a:lnSpc>
+                      </a:pPr>
+                      <a:r>
+                        <a:rPr sz="1300" b="0">
+                          <a:solidFill>
+                            <a:srgbClr val="1B2A4A"/>
+                          </a:solidFill>
+                          <a:latin typeface="Noto Sans CJK SC"/>
+                        </a:rPr>
+                        <a:t>事后饱和截断，约束下退化</a:t>
+                      </a:r>
+                    </a:p>
+                  </a:txBody>
+                  <a:tcPr marL="54864" marR="54864" marT="27432" marB="27432" anchor="ctr">
+                    <a:solidFill>
+                      <a:srgbClr val="EEF3FA"/>
+                    </a:solidFill>
+                  </a:tcPr>
+                </a:tc>
+                <a:tc>
+                  <a:txBody>
+                    <a:bodyPr/>
+                    <a:lstStyle/>
+                    <a:p>
+                      <a:pPr>
+                        <a:lnSpc>
+                          <a:spcPct val="105000"/>
+                        </a:lnSpc>
+                      </a:pPr>
+                      <a:r>
+                        <a:rPr sz="1300" b="0">
+                          <a:solidFill>
+                            <a:srgbClr val="1B2A4A"/>
+                          </a:solidFill>
+                          <a:latin typeface="Noto Sans CJK SC"/>
+                        </a:rPr>
+                        <a:t>舵角/舵速约束显式满足；稳定性需专门构造</a:t>
+                      </a:r>
+                    </a:p>
+                  </a:txBody>
+                  <a:tcPr marL="54864" marR="54864" marT="27432" marB="27432" anchor="ctr">
+                    <a:solidFill>
+                      <a:srgbClr val="EEF3FA"/>
+                    </a:solidFill>
+                  </a:tcPr>
+                </a:tc>
+              </a:tr>
+              <a:tr h="594360">
+                <a:tc>
+                  <a:txBody>
+                    <a:bodyPr/>
+                    <a:lstStyle/>
+                    <a:p>
+                      <a:pPr>
+                        <a:lnSpc>
+                          <a:spcPct val="105000"/>
+                        </a:lnSpc>
+                      </a:pPr>
+                      <a:r>
+                        <a:rPr sz="1300" b="0">
+                          <a:solidFill>
+                            <a:srgbClr val="1B2A4A"/>
+                          </a:solidFill>
+                          <a:latin typeface="Noto Sans CJK SC"/>
+                        </a:rPr>
+                        <a:t>认证与维护</a:t>
+                      </a:r>
+                    </a:p>
+                  </a:txBody>
+                  <a:tcPr marL="54864" marR="54864" marT="27432" marB="27432" anchor="ctr"/>
+                </a:tc>
+                <a:tc>
+                  <a:txBody>
+                    <a:bodyPr/>
+                    <a:lstStyle/>
+                    <a:p>
+                      <a:pPr>
+                        <a:lnSpc>
+                          <a:spcPct val="105000"/>
+                        </a:lnSpc>
+                      </a:pPr>
+                      <a:r>
+                        <a:rPr sz="1300" b="0">
+                          <a:solidFill>
+                            <a:srgbClr val="1B2A4A"/>
+                          </a:solidFill>
+                          <a:latin typeface="Noto Sans CJK SC"/>
+                        </a:rPr>
+                        <a:t>工业生态与船级社认证完备</a:t>
+                      </a:r>
+                    </a:p>
+                  </a:txBody>
+                  <a:tcPr marL="54864" marR="54864" marT="27432" marB="27432" anchor="ctr"/>
+                </a:tc>
+                <a:tc>
+                  <a:txBody>
+                    <a:bodyPr/>
+                    <a:lstStyle/>
+                    <a:p>
+                      <a:pPr>
+                        <a:lnSpc>
+                          <a:spcPct val="105000"/>
+                        </a:lnSpc>
+                      </a:pPr>
+                      <a:r>
+                        <a:rPr sz="1300" b="0">
+                          <a:solidFill>
+                            <a:srgbClr val="1B2A4A"/>
+                          </a:solidFill>
+                          <a:latin typeface="Noto Sans CJK SC"/>
+                        </a:rPr>
+                        <a:t>认证路径不成熟；需控制工程师维护</a:t>
+                      </a:r>
+                    </a:p>
+                  </a:txBody>
+                  <a:tcPr marL="54864" marR="54864" marT="27432" marB="27432" anchor="ctr"/>
+                </a:tc>
+              </a:tr>
+            </a:tbl>
+          </a:graphicData>
+        </a:graphic>
+      </p:graphicFrame>
+      <p:sp>
+        <p:nvSpPr>
+          <p:cNvPr id="5" name="TextBox 4"/>
+          <p:cNvSpPr txBox="1"/>
+          <p:nvPr/>
+        </p:nvSpPr>
+        <p:spPr>
+          <a:xfrm>
+            <a:off x="457200" y="5303520"/>
+            <a:ext cx="11338560" cy="1188720"/>
+          </a:xfrm>
+          <a:prstGeom prst="rect">
+            <a:avLst/>
+          </a:prstGeom>
+          <a:noFill/>
+        </p:spPr>
+        <p:txBody>
+          <a:bodyPr wrap="square" anchor="t">
+            <a:spAutoFit/>
+          </a:bodyPr>
+          <a:lstStyle/>
+          <a:p>
+            <a:pPr algn="l">
+              <a:lnSpc>
+                <a:spcPct val="115000"/>
+              </a:lnSpc>
+              <a:spcAft>
+                <a:spcPts val="600"/>
+              </a:spcAft>
+            </a:pPr>
+            <a:r>
+              <a:rPr sz="1700" b="1">
+                <a:solidFill>
+                  <a:srgbClr val="2CA02C"/>
+                </a:solidFill>
+                <a:latin typeface="Noto Sans CJK SC"/>
+              </a:rPr>
+              <a:t>结论性判断：PD/PID 打底保证可靠性，MPC 作为性能增强层；</a:t>
+            </a:r>
+          </a:p>
+          <a:p>
+            <a:pPr algn="l">
+              <a:lnSpc>
+                <a:spcPct val="115000"/>
+              </a:lnSpc>
+              <a:spcAft>
+                <a:spcPts val="600"/>
+              </a:spcAft>
+            </a:pPr>
+            <a:r>
+              <a:rPr sz="1700" b="1">
+                <a:solidFill>
+                  <a:srgbClr val="2CA02C"/>
+                </a:solidFill>
+                <a:latin typeface="Noto Sans CJK SC"/>
+              </a:rPr>
+              <a:t>模型辨识与整定自动化（本仓库 auto_tuning 流程）是 MPC 能否落地的前置条件。</a:t>
+            </a:r>
+          </a:p>
+        </p:txBody>
+      </p:sp>
+      <p:sp>
+        <p:nvSpPr>
+          <p:cNvPr id="6" name="TextBox 5"/>
+          <p:cNvSpPr txBox="1"/>
+          <p:nvPr/>
+        </p:nvSpPr>
+        <p:spPr>
+          <a:xfrm>
+            <a:off x="11475720" y="6473952"/>
+            <a:ext cx="640080" cy="320040"/>
+          </a:xfrm>
+          <a:prstGeom prst="rect">
+            <a:avLst/>
+          </a:prstGeom>
+          <a:noFill/>
+        </p:spPr>
+        <p:txBody>
+          <a:bodyPr wrap="square" anchor="t">
+            <a:spAutoFit/>
+          </a:bodyPr>
+          <a:lstStyle/>
+          <a:p>
+            <a:pPr algn="r">
+              <a:lnSpc>
+                <a:spcPct val="115000"/>
+              </a:lnSpc>
+              <a:spcAft>
+                <a:spcPts val="600"/>
+              </a:spcAft>
+            </a:pPr>
+            <a:r>
+              <a:rPr sz="1100" b="0">
+                <a:solidFill>
+                  <a:srgbClr val="666666"/>
+                </a:solidFill>
+                <a:latin typeface="Noto Sans CJK SC"/>
+              </a:rPr>
+              <a:t>9 / 19</a:t>
             </a:r>
           </a:p>
         </p:txBody>

--- a/docs/ship_energy_research/船舶控制与节能算法调研汇报.pptx
+++ b/docs/ship_energy_research/船舶控制与节能算法调研汇报.pptx
@@ -3486,6 +3486,48 @@
           </a:p>
         </p:txBody>
       </p:sp>
+      <p:sp>
+        <p:nvSpPr>
+          <p:cNvPr id="7" name="TextBox 6"/>
+          <p:cNvSpPr txBox="1"/>
+          <p:nvPr/>
+        </p:nvSpPr>
+        <p:spPr>
+          <a:xfrm>
+            <a:off x="457200" y="6492240"/>
+            <a:ext cx="10881360" cy="310896"/>
+          </a:xfrm>
+          <a:prstGeom prst="rect">
+            <a:avLst/>
+          </a:prstGeom>
+          <a:noFill/>
+        </p:spPr>
+        <p:txBody>
+          <a:bodyPr wrap="square" anchor="t">
+            <a:spAutoFit/>
+          </a:bodyPr>
+          <a:lstStyle/>
+          <a:p>
+            <a:pPr algn="l">
+              <a:lnSpc>
+                <a:spcPct val="115000"/>
+              </a:lnSpc>
+              <a:spcAft>
+                <a:spcPts val="600"/>
+              </a:spcAft>
+            </a:pPr>
+            <a:r>
+              <a:rPr sz="850" b="0">
+                <a:solidFill>
+                  <a:srgbClr val="666666"/>
+                </a:solidFill>
+                <a:latin typeface="Noto Sans CJK SC"/>
+              </a:rPr>
+              <a:t>来源：https://greenvoyage2050.imo.org/technology/speed-management/ ｜ https://greenvoyage2050.imo.org/technology/autopilot-adjustment-and-use/</a:t>
+            </a:r>
+          </a:p>
+        </p:txBody>
+      </p:sp>
     </p:spTree>
   </p:cSld>
   <p:clrMapOvr>
@@ -4157,6 +4199,48 @@
           </a:p>
         </p:txBody>
       </p:sp>
+      <p:sp>
+        <p:nvSpPr>
+          <p:cNvPr id="7" name="TextBox 6"/>
+          <p:cNvSpPr txBox="1"/>
+          <p:nvPr/>
+        </p:nvSpPr>
+        <p:spPr>
+          <a:xfrm>
+            <a:off x="457200" y="6492240"/>
+            <a:ext cx="10881360" cy="310896"/>
+          </a:xfrm>
+          <a:prstGeom prst="rect">
+            <a:avLst/>
+          </a:prstGeom>
+          <a:noFill/>
+        </p:spPr>
+        <p:txBody>
+          <a:bodyPr wrap="square" anchor="t">
+            <a:spAutoFit/>
+          </a:bodyPr>
+          <a:lstStyle/>
+          <a:p>
+            <a:pPr algn="l">
+              <a:lnSpc>
+                <a:spcPct val="115000"/>
+              </a:lnSpc>
+              <a:spcAft>
+                <a:spcPts val="600"/>
+              </a:spcAft>
+            </a:pPr>
+            <a:r>
+              <a:rPr sz="850" b="0">
+                <a:solidFill>
+                  <a:srgbClr val="666666"/>
+                </a:solidFill>
+                <a:latin typeface="Noto Sans CJK SC"/>
+              </a:rPr>
+              <a:t>来源：https://www.mdpi.com/2077-1312/11/3/675 ｜ https://stormgeo.com/insights/how-the-evolution-of-weather-routing-is-reducing-greenhouse-gas-emissions</a:t>
+            </a:r>
+          </a:p>
+        </p:txBody>
+      </p:sp>
     </p:spTree>
   </p:cSld>
   <p:clrMapOvr>
@@ -4945,6 +5029,48 @@
           </a:p>
         </p:txBody>
       </p:sp>
+      <p:sp>
+        <p:nvSpPr>
+          <p:cNvPr id="7" name="TextBox 6"/>
+          <p:cNvSpPr txBox="1"/>
+          <p:nvPr/>
+        </p:nvSpPr>
+        <p:spPr>
+          <a:xfrm>
+            <a:off x="457200" y="6492240"/>
+            <a:ext cx="10881360" cy="310896"/>
+          </a:xfrm>
+          <a:prstGeom prst="rect">
+            <a:avLst/>
+          </a:prstGeom>
+          <a:noFill/>
+        </p:spPr>
+        <p:txBody>
+          <a:bodyPr wrap="square" anchor="t">
+            <a:spAutoFit/>
+          </a:bodyPr>
+          <a:lstStyle/>
+          <a:p>
+            <a:pPr algn="l">
+              <a:lnSpc>
+                <a:spcPct val="115000"/>
+              </a:lnSpc>
+              <a:spcAft>
+                <a:spcPts val="600"/>
+              </a:spcAft>
+            </a:pPr>
+            <a:r>
+              <a:rPr sz="850" b="0">
+                <a:solidFill>
+                  <a:srgbClr val="666666"/>
+                </a:solidFill>
+                <a:latin typeface="Noto Sans CJK SC"/>
+              </a:rPr>
+              <a:t>来源：https://greenvoyage2050.imo.org/technology/speed-management/ ｜ https://research.chalmers.se/en/publication/516144（气象航线五算法基准）</a:t>
+            </a:r>
+          </a:p>
+        </p:txBody>
+      </p:sp>
     </p:spTree>
   </p:cSld>
   <p:clrMapOvr>
@@ -5622,6 +5748,48 @@
           </a:p>
         </p:txBody>
       </p:sp>
+      <p:sp>
+        <p:nvSpPr>
+          <p:cNvPr id="6" name="TextBox 5"/>
+          <p:cNvSpPr txBox="1"/>
+          <p:nvPr/>
+        </p:nvSpPr>
+        <p:spPr>
+          <a:xfrm>
+            <a:off x="457200" y="6492240"/>
+            <a:ext cx="10881360" cy="310896"/>
+          </a:xfrm>
+          <a:prstGeom prst="rect">
+            <a:avLst/>
+          </a:prstGeom>
+          <a:noFill/>
+        </p:spPr>
+        <p:txBody>
+          <a:bodyPr wrap="square" anchor="t">
+            <a:spAutoFit/>
+          </a:bodyPr>
+          <a:lstStyle/>
+          <a:p>
+            <a:pPr algn="l">
+              <a:lnSpc>
+                <a:spcPct val="115000"/>
+              </a:lnSpc>
+              <a:spcAft>
+                <a:spcPts val="600"/>
+              </a:spcAft>
+            </a:pPr>
+            <a:r>
+              <a:rPr sz="850" b="0">
+                <a:solidFill>
+                  <a:srgbClr val="666666"/>
+                </a:solidFill>
+                <a:latin typeface="Noto Sans CJK SC"/>
+              </a:rPr>
+              <a:t>来源：https://www.sciopen.com/article/10.19693/j.issn.1673-3185.03104 ｜ https://ww2.eagle.org/content/dam/eagle/advisories-and-debriefs/ABS_Energy_Efficiency_Advisory.pdf</a:t>
+            </a:r>
+          </a:p>
+        </p:txBody>
+      </p:sp>
     </p:spTree>
   </p:cSld>
   <p:clrMapOvr>
@@ -6008,6 +6176,48 @@
           </a:p>
         </p:txBody>
       </p:sp>
+      <p:sp>
+        <p:nvSpPr>
+          <p:cNvPr id="8" name="TextBox 7"/>
+          <p:cNvSpPr txBox="1"/>
+          <p:nvPr/>
+        </p:nvSpPr>
+        <p:spPr>
+          <a:xfrm>
+            <a:off x="457200" y="6492240"/>
+            <a:ext cx="10881360" cy="310896"/>
+          </a:xfrm>
+          <a:prstGeom prst="rect">
+            <a:avLst/>
+          </a:prstGeom>
+          <a:noFill/>
+        </p:spPr>
+        <p:txBody>
+          <a:bodyPr wrap="square" anchor="t">
+            <a:spAutoFit/>
+          </a:bodyPr>
+          <a:lstStyle/>
+          <a:p>
+            <a:pPr algn="l">
+              <a:lnSpc>
+                <a:spcPct val="115000"/>
+              </a:lnSpc>
+              <a:spcAft>
+                <a:spcPts val="600"/>
+              </a:spcAft>
+            </a:pPr>
+            <a:r>
+              <a:rPr sz="850" b="0">
+                <a:solidFill>
+                  <a:srgbClr val="666666"/>
+                </a:solidFill>
+                <a:latin typeface="Noto Sans CJK SC"/>
+              </a:rPr>
+              <a:t>来源：https://library.e.abb.com/public/b92c10c2533647b08601322d2f9ffef4/Detailed%20Description_ABB%20Ability%20Marine%20Advisory%20Suite%20-%20OCTOPUS.pdf ｜ https://www.hellenicshippingnews.com/nabtesco-combines-telegraph-agent-and-cassandra-to-deliver-unmatched-fuel-optimisation-for-eastern-car-liner-co/</a:t>
+            </a:r>
+          </a:p>
+        </p:txBody>
+      </p:sp>
     </p:spTree>
   </p:cSld>
   <p:clrMapOvr>
@@ -6886,6 +7096,48 @@
           </a:p>
         </p:txBody>
       </p:sp>
+      <p:sp>
+        <p:nvSpPr>
+          <p:cNvPr id="8" name="TextBox 7"/>
+          <p:cNvSpPr txBox="1"/>
+          <p:nvPr/>
+        </p:nvSpPr>
+        <p:spPr>
+          <a:xfrm>
+            <a:off x="457200" y="6492240"/>
+            <a:ext cx="10881360" cy="310896"/>
+          </a:xfrm>
+          <a:prstGeom prst="rect">
+            <a:avLst/>
+          </a:prstGeom>
+          <a:noFill/>
+        </p:spPr>
+        <p:txBody>
+          <a:bodyPr wrap="square" anchor="t">
+            <a:spAutoFit/>
+          </a:bodyPr>
+          <a:lstStyle/>
+          <a:p>
+            <a:pPr algn="l">
+              <a:lnSpc>
+                <a:spcPct val="115000"/>
+              </a:lnSpc>
+              <a:spcAft>
+                <a:spcPts val="600"/>
+              </a:spcAft>
+            </a:pPr>
+            <a:r>
+              <a:rPr sz="850" b="0">
+                <a:solidFill>
+                  <a:srgbClr val="666666"/>
+                </a:solidFill>
+                <a:latin typeface="Noto Sans CJK SC"/>
+              </a:rPr>
+              <a:t>来源：https://www.rivieramm.com/news-content-hub/news-content-hub/yara-marines-fuelopt-demonstrates-significant-fuel-savings-75433 ｜ https://www.napa.fi/news/napa-norsepower-sumitomo-study/</a:t>
+            </a:r>
+          </a:p>
+        </p:txBody>
+      </p:sp>
     </p:spTree>
   </p:cSld>
   <p:clrMapOvr>
@@ -7248,6 +7500,48 @@
           </a:p>
         </p:txBody>
       </p:sp>
+      <p:sp>
+        <p:nvSpPr>
+          <p:cNvPr id="7" name="TextBox 6"/>
+          <p:cNvSpPr txBox="1"/>
+          <p:nvPr/>
+        </p:nvSpPr>
+        <p:spPr>
+          <a:xfrm>
+            <a:off x="457200" y="6492240"/>
+            <a:ext cx="10881360" cy="310896"/>
+          </a:xfrm>
+          <a:prstGeom prst="rect">
+            <a:avLst/>
+          </a:prstGeom>
+          <a:noFill/>
+        </p:spPr>
+        <p:txBody>
+          <a:bodyPr wrap="square" anchor="t">
+            <a:spAutoFit/>
+          </a:bodyPr>
+          <a:lstStyle/>
+          <a:p>
+            <a:pPr algn="l">
+              <a:lnSpc>
+                <a:spcPct val="115000"/>
+              </a:lnSpc>
+              <a:spcAft>
+                <a:spcPts val="600"/>
+              </a:spcAft>
+            </a:pPr>
+            <a:r>
+              <a:rPr sz="850" b="0">
+                <a:solidFill>
+                  <a:srgbClr val="666666"/>
+                </a:solidFill>
+                <a:latin typeface="Noto Sans CJK SC"/>
+              </a:rPr>
+              <a:t>来源：https://www.classnk.or.jp/hp/en/hp_pressrelease.aspx?id=834&amp;layout=3 ｜ https://vesselperformance.info/2024/11/15/eastern-pacific-uses-deepsea-to-improve-fuel-consumption-forecasts-to-within-1-per-cent/</a:t>
+            </a:r>
+          </a:p>
+        </p:txBody>
+      </p:sp>
     </p:spTree>
   </p:cSld>
   <p:clrMapOvr>
@@ -7885,6 +8179,48 @@
           </a:p>
         </p:txBody>
       </p:sp>
+      <p:sp>
+        <p:nvSpPr>
+          <p:cNvPr id="7" name="TextBox 6"/>
+          <p:cNvSpPr txBox="1"/>
+          <p:nvPr/>
+        </p:nvSpPr>
+        <p:spPr>
+          <a:xfrm>
+            <a:off x="457200" y="6492240"/>
+            <a:ext cx="10881360" cy="310896"/>
+          </a:xfrm>
+          <a:prstGeom prst="rect">
+            <a:avLst/>
+          </a:prstGeom>
+          <a:noFill/>
+        </p:spPr>
+        <p:txBody>
+          <a:bodyPr wrap="square" anchor="t">
+            <a:spAutoFit/>
+          </a:bodyPr>
+          <a:lstStyle/>
+          <a:p>
+            <a:pPr algn="l">
+              <a:lnSpc>
+                <a:spcPct val="115000"/>
+              </a:lnSpc>
+              <a:spcAft>
+                <a:spcPts val="600"/>
+              </a:spcAft>
+            </a:pPr>
+            <a:r>
+              <a:rPr sz="850" b="0">
+                <a:solidFill>
+                  <a:srgbClr val="666666"/>
+                </a:solidFill>
+                <a:latin typeface="Noto Sans CJK SC"/>
+              </a:rPr>
+              <a:t>来源：https://greenvoyage2050.imo.org/technology/autopilot-adjustment-and-use/ ｜ https://www.mdpi.com/2077-1312/12/1/94</a:t>
+            </a:r>
+          </a:p>
+        </p:txBody>
+      </p:sp>
     </p:spTree>
   </p:cSld>
   <p:clrMapOvr>
@@ -9296,6 +9632,48 @@
           </a:p>
         </p:txBody>
       </p:sp>
+      <p:sp>
+        <p:nvSpPr>
+          <p:cNvPr id="9" name="TextBox 8"/>
+          <p:cNvSpPr txBox="1"/>
+          <p:nvPr/>
+        </p:nvSpPr>
+        <p:spPr>
+          <a:xfrm>
+            <a:off x="457200" y="6492240"/>
+            <a:ext cx="10881360" cy="310896"/>
+          </a:xfrm>
+          <a:prstGeom prst="rect">
+            <a:avLst/>
+          </a:prstGeom>
+          <a:noFill/>
+        </p:spPr>
+        <p:txBody>
+          <a:bodyPr wrap="square" anchor="t">
+            <a:spAutoFit/>
+          </a:bodyPr>
+          <a:lstStyle/>
+          <a:p>
+            <a:pPr algn="l">
+              <a:lnSpc>
+                <a:spcPct val="115000"/>
+              </a:lnSpc>
+              <a:spcAft>
+                <a:spcPts val="600"/>
+              </a:spcAft>
+            </a:pPr>
+            <a:r>
+              <a:rPr sz="850" b="0">
+                <a:solidFill>
+                  <a:srgbClr val="666666"/>
+                </a:solidFill>
+                <a:latin typeface="Noto Sans CJK SC"/>
+              </a:rPr>
+              <a:t>来源：https://www.anschuetz.com/news/article/want-to-know-how-efficiently-your-ship-steers ｜ https://www.mdpi.com/2077-1312/12/1/94</a:t>
+            </a:r>
+          </a:p>
+        </p:txBody>
+      </p:sp>
     </p:spTree>
   </p:cSld>
   <p:clrMapOvr>
@@ -9697,6 +10075,48 @@
                 <a:latin typeface="Noto Sans CJK SC"/>
               </a:rPr>
               <a:t>4 / 19</a:t>
+            </a:r>
+          </a:p>
+        </p:txBody>
+      </p:sp>
+      <p:sp>
+        <p:nvSpPr>
+          <p:cNvPr id="8" name="TextBox 7"/>
+          <p:cNvSpPr txBox="1"/>
+          <p:nvPr/>
+        </p:nvSpPr>
+        <p:spPr>
+          <a:xfrm>
+            <a:off x="457200" y="6492240"/>
+            <a:ext cx="10881360" cy="310896"/>
+          </a:xfrm>
+          <a:prstGeom prst="rect">
+            <a:avLst/>
+          </a:prstGeom>
+          <a:noFill/>
+        </p:spPr>
+        <p:txBody>
+          <a:bodyPr wrap="square" anchor="t">
+            <a:spAutoFit/>
+          </a:bodyPr>
+          <a:lstStyle/>
+          <a:p>
+            <a:pPr algn="l">
+              <a:lnSpc>
+                <a:spcPct val="115000"/>
+              </a:lnSpc>
+              <a:spcAft>
+                <a:spcPts val="600"/>
+              </a:spcAft>
+            </a:pPr>
+            <a:r>
+              <a:rPr sz="850" b="0">
+                <a:solidFill>
+                  <a:srgbClr val="666666"/>
+                </a:solidFill>
+                <a:latin typeface="Noto Sans CJK SC"/>
+              </a:rPr>
+              <a:t>来源：https://pdfs.semanticscholar.org/d822/3e9163b9d78bbae541b1e9820cbe36d81daf.pdf（Jannaty 2023，含约束设置）</a:t>
             </a:r>
           </a:p>
         </p:txBody>
@@ -10391,6 +10811,48 @@
           </a:p>
         </p:txBody>
       </p:sp>
+      <p:sp>
+        <p:nvSpPr>
+          <p:cNvPr id="9" name="TextBox 8"/>
+          <p:cNvSpPr txBox="1"/>
+          <p:nvPr/>
+        </p:nvSpPr>
+        <p:spPr>
+          <a:xfrm>
+            <a:off x="457200" y="6492240"/>
+            <a:ext cx="10881360" cy="310896"/>
+          </a:xfrm>
+          <a:prstGeom prst="rect">
+            <a:avLst/>
+          </a:prstGeom>
+          <a:noFill/>
+        </p:spPr>
+        <p:txBody>
+          <a:bodyPr wrap="square" anchor="t">
+            <a:spAutoFit/>
+          </a:bodyPr>
+          <a:lstStyle/>
+          <a:p>
+            <a:pPr algn="l">
+              <a:lnSpc>
+                <a:spcPct val="115000"/>
+              </a:lnSpc>
+              <a:spcAft>
+                <a:spcPts val="600"/>
+              </a:spcAft>
+            </a:pPr>
+            <a:r>
+              <a:rPr sz="850" b="0">
+                <a:solidFill>
+                  <a:srgbClr val="666666"/>
+                </a:solidFill>
+                <a:latin typeface="Noto Sans CJK SC"/>
+              </a:rPr>
+              <a:t>来源：https://repository.tudelft.nl/file/File_4dca60ee-8635-4954-bee2-d55ab94a6f2c?preview=1（Zhang 2025 全文）｜ https://www.mdpi.com/2076-3417/16/9/4477</a:t>
+            </a:r>
+          </a:p>
+        </p:txBody>
+      </p:sp>
     </p:spTree>
   </p:cSld>
   <p:clrMapOvr>
@@ -11141,6 +11603,48 @@
           </a:p>
         </p:txBody>
       </p:sp>
+      <p:sp>
+        <p:nvSpPr>
+          <p:cNvPr id="8" name="TextBox 7"/>
+          <p:cNvSpPr txBox="1"/>
+          <p:nvPr/>
+        </p:nvSpPr>
+        <p:spPr>
+          <a:xfrm>
+            <a:off x="457200" y="6492240"/>
+            <a:ext cx="10881360" cy="310896"/>
+          </a:xfrm>
+          <a:prstGeom prst="rect">
+            <a:avLst/>
+          </a:prstGeom>
+          <a:noFill/>
+        </p:spPr>
+        <p:txBody>
+          <a:bodyPr wrap="square" anchor="t">
+            <a:spAutoFit/>
+          </a:bodyPr>
+          <a:lstStyle/>
+          <a:p>
+            <a:pPr algn="l">
+              <a:lnSpc>
+                <a:spcPct val="115000"/>
+              </a:lnSpc>
+              <a:spcAft>
+                <a:spcPts val="600"/>
+              </a:spcAft>
+            </a:pPr>
+            <a:r>
+              <a:rPr sz="850" b="0">
+                <a:solidFill>
+                  <a:srgbClr val="666666"/>
+                </a:solidFill>
+                <a:latin typeface="Noto Sans CJK SC"/>
+              </a:rPr>
+              <a:t>来源：https://www.classnk.or.jp/hp/en/hp_pressrelease.aspx?id=834&amp;layout=3 ｜ https://ww2.eagle.org/content/dam/eagle/advisories-and-debriefs/ABS_Energy_Efficiency_Advisory.pdf</a:t>
+            </a:r>
+          </a:p>
+        </p:txBody>
+      </p:sp>
     </p:spTree>
   </p:cSld>
   <p:clrMapOvr>
@@ -11546,6 +12050,48 @@
           </a:p>
         </p:txBody>
       </p:sp>
+      <p:sp>
+        <p:nvSpPr>
+          <p:cNvPr id="8" name="TextBox 7"/>
+          <p:cNvSpPr txBox="1"/>
+          <p:nvPr/>
+        </p:nvSpPr>
+        <p:spPr>
+          <a:xfrm>
+            <a:off x="457200" y="6492240"/>
+            <a:ext cx="10881360" cy="310896"/>
+          </a:xfrm>
+          <a:prstGeom prst="rect">
+            <a:avLst/>
+          </a:prstGeom>
+          <a:noFill/>
+        </p:spPr>
+        <p:txBody>
+          <a:bodyPr wrap="square" anchor="t">
+            <a:spAutoFit/>
+          </a:bodyPr>
+          <a:lstStyle/>
+          <a:p>
+            <a:pPr algn="l">
+              <a:lnSpc>
+                <a:spcPct val="115000"/>
+              </a:lnSpc>
+              <a:spcAft>
+                <a:spcPts val="600"/>
+              </a:spcAft>
+            </a:pPr>
+            <a:r>
+              <a:rPr sz="850" b="0">
+                <a:solidFill>
+                  <a:srgbClr val="666666"/>
+                </a:solidFill>
+                <a:latin typeface="Noto Sans CJK SC"/>
+              </a:rPr>
+              <a:t>来源：https://arxiv.org/abs/2509.11235 ｜ https://theses.gla.ac.uk/4493/（Nomoto 极点配置公式推导 §3.6.1）</a:t>
+            </a:r>
+          </a:p>
+        </p:txBody>
+      </p:sp>
     </p:spTree>
   </p:cSld>
   <p:clrMapOvr>
@@ -12026,6 +12572,48 @@
           </a:p>
         </p:txBody>
       </p:sp>
+      <p:sp>
+        <p:nvSpPr>
+          <p:cNvPr id="8" name="TextBox 7"/>
+          <p:cNvSpPr txBox="1"/>
+          <p:nvPr/>
+        </p:nvSpPr>
+        <p:spPr>
+          <a:xfrm>
+            <a:off x="457200" y="6492240"/>
+            <a:ext cx="10881360" cy="310896"/>
+          </a:xfrm>
+          <a:prstGeom prst="rect">
+            <a:avLst/>
+          </a:prstGeom>
+          <a:noFill/>
+        </p:spPr>
+        <p:txBody>
+          <a:bodyPr wrap="square" anchor="t">
+            <a:spAutoFit/>
+          </a:bodyPr>
+          <a:lstStyle/>
+          <a:p>
+            <a:pPr algn="l">
+              <a:lnSpc>
+                <a:spcPct val="115000"/>
+              </a:lnSpc>
+              <a:spcAft>
+                <a:spcPts val="600"/>
+              </a:spcAft>
+            </a:pPr>
+            <a:r>
+              <a:rPr sz="850" b="0">
+                <a:solidFill>
+                  <a:srgbClr val="666666"/>
+                </a:solidFill>
+                <a:latin typeface="Noto Sans CJK SC"/>
+              </a:rPr>
+              <a:t>来源：https://arxiv.org/abs/2510.21773 ｜ https://www.mdpi.com/2077-1312/11/2/281（Lyapunov-based MPC，DP 船）</a:t>
+            </a:r>
+          </a:p>
+        </p:txBody>
+      </p:sp>
     </p:spTree>
   </p:cSld>
   <p:clrMapOvr>
@@ -12717,6 +13305,48 @@
                 <a:latin typeface="Noto Sans CJK SC"/>
               </a:rPr>
               <a:t>9 / 19</a:t>
+            </a:r>
+          </a:p>
+        </p:txBody>
+      </p:sp>
+      <p:sp>
+        <p:nvSpPr>
+          <p:cNvPr id="7" name="TextBox 6"/>
+          <p:cNvSpPr txBox="1"/>
+          <p:nvPr/>
+        </p:nvSpPr>
+        <p:spPr>
+          <a:xfrm>
+            <a:off x="457200" y="6492240"/>
+            <a:ext cx="10881360" cy="310896"/>
+          </a:xfrm>
+          <a:prstGeom prst="rect">
+            <a:avLst/>
+          </a:prstGeom>
+          <a:noFill/>
+        </p:spPr>
+        <p:txBody>
+          <a:bodyPr wrap="square" anchor="t">
+            <a:spAutoFit/>
+          </a:bodyPr>
+          <a:lstStyle/>
+          <a:p>
+            <a:pPr algn="l">
+              <a:lnSpc>
+                <a:spcPct val="115000"/>
+              </a:lnSpc>
+              <a:spcAft>
+                <a:spcPts val="600"/>
+              </a:spcAft>
+            </a:pPr>
+            <a:r>
+              <a:rPr sz="850" b="0">
+                <a:solidFill>
+                  <a:srgbClr val="666666"/>
+                </a:solidFill>
+                <a:latin typeface="Noto Sans CJK SC"/>
+              </a:rPr>
+              <a:t>来源：https://www.sciencedirect.com/science/article/abs/pii/S0029801823023557（He 2023）｜ https://arxiv.org/abs/2509.11235</a:t>
             </a:r>
           </a:p>
         </p:txBody>

--- a/docs/ship_energy_research/船舶控制与节能算法调研汇报.pptx
+++ b/docs/ship_energy_research/船舶控制与节能算法调研汇报.pptx
@@ -24,6 +24,8 @@
     <p:sldId id="272" r:id="rId23"/>
     <p:sldId id="273" r:id="rId24"/>
     <p:sldId id="274" r:id="rId25"/>
+    <p:sldId id="275" r:id="rId26"/>
+    <p:sldId id="276" r:id="rId27"/>
   </p:sldIdLst>
   <p:sldSz cx="12191695" cy="6858000" type="screen4x3"/>
   <p:notesSz cx="6858000" cy="9144000"/>
@@ -3373,7 +3375,7 @@
                 </a:solidFill>
                 <a:latin typeface="Noto Sans CJK SC"/>
               </a:rPr>
-              <a:t>船舶节能五大路线：量级差异极大</a:t>
+              <a:t>MPC 工程化两个关键问题：实时性与稳定性</a:t>
             </a:r>
           </a:p>
         </p:txBody>
@@ -3415,38 +3417,307 @@
                 </a:solidFill>
                 <a:latin typeface="Noto Sans CJK SC"/>
               </a:rPr>
-              <a:t>来源：IMO / 船级社 / 实船试航，均为已核对数据</a:t>
-            </a:r>
-          </a:p>
-        </p:txBody>
-      </p:sp>
-      <p:pic>
-        <p:nvPicPr>
-          <p:cNvPr id="5" name="Picture 4" descr="fig4_energy_measures.png"/>
-          <p:cNvPicPr>
-            <a:picLocks noChangeAspect="1"/>
-          </p:cNvPicPr>
+              <a:t>均有文献实测数据支撑</a:t>
+            </a:r>
+          </a:p>
+        </p:txBody>
+      </p:sp>
+      <p:sp>
+        <p:nvSpPr>
+          <p:cNvPr id="5" name="TextBox 4"/>
+          <p:cNvSpPr txBox="1"/>
           <p:nvPr/>
-        </p:nvPicPr>
-        <p:blipFill>
-          <a:blip r:embed="rId2"/>
-          <a:stretch>
-            <a:fillRect/>
-          </a:stretch>
-        </p:blipFill>
+        </p:nvSpPr>
         <p:spPr>
           <a:xfrm>
-            <a:off x="1658389" y="1554480"/>
-            <a:ext cx="8844741" cy="5120640"/>
+            <a:off x="548640" y="1554480"/>
+            <a:ext cx="5669280" cy="5120640"/>
           </a:xfrm>
           <a:prstGeom prst="rect">
             <a:avLst/>
           </a:prstGeom>
+          <a:noFill/>
         </p:spPr>
-      </p:pic>
+        <p:txBody>
+          <a:bodyPr wrap="square" anchor="t">
+            <a:spAutoFit/>
+          </a:bodyPr>
+          <a:lstStyle/>
+          <a:p>
+            <a:pPr algn="l">
+              <a:lnSpc>
+                <a:spcPct val="115000"/>
+              </a:lnSpc>
+              <a:spcAft>
+                <a:spcPts val="800"/>
+              </a:spcAft>
+            </a:pPr>
+            <a:r>
+              <a:rPr sz="1400" b="1">
+                <a:solidFill>
+                  <a:srgbClr val="1F77B4"/>
+                </a:solidFill>
+                <a:latin typeface="Noto Sans CJK SC"/>
+              </a:rPr>
+              <a:t>▪ 实时性：船舶慢动态下可满足</a:t>
+            </a:r>
+          </a:p>
+          <a:p>
+            <a:pPr algn="l">
+              <a:lnSpc>
+                <a:spcPct val="115000"/>
+              </a:lnSpc>
+              <a:spcAft>
+                <a:spcPts val="400"/>
+              </a:spcAft>
+            </a:pPr>
+            <a:r>
+              <a:rPr sz="1250" b="0">
+                <a:solidFill>
+                  <a:srgbClr val="1B2A4A"/>
+                </a:solidFill>
+                <a:latin typeface="Noto Sans CJK SC"/>
+              </a:rPr>
+              <a:t>    – 船舶航向控制周期 0.1–0.2 s 足够（He 2023 船模 8 Hz）</a:t>
+            </a:r>
+          </a:p>
+          <a:p>
+            <a:pPr algn="l">
+              <a:lnSpc>
+                <a:spcPct val="115000"/>
+              </a:lnSpc>
+              <a:spcAft>
+                <a:spcPts val="400"/>
+              </a:spcAft>
+            </a:pPr>
+            <a:r>
+              <a:rPr sz="1250" b="0">
+                <a:solidFill>
+                  <a:srgbClr val="1B2A4A"/>
+                </a:solidFill>
+                <a:latin typeface="Noto Sans CJK SC"/>
+              </a:rPr>
+              <a:t>    – acados 实测：预测时域 60、20 Hz 下平均求解 7 ms，仅占采样周期 14%（Hu 2024，JMSE）</a:t>
+            </a:r>
+          </a:p>
+          <a:p>
+            <a:pPr algn="l">
+              <a:lnSpc>
+                <a:spcPct val="115000"/>
+              </a:lnSpc>
+              <a:spcAft>
+                <a:spcPts val="400"/>
+              </a:spcAft>
+            </a:pPr>
+            <a:r>
+              <a:rPr sz="1250" b="0">
+                <a:solidFill>
+                  <a:srgbClr val="1B2A4A"/>
+                </a:solidFill>
+                <a:latin typeface="Noto Sans CJK SC"/>
+              </a:rPr>
+              <a:t>    – 嵌入式平台（x86/ARM）QP 求解器基准：HPIPM 长时域最快；OSQP 热启动稳定可用（arXiv 2510.21773）</a:t>
+            </a:r>
+          </a:p>
+          <a:p>
+            <a:pPr algn="l">
+              <a:lnSpc>
+                <a:spcPct val="115000"/>
+              </a:lnSpc>
+              <a:spcAft>
+                <a:spcPts val="400"/>
+              </a:spcAft>
+            </a:pPr>
+            <a:r>
+              <a:rPr sz="1250" b="0">
+                <a:solidFill>
+                  <a:srgbClr val="1B2A4A"/>
+                </a:solidFill>
+                <a:latin typeface="Noto Sans CJK SC"/>
+              </a:rPr>
+              <a:t>    – 可选求解器：OSQP / qpSWIFT / acados / HPIPM</a:t>
+            </a:r>
+          </a:p>
+          <a:p>
+            <a:pPr algn="l">
+              <a:lnSpc>
+                <a:spcPct val="115000"/>
+              </a:lnSpc>
+              <a:spcAft>
+                <a:spcPts val="400"/>
+              </a:spcAft>
+            </a:pPr>
+            <a:r>
+              <a:rPr sz="1250" b="0">
+                <a:solidFill>
+                  <a:srgbClr val="1B2A4A"/>
+                </a:solidFill>
+                <a:latin typeface="Noto Sans CJK SC"/>
+              </a:rPr>
+              <a:t>    – 自主拖船 MPC 采样 0.2 s（You et al., 2024，UCL）</a:t>
+            </a:r>
+          </a:p>
+        </p:txBody>
+      </p:sp>
       <p:sp>
         <p:nvSpPr>
           <p:cNvPr id="6" name="TextBox 5"/>
+          <p:cNvSpPr txBox="1"/>
+          <p:nvPr/>
+        </p:nvSpPr>
+        <p:spPr>
+          <a:xfrm>
+            <a:off x="6400800" y="1554480"/>
+            <a:ext cx="5486400" cy="5120640"/>
+          </a:xfrm>
+          <a:prstGeom prst="rect">
+            <a:avLst/>
+          </a:prstGeom>
+          <a:noFill/>
+        </p:spPr>
+        <p:txBody>
+          <a:bodyPr wrap="square" anchor="t">
+            <a:spAutoFit/>
+          </a:bodyPr>
+          <a:lstStyle/>
+          <a:p>
+            <a:pPr algn="l">
+              <a:lnSpc>
+                <a:spcPct val="115000"/>
+              </a:lnSpc>
+              <a:spcAft>
+                <a:spcPts val="800"/>
+              </a:spcAft>
+            </a:pPr>
+            <a:r>
+              <a:rPr sz="1400" b="1">
+                <a:solidFill>
+                  <a:srgbClr val="E87D0D"/>
+                </a:solidFill>
+                <a:latin typeface="Noto Sans CJK SC"/>
+              </a:rPr>
+              <a:t>▪ 稳定性：需专门构造，不能默认获得</a:t>
+            </a:r>
+          </a:p>
+          <a:p>
+            <a:pPr algn="l">
+              <a:lnSpc>
+                <a:spcPct val="115000"/>
+              </a:lnSpc>
+              <a:spcAft>
+                <a:spcPts val="400"/>
+              </a:spcAft>
+            </a:pPr>
+            <a:r>
+              <a:rPr sz="1250" b="0">
+                <a:solidFill>
+                  <a:srgbClr val="1B2A4A"/>
+                </a:solidFill>
+                <a:latin typeface="Noto Sans CJK SC"/>
+              </a:rPr>
+              <a:t>    – PID：Nomoto 闭环分析成熟，频域裕度/极点配置直观</a:t>
+            </a:r>
+          </a:p>
+          <a:p>
+            <a:pPr algn="l">
+              <a:lnSpc>
+                <a:spcPct val="115000"/>
+              </a:lnSpc>
+              <a:spcAft>
+                <a:spcPts val="400"/>
+              </a:spcAft>
+            </a:pPr>
+            <a:r>
+              <a:rPr sz="1250" b="0">
+                <a:solidFill>
+                  <a:srgbClr val="1B2A4A"/>
+                </a:solidFill>
+                <a:latin typeface="Noto Sans CJK SC"/>
+              </a:rPr>
+              <a:t>    – MPC：有限时域优化不天然保证闭环稳定</a:t>
+            </a:r>
+          </a:p>
+          <a:p>
+            <a:pPr algn="l">
+              <a:lnSpc>
+                <a:spcPct val="115000"/>
+              </a:lnSpc>
+              <a:spcAft>
+                <a:spcPts val="400"/>
+              </a:spcAft>
+            </a:pPr>
+            <a:r>
+              <a:rPr sz="1250" b="0">
+                <a:solidFill>
+                  <a:srgbClr val="1B2A4A"/>
+                </a:solidFill>
+                <a:latin typeface="Noto Sans CJK SC"/>
+              </a:rPr>
+              <a:t>    – 经典框架：终端约束集 + 终端代价（Mayne et al., 2000, Automatica）</a:t>
+            </a:r>
+          </a:p>
+          <a:p>
+            <a:pPr algn="l">
+              <a:lnSpc>
+                <a:spcPct val="115000"/>
+              </a:lnSpc>
+              <a:spcAft>
+                <a:spcPts val="400"/>
+              </a:spcAft>
+            </a:pPr>
+            <a:r>
+              <a:rPr sz="1250" b="0">
+                <a:solidFill>
+                  <a:srgbClr val="1B2A4A"/>
+                </a:solidFill>
+                <a:latin typeface="Noto Sans CJK SC"/>
+              </a:rPr>
+              <a:t>    – 船舶落地形式：Lyapunov 约束嵌入优化问题</a:t>
+            </a:r>
+          </a:p>
+          <a:p>
+            <a:pPr algn="l">
+              <a:lnSpc>
+                <a:spcPct val="115000"/>
+              </a:lnSpc>
+              <a:spcAft>
+                <a:spcPts val="400"/>
+              </a:spcAft>
+            </a:pPr>
+            <a:r>
+              <a:rPr sz="1250" b="0">
+                <a:solidFill>
+                  <a:srgbClr val="1B2A4A"/>
+                </a:solidFill>
+                <a:latin typeface="Noto Sans CJK SC"/>
+              </a:rPr>
+              <a:t>    – Gong et al., 2021（AUV，Ocean Engineering）</a:t>
+            </a:r>
+          </a:p>
+          <a:p>
+            <a:pPr algn="l">
+              <a:lnSpc>
+                <a:spcPct val="115000"/>
+              </a:lnSpc>
+              <a:spcAft>
+                <a:spcPts val="400"/>
+              </a:spcAft>
+            </a:pPr>
+            <a:r>
+              <a:rPr sz="1250" b="0">
+                <a:solidFill>
+                  <a:srgbClr val="1B2A4A"/>
+                </a:solidFill>
+                <a:latin typeface="Noto Sans CJK SC"/>
+              </a:rPr>
+              <a:t>    – Zhang et al., 2023（DP 船，JMSE 11(2):281）</a:t>
+            </a:r>
+          </a:p>
+        </p:txBody>
+      </p:sp>
+      <p:sp>
+        <p:nvSpPr>
+          <p:cNvPr id="7" name="TextBox 6"/>
           <p:cNvSpPr txBox="1"/>
           <p:nvPr/>
         </p:nvSpPr>
@@ -3481,14 +3752,14 @@
                 </a:solidFill>
                 <a:latin typeface="Noto Sans CJK SC"/>
               </a:rPr>
-              <a:t>10 / 19</a:t>
-            </a:r>
-          </a:p>
-        </p:txBody>
-      </p:sp>
-      <p:sp>
-        <p:nvSpPr>
-          <p:cNvPr id="7" name="TextBox 6"/>
+              <a:t>10 / 21</a:t>
+            </a:r>
+          </a:p>
+        </p:txBody>
+      </p:sp>
+      <p:sp>
+        <p:nvSpPr>
+          <p:cNvPr id="8" name="TextBox 7"/>
           <p:cNvSpPr txBox="1"/>
           <p:nvPr/>
         </p:nvSpPr>
@@ -3523,7 +3794,7 @@
                 </a:solidFill>
                 <a:latin typeface="Noto Sans CJK SC"/>
               </a:rPr>
-              <a:t>来源：https://greenvoyage2050.imo.org/technology/speed-management/ ｜ https://greenvoyage2050.imo.org/technology/autopilot-adjustment-and-use/</a:t>
+              <a:t>来源：https://arxiv.org/abs/2510.21773 ｜ https://www.mdpi.com/2077-1312/11/2/281（Lyapunov-based MPC，DP 船）</a:t>
             </a:r>
           </a:p>
         </p:txBody>
@@ -3626,56 +3897,14 @@
                 </a:solidFill>
                 <a:latin typeface="Noto Sans CJK SC"/>
               </a:rPr>
-              <a:t>节能方案优缺点（一）：决策层</a:t>
-            </a:r>
-          </a:p>
-        </p:txBody>
-      </p:sp>
-      <p:sp>
-        <p:nvSpPr>
-          <p:cNvPr id="4" name="TextBox 3"/>
-          <p:cNvSpPr txBox="1"/>
-          <p:nvPr/>
-        </p:nvSpPr>
-        <p:spPr>
-          <a:xfrm>
-            <a:off x="475488" y="914400"/>
-            <a:ext cx="11247120" cy="457200"/>
-          </a:xfrm>
-          <a:prstGeom prst="rect">
-            <a:avLst/>
-          </a:prstGeom>
-          <a:noFill/>
-        </p:spPr>
-        <p:txBody>
-          <a:bodyPr wrap="square" anchor="t">
-            <a:spAutoFit/>
-          </a:bodyPr>
-          <a:lstStyle/>
-          <a:p>
-            <a:pPr algn="l">
-              <a:lnSpc>
-                <a:spcPct val="115000"/>
-              </a:lnSpc>
-              <a:spcAft>
-                <a:spcPts val="600"/>
-              </a:spcAft>
-            </a:pPr>
-            <a:r>
-              <a:rPr sz="1400" b="0">
-                <a:solidFill>
-                  <a:srgbClr val="666666"/>
-                </a:solidFill>
-                <a:latin typeface="Noto Sans CJK SC"/>
-              </a:rPr>
-              <a:t>节能大头所在</a:t>
+              <a:t>MPC vs PD 部署优缺点小结</a:t>
             </a:r>
           </a:p>
         </p:txBody>
       </p:sp>
       <p:graphicFrame>
         <p:nvGraphicFramePr>
-          <p:cNvPr id="5" name="Table 4"/>
+          <p:cNvPr id="4" name="Table 3"/>
           <p:cNvGraphicFramePr>
             <a:graphicFrameLocks noGrp="1"/>
           </p:cNvGraphicFramePr>
@@ -3683,7 +3912,7 @@
         </p:nvGraphicFramePr>
         <p:xfrm>
           <a:off x="457200" y="1463040"/>
-          <a:ext cx="11338559" cy="4846320"/>
+          <a:ext cx="11338558" cy="3566160"/>
         </p:xfrm>
         <a:graphic>
           <a:graphicData uri="http://schemas.openxmlformats.org/drawingml/2006/table">
@@ -3692,30 +3921,29 @@
                 <a:tableStyleId>{5C22544A-7EE6-4342-B048-85BDC9FD1C3A}</a:tableStyleId>
               </a:tblPr>
               <a:tblGrid>
-                <a:gridCol w="1553227"/>
-                <a:gridCol w="4038391"/>
-                <a:gridCol w="2795809"/>
-                <a:gridCol w="2951132"/>
+                <a:gridCol w="1790298"/>
+                <a:gridCol w="4376286"/>
+                <a:gridCol w="5171974"/>
               </a:tblGrid>
-              <a:tr h="1211580">
-                <a:tc>
-                  <a:txBody>
-                    <a:bodyPr/>
-                    <a:lstStyle/>
-                    <a:p>
-                      <a:pPr>
-                        <a:lnSpc>
-                          <a:spcPct val="105000"/>
-                        </a:lnSpc>
-                      </a:pPr>
-                      <a:r>
-                        <a:rPr sz="1250" b="1">
+              <a:tr h="594360">
+                <a:tc>
+                  <a:txBody>
+                    <a:bodyPr/>
+                    <a:lstStyle/>
+                    <a:p>
+                      <a:pPr>
+                        <a:lnSpc>
+                          <a:spcPct val="105000"/>
+                        </a:lnSpc>
+                      </a:pPr>
+                      <a:r>
+                        <a:rPr sz="1350" b="1">
                           <a:solidFill>
                             <a:srgbClr val="FFFFFF"/>
                           </a:solidFill>
                           <a:latin typeface="Noto Sans CJK SC"/>
                         </a:rPr>
-                        <a:t>方案</a:t>
+                        <a:t>维度</a:t>
                       </a:r>
                     </a:p>
                   </a:txBody>
@@ -3736,13 +3964,13 @@
                         </a:lnSpc>
                       </a:pPr>
                       <a:r>
-                        <a:rPr sz="1250" b="1">
+                        <a:rPr sz="1350" b="1">
                           <a:solidFill>
                             <a:srgbClr val="FFFFFF"/>
                           </a:solidFill>
                           <a:latin typeface="Noto Sans CJK SC"/>
                         </a:rPr>
-                        <a:t>代表数据（已核对）</a:t>
+                        <a:t>传统 PD/PID</a:t>
                       </a:r>
                     </a:p>
                   </a:txBody>
@@ -3763,13 +3991,13 @@
                         </a:lnSpc>
                       </a:pPr>
                       <a:r>
-                        <a:rPr sz="1250" b="1">
+                        <a:rPr sz="1350" b="1">
                           <a:solidFill>
                             <a:srgbClr val="FFFFFF"/>
                           </a:solidFill>
                           <a:latin typeface="Noto Sans CJK SC"/>
                         </a:rPr>
-                        <a:t>优点</a:t>
+                        <a:t>MPC</a:t>
                       </a:r>
                     </a:p>
                   </a:txBody>
@@ -3779,53 +4007,26 @@
                     </a:solidFill>
                   </a:tcPr>
                 </a:tc>
-                <a:tc>
-                  <a:txBody>
-                    <a:bodyPr/>
-                    <a:lstStyle/>
-                    <a:p>
-                      <a:pPr>
-                        <a:lnSpc>
-                          <a:spcPct val="105000"/>
-                        </a:lnSpc>
-                      </a:pPr>
-                      <a:r>
-                        <a:rPr sz="1250" b="1">
-                          <a:solidFill>
-                            <a:srgbClr val="FFFFFF"/>
-                          </a:solidFill>
-                          <a:latin typeface="Noto Sans CJK SC"/>
-                        </a:rPr>
-                        <a:t>缺点</a:t>
-                      </a:r>
-                    </a:p>
-                  </a:txBody>
-                  <a:tcPr marL="54864" marR="54864" marT="27432" marB="27432" anchor="ctr">
-                    <a:solidFill>
-                      <a:srgbClr val="1F77B4"/>
-                    </a:solidFill>
-                  </a:tcPr>
-                </a:tc>
               </a:tr>
-              <a:tr h="1211580">
-                <a:tc>
-                  <a:txBody>
-                    <a:bodyPr/>
-                    <a:lstStyle/>
-                    <a:p>
-                      <a:pPr>
-                        <a:lnSpc>
-                          <a:spcPct val="105000"/>
-                        </a:lnSpc>
-                      </a:pPr>
-                      <a:r>
-                        <a:rPr sz="1200" b="0">
-                          <a:solidFill>
-                            <a:srgbClr val="1B2A4A"/>
-                          </a:solidFill>
-                          <a:latin typeface="Noto Sans CJK SC"/>
-                        </a:rPr>
-                        <a:t>减速航行</a:t>
+              <a:tr h="594360">
+                <a:tc>
+                  <a:txBody>
+                    <a:bodyPr/>
+                    <a:lstStyle/>
+                    <a:p>
+                      <a:pPr>
+                        <a:lnSpc>
+                          <a:spcPct val="105000"/>
+                        </a:lnSpc>
+                      </a:pPr>
+                      <a:r>
+                        <a:rPr sz="1300" b="0">
+                          <a:solidFill>
+                            <a:srgbClr val="1B2A4A"/>
+                          </a:solidFill>
+                          <a:latin typeface="Noto Sans CJK SC"/>
+                        </a:rPr>
+                        <a:t>控制效果</a:t>
                       </a:r>
                     </a:p>
                   </a:txBody>
@@ -3842,29 +4043,13 @@
                         </a:lnSpc>
                       </a:pPr>
                       <a:r>
-                        <a:rPr sz="1200" b="0">
-                          <a:solidFill>
-                            <a:srgbClr val="1B2A4A"/>
-                          </a:solidFill>
-                          <a:latin typeface="Noto Sans CJK SC"/>
-                        </a:rPr>
-                        <a:t>23→12 kn 每海里油耗降 72–76%（Pelić 2023）</a:t>
-                      </a:r>
-                    </a:p>
-                    <a:p>
-                      <a:pPr>
-                        <a:lnSpc>
-                          <a:spcPct val="105000"/>
-                        </a:lnSpc>
-                      </a:pPr>
-                      <a:r>
-                        <a:rPr sz="1200" b="0">
-                          <a:solidFill>
-                            <a:srgbClr val="1B2A4A"/>
-                          </a:solidFill>
-                          <a:latin typeface="Noto Sans CJK SC"/>
-                        </a:rPr>
-                        <a:t>IMO：主机油耗潜力 10–50%，全船口径 3–12%</a:t>
+                        <a:rPr sz="1300" b="0">
+                          <a:solidFill>
+                            <a:srgbClr val="1B2A4A"/>
+                          </a:solidFill>
+                          <a:latin typeface="Noto Sans CJK SC"/>
+                        </a:rPr>
+                        <a:t>无前瞻、海浪下易无效操舵</a:t>
                       </a:r>
                     </a:p>
                   </a:txBody>
@@ -3881,61 +4066,38 @@
                         </a:lnSpc>
                       </a:pPr>
                       <a:r>
-                        <a:rPr sz="1200" b="0">
-                          <a:solidFill>
-                            <a:srgbClr val="1B2A4A"/>
-                          </a:solidFill>
-                          <a:latin typeface="Noto Sans CJK SC"/>
-                        </a:rPr>
-                        <a:t>杠杆最大；零硬件成本；单位运输功油耗直接下降</a:t>
+                        <a:rPr sz="1300" b="0">
+                          <a:solidFill>
+                            <a:srgbClr val="1B2A4A"/>
+                          </a:solidFill>
+                          <a:latin typeface="Noto Sans CJK SC"/>
+                        </a:rPr>
+                        <a:t>响应快、超调小、抗扰强、特定工况舵动作更少</a:t>
                       </a:r>
                     </a:p>
                   </a:txBody>
                   <a:tcPr marL="54864" marR="54864" marT="27432" marB="27432" anchor="ctr"/>
                 </a:tc>
-                <a:tc>
-                  <a:txBody>
-                    <a:bodyPr/>
-                    <a:lstStyle/>
-                    <a:p>
-                      <a:pPr>
-                        <a:lnSpc>
-                          <a:spcPct val="105000"/>
-                        </a:lnSpc>
-                      </a:pPr>
-                      <a:r>
-                        <a:rPr sz="1200" b="0">
-                          <a:solidFill>
-                            <a:srgbClr val="1B2A4A"/>
-                          </a:solidFill>
-                          <a:latin typeface="Noto Sans CJK SC"/>
-                        </a:rPr>
-                        <a:t>牺牲船期；受租约约束；低速偏离主机最佳负荷点</a:t>
-                      </a:r>
-                    </a:p>
-                  </a:txBody>
-                  <a:tcPr marL="54864" marR="54864" marT="27432" marB="27432" anchor="ctr"/>
-                </a:tc>
               </a:tr>
-              <a:tr h="1211580">
-                <a:tc>
-                  <a:txBody>
-                    <a:bodyPr/>
-                    <a:lstStyle/>
-                    <a:p>
-                      <a:pPr>
-                        <a:lnSpc>
-                          <a:spcPct val="105000"/>
-                        </a:lnSpc>
-                      </a:pPr>
-                      <a:r>
-                        <a:rPr sz="1200" b="0">
-                          <a:solidFill>
-                            <a:srgbClr val="1B2A4A"/>
-                          </a:solidFill>
-                          <a:latin typeface="Noto Sans CJK SC"/>
-                        </a:rPr>
-                        <a:t>气象航线优化</a:t>
+              <a:tr h="594360">
+                <a:tc>
+                  <a:txBody>
+                    <a:bodyPr/>
+                    <a:lstStyle/>
+                    <a:p>
+                      <a:pPr>
+                        <a:lnSpc>
+                          <a:spcPct val="105000"/>
+                        </a:lnSpc>
+                      </a:pPr>
+                      <a:r>
+                        <a:rPr sz="1300" b="0">
+                          <a:solidFill>
+                            <a:srgbClr val="1B2A4A"/>
+                          </a:solidFill>
+                          <a:latin typeface="Noto Sans CJK SC"/>
+                        </a:rPr>
+                        <a:t>调试难度</a:t>
                       </a:r>
                     </a:p>
                   </a:txBody>
@@ -3956,29 +4118,13 @@
                         </a:lnSpc>
                       </a:pPr>
                       <a:r>
-                        <a:rPr sz="1200" b="0">
-                          <a:solidFill>
-                            <a:srgbClr val="1B2A4A"/>
-                          </a:solidFill>
-                          <a:latin typeface="Noto Sans CJK SC"/>
-                        </a:rPr>
-                        <a:t>IMO 口径 ≥3%，集装箱船可达 10%</a:t>
-                      </a:r>
-                    </a:p>
-                    <a:p>
-                      <a:pPr>
-                        <a:lnSpc>
-                          <a:spcPct val="105000"/>
-                        </a:lnSpc>
-                      </a:pPr>
-                      <a:r>
-                        <a:rPr sz="1200" b="0">
-                          <a:solidFill>
-                            <a:srgbClr val="1B2A4A"/>
-                          </a:solidFill>
-                          <a:latin typeface="Noto Sans CJK SC"/>
-                        </a:rPr>
-                        <a:t>Li 2022 实船 2.1–5.2%（二手转引）</a:t>
+                        <a:rPr sz="1300" b="0">
+                          <a:solidFill>
+                            <a:srgbClr val="1B2A4A"/>
+                          </a:solidFill>
+                          <a:latin typeface="Noto Sans CJK SC"/>
+                        </a:rPr>
+                        <a:t>整定规则成熟，船员可现场整定</a:t>
                       </a:r>
                     </a:p>
                   </a:txBody>
@@ -3999,13 +4145,13 @@
                         </a:lnSpc>
                       </a:pPr>
                       <a:r>
-                        <a:rPr sz="1200" b="0">
-                          <a:solidFill>
-                            <a:srgbClr val="1B2A4A"/>
-                          </a:solidFill>
-                          <a:latin typeface="Noto Sans CJK SC"/>
-                        </a:rPr>
-                        <a:t>节能+避离恶劣海况兼得；商用服务成熟</a:t>
+                        <a:rPr sz="1300" b="0">
+                          <a:solidFill>
+                            <a:srgbClr val="1B2A4A"/>
+                          </a:solidFill>
+                          <a:latin typeface="Noto Sans CJK SC"/>
+                        </a:rPr>
+                        <a:t>模型辨识是硬门槛；权重多靠 trial-and-error</a:t>
                       </a:r>
                     </a:p>
                   </a:txBody>
@@ -4015,24 +4161,97 @@
                     </a:solidFill>
                   </a:tcPr>
                 </a:tc>
-                <a:tc>
-                  <a:txBody>
-                    <a:bodyPr/>
-                    <a:lstStyle/>
-                    <a:p>
-                      <a:pPr>
-                        <a:lnSpc>
-                          <a:spcPct val="105000"/>
-                        </a:lnSpc>
-                      </a:pPr>
-                      <a:r>
-                        <a:rPr sz="1200" b="0">
-                          <a:solidFill>
-                            <a:srgbClr val="1B2A4A"/>
-                          </a:solidFill>
-                          <a:latin typeface="Noto Sans CJK SC"/>
-                        </a:rPr>
-                        <a:t>依赖气象预报与增阻模型精度；收益随海况波动</a:t>
+              </a:tr>
+              <a:tr h="594360">
+                <a:tc>
+                  <a:txBody>
+                    <a:bodyPr/>
+                    <a:lstStyle/>
+                    <a:p>
+                      <a:pPr>
+                        <a:lnSpc>
+                          <a:spcPct val="105000"/>
+                        </a:lnSpc>
+                      </a:pPr>
+                      <a:r>
+                        <a:rPr sz="1300" b="0">
+                          <a:solidFill>
+                            <a:srgbClr val="1B2A4A"/>
+                          </a:solidFill>
+                          <a:latin typeface="Noto Sans CJK SC"/>
+                        </a:rPr>
+                        <a:t>实时计算</a:t>
+                      </a:r>
+                    </a:p>
+                  </a:txBody>
+                  <a:tcPr marL="54864" marR="54864" marT="27432" marB="27432" anchor="ctr"/>
+                </a:tc>
+                <a:tc>
+                  <a:txBody>
+                    <a:bodyPr/>
+                    <a:lstStyle/>
+                    <a:p>
+                      <a:pPr>
+                        <a:lnSpc>
+                          <a:spcPct val="105000"/>
+                        </a:lnSpc>
+                      </a:pPr>
+                      <a:r>
+                        <a:rPr sz="1300" b="0">
+                          <a:solidFill>
+                            <a:srgbClr val="1B2A4A"/>
+                          </a:solidFill>
+                          <a:latin typeface="Noto Sans CJK SC"/>
+                        </a:rPr>
+                        <a:t>几次乘加，单片机即可</a:t>
+                      </a:r>
+                    </a:p>
+                  </a:txBody>
+                  <a:tcPr marL="54864" marR="54864" marT="27432" marB="27432" anchor="ctr"/>
+                </a:tc>
+                <a:tc>
+                  <a:txBody>
+                    <a:bodyPr/>
+                    <a:lstStyle/>
+                    <a:p>
+                      <a:pPr>
+                        <a:lnSpc>
+                          <a:spcPct val="105000"/>
+                        </a:lnSpc>
+                      </a:pPr>
+                      <a:r>
+                        <a:rPr sz="1300" b="0">
+                          <a:solidFill>
+                            <a:srgbClr val="1B2A4A"/>
+                          </a:solidFill>
+                          <a:latin typeface="Noto Sans CJK SC"/>
+                        </a:rPr>
+                        <a:t>每周期解 QP/NLP；船舶慢动态下可行（实测 7 ms）</a:t>
+                      </a:r>
+                    </a:p>
+                  </a:txBody>
+                  <a:tcPr marL="54864" marR="54864" marT="27432" marB="27432" anchor="ctr"/>
+                </a:tc>
+              </a:tr>
+              <a:tr h="594360">
+                <a:tc>
+                  <a:txBody>
+                    <a:bodyPr/>
+                    <a:lstStyle/>
+                    <a:p>
+                      <a:pPr>
+                        <a:lnSpc>
+                          <a:spcPct val="105000"/>
+                        </a:lnSpc>
+                      </a:pPr>
+                      <a:r>
+                        <a:rPr sz="1300" b="0">
+                          <a:solidFill>
+                            <a:srgbClr val="1B2A4A"/>
+                          </a:solidFill>
+                          <a:latin typeface="Noto Sans CJK SC"/>
+                        </a:rPr>
+                        <a:t>约束/安全</a:t>
                       </a:r>
                     </a:p>
                   </a:txBody>
@@ -4042,26 +4261,80 @@
                     </a:solidFill>
                   </a:tcPr>
                 </a:tc>
+                <a:tc>
+                  <a:txBody>
+                    <a:bodyPr/>
+                    <a:lstStyle/>
+                    <a:p>
+                      <a:pPr>
+                        <a:lnSpc>
+                          <a:spcPct val="105000"/>
+                        </a:lnSpc>
+                      </a:pPr>
+                      <a:r>
+                        <a:rPr sz="1300" b="0">
+                          <a:solidFill>
+                            <a:srgbClr val="1B2A4A"/>
+                          </a:solidFill>
+                          <a:latin typeface="Noto Sans CJK SC"/>
+                        </a:rPr>
+                        <a:t>事后饱和截断，约束下退化</a:t>
+                      </a:r>
+                    </a:p>
+                  </a:txBody>
+                  <a:tcPr marL="54864" marR="54864" marT="27432" marB="27432" anchor="ctr">
+                    <a:solidFill>
+                      <a:srgbClr val="EEF3FA"/>
+                    </a:solidFill>
+                  </a:tcPr>
+                </a:tc>
+                <a:tc>
+                  <a:txBody>
+                    <a:bodyPr/>
+                    <a:lstStyle/>
+                    <a:p>
+                      <a:pPr>
+                        <a:lnSpc>
+                          <a:spcPct val="105000"/>
+                        </a:lnSpc>
+                      </a:pPr>
+                      <a:r>
+                        <a:rPr sz="1300" b="0">
+                          <a:solidFill>
+                            <a:srgbClr val="1B2A4A"/>
+                          </a:solidFill>
+                          <a:latin typeface="Noto Sans CJK SC"/>
+                        </a:rPr>
+                        <a:t>舵角/舵速约束显式满足；稳定性需专门构造</a:t>
+                      </a:r>
+                    </a:p>
+                  </a:txBody>
+                  <a:tcPr marL="54864" marR="54864" marT="27432" marB="27432" anchor="ctr">
+                    <a:solidFill>
+                      <a:srgbClr val="EEF3FA"/>
+                    </a:solidFill>
+                  </a:tcPr>
+                </a:tc>
               </a:tr>
-              <a:tr h="1211580">
-                <a:tc>
-                  <a:txBody>
-                    <a:bodyPr/>
-                    <a:lstStyle/>
-                    <a:p>
-                      <a:pPr>
-                        <a:lnSpc>
-                          <a:spcPct val="105000"/>
-                        </a:lnSpc>
-                      </a:pPr>
-                      <a:r>
-                        <a:rPr sz="1200" b="0">
-                          <a:solidFill>
-                            <a:srgbClr val="1B2A4A"/>
-                          </a:solidFill>
-                          <a:latin typeface="Noto Sans CJK SC"/>
-                        </a:rPr>
-                        <a:t>纵倾优化</a:t>
+              <a:tr h="594360">
+                <a:tc>
+                  <a:txBody>
+                    <a:bodyPr/>
+                    <a:lstStyle/>
+                    <a:p>
+                      <a:pPr>
+                        <a:lnSpc>
+                          <a:spcPct val="105000"/>
+                        </a:lnSpc>
+                      </a:pPr>
+                      <a:r>
+                        <a:rPr sz="1300" b="0">
+                          <a:solidFill>
+                            <a:srgbClr val="1B2A4A"/>
+                          </a:solidFill>
+                          <a:latin typeface="Noto Sans CJK SC"/>
+                        </a:rPr>
+                        <a:t>认证与维护</a:t>
                       </a:r>
                     </a:p>
                   </a:txBody>
@@ -4078,29 +4351,13 @@
                         </a:lnSpc>
                       </a:pPr>
                       <a:r>
-                        <a:rPr sz="1200" b="0">
-                          <a:solidFill>
-                            <a:srgbClr val="1B2A4A"/>
-                          </a:solidFill>
-                          <a:latin typeface="Noto Sans CJK SC"/>
-                        </a:rPr>
-                        <a:t>ClassNK-NAPA 实船试航：纵倾贡献 1.2%</a:t>
-                      </a:r>
-                    </a:p>
-                    <a:p>
-                      <a:pPr>
-                        <a:lnSpc>
-                          <a:spcPct val="105000"/>
-                        </a:lnSpc>
-                      </a:pPr>
-                      <a:r>
-                        <a:rPr sz="1200" b="0">
-                          <a:solidFill>
-                            <a:srgbClr val="1B2A4A"/>
-                          </a:solidFill>
-                          <a:latin typeface="Noto Sans CJK SC"/>
-                        </a:rPr>
-                        <a:t>专项研究最多 4%；Eniram 实测 1–5%</a:t>
+                        <a:rPr sz="1300" b="0">
+                          <a:solidFill>
+                            <a:srgbClr val="1B2A4A"/>
+                          </a:solidFill>
+                          <a:latin typeface="Noto Sans CJK SC"/>
+                        </a:rPr>
+                        <a:t>工业生态与船级社认证完备</a:t>
                       </a:r>
                     </a:p>
                   </a:txBody>
@@ -4117,36 +4374,13 @@
                         </a:lnSpc>
                       </a:pPr>
                       <a:r>
-                        <a:rPr sz="1200" b="0">
-                          <a:solidFill>
-                            <a:srgbClr val="1B2A4A"/>
-                          </a:solidFill>
-                          <a:latin typeface="Noto Sans CJK SC"/>
-                        </a:rPr>
-                        <a:t>几乎零成本（调压载水）；实船背书强</a:t>
-                      </a:r>
-                    </a:p>
-                  </a:txBody>
-                  <a:tcPr marL="54864" marR="54864" marT="27432" marB="27432" anchor="ctr"/>
-                </a:tc>
-                <a:tc>
-                  <a:txBody>
-                    <a:bodyPr/>
-                    <a:lstStyle/>
-                    <a:p>
-                      <a:pPr>
-                        <a:lnSpc>
-                          <a:spcPct val="105000"/>
-                        </a:lnSpc>
-                      </a:pPr>
-                      <a:r>
-                        <a:rPr sz="1200" b="0">
-                          <a:solidFill>
-                            <a:srgbClr val="1B2A4A"/>
-                          </a:solidFill>
-                          <a:latin typeface="Noto Sans CJK SC"/>
-                        </a:rPr>
-                        <a:t>最优纵倾随工况变化；受稳性/装卸约束；幅度偏小</a:t>
+                        <a:rPr sz="1300" b="0">
+                          <a:solidFill>
+                            <a:srgbClr val="1B2A4A"/>
+                          </a:solidFill>
+                          <a:latin typeface="Noto Sans CJK SC"/>
+                        </a:rPr>
+                        <a:t>认证路径不成熟；需控制工程师维护</a:t>
                       </a:r>
                     </a:p>
                   </a:txBody>
@@ -4157,6 +4391,67 @@
           </a:graphicData>
         </a:graphic>
       </p:graphicFrame>
+      <p:sp>
+        <p:nvSpPr>
+          <p:cNvPr id="5" name="TextBox 4"/>
+          <p:cNvSpPr txBox="1"/>
+          <p:nvPr/>
+        </p:nvSpPr>
+        <p:spPr>
+          <a:xfrm>
+            <a:off x="457200" y="5303520"/>
+            <a:ext cx="11338560" cy="1188720"/>
+          </a:xfrm>
+          <a:prstGeom prst="rect">
+            <a:avLst/>
+          </a:prstGeom>
+          <a:noFill/>
+        </p:spPr>
+        <p:txBody>
+          <a:bodyPr wrap="square" anchor="t">
+            <a:spAutoFit/>
+          </a:bodyPr>
+          <a:lstStyle/>
+          <a:p>
+            <a:pPr algn="l">
+              <a:lnSpc>
+                <a:spcPct val="115000"/>
+              </a:lnSpc>
+              <a:spcAft>
+                <a:spcPts val="600"/>
+              </a:spcAft>
+            </a:pPr>
+            <a:r>
+              <a:rPr sz="1700" b="1">
+                <a:solidFill>
+                  <a:srgbClr val="2CA02C"/>
+                </a:solidFill>
+                <a:latin typeface="Noto Sans CJK SC"/>
+              </a:rPr>
+              <a:t>结论性判断：PD/PID 打底保证可靠性，MPC 作为性能增强层；</a:t>
+            </a:r>
+          </a:p>
+          <a:p>
+            <a:pPr algn="l">
+              <a:lnSpc>
+                <a:spcPct val="115000"/>
+              </a:lnSpc>
+              <a:spcAft>
+                <a:spcPts val="600"/>
+              </a:spcAft>
+            </a:pPr>
+            <a:r>
+              <a:rPr sz="1700" b="1">
+                <a:solidFill>
+                  <a:srgbClr val="2CA02C"/>
+                </a:solidFill>
+                <a:latin typeface="Noto Sans CJK SC"/>
+              </a:rPr>
+              <a:t>模型辨识与整定自动化（本仓库 auto_tuning 流程）是 MPC 能否落地的前置条件。</a:t>
+            </a:r>
+          </a:p>
+        </p:txBody>
+      </p:sp>
       <p:sp>
         <p:nvSpPr>
           <p:cNvPr id="6" name="TextBox 5"/>
@@ -4194,7 +4489,7 @@
                 </a:solidFill>
                 <a:latin typeface="Noto Sans CJK SC"/>
               </a:rPr>
-              <a:t>11 / 19</a:t>
+              <a:t>11 / 21</a:t>
             </a:r>
           </a:p>
         </p:txBody>
@@ -4236,7 +4531,7 @@
                 </a:solidFill>
                 <a:latin typeface="Noto Sans CJK SC"/>
               </a:rPr>
-              <a:t>来源：https://www.mdpi.com/2077-1312/11/3/675 ｜ https://stormgeo.com/insights/how-the-evolution-of-weather-routing-is-reducing-greenhouse-gas-emissions</a:t>
+              <a:t>来源：https://www.sciencedirect.com/science/article/abs/pii/S0029801823023557（He 2023）｜ https://arxiv.org/abs/2509.11235</a:t>
             </a:r>
           </a:p>
         </p:txBody>
@@ -4339,7 +4634,7 @@
                 </a:solidFill>
                 <a:latin typeface="Noto Sans CJK SC"/>
               </a:rPr>
-              <a:t>节能方案关键数据补充</a:t>
+              <a:t>船舶节能五大路线：量级差异极大</a:t>
             </a:r>
           </a:p>
         </p:txBody>
@@ -4381,612 +4676,35 @@
                 </a:solidFill>
                 <a:latin typeface="Noto Sans CJK SC"/>
               </a:rPr>
-              <a:t>对比基线与口径已逐条核对，避免误读</a:t>
-            </a:r>
-          </a:p>
-        </p:txBody>
-      </p:sp>
-      <p:graphicFrame>
-        <p:nvGraphicFramePr>
-          <p:cNvPr id="5" name="Table 4"/>
-          <p:cNvGraphicFramePr>
-            <a:graphicFrameLocks noGrp="1"/>
-          </p:cNvGraphicFramePr>
+              <a:t>来源：IMO / 船级社 / 实船试航，均为已核对数据</a:t>
+            </a:r>
+          </a:p>
+        </p:txBody>
+      </p:sp>
+      <p:pic>
+        <p:nvPicPr>
+          <p:cNvPr id="5" name="Picture 4" descr="fig4_energy_measures.png"/>
+          <p:cNvPicPr>
+            <a:picLocks noChangeAspect="1"/>
+          </p:cNvPicPr>
           <p:nvPr/>
-        </p:nvGraphicFramePr>
-        <p:xfrm>
-          <a:off x="457200" y="1463040"/>
-          <a:ext cx="11338560" cy="4846320"/>
-        </p:xfrm>
-        <a:graphic>
-          <a:graphicData uri="http://schemas.openxmlformats.org/drawingml/2006/table">
-            <a:tbl>
-              <a:tblPr firstRow="1" bandRow="1">
-                <a:tableStyleId>{5C22544A-7EE6-4342-B048-85BDC9FD1C3A}</a:tableStyleId>
-              </a:tblPr>
-              <a:tblGrid>
-                <a:gridCol w="1889760"/>
-                <a:gridCol w="6299200"/>
-                <a:gridCol w="3149600"/>
-              </a:tblGrid>
-              <a:tr h="807720">
-                <a:tc>
-                  <a:txBody>
-                    <a:bodyPr/>
-                    <a:lstStyle/>
-                    <a:p>
-                      <a:pPr>
-                        <a:lnSpc>
-                          <a:spcPct val="105000"/>
-                        </a:lnSpc>
-                      </a:pPr>
-                      <a:r>
-                        <a:rPr sz="1200" b="1">
-                          <a:solidFill>
-                            <a:srgbClr val="FFFFFF"/>
-                          </a:solidFill>
-                          <a:latin typeface="Noto Sans CJK SC"/>
-                        </a:rPr>
-                        <a:t>方案</a:t>
-                      </a:r>
-                    </a:p>
-                  </a:txBody>
-                  <a:tcPr marL="54864" marR="54864" marT="27432" marB="27432" anchor="ctr">
-                    <a:solidFill>
-                      <a:srgbClr val="1F77B4"/>
-                    </a:solidFill>
-                  </a:tcPr>
-                </a:tc>
-                <a:tc>
-                  <a:txBody>
-                    <a:bodyPr/>
-                    <a:lstStyle/>
-                    <a:p>
-                      <a:pPr>
-                        <a:lnSpc>
-                          <a:spcPct val="105000"/>
-                        </a:lnSpc>
-                      </a:pPr>
-                      <a:r>
-                        <a:rPr sz="1200" b="1">
-                          <a:solidFill>
-                            <a:srgbClr val="FFFFFF"/>
-                          </a:solidFill>
-                          <a:latin typeface="Noto Sans CJK SC"/>
-                        </a:rPr>
-                        <a:t>补充数据（已核对）</a:t>
-                      </a:r>
-                    </a:p>
-                  </a:txBody>
-                  <a:tcPr marL="54864" marR="54864" marT="27432" marB="27432" anchor="ctr">
-                    <a:solidFill>
-                      <a:srgbClr val="1F77B4"/>
-                    </a:solidFill>
-                  </a:tcPr>
-                </a:tc>
-                <a:tc>
-                  <a:txBody>
-                    <a:bodyPr/>
-                    <a:lstStyle/>
-                    <a:p>
-                      <a:pPr>
-                        <a:lnSpc>
-                          <a:spcPct val="105000"/>
-                        </a:lnSpc>
-                      </a:pPr>
-                      <a:r>
-                        <a:rPr sz="1200" b="1">
-                          <a:solidFill>
-                            <a:srgbClr val="FFFFFF"/>
-                          </a:solidFill>
-                          <a:latin typeface="Noto Sans CJK SC"/>
-                        </a:rPr>
-                        <a:t>口径说明</a:t>
-                      </a:r>
-                    </a:p>
-                  </a:txBody>
-                  <a:tcPr marL="54864" marR="54864" marT="27432" marB="27432" anchor="ctr">
-                    <a:solidFill>
-                      <a:srgbClr val="1F77B4"/>
-                    </a:solidFill>
-                  </a:tcPr>
-                </a:tc>
-              </a:tr>
-              <a:tr h="807720">
-                <a:tc>
-                  <a:txBody>
-                    <a:bodyPr/>
-                    <a:lstStyle/>
-                    <a:p>
-                      <a:pPr>
-                        <a:lnSpc>
-                          <a:spcPct val="105000"/>
-                        </a:lnSpc>
-                      </a:pPr>
-                      <a:r>
-                        <a:rPr sz="1150" b="0">
-                          <a:solidFill>
-                            <a:srgbClr val="1B2A4A"/>
-                          </a:solidFill>
-                          <a:latin typeface="Noto Sans CJK SC"/>
-                        </a:rPr>
-                        <a:t>减速航行</a:t>
-                      </a:r>
-                    </a:p>
-                  </a:txBody>
-                  <a:tcPr marL="54864" marR="54864" marT="27432" marB="27432" anchor="ctr"/>
-                </a:tc>
-                <a:tc>
-                  <a:txBody>
-                    <a:bodyPr/>
-                    <a:lstStyle/>
-                    <a:p>
-                      <a:pPr>
-                        <a:lnSpc>
-                          <a:spcPct val="105000"/>
-                        </a:lnSpc>
-                      </a:pPr>
-                      <a:r>
-                        <a:rPr sz="1150" b="0">
-                          <a:solidFill>
-                            <a:srgbClr val="1B2A4A"/>
-                          </a:solidFill>
-                          <a:latin typeface="Noto Sans CJK SC"/>
-                        </a:rPr>
-                        <a:t>IMO 案例：56,000 DWT 敞舱口货船 13% 减速 → 日油耗 −34%；</a:t>
-                      </a:r>
-                    </a:p>
-                    <a:p>
-                      <a:pPr>
-                        <a:lnSpc>
-                          <a:spcPct val="105000"/>
-                        </a:lnSpc>
-                      </a:pPr>
-                      <a:r>
-                        <a:rPr sz="1150" b="0">
-                          <a:solidFill>
-                            <a:srgbClr val="1B2A4A"/>
-                          </a:solidFill>
-                          <a:latin typeface="Noto Sans CJK SC"/>
-                        </a:rPr>
-                        <a:t>10% 减速 → 功率 −27%，计入航时后航次总节油约 19%</a:t>
-                      </a:r>
-                    </a:p>
-                  </a:txBody>
-                  <a:tcPr marL="54864" marR="54864" marT="27432" marB="27432" anchor="ctr"/>
-                </a:tc>
-                <a:tc>
-                  <a:txBody>
-                    <a:bodyPr/>
-                    <a:lstStyle/>
-                    <a:p>
-                      <a:pPr>
-                        <a:lnSpc>
-                          <a:spcPct val="105000"/>
-                        </a:lnSpc>
-                      </a:pPr>
-                      <a:r>
-                        <a:rPr sz="1150" b="0">
-                          <a:solidFill>
-                            <a:srgbClr val="1B2A4A"/>
-                          </a:solidFill>
-                          <a:latin typeface="Noto Sans CJK SC"/>
-                        </a:rPr>
-                        <a:t>特定船案例，非普适值；</a:t>
-                      </a:r>
-                    </a:p>
-                    <a:p>
-                      <a:pPr>
-                        <a:lnSpc>
-                          <a:spcPct val="105000"/>
-                        </a:lnSpc>
-                      </a:pPr>
-                      <a:r>
-                        <a:rPr sz="1150" b="0">
-                          <a:solidFill>
-                            <a:srgbClr val="1B2A4A"/>
-                          </a:solidFill>
-                          <a:latin typeface="Noto Sans CJK SC"/>
-                        </a:rPr>
-                        <a:t>主机口径 10–50% vs 全船 3–12%</a:t>
-                      </a:r>
-                    </a:p>
-                  </a:txBody>
-                  <a:tcPr marL="54864" marR="54864" marT="27432" marB="27432" anchor="ctr"/>
-                </a:tc>
-              </a:tr>
-              <a:tr h="807720">
-                <a:tc>
-                  <a:txBody>
-                    <a:bodyPr/>
-                    <a:lstStyle/>
-                    <a:p>
-                      <a:pPr>
-                        <a:lnSpc>
-                          <a:spcPct val="105000"/>
-                        </a:lnSpc>
-                      </a:pPr>
-                      <a:r>
-                        <a:rPr sz="1150" b="0">
-                          <a:solidFill>
-                            <a:srgbClr val="1B2A4A"/>
-                          </a:solidFill>
-                          <a:latin typeface="Noto Sans CJK SC"/>
-                        </a:rPr>
-                        <a:t>航速+纵倾联合</a:t>
-                      </a:r>
-                    </a:p>
-                  </a:txBody>
-                  <a:tcPr marL="54864" marR="54864" marT="27432" marB="27432" anchor="ctr">
-                    <a:solidFill>
-                      <a:srgbClr val="EEF3FA"/>
-                    </a:solidFill>
-                  </a:tcPr>
-                </a:tc>
-                <a:tc>
-                  <a:txBody>
-                    <a:bodyPr/>
-                    <a:lstStyle/>
-                    <a:p>
-                      <a:pPr>
-                        <a:lnSpc>
-                          <a:spcPct val="105000"/>
-                        </a:lnSpc>
-                      </a:pPr>
-                      <a:r>
-                        <a:rPr sz="1150" b="0">
-                          <a:solidFill>
-                            <a:srgbClr val="1B2A4A"/>
-                          </a:solidFill>
-                          <a:latin typeface="Noto Sans CJK SC"/>
-                        </a:rPr>
-                        <a:t>Du 2019（实船数据+ANN 模型）：动态纵倾 C1 省 4.96%/5.83%；</a:t>
-                      </a:r>
-                    </a:p>
-                    <a:p>
-                      <a:pPr>
-                        <a:lnSpc>
-                          <a:spcPct val="105000"/>
-                        </a:lnSpc>
-                      </a:pPr>
-                      <a:r>
-                        <a:rPr sz="1150" b="0">
-                          <a:solidFill>
-                            <a:srgbClr val="1B2A4A"/>
-                          </a:solidFill>
-                          <a:latin typeface="Noto Sans CJK SC"/>
-                        </a:rPr>
-                        <a:t>ANN 航速优化 C2 省 7.63%/7.57%；综合 C3 平均省 8.25%</a:t>
-                      </a:r>
-                    </a:p>
-                  </a:txBody>
-                  <a:tcPr marL="54864" marR="54864" marT="27432" marB="27432" anchor="ctr">
-                    <a:solidFill>
-                      <a:srgbClr val="EEF3FA"/>
-                    </a:solidFill>
-                  </a:tcPr>
-                </a:tc>
-                <a:tc>
-                  <a:txBody>
-                    <a:bodyPr/>
-                    <a:lstStyle/>
-                    <a:p>
-                      <a:pPr>
-                        <a:lnSpc>
-                          <a:spcPct val="105000"/>
-                        </a:lnSpc>
-                      </a:pPr>
-                      <a:r>
-                        <a:rPr sz="1150" b="0">
-                          <a:solidFill>
-                            <a:srgbClr val="1B2A4A"/>
-                          </a:solidFill>
-                          <a:latin typeface="Noto Sans CJK SC"/>
-                        </a:rPr>
-                        <a:t>0.57%/3.69% 是相对三次方定律的</a:t>
-                      </a:r>
-                    </a:p>
-                    <a:p>
-                      <a:pPr>
-                        <a:lnSpc>
-                          <a:spcPct val="105000"/>
-                        </a:lnSpc>
-                      </a:pPr>
-                      <a:r>
-                        <a:rPr sz="1150" b="0">
-                          <a:solidFill>
-                            <a:srgbClr val="1B2A4A"/>
-                          </a:solidFill>
-                          <a:latin typeface="Noto Sans CJK SC"/>
-                        </a:rPr>
-                        <a:t>额外节油，非总节油</a:t>
-                      </a:r>
-                    </a:p>
-                  </a:txBody>
-                  <a:tcPr marL="54864" marR="54864" marT="27432" marB="27432" anchor="ctr">
-                    <a:solidFill>
-                      <a:srgbClr val="EEF3FA"/>
-                    </a:solidFill>
-                  </a:tcPr>
-                </a:tc>
-              </a:tr>
-              <a:tr h="807720">
-                <a:tc>
-                  <a:txBody>
-                    <a:bodyPr/>
-                    <a:lstStyle/>
-                    <a:p>
-                      <a:pPr>
-                        <a:lnSpc>
-                          <a:spcPct val="105000"/>
-                        </a:lnSpc>
-                      </a:pPr>
-                      <a:r>
-                        <a:rPr sz="1150" b="0">
-                          <a:solidFill>
-                            <a:srgbClr val="1B2A4A"/>
-                          </a:solidFill>
-                          <a:latin typeface="Noto Sans CJK SC"/>
-                        </a:rPr>
-                        <a:t>纵倾优化</a:t>
-                      </a:r>
-                    </a:p>
-                  </a:txBody>
-                  <a:tcPr marL="54864" marR="54864" marT="27432" marB="27432" anchor="ctr"/>
-                </a:tc>
-                <a:tc>
-                  <a:txBody>
-                    <a:bodyPr/>
-                    <a:lstStyle/>
-                    <a:p>
-                      <a:pPr>
-                        <a:lnSpc>
-                          <a:spcPct val="105000"/>
-                        </a:lnSpc>
-                      </a:pPr>
-                      <a:r>
-                        <a:rPr sz="1150" b="0">
-                          <a:solidFill>
-                            <a:srgbClr val="1B2A4A"/>
-                          </a:solidFill>
-                          <a:latin typeface="Noto Sans CJK SC"/>
-                        </a:rPr>
-                        <a:t>ClassNK 两次印度洋横渡专项：最优纵倾最多再省 4%</a:t>
-                      </a:r>
-                    </a:p>
-                  </a:txBody>
-                  <a:tcPr marL="54864" marR="54864" marT="27432" marB="27432" anchor="ctr"/>
-                </a:tc>
-                <a:tc>
-                  <a:txBody>
-                    <a:bodyPr/>
-                    <a:lstStyle/>
-                    <a:p>
-                      <a:pPr>
-                        <a:lnSpc>
-                          <a:spcPct val="105000"/>
-                        </a:lnSpc>
-                      </a:pPr>
-                      <a:r>
-                        <a:rPr sz="1150" b="0">
-                          <a:solidFill>
-                            <a:srgbClr val="1B2A4A"/>
-                          </a:solidFill>
-                          <a:latin typeface="Noto Sans CJK SC"/>
-                        </a:rPr>
-                        <a:t>与航速/航程优化收益可叠加</a:t>
-                      </a:r>
-                    </a:p>
-                  </a:txBody>
-                  <a:tcPr marL="54864" marR="54864" marT="27432" marB="27432" anchor="ctr"/>
-                </a:tc>
-              </a:tr>
-              <a:tr h="807720">
-                <a:tc>
-                  <a:txBody>
-                    <a:bodyPr/>
-                    <a:lstStyle/>
-                    <a:p>
-                      <a:pPr>
-                        <a:lnSpc>
-                          <a:spcPct val="105000"/>
-                        </a:lnSpc>
-                      </a:pPr>
-                      <a:r>
-                        <a:rPr sz="1150" b="0">
-                          <a:solidFill>
-                            <a:srgbClr val="1B2A4A"/>
-                          </a:solidFill>
-                          <a:latin typeface="Noto Sans CJK SC"/>
-                        </a:rPr>
-                        <a:t>MPC 能量管理</a:t>
-                      </a:r>
-                    </a:p>
-                  </a:txBody>
-                  <a:tcPr marL="54864" marR="54864" marT="27432" marB="27432" anchor="ctr">
-                    <a:solidFill>
-                      <a:srgbClr val="EEF3FA"/>
-                    </a:solidFill>
-                  </a:tcPr>
-                </a:tc>
-                <a:tc>
-                  <a:txBody>
-                    <a:bodyPr/>
-                    <a:lstStyle/>
-                    <a:p>
-                      <a:pPr>
-                        <a:lnSpc>
-                          <a:spcPct val="105000"/>
-                        </a:lnSpc>
-                      </a:pPr>
-                      <a:r>
-                        <a:rPr sz="1150" b="0">
-                          <a:solidFill>
-                            <a:srgbClr val="1B2A4A"/>
-                          </a:solidFill>
-                          <a:latin typeface="Noto Sans CJK SC"/>
-                        </a:rPr>
-                        <a:t>Zhang 2022：双层 MPC 比传统单层 MPC 再省 17.2%（30 kW 柴电混合船）</a:t>
-                      </a:r>
-                    </a:p>
-                    <a:p>
-                      <a:pPr>
-                        <a:lnSpc>
-                          <a:spcPct val="105000"/>
-                        </a:lnSpc>
-                      </a:pPr>
-                      <a:r>
-                        <a:rPr sz="1150" b="0">
-                          <a:solidFill>
-                            <a:srgbClr val="1B2A4A"/>
-                          </a:solidFill>
-                          <a:latin typeface="Noto Sans CJK SC"/>
-                        </a:rPr>
-                        <a:t>周妍 2024：比规则控制省 4.85%（客滚船）</a:t>
-                      </a:r>
-                    </a:p>
-                  </a:txBody>
-                  <a:tcPr marL="54864" marR="54864" marT="27432" marB="27432" anchor="ctr">
-                    <a:solidFill>
-                      <a:srgbClr val="EEF3FA"/>
-                    </a:solidFill>
-                  </a:tcPr>
-                </a:tc>
-                <a:tc>
-                  <a:txBody>
-                    <a:bodyPr/>
-                    <a:lstStyle/>
-                    <a:p>
-                      <a:pPr>
-                        <a:lnSpc>
-                          <a:spcPct val="105000"/>
-                        </a:lnSpc>
-                      </a:pPr>
-                      <a:r>
-                        <a:rPr sz="1150" b="0">
-                          <a:solidFill>
-                            <a:srgbClr val="1B2A4A"/>
-                          </a:solidFill>
-                          <a:latin typeface="Noto Sans CJK SC"/>
-                        </a:rPr>
-                        <a:t>两者对比基线不同，不可互比；</a:t>
-                      </a:r>
-                    </a:p>
-                    <a:p>
-                      <a:pPr>
-                        <a:lnSpc>
-                          <a:spcPct val="105000"/>
-                        </a:lnSpc>
-                      </a:pPr>
-                      <a:r>
-                        <a:rPr sz="1150" b="0">
-                          <a:solidFill>
-                            <a:srgbClr val="1B2A4A"/>
-                          </a:solidFill>
-                          <a:latin typeface="Noto Sans CJK SC"/>
-                        </a:rPr>
-                        <a:t>均为仿真</a:t>
-                      </a:r>
-                    </a:p>
-                  </a:txBody>
-                  <a:tcPr marL="54864" marR="54864" marT="27432" marB="27432" anchor="ctr">
-                    <a:solidFill>
-                      <a:srgbClr val="EEF3FA"/>
-                    </a:solidFill>
-                  </a:tcPr>
-                </a:tc>
-              </a:tr>
-              <a:tr h="807720">
-                <a:tc>
-                  <a:txBody>
-                    <a:bodyPr/>
-                    <a:lstStyle/>
-                    <a:p>
-                      <a:pPr>
-                        <a:lnSpc>
-                          <a:spcPct val="105000"/>
-                        </a:lnSpc>
-                      </a:pPr>
-                      <a:r>
-                        <a:rPr sz="1150" b="0">
-                          <a:solidFill>
-                            <a:srgbClr val="1B2A4A"/>
-                          </a:solidFill>
-                          <a:latin typeface="Noto Sans CJK SC"/>
-                        </a:rPr>
-                        <a:t>气象航线</a:t>
-                      </a:r>
-                    </a:p>
-                  </a:txBody>
-                  <a:tcPr marL="54864" marR="54864" marT="27432" marB="27432" anchor="ctr"/>
-                </a:tc>
-                <a:tc>
-                  <a:txBody>
-                    <a:bodyPr/>
-                    <a:lstStyle/>
-                    <a:p>
-                      <a:pPr>
-                        <a:lnSpc>
-                          <a:spcPct val="105000"/>
-                        </a:lnSpc>
-                      </a:pPr>
-                      <a:r>
-                        <a:rPr sz="1150" b="0">
-                          <a:solidFill>
-                            <a:srgbClr val="1B2A4A"/>
-                          </a:solidFill>
-                          <a:latin typeface="Noto Sans CJK SC"/>
-                        </a:rPr>
-                        <a:t>算法基准研究：Isochrone / Isopone / DP / 3D-DP / Dijkstra</a:t>
-                      </a:r>
-                    </a:p>
-                    <a:p>
-                      <a:pPr>
-                        <a:lnSpc>
-                          <a:spcPct val="105000"/>
-                        </a:lnSpc>
-                      </a:pPr>
-                      <a:r>
-                        <a:rPr sz="1150" b="0">
-                          <a:solidFill>
-                            <a:srgbClr val="1B2A4A"/>
-                          </a:solidFill>
-                          <a:latin typeface="Noto Sans CJK SC"/>
-                        </a:rPr>
-                        <a:t>五算法横向对比（Wang et al., Chalmers，北大西洋案例）</a:t>
-                      </a:r>
-                    </a:p>
-                  </a:txBody>
-                  <a:tcPr marL="54864" marR="54864" marT="27432" marB="27432" anchor="ctr"/>
-                </a:tc>
-                <a:tc>
-                  <a:txBody>
-                    <a:bodyPr/>
-                    <a:lstStyle/>
-                    <a:p>
-                      <a:pPr>
-                        <a:lnSpc>
-                          <a:spcPct val="105000"/>
-                        </a:lnSpc>
-                      </a:pPr>
-                      <a:r>
-                        <a:rPr sz="1150" b="0">
-                          <a:solidFill>
-                            <a:srgbClr val="1B2A4A"/>
-                          </a:solidFill>
-                          <a:latin typeface="Noto Sans CJK SC"/>
-                        </a:rPr>
-                        <a:t>仿真基准，无单一最优算法</a:t>
-                      </a:r>
-                    </a:p>
-                  </a:txBody>
-                  <a:tcPr marL="54864" marR="54864" marT="27432" marB="27432" anchor="ctr"/>
-                </a:tc>
-              </a:tr>
-            </a:tbl>
-          </a:graphicData>
-        </a:graphic>
-      </p:graphicFrame>
+        </p:nvPicPr>
+        <p:blipFill>
+          <a:blip r:embed="rId2"/>
+          <a:stretch>
+            <a:fillRect/>
+          </a:stretch>
+        </p:blipFill>
+        <p:spPr>
+          <a:xfrm>
+            <a:off x="1658389" y="1554480"/>
+            <a:ext cx="8844741" cy="5120640"/>
+          </a:xfrm>
+          <a:prstGeom prst="rect">
+            <a:avLst/>
+          </a:prstGeom>
+        </p:spPr>
+      </p:pic>
       <p:sp>
         <p:nvSpPr>
           <p:cNvPr id="6" name="TextBox 5"/>
@@ -5024,7 +4742,7 @@
                 </a:solidFill>
                 <a:latin typeface="Noto Sans CJK SC"/>
               </a:rPr>
-              <a:t>12 / 19</a:t>
+              <a:t>12 / 21</a:t>
             </a:r>
           </a:p>
         </p:txBody>
@@ -5066,7 +4784,7 @@
                 </a:solidFill>
                 <a:latin typeface="Noto Sans CJK SC"/>
               </a:rPr>
-              <a:t>来源：https://greenvoyage2050.imo.org/technology/speed-management/ ｜ https://research.chalmers.se/en/publication/516144（气象航线五算法基准）</a:t>
+              <a:t>来源：https://greenvoyage2050.imo.org/technology/speed-management/ ｜ https://greenvoyage2050.imo.org/technology/autopilot-adjustment-and-use/</a:t>
             </a:r>
           </a:p>
         </p:txBody>
@@ -5169,14 +4887,56 @@
                 </a:solidFill>
                 <a:latin typeface="Noto Sans CJK SC"/>
               </a:rPr>
-              <a:t>节能方案优缺点（二）：操作层与控制层</a:t>
+              <a:t>节能方案优缺点（一）：决策层</a:t>
+            </a:r>
+          </a:p>
+        </p:txBody>
+      </p:sp>
+      <p:sp>
+        <p:nvSpPr>
+          <p:cNvPr id="4" name="TextBox 3"/>
+          <p:cNvSpPr txBox="1"/>
+          <p:nvPr/>
+        </p:nvSpPr>
+        <p:spPr>
+          <a:xfrm>
+            <a:off x="475488" y="914400"/>
+            <a:ext cx="11247120" cy="457200"/>
+          </a:xfrm>
+          <a:prstGeom prst="rect">
+            <a:avLst/>
+          </a:prstGeom>
+          <a:noFill/>
+        </p:spPr>
+        <p:txBody>
+          <a:bodyPr wrap="square" anchor="t">
+            <a:spAutoFit/>
+          </a:bodyPr>
+          <a:lstStyle/>
+          <a:p>
+            <a:pPr algn="l">
+              <a:lnSpc>
+                <a:spcPct val="115000"/>
+              </a:lnSpc>
+              <a:spcAft>
+                <a:spcPts val="600"/>
+              </a:spcAft>
+            </a:pPr>
+            <a:r>
+              <a:rPr sz="1400" b="0">
+                <a:solidFill>
+                  <a:srgbClr val="666666"/>
+                </a:solidFill>
+                <a:latin typeface="Noto Sans CJK SC"/>
+              </a:rPr>
+              <a:t>节能大头所在</a:t>
             </a:r>
           </a:p>
         </p:txBody>
       </p:sp>
       <p:graphicFrame>
         <p:nvGraphicFramePr>
-          <p:cNvPr id="4" name="Table 3"/>
+          <p:cNvPr id="5" name="Table 4"/>
           <p:cNvGraphicFramePr>
             <a:graphicFrameLocks noGrp="1"/>
           </p:cNvGraphicFramePr>
@@ -5193,10 +4953,10 @@
                 <a:tableStyleId>{5C22544A-7EE6-4342-B048-85BDC9FD1C3A}</a:tableStyleId>
               </a:tblPr>
               <a:tblGrid>
-                <a:gridCol w="1939490"/>
-                <a:gridCol w="3878981"/>
-                <a:gridCol w="2685448"/>
-                <a:gridCol w="2834640"/>
+                <a:gridCol w="1553227"/>
+                <a:gridCol w="4038391"/>
+                <a:gridCol w="2795809"/>
+                <a:gridCol w="2951132"/>
               </a:tblGrid>
               <a:tr h="1211580">
                 <a:tc>
@@ -5326,9 +5086,16 @@
                           </a:solidFill>
                           <a:latin typeface="Noto Sans CJK SC"/>
                         </a:rPr>
-                        <a:t>MPC 能量管理</a:t>
-                      </a:r>
-                    </a:p>
+                        <a:t>减速航行</a:t>
+                      </a:r>
+                    </a:p>
+                  </a:txBody>
+                  <a:tcPr marL="54864" marR="54864" marT="27432" marB="27432" anchor="ctr"/>
+                </a:tc>
+                <a:tc>
+                  <a:txBody>
+                    <a:bodyPr/>
+                    <a:lstStyle/>
                     <a:p>
                       <a:pPr>
                         <a:lnSpc>
@@ -5342,7 +5109,23 @@
                           </a:solidFill>
                           <a:latin typeface="Noto Sans CJK SC"/>
                         </a:rPr>
-                        <a:t>(混合动力 EMS)</a:t>
+                        <a:t>23→12 kn 每海里油耗降 72–76%（Pelić 2023）</a:t>
+                      </a:r>
+                    </a:p>
+                    <a:p>
+                      <a:pPr>
+                        <a:lnSpc>
+                          <a:spcPct val="105000"/>
+                        </a:lnSpc>
+                      </a:pPr>
+                      <a:r>
+                        <a:rPr sz="1200" b="0">
+                          <a:solidFill>
+                            <a:srgbClr val="1B2A4A"/>
+                          </a:solidFill>
+                          <a:latin typeface="Noto Sans CJK SC"/>
+                        </a:rPr>
+                        <a:t>IMO：主机油耗潜力 10–50%，全船口径 3–12%</a:t>
                       </a:r>
                     </a:p>
                   </a:txBody>
@@ -5365,9 +5148,16 @@
                           </a:solidFill>
                           <a:latin typeface="Noto Sans CJK SC"/>
                         </a:rPr>
-                        <a:t>双层 MPC 比传统 MPC 再省 17.2%（Zhang 2022）</a:t>
-                      </a:r>
-                    </a:p>
+                        <a:t>杠杆最大；零硬件成本；单位运输功油耗直接下降</a:t>
+                      </a:r>
+                    </a:p>
+                  </a:txBody>
+                  <a:tcPr marL="54864" marR="54864" marT="27432" marB="27432" anchor="ctr"/>
+                </a:tc>
+                <a:tc>
+                  <a:txBody>
+                    <a:bodyPr/>
+                    <a:lstStyle/>
                     <a:p>
                       <a:pPr>
                         <a:lnSpc>
@@ -5381,53 +5171,7 @@
                           </a:solidFill>
                           <a:latin typeface="Noto Sans CJK SC"/>
                         </a:rPr>
-                        <a:t>客滚船 MPC-EMS 节油 4.85%（周妍 2024）</a:t>
-                      </a:r>
-                    </a:p>
-                  </a:txBody>
-                  <a:tcPr marL="54864" marR="54864" marT="27432" marB="27432" anchor="ctr"/>
-                </a:tc>
-                <a:tc>
-                  <a:txBody>
-                    <a:bodyPr/>
-                    <a:lstStyle/>
-                    <a:p>
-                      <a:pPr>
-                        <a:lnSpc>
-                          <a:spcPct val="105000"/>
-                        </a:lnSpc>
-                      </a:pPr>
-                      <a:r>
-                        <a:rPr sz="1200" b="0">
-                          <a:solidFill>
-                            <a:srgbClr val="1B2A4A"/>
-                          </a:solidFill>
-                          <a:latin typeface="Noto Sans CJK SC"/>
-                        </a:rPr>
-                        <a:t>滚动时域天然适合负载预测；多目标可编码</a:t>
-                      </a:r>
-                    </a:p>
-                  </a:txBody>
-                  <a:tcPr marL="54864" marR="54864" marT="27432" marB="27432" anchor="ctr"/>
-                </a:tc>
-                <a:tc>
-                  <a:txBody>
-                    <a:bodyPr/>
-                    <a:lstStyle/>
-                    <a:p>
-                      <a:pPr>
-                        <a:lnSpc>
-                          <a:spcPct val="105000"/>
-                        </a:lnSpc>
-                      </a:pPr>
-                      <a:r>
-                        <a:rPr sz="1200" b="0">
-                          <a:solidFill>
-                            <a:srgbClr val="1B2A4A"/>
-                          </a:solidFill>
-                          <a:latin typeface="Noto Sans CJK SC"/>
-                        </a:rPr>
-                        <a:t>全部仿真验证无实船数据；仅限混合动力船型</a:t>
+                        <a:t>牺牲船期；受租约约束；低速偏离主机最佳负荷点</a:t>
                       </a:r>
                     </a:p>
                   </a:txBody>
@@ -5452,23 +5196,7 @@
                           </a:solidFill>
                           <a:latin typeface="Noto Sans CJK SC"/>
                         </a:rPr>
-                        <a:t>自动舵节能</a:t>
-                      </a:r>
-                    </a:p>
-                    <a:p>
-                      <a:pPr>
-                        <a:lnSpc>
-                          <a:spcPct val="105000"/>
-                        </a:lnSpc>
-                      </a:pPr>
-                      <a:r>
-                        <a:rPr sz="1200" b="0">
-                          <a:solidFill>
-                            <a:srgbClr val="1B2A4A"/>
-                          </a:solidFill>
-                          <a:latin typeface="Noto Sans CJK SC"/>
-                        </a:rPr>
-                        <a:t>(减少无效操舵)</a:t>
+                        <a:t>气象航线优化</a:t>
                       </a:r>
                     </a:p>
                   </a:txBody>
@@ -5495,7 +5223,7 @@
                           </a:solidFill>
                           <a:latin typeface="Noto Sans CJK SC"/>
                         </a:rPr>
-                        <a:t>IMO：0.1–1.0%；ABS：最高 1%、改造成本 $2 万</a:t>
+                        <a:t>IMO 口径 ≥3%，集装箱船可达 10%</a:t>
                       </a:r>
                     </a:p>
                     <a:p>
@@ -5511,7 +5239,7 @@
                           </a:solidFill>
                           <a:latin typeface="Noto Sans CJK SC"/>
                         </a:rPr>
-                        <a:t>MRAS 实船试验 1–3%（van Amerongen 经典）</a:t>
+                        <a:t>Li 2022 实船 2.1–5.2%（二手转引）</a:t>
                       </a:r>
                     </a:p>
                   </a:txBody>
@@ -5538,7 +5266,7 @@
                           </a:solidFill>
                           <a:latin typeface="Noto Sans CJK SC"/>
                         </a:rPr>
-                        <a:t>实施成本最低（软件级）；兼降舵机磨损</a:t>
+                        <a:t>节能+避离恶劣海况兼得；商用服务成熟</a:t>
                       </a:r>
                     </a:p>
                   </a:txBody>
@@ -5565,7 +5293,7 @@
                           </a:solidFill>
                           <a:latin typeface="Noto Sans CJK SC"/>
                         </a:rPr>
-                        <a:t>单项幅度最小；收益依赖海况</a:t>
+                        <a:t>依赖气象预报与增阻模型精度；收益随海况波动</a:t>
                       </a:r>
                     </a:p>
                   </a:txBody>
@@ -5594,9 +5322,16 @@
                           </a:solidFill>
                           <a:latin typeface="Noto Sans CJK SC"/>
                         </a:rPr>
-                        <a:t>双舵 Toe Angle</a:t>
-                      </a:r>
-                    </a:p>
+                        <a:t>纵倾优化</a:t>
+                      </a:r>
+                    </a:p>
+                  </a:txBody>
+                  <a:tcPr marL="54864" marR="54864" marT="27432" marB="27432" anchor="ctr"/>
+                </a:tc>
+                <a:tc>
+                  <a:txBody>
+                    <a:bodyPr/>
+                    <a:lstStyle/>
                     <a:p>
                       <a:pPr>
                         <a:lnSpc>
@@ -5610,7 +5345,23 @@
                           </a:solidFill>
                           <a:latin typeface="Noto Sans CJK SC"/>
                         </a:rPr>
-                        <a:t>(舵系水动力优化)</a:t>
+                        <a:t>ClassNK-NAPA 实船试航：纵倾贡献 1.2%</a:t>
+                      </a:r>
+                    </a:p>
+                    <a:p>
+                      <a:pPr>
+                        <a:lnSpc>
+                          <a:spcPct val="105000"/>
+                        </a:lnSpc>
+                      </a:pPr>
+                      <a:r>
+                        <a:rPr sz="1200" b="0">
+                          <a:solidFill>
+                            <a:srgbClr val="1B2A4A"/>
+                          </a:solidFill>
+                          <a:latin typeface="Noto Sans CJK SC"/>
+                        </a:rPr>
+                        <a:t>专项研究最多 4%；Eniram 实测 1–5%</a:t>
                       </a:r>
                     </a:p>
                   </a:txBody>
@@ -5633,9 +5384,16 @@
                           </a:solidFill>
                           <a:latin typeface="Noto Sans CJK SC"/>
                         </a:rPr>
-                        <a:t>Anschütz 实测最大 4.7%、平均约 2%（宣称 ≤5%）</a:t>
-                      </a:r>
-                    </a:p>
+                        <a:t>几乎零成本（调压载水）；实船背书强</a:t>
+                      </a:r>
+                    </a:p>
+                  </a:txBody>
+                  <a:tcPr marL="54864" marR="54864" marT="27432" marB="27432" anchor="ctr"/>
+                </a:tc>
+                <a:tc>
+                  <a:txBody>
+                    <a:bodyPr/>
+                    <a:lstStyle/>
                     <a:p>
                       <a:pPr>
                         <a:lnSpc>
@@ -5649,53 +5407,7 @@
                           </a:solidFill>
                           <a:latin typeface="Noto Sans CJK SC"/>
                         </a:rPr>
-                        <a:t>自适应模式平均减少舵动作 25%</a:t>
-                      </a:r>
-                    </a:p>
-                  </a:txBody>
-                  <a:tcPr marL="54864" marR="54864" marT="27432" marB="27432" anchor="ctr"/>
-                </a:tc>
-                <a:tc>
-                  <a:txBody>
-                    <a:bodyPr/>
-                    <a:lstStyle/>
-                    <a:p>
-                      <a:pPr>
-                        <a:lnSpc>
-                          <a:spcPct val="105000"/>
-                        </a:lnSpc>
-                      </a:pPr>
-                      <a:r>
-                        <a:rPr sz="1200" b="0">
-                          <a:solidFill>
-                            <a:srgbClr val="1B2A4A"/>
-                          </a:solidFill>
-                          <a:latin typeface="Noto Sans CJK SC"/>
-                        </a:rPr>
-                        <a:t>双舵船额外收益；已有商用产品</a:t>
-                      </a:r>
-                    </a:p>
-                  </a:txBody>
-                  <a:tcPr marL="54864" marR="54864" marT="27432" marB="27432" anchor="ctr"/>
-                </a:tc>
-                <a:tc>
-                  <a:txBody>
-                    <a:bodyPr/>
-                    <a:lstStyle/>
-                    <a:p>
-                      <a:pPr>
-                        <a:lnSpc>
-                          <a:spcPct val="105000"/>
-                        </a:lnSpc>
-                      </a:pPr>
-                      <a:r>
-                        <a:rPr sz="1200" b="0">
-                          <a:solidFill>
-                            <a:srgbClr val="1B2A4A"/>
-                          </a:solidFill>
-                          <a:latin typeface="Noto Sans CJK SC"/>
-                        </a:rPr>
-                        <a:t>仅适用双舵船；厂商数据待第三方复核</a:t>
+                        <a:t>最优纵倾随工况变化；受稳性/装卸约束；幅度偏小</a:t>
                       </a:r>
                     </a:p>
                   </a:txBody>
@@ -5708,7 +5420,7 @@
       </p:graphicFrame>
       <p:sp>
         <p:nvSpPr>
-          <p:cNvPr id="5" name="TextBox 4"/>
+          <p:cNvPr id="6" name="TextBox 5"/>
           <p:cNvSpPr txBox="1"/>
           <p:nvPr/>
         </p:nvSpPr>
@@ -5743,14 +5455,14 @@
                 </a:solidFill>
                 <a:latin typeface="Noto Sans CJK SC"/>
               </a:rPr>
-              <a:t>13 / 19</a:t>
-            </a:r>
-          </a:p>
-        </p:txBody>
-      </p:sp>
-      <p:sp>
-        <p:nvSpPr>
-          <p:cNvPr id="6" name="TextBox 5"/>
+              <a:t>13 / 21</a:t>
+            </a:r>
+          </a:p>
+        </p:txBody>
+      </p:sp>
+      <p:sp>
+        <p:nvSpPr>
+          <p:cNvPr id="7" name="TextBox 6"/>
           <p:cNvSpPr txBox="1"/>
           <p:nvPr/>
         </p:nvSpPr>
@@ -5785,7 +5497,7 @@
                 </a:solidFill>
                 <a:latin typeface="Noto Sans CJK SC"/>
               </a:rPr>
-              <a:t>来源：https://www.sciopen.com/article/10.19693/j.issn.1673-3185.03104 ｜ https://ww2.eagle.org/content/dam/eagle/advisories-and-debriefs/ABS_Energy_Efficiency_Advisory.pdf</a:t>
+              <a:t>来源：https://www.mdpi.com/2077-1312/11/3/675 ｜ https://stormgeo.com/insights/how-the-evolution-of-weather-routing-is-reducing-greenhouse-gas-emissions</a:t>
             </a:r>
           </a:p>
         </p:txBody>
@@ -5888,7 +5600,7 @@
                 </a:solidFill>
                 <a:latin typeface="Noto Sans CJK SC"/>
               </a:rPr>
-              <a:t>工业部署案例（一）：第三方实测集中在 3–10%</a:t>
+              <a:t>节能方案关键数据补充</a:t>
             </a:r>
           </a:p>
         </p:txBody>
@@ -5930,213 +5642,615 @@
                 </a:solidFill>
                 <a:latin typeface="Noto Sans CJK SC"/>
               </a:rPr>
-              <a:t>厂商宣称值普遍高于实测，引用以船级社/试航数据为准</a:t>
-            </a:r>
-          </a:p>
-        </p:txBody>
-      </p:sp>
-      <p:pic>
-        <p:nvPicPr>
-          <p:cNvPr id="5" name="Picture 4" descr="fig5_deploy_cases.png"/>
-          <p:cNvPicPr>
-            <a:picLocks noChangeAspect="1"/>
-          </p:cNvPicPr>
+              <a:t>对比基线与口径已逐条核对，避免误读</a:t>
+            </a:r>
+          </a:p>
+        </p:txBody>
+      </p:sp>
+      <p:graphicFrame>
+        <p:nvGraphicFramePr>
+          <p:cNvPr id="5" name="Table 4"/>
+          <p:cNvGraphicFramePr>
+            <a:graphicFrameLocks noGrp="1"/>
+          </p:cNvGraphicFramePr>
           <p:nvPr/>
-        </p:nvPicPr>
-        <p:blipFill>
-          <a:blip r:embed="rId2"/>
-          <a:stretch>
-            <a:fillRect/>
-          </a:stretch>
-        </p:blipFill>
-        <p:spPr>
-          <a:xfrm>
-            <a:off x="365760" y="2125066"/>
-            <a:ext cx="6949440" cy="3613708"/>
-          </a:xfrm>
-          <a:prstGeom prst="rect">
-            <a:avLst/>
-          </a:prstGeom>
-        </p:spPr>
-      </p:pic>
+        </p:nvGraphicFramePr>
+        <p:xfrm>
+          <a:off x="457200" y="1463040"/>
+          <a:ext cx="11338560" cy="4846320"/>
+        </p:xfrm>
+        <a:graphic>
+          <a:graphicData uri="http://schemas.openxmlformats.org/drawingml/2006/table">
+            <a:tbl>
+              <a:tblPr firstRow="1" bandRow="1">
+                <a:tableStyleId>{5C22544A-7EE6-4342-B048-85BDC9FD1C3A}</a:tableStyleId>
+              </a:tblPr>
+              <a:tblGrid>
+                <a:gridCol w="1889760"/>
+                <a:gridCol w="6299200"/>
+                <a:gridCol w="3149600"/>
+              </a:tblGrid>
+              <a:tr h="807720">
+                <a:tc>
+                  <a:txBody>
+                    <a:bodyPr/>
+                    <a:lstStyle/>
+                    <a:p>
+                      <a:pPr>
+                        <a:lnSpc>
+                          <a:spcPct val="105000"/>
+                        </a:lnSpc>
+                      </a:pPr>
+                      <a:r>
+                        <a:rPr sz="1200" b="1">
+                          <a:solidFill>
+                            <a:srgbClr val="FFFFFF"/>
+                          </a:solidFill>
+                          <a:latin typeface="Noto Sans CJK SC"/>
+                        </a:rPr>
+                        <a:t>方案</a:t>
+                      </a:r>
+                    </a:p>
+                  </a:txBody>
+                  <a:tcPr marL="54864" marR="54864" marT="27432" marB="27432" anchor="ctr">
+                    <a:solidFill>
+                      <a:srgbClr val="1F77B4"/>
+                    </a:solidFill>
+                  </a:tcPr>
+                </a:tc>
+                <a:tc>
+                  <a:txBody>
+                    <a:bodyPr/>
+                    <a:lstStyle/>
+                    <a:p>
+                      <a:pPr>
+                        <a:lnSpc>
+                          <a:spcPct val="105000"/>
+                        </a:lnSpc>
+                      </a:pPr>
+                      <a:r>
+                        <a:rPr sz="1200" b="1">
+                          <a:solidFill>
+                            <a:srgbClr val="FFFFFF"/>
+                          </a:solidFill>
+                          <a:latin typeface="Noto Sans CJK SC"/>
+                        </a:rPr>
+                        <a:t>补充数据（已核对）</a:t>
+                      </a:r>
+                    </a:p>
+                  </a:txBody>
+                  <a:tcPr marL="54864" marR="54864" marT="27432" marB="27432" anchor="ctr">
+                    <a:solidFill>
+                      <a:srgbClr val="1F77B4"/>
+                    </a:solidFill>
+                  </a:tcPr>
+                </a:tc>
+                <a:tc>
+                  <a:txBody>
+                    <a:bodyPr/>
+                    <a:lstStyle/>
+                    <a:p>
+                      <a:pPr>
+                        <a:lnSpc>
+                          <a:spcPct val="105000"/>
+                        </a:lnSpc>
+                      </a:pPr>
+                      <a:r>
+                        <a:rPr sz="1200" b="1">
+                          <a:solidFill>
+                            <a:srgbClr val="FFFFFF"/>
+                          </a:solidFill>
+                          <a:latin typeface="Noto Sans CJK SC"/>
+                        </a:rPr>
+                        <a:t>口径说明</a:t>
+                      </a:r>
+                    </a:p>
+                  </a:txBody>
+                  <a:tcPr marL="54864" marR="54864" marT="27432" marB="27432" anchor="ctr">
+                    <a:solidFill>
+                      <a:srgbClr val="1F77B4"/>
+                    </a:solidFill>
+                  </a:tcPr>
+                </a:tc>
+              </a:tr>
+              <a:tr h="807720">
+                <a:tc>
+                  <a:txBody>
+                    <a:bodyPr/>
+                    <a:lstStyle/>
+                    <a:p>
+                      <a:pPr>
+                        <a:lnSpc>
+                          <a:spcPct val="105000"/>
+                        </a:lnSpc>
+                      </a:pPr>
+                      <a:r>
+                        <a:rPr sz="1150" b="0">
+                          <a:solidFill>
+                            <a:srgbClr val="1B2A4A"/>
+                          </a:solidFill>
+                          <a:latin typeface="Noto Sans CJK SC"/>
+                        </a:rPr>
+                        <a:t>减速航行</a:t>
+                      </a:r>
+                    </a:p>
+                  </a:txBody>
+                  <a:tcPr marL="54864" marR="54864" marT="27432" marB="27432" anchor="ctr"/>
+                </a:tc>
+                <a:tc>
+                  <a:txBody>
+                    <a:bodyPr/>
+                    <a:lstStyle/>
+                    <a:p>
+                      <a:pPr>
+                        <a:lnSpc>
+                          <a:spcPct val="105000"/>
+                        </a:lnSpc>
+                      </a:pPr>
+                      <a:r>
+                        <a:rPr sz="1150" b="0">
+                          <a:solidFill>
+                            <a:srgbClr val="1B2A4A"/>
+                          </a:solidFill>
+                          <a:latin typeface="Noto Sans CJK SC"/>
+                        </a:rPr>
+                        <a:t>IMO 案例：56,000 DWT 敞舱口货船 13% 减速 → 日油耗 −34%；</a:t>
+                      </a:r>
+                    </a:p>
+                    <a:p>
+                      <a:pPr>
+                        <a:lnSpc>
+                          <a:spcPct val="105000"/>
+                        </a:lnSpc>
+                      </a:pPr>
+                      <a:r>
+                        <a:rPr sz="1150" b="0">
+                          <a:solidFill>
+                            <a:srgbClr val="1B2A4A"/>
+                          </a:solidFill>
+                          <a:latin typeface="Noto Sans CJK SC"/>
+                        </a:rPr>
+                        <a:t>10% 减速 → 功率 −27%，计入航时后航次总节油约 19%</a:t>
+                      </a:r>
+                    </a:p>
+                  </a:txBody>
+                  <a:tcPr marL="54864" marR="54864" marT="27432" marB="27432" anchor="ctr"/>
+                </a:tc>
+                <a:tc>
+                  <a:txBody>
+                    <a:bodyPr/>
+                    <a:lstStyle/>
+                    <a:p>
+                      <a:pPr>
+                        <a:lnSpc>
+                          <a:spcPct val="105000"/>
+                        </a:lnSpc>
+                      </a:pPr>
+                      <a:r>
+                        <a:rPr sz="1150" b="0">
+                          <a:solidFill>
+                            <a:srgbClr val="1B2A4A"/>
+                          </a:solidFill>
+                          <a:latin typeface="Noto Sans CJK SC"/>
+                        </a:rPr>
+                        <a:t>特定船案例，非普适值；</a:t>
+                      </a:r>
+                    </a:p>
+                    <a:p>
+                      <a:pPr>
+                        <a:lnSpc>
+                          <a:spcPct val="105000"/>
+                        </a:lnSpc>
+                      </a:pPr>
+                      <a:r>
+                        <a:rPr sz="1150" b="0">
+                          <a:solidFill>
+                            <a:srgbClr val="1B2A4A"/>
+                          </a:solidFill>
+                          <a:latin typeface="Noto Sans CJK SC"/>
+                        </a:rPr>
+                        <a:t>主机口径 10–50% vs 全船 3–12%</a:t>
+                      </a:r>
+                    </a:p>
+                  </a:txBody>
+                  <a:tcPr marL="54864" marR="54864" marT="27432" marB="27432" anchor="ctr"/>
+                </a:tc>
+              </a:tr>
+              <a:tr h="807720">
+                <a:tc>
+                  <a:txBody>
+                    <a:bodyPr/>
+                    <a:lstStyle/>
+                    <a:p>
+                      <a:pPr>
+                        <a:lnSpc>
+                          <a:spcPct val="105000"/>
+                        </a:lnSpc>
+                      </a:pPr>
+                      <a:r>
+                        <a:rPr sz="1150" b="0">
+                          <a:solidFill>
+                            <a:srgbClr val="1B2A4A"/>
+                          </a:solidFill>
+                          <a:latin typeface="Noto Sans CJK SC"/>
+                        </a:rPr>
+                        <a:t>航速+纵倾联合</a:t>
+                      </a:r>
+                    </a:p>
+                  </a:txBody>
+                  <a:tcPr marL="54864" marR="54864" marT="27432" marB="27432" anchor="ctr">
+                    <a:solidFill>
+                      <a:srgbClr val="EEF3FA"/>
+                    </a:solidFill>
+                  </a:tcPr>
+                </a:tc>
+                <a:tc>
+                  <a:txBody>
+                    <a:bodyPr/>
+                    <a:lstStyle/>
+                    <a:p>
+                      <a:pPr>
+                        <a:lnSpc>
+                          <a:spcPct val="105000"/>
+                        </a:lnSpc>
+                      </a:pPr>
+                      <a:r>
+                        <a:rPr sz="1150" b="0">
+                          <a:solidFill>
+                            <a:srgbClr val="1B2A4A"/>
+                          </a:solidFill>
+                          <a:latin typeface="Noto Sans CJK SC"/>
+                        </a:rPr>
+                        <a:t>Du 2019（实船数据+ANN 模型）：动态纵倾 C1 省 4.96%/5.83%；</a:t>
+                      </a:r>
+                    </a:p>
+                    <a:p>
+                      <a:pPr>
+                        <a:lnSpc>
+                          <a:spcPct val="105000"/>
+                        </a:lnSpc>
+                      </a:pPr>
+                      <a:r>
+                        <a:rPr sz="1150" b="0">
+                          <a:solidFill>
+                            <a:srgbClr val="1B2A4A"/>
+                          </a:solidFill>
+                          <a:latin typeface="Noto Sans CJK SC"/>
+                        </a:rPr>
+                        <a:t>ANN 航速优化 C2 省 7.63%/7.57%；综合 C3 平均省 8.25%</a:t>
+                      </a:r>
+                    </a:p>
+                  </a:txBody>
+                  <a:tcPr marL="54864" marR="54864" marT="27432" marB="27432" anchor="ctr">
+                    <a:solidFill>
+                      <a:srgbClr val="EEF3FA"/>
+                    </a:solidFill>
+                  </a:tcPr>
+                </a:tc>
+                <a:tc>
+                  <a:txBody>
+                    <a:bodyPr/>
+                    <a:lstStyle/>
+                    <a:p>
+                      <a:pPr>
+                        <a:lnSpc>
+                          <a:spcPct val="105000"/>
+                        </a:lnSpc>
+                      </a:pPr>
+                      <a:r>
+                        <a:rPr sz="1150" b="0">
+                          <a:solidFill>
+                            <a:srgbClr val="1B2A4A"/>
+                          </a:solidFill>
+                          <a:latin typeface="Noto Sans CJK SC"/>
+                        </a:rPr>
+                        <a:t>0.57%/3.69% 是相对三次方定律的</a:t>
+                      </a:r>
+                    </a:p>
+                    <a:p>
+                      <a:pPr>
+                        <a:lnSpc>
+                          <a:spcPct val="105000"/>
+                        </a:lnSpc>
+                      </a:pPr>
+                      <a:r>
+                        <a:rPr sz="1150" b="0">
+                          <a:solidFill>
+                            <a:srgbClr val="1B2A4A"/>
+                          </a:solidFill>
+                          <a:latin typeface="Noto Sans CJK SC"/>
+                        </a:rPr>
+                        <a:t>额外节油，非总节油</a:t>
+                      </a:r>
+                    </a:p>
+                  </a:txBody>
+                  <a:tcPr marL="54864" marR="54864" marT="27432" marB="27432" anchor="ctr">
+                    <a:solidFill>
+                      <a:srgbClr val="EEF3FA"/>
+                    </a:solidFill>
+                  </a:tcPr>
+                </a:tc>
+              </a:tr>
+              <a:tr h="807720">
+                <a:tc>
+                  <a:txBody>
+                    <a:bodyPr/>
+                    <a:lstStyle/>
+                    <a:p>
+                      <a:pPr>
+                        <a:lnSpc>
+                          <a:spcPct val="105000"/>
+                        </a:lnSpc>
+                      </a:pPr>
+                      <a:r>
+                        <a:rPr sz="1150" b="0">
+                          <a:solidFill>
+                            <a:srgbClr val="1B2A4A"/>
+                          </a:solidFill>
+                          <a:latin typeface="Noto Sans CJK SC"/>
+                        </a:rPr>
+                        <a:t>纵倾优化</a:t>
+                      </a:r>
+                    </a:p>
+                  </a:txBody>
+                  <a:tcPr marL="54864" marR="54864" marT="27432" marB="27432" anchor="ctr"/>
+                </a:tc>
+                <a:tc>
+                  <a:txBody>
+                    <a:bodyPr/>
+                    <a:lstStyle/>
+                    <a:p>
+                      <a:pPr>
+                        <a:lnSpc>
+                          <a:spcPct val="105000"/>
+                        </a:lnSpc>
+                      </a:pPr>
+                      <a:r>
+                        <a:rPr sz="1150" b="0">
+                          <a:solidFill>
+                            <a:srgbClr val="1B2A4A"/>
+                          </a:solidFill>
+                          <a:latin typeface="Noto Sans CJK SC"/>
+                        </a:rPr>
+                        <a:t>ClassNK 两次印度洋横渡专项：最优纵倾最多再省 4%</a:t>
+                      </a:r>
+                    </a:p>
+                  </a:txBody>
+                  <a:tcPr marL="54864" marR="54864" marT="27432" marB="27432" anchor="ctr"/>
+                </a:tc>
+                <a:tc>
+                  <a:txBody>
+                    <a:bodyPr/>
+                    <a:lstStyle/>
+                    <a:p>
+                      <a:pPr>
+                        <a:lnSpc>
+                          <a:spcPct val="105000"/>
+                        </a:lnSpc>
+                      </a:pPr>
+                      <a:r>
+                        <a:rPr sz="1150" b="0">
+                          <a:solidFill>
+                            <a:srgbClr val="1B2A4A"/>
+                          </a:solidFill>
+                          <a:latin typeface="Noto Sans CJK SC"/>
+                        </a:rPr>
+                        <a:t>与航速/航程优化收益可叠加</a:t>
+                      </a:r>
+                    </a:p>
+                  </a:txBody>
+                  <a:tcPr marL="54864" marR="54864" marT="27432" marB="27432" anchor="ctr"/>
+                </a:tc>
+              </a:tr>
+              <a:tr h="807720">
+                <a:tc>
+                  <a:txBody>
+                    <a:bodyPr/>
+                    <a:lstStyle/>
+                    <a:p>
+                      <a:pPr>
+                        <a:lnSpc>
+                          <a:spcPct val="105000"/>
+                        </a:lnSpc>
+                      </a:pPr>
+                      <a:r>
+                        <a:rPr sz="1150" b="0">
+                          <a:solidFill>
+                            <a:srgbClr val="1B2A4A"/>
+                          </a:solidFill>
+                          <a:latin typeface="Noto Sans CJK SC"/>
+                        </a:rPr>
+                        <a:t>MPC 能量管理</a:t>
+                      </a:r>
+                    </a:p>
+                  </a:txBody>
+                  <a:tcPr marL="54864" marR="54864" marT="27432" marB="27432" anchor="ctr">
+                    <a:solidFill>
+                      <a:srgbClr val="EEF3FA"/>
+                    </a:solidFill>
+                  </a:tcPr>
+                </a:tc>
+                <a:tc>
+                  <a:txBody>
+                    <a:bodyPr/>
+                    <a:lstStyle/>
+                    <a:p>
+                      <a:pPr>
+                        <a:lnSpc>
+                          <a:spcPct val="105000"/>
+                        </a:lnSpc>
+                      </a:pPr>
+                      <a:r>
+                        <a:rPr sz="1150" b="0">
+                          <a:solidFill>
+                            <a:srgbClr val="1B2A4A"/>
+                          </a:solidFill>
+                          <a:latin typeface="Noto Sans CJK SC"/>
+                        </a:rPr>
+                        <a:t>Zhang 2022：双层 MPC 比传统单层 MPC 再省 17.2%（30 kW 柴电混合船）</a:t>
+                      </a:r>
+                    </a:p>
+                    <a:p>
+                      <a:pPr>
+                        <a:lnSpc>
+                          <a:spcPct val="105000"/>
+                        </a:lnSpc>
+                      </a:pPr>
+                      <a:r>
+                        <a:rPr sz="1150" b="0">
+                          <a:solidFill>
+                            <a:srgbClr val="1B2A4A"/>
+                          </a:solidFill>
+                          <a:latin typeface="Noto Sans CJK SC"/>
+                        </a:rPr>
+                        <a:t>周妍 2024：比规则控制省 4.85%（客滚船）</a:t>
+                      </a:r>
+                    </a:p>
+                  </a:txBody>
+                  <a:tcPr marL="54864" marR="54864" marT="27432" marB="27432" anchor="ctr">
+                    <a:solidFill>
+                      <a:srgbClr val="EEF3FA"/>
+                    </a:solidFill>
+                  </a:tcPr>
+                </a:tc>
+                <a:tc>
+                  <a:txBody>
+                    <a:bodyPr/>
+                    <a:lstStyle/>
+                    <a:p>
+                      <a:pPr>
+                        <a:lnSpc>
+                          <a:spcPct val="105000"/>
+                        </a:lnSpc>
+                      </a:pPr>
+                      <a:r>
+                        <a:rPr sz="1150" b="0">
+                          <a:solidFill>
+                            <a:srgbClr val="1B2A4A"/>
+                          </a:solidFill>
+                          <a:latin typeface="Noto Sans CJK SC"/>
+                        </a:rPr>
+                        <a:t>两者对比基线不同，不可互比；</a:t>
+                      </a:r>
+                    </a:p>
+                    <a:p>
+                      <a:pPr>
+                        <a:lnSpc>
+                          <a:spcPct val="105000"/>
+                        </a:lnSpc>
+                      </a:pPr>
+                      <a:r>
+                        <a:rPr sz="1150" b="0">
+                          <a:solidFill>
+                            <a:srgbClr val="1B2A4A"/>
+                          </a:solidFill>
+                          <a:latin typeface="Noto Sans CJK SC"/>
+                        </a:rPr>
+                        <a:t>均为仿真</a:t>
+                      </a:r>
+                    </a:p>
+                  </a:txBody>
+                  <a:tcPr marL="54864" marR="54864" marT="27432" marB="27432" anchor="ctr">
+                    <a:solidFill>
+                      <a:srgbClr val="EEF3FA"/>
+                    </a:solidFill>
+                  </a:tcPr>
+                </a:tc>
+              </a:tr>
+              <a:tr h="807720">
+                <a:tc>
+                  <a:txBody>
+                    <a:bodyPr/>
+                    <a:lstStyle/>
+                    <a:p>
+                      <a:pPr>
+                        <a:lnSpc>
+                          <a:spcPct val="105000"/>
+                        </a:lnSpc>
+                      </a:pPr>
+                      <a:r>
+                        <a:rPr sz="1150" b="0">
+                          <a:solidFill>
+                            <a:srgbClr val="1B2A4A"/>
+                          </a:solidFill>
+                          <a:latin typeface="Noto Sans CJK SC"/>
+                        </a:rPr>
+                        <a:t>气象航线</a:t>
+                      </a:r>
+                    </a:p>
+                  </a:txBody>
+                  <a:tcPr marL="54864" marR="54864" marT="27432" marB="27432" anchor="ctr"/>
+                </a:tc>
+                <a:tc>
+                  <a:txBody>
+                    <a:bodyPr/>
+                    <a:lstStyle/>
+                    <a:p>
+                      <a:pPr>
+                        <a:lnSpc>
+                          <a:spcPct val="105000"/>
+                        </a:lnSpc>
+                      </a:pPr>
+                      <a:r>
+                        <a:rPr sz="1150" b="0">
+                          <a:solidFill>
+                            <a:srgbClr val="1B2A4A"/>
+                          </a:solidFill>
+                          <a:latin typeface="Noto Sans CJK SC"/>
+                        </a:rPr>
+                        <a:t>算法基准研究：Isochrone / Isopone / DP / 3D-DP / Dijkstra</a:t>
+                      </a:r>
+                    </a:p>
+                    <a:p>
+                      <a:pPr>
+                        <a:lnSpc>
+                          <a:spcPct val="105000"/>
+                        </a:lnSpc>
+                      </a:pPr>
+                      <a:r>
+                        <a:rPr sz="1150" b="0">
+                          <a:solidFill>
+                            <a:srgbClr val="1B2A4A"/>
+                          </a:solidFill>
+                          <a:latin typeface="Noto Sans CJK SC"/>
+                        </a:rPr>
+                        <a:t>五算法横向对比（Wang et al., Chalmers，北大西洋案例）</a:t>
+                      </a:r>
+                    </a:p>
+                  </a:txBody>
+                  <a:tcPr marL="54864" marR="54864" marT="27432" marB="27432" anchor="ctr"/>
+                </a:tc>
+                <a:tc>
+                  <a:txBody>
+                    <a:bodyPr/>
+                    <a:lstStyle/>
+                    <a:p>
+                      <a:pPr>
+                        <a:lnSpc>
+                          <a:spcPct val="105000"/>
+                        </a:lnSpc>
+                      </a:pPr>
+                      <a:r>
+                        <a:rPr sz="1150" b="0">
+                          <a:solidFill>
+                            <a:srgbClr val="1B2A4A"/>
+                          </a:solidFill>
+                          <a:latin typeface="Noto Sans CJK SC"/>
+                        </a:rPr>
+                        <a:t>仿真基准，无单一最优算法</a:t>
+                      </a:r>
+                    </a:p>
+                  </a:txBody>
+                  <a:tcPr marL="54864" marR="54864" marT="27432" marB="27432" anchor="ctr"/>
+                </a:tc>
+              </a:tr>
+            </a:tbl>
+          </a:graphicData>
+        </a:graphic>
+      </p:graphicFrame>
       <p:sp>
         <p:nvSpPr>
           <p:cNvPr id="6" name="TextBox 5"/>
-          <p:cNvSpPr txBox="1"/>
-          <p:nvPr/>
-        </p:nvSpPr>
-        <p:spPr>
-          <a:xfrm>
-            <a:off x="7498079" y="1554480"/>
-            <a:ext cx="4480560" cy="5120640"/>
-          </a:xfrm>
-          <a:prstGeom prst="rect">
-            <a:avLst/>
-          </a:prstGeom>
-          <a:noFill/>
-        </p:spPr>
-        <p:txBody>
-          <a:bodyPr wrap="square" anchor="t">
-            <a:spAutoFit/>
-          </a:bodyPr>
-          <a:lstStyle/>
-          <a:p>
-            <a:pPr algn="l">
-              <a:lnSpc>
-                <a:spcPct val="115000"/>
-              </a:lnSpc>
-              <a:spcAft>
-                <a:spcPts val="800"/>
-              </a:spcAft>
-            </a:pPr>
-            <a:r>
-              <a:rPr sz="1400" b="1">
-                <a:solidFill>
-                  <a:srgbClr val="1F77B4"/>
-                </a:solidFill>
-                <a:latin typeface="Noto Sans CJK SC"/>
-              </a:rPr>
-              <a:t>▪ 规模化部署</a:t>
-            </a:r>
-          </a:p>
-          <a:p>
-            <a:pPr algn="l">
-              <a:lnSpc>
-                <a:spcPct val="115000"/>
-              </a:lnSpc>
-              <a:spcAft>
-                <a:spcPts val="400"/>
-              </a:spcAft>
-            </a:pPr>
-            <a:r>
-              <a:rPr sz="1250" b="0">
-                <a:solidFill>
-                  <a:srgbClr val="1B2A4A"/>
-                </a:solidFill>
-                <a:latin typeface="Noto Sans CJK SC"/>
-              </a:rPr>
-              <a:t>    – ABB OCTOPUS：1000+ 船，回收期仅几个月</a:t>
-            </a:r>
-          </a:p>
-          <a:p>
-            <a:pPr algn="l">
-              <a:lnSpc>
-                <a:spcPct val="115000"/>
-              </a:lnSpc>
-              <a:spcAft>
-                <a:spcPts val="400"/>
-              </a:spcAft>
-            </a:pPr>
-            <a:r>
-              <a:rPr sz="1250" b="0">
-                <a:solidFill>
-                  <a:srgbClr val="1B2A4A"/>
-                </a:solidFill>
-                <a:latin typeface="Noto Sans CJK SC"/>
-              </a:rPr>
-              <a:t>    – DeepSea：EPS 全船队 300 艘，油耗预报误差 0.8%</a:t>
-            </a:r>
-          </a:p>
-          <a:p>
-            <a:pPr algn="l">
-              <a:lnSpc>
-                <a:spcPct val="115000"/>
-              </a:lnSpc>
-              <a:spcAft>
-                <a:spcPts val="400"/>
-              </a:spcAft>
-            </a:pPr>
-            <a:r>
-              <a:rPr sz="1250" b="0">
-                <a:solidFill>
-                  <a:srgbClr val="1B2A4A"/>
-                </a:solidFill>
-                <a:latin typeface="Noto Sans CJK SC"/>
-              </a:rPr>
-              <a:t>    – Orca AI：Seaspan 267+ 船，单船年省约 $10 万</a:t>
-            </a:r>
-          </a:p>
-          <a:p>
-            <a:pPr algn="l">
-              <a:lnSpc>
-                <a:spcPct val="115000"/>
-              </a:lnSpc>
-              <a:spcAft>
-                <a:spcPts val="800"/>
-              </a:spcAft>
-            </a:pPr>
-            <a:r>
-              <a:rPr sz="1400" b="1">
-                <a:solidFill>
-                  <a:srgbClr val="2CA02C"/>
-                </a:solidFill>
-                <a:latin typeface="Noto Sans CJK SC"/>
-              </a:rPr>
-              <a:t>▪ 控制层现状</a:t>
-            </a:r>
-          </a:p>
-          <a:p>
-            <a:pPr algn="l">
-              <a:lnSpc>
-                <a:spcPct val="115000"/>
-              </a:lnSpc>
-              <a:spcAft>
-                <a:spcPts val="400"/>
-              </a:spcAft>
-            </a:pPr>
-            <a:r>
-              <a:rPr sz="1250" b="0">
-                <a:solidFill>
-                  <a:srgbClr val="1B2A4A"/>
-                </a:solidFill>
-                <a:latin typeface="Noto Sans CJK SC"/>
-              </a:rPr>
-              <a:t>    – 节能自动舵 = 自适应+海浪滤波（Anschütz ECO）</a:t>
-            </a:r>
-          </a:p>
-          <a:p>
-            <a:pPr algn="l">
-              <a:lnSpc>
-                <a:spcPct val="115000"/>
-              </a:lnSpc>
-              <a:spcAft>
-                <a:spcPts val="400"/>
-              </a:spcAft>
-            </a:pPr>
-            <a:r>
-              <a:rPr sz="1250" b="0">
-                <a:solidFill>
-                  <a:srgbClr val="1B2A4A"/>
-                </a:solidFill>
-                <a:latin typeface="Noto Sans CJK SC"/>
-              </a:rPr>
-              <a:t>    – 无公开的 MPC 实船自动舵部署案例</a:t>
-            </a:r>
-          </a:p>
-          <a:p>
-            <a:pPr algn="l">
-              <a:lnSpc>
-                <a:spcPct val="115000"/>
-              </a:lnSpc>
-              <a:spcAft>
-                <a:spcPts val="400"/>
-              </a:spcAft>
-            </a:pPr>
-            <a:r>
-              <a:rPr sz="1250" b="0">
-                <a:solidFill>
-                  <a:srgbClr val="1B2A4A"/>
-                </a:solidFill>
-                <a:latin typeface="Noto Sans CJK SC"/>
-              </a:rPr>
-              <a:t>    – 印证：门槛不在算力，在模型获取与整定</a:t>
-            </a:r>
-          </a:p>
-        </p:txBody>
-      </p:sp>
-      <p:sp>
-        <p:nvSpPr>
-          <p:cNvPr id="7" name="TextBox 6"/>
           <p:cNvSpPr txBox="1"/>
           <p:nvPr/>
         </p:nvSpPr>
@@ -6171,14 +6285,14 @@
                 </a:solidFill>
                 <a:latin typeface="Noto Sans CJK SC"/>
               </a:rPr>
-              <a:t>14 / 19</a:t>
-            </a:r>
-          </a:p>
-        </p:txBody>
-      </p:sp>
-      <p:sp>
-        <p:nvSpPr>
-          <p:cNvPr id="8" name="TextBox 7"/>
+              <a:t>14 / 21</a:t>
+            </a:r>
+          </a:p>
+        </p:txBody>
+      </p:sp>
+      <p:sp>
+        <p:nvSpPr>
+          <p:cNvPr id="7" name="TextBox 6"/>
           <p:cNvSpPr txBox="1"/>
           <p:nvPr/>
         </p:nvSpPr>
@@ -6213,7 +6327,7 @@
                 </a:solidFill>
                 <a:latin typeface="Noto Sans CJK SC"/>
               </a:rPr>
-              <a:t>来源：https://library.e.abb.com/public/b92c10c2533647b08601322d2f9ffef4/Detailed%20Description_ABB%20Ability%20Marine%20Advisory%20Suite%20-%20OCTOPUS.pdf ｜ https://www.hellenicshippingnews.com/nabtesco-combines-telegraph-agent-and-cassandra-to-deliver-unmatched-fuel-optimisation-for-eastern-car-liner-co/</a:t>
+              <a:t>来源：https://greenvoyage2050.imo.org/technology/speed-management/ ｜ https://research.chalmers.se/en/publication/516144（气象航线五算法基准）</a:t>
             </a:r>
           </a:p>
         </p:txBody>
@@ -6316,56 +6430,14 @@
                 </a:solidFill>
                 <a:latin typeface="Noto Sans CJK SC"/>
               </a:rPr>
-              <a:t>工业部署案例（二）：实测细节与口径</a:t>
-            </a:r>
-          </a:p>
-        </p:txBody>
-      </p:sp>
-      <p:sp>
-        <p:nvSpPr>
-          <p:cNvPr id="4" name="TextBox 3"/>
-          <p:cNvSpPr txBox="1"/>
-          <p:nvPr/>
-        </p:nvSpPr>
-        <p:spPr>
-          <a:xfrm>
-            <a:off x="475488" y="914400"/>
-            <a:ext cx="11247120" cy="457200"/>
-          </a:xfrm>
-          <a:prstGeom prst="rect">
-            <a:avLst/>
-          </a:prstGeom>
-          <a:noFill/>
-        </p:spPr>
-        <p:txBody>
-          <a:bodyPr wrap="square" anchor="t">
-            <a:spAutoFit/>
-          </a:bodyPr>
-          <a:lstStyle/>
-          <a:p>
-            <a:pPr algn="l">
-              <a:lnSpc>
-                <a:spcPct val="115000"/>
-              </a:lnSpc>
-              <a:spcAft>
-                <a:spcPts val="600"/>
-              </a:spcAft>
-            </a:pPr>
-            <a:r>
-              <a:rPr sz="1400" b="0">
-                <a:solidFill>
-                  <a:srgbClr val="666666"/>
-                </a:solidFill>
-                <a:latin typeface="Noto Sans CJK SC"/>
-              </a:rPr>
-              <a:t>注意：各案例节油路径不同，不可直接横向比较</a:t>
+              <a:t>节能方案优缺点（二）：操作层与控制层</a:t>
             </a:r>
           </a:p>
         </p:txBody>
       </p:sp>
       <p:graphicFrame>
         <p:nvGraphicFramePr>
-          <p:cNvPr id="5" name="Table 4"/>
+          <p:cNvPr id="4" name="Table 3"/>
           <p:cNvGraphicFramePr>
             <a:graphicFrameLocks noGrp="1"/>
           </p:cNvGraphicFramePr>
@@ -6373,7 +6445,7 @@
         </p:nvGraphicFramePr>
         <p:xfrm>
           <a:off x="457200" y="1463040"/>
-          <a:ext cx="11338558" cy="4206240"/>
+          <a:ext cx="11338559" cy="4846320"/>
         </p:xfrm>
         <a:graphic>
           <a:graphicData uri="http://schemas.openxmlformats.org/drawingml/2006/table">
@@ -6382,29 +6454,30 @@
                 <a:tableStyleId>{5C22544A-7EE6-4342-B048-85BDC9FD1C3A}</a:tableStyleId>
               </a:tblPr>
               <a:tblGrid>
-                <a:gridCol w="2538483"/>
-                <a:gridCol w="6092360"/>
-                <a:gridCol w="2707715"/>
+                <a:gridCol w="1939490"/>
+                <a:gridCol w="3878981"/>
+                <a:gridCol w="2685448"/>
+                <a:gridCol w="2834640"/>
               </a:tblGrid>
-              <a:tr h="701040">
-                <a:tc>
-                  <a:txBody>
-                    <a:bodyPr/>
-                    <a:lstStyle/>
-                    <a:p>
-                      <a:pPr>
-                        <a:lnSpc>
-                          <a:spcPct val="105000"/>
-                        </a:lnSpc>
-                      </a:pPr>
-                      <a:r>
-                        <a:rPr sz="1200" b="1">
+              <a:tr h="1211580">
+                <a:tc>
+                  <a:txBody>
+                    <a:bodyPr/>
+                    <a:lstStyle/>
+                    <a:p>
+                      <a:pPr>
+                        <a:lnSpc>
+                          <a:spcPct val="105000"/>
+                        </a:lnSpc>
+                      </a:pPr>
+                      <a:r>
+                        <a:rPr sz="1250" b="1">
                           <a:solidFill>
                             <a:srgbClr val="FFFFFF"/>
                           </a:solidFill>
                           <a:latin typeface="Noto Sans CJK SC"/>
                         </a:rPr>
-                        <a:t>案例</a:t>
+                        <a:t>方案</a:t>
                       </a:r>
                     </a:p>
                   </a:txBody>
@@ -6425,13 +6498,13 @@
                         </a:lnSpc>
                       </a:pPr>
                       <a:r>
-                        <a:rPr sz="1200" b="1">
+                        <a:rPr sz="1250" b="1">
                           <a:solidFill>
                             <a:srgbClr val="FFFFFF"/>
                           </a:solidFill>
                           <a:latin typeface="Noto Sans CJK SC"/>
                         </a:rPr>
-                        <a:t>实测细节（已核对）</a:t>
+                        <a:t>代表数据（已核对）</a:t>
                       </a:r>
                     </a:p>
                   </a:txBody>
@@ -6452,13 +6525,13 @@
                         </a:lnSpc>
                       </a:pPr>
                       <a:r>
-                        <a:rPr sz="1200" b="1">
+                        <a:rPr sz="1250" b="1">
                           <a:solidFill>
                             <a:srgbClr val="FFFFFF"/>
                           </a:solidFill>
                           <a:latin typeface="Noto Sans CJK SC"/>
                         </a:rPr>
-                        <a:t>节油路径</a:t>
+                        <a:t>优点</a:t>
                       </a:r>
                     </a:p>
                   </a:txBody>
@@ -6468,42 +6541,69 @@
                     </a:solidFill>
                   </a:tcPr>
                 </a:tc>
+                <a:tc>
+                  <a:txBody>
+                    <a:bodyPr/>
+                    <a:lstStyle/>
+                    <a:p>
+                      <a:pPr>
+                        <a:lnSpc>
+                          <a:spcPct val="105000"/>
+                        </a:lnSpc>
+                      </a:pPr>
+                      <a:r>
+                        <a:rPr sz="1250" b="1">
+                          <a:solidFill>
+                            <a:srgbClr val="FFFFFF"/>
+                          </a:solidFill>
+                          <a:latin typeface="Noto Sans CJK SC"/>
+                        </a:rPr>
+                        <a:t>缺点</a:t>
+                      </a:r>
+                    </a:p>
+                  </a:txBody>
+                  <a:tcPr marL="54864" marR="54864" marT="27432" marB="27432" anchor="ctr">
+                    <a:solidFill>
+                      <a:srgbClr val="1F77B4"/>
+                    </a:solidFill>
+                  </a:tcPr>
+                </a:tc>
               </a:tr>
-              <a:tr h="701040">
-                <a:tc>
-                  <a:txBody>
-                    <a:bodyPr/>
-                    <a:lstStyle/>
-                    <a:p>
-                      <a:pPr>
-                        <a:lnSpc>
-                          <a:spcPct val="105000"/>
-                        </a:lnSpc>
-                      </a:pPr>
-                      <a:r>
-                        <a:rPr sz="1150" b="0">
-                          <a:solidFill>
-                            <a:srgbClr val="1B2A4A"/>
-                          </a:solidFill>
-                          <a:latin typeface="Noto Sans CJK SC"/>
-                        </a:rPr>
-                        <a:t>Wärtsilä/Eniram</a:t>
-                      </a:r>
-                    </a:p>
-                    <a:p>
-                      <a:pPr>
-                        <a:lnSpc>
-                          <a:spcPct val="105000"/>
-                        </a:lnSpc>
-                      </a:pPr>
-                      <a:r>
-                        <a:rPr sz="1150" b="0">
-                          <a:solidFill>
-                            <a:srgbClr val="1B2A4A"/>
-                          </a:solidFill>
-                          <a:latin typeface="Noto Sans CJK SC"/>
-                        </a:rPr>
-                        <a:t>VLCC 案例</a:t>
+              <a:tr h="1211580">
+                <a:tc>
+                  <a:txBody>
+                    <a:bodyPr/>
+                    <a:lstStyle/>
+                    <a:p>
+                      <a:pPr>
+                        <a:lnSpc>
+                          <a:spcPct val="105000"/>
+                        </a:lnSpc>
+                      </a:pPr>
+                      <a:r>
+                        <a:rPr sz="1200" b="0">
+                          <a:solidFill>
+                            <a:srgbClr val="1B2A4A"/>
+                          </a:solidFill>
+                          <a:latin typeface="Noto Sans CJK SC"/>
+                        </a:rPr>
+                        <a:t>MPC 能量管理</a:t>
+                      </a:r>
+                    </a:p>
+                    <a:p>
+                      <a:pPr>
+                        <a:lnSpc>
+                          <a:spcPct val="105000"/>
+                        </a:lnSpc>
+                      </a:pPr>
+                      <a:r>
+                        <a:rPr sz="1200" b="0">
+                          <a:solidFill>
+                            <a:srgbClr val="1B2A4A"/>
+                          </a:solidFill>
+                          <a:latin typeface="Noto Sans CJK SC"/>
+                        </a:rPr>
+                        <a:t>(混合动力 EMS)</a:t>
                       </a:r>
                     </a:p>
                   </a:txBody>
@@ -6520,29 +6620,29 @@
                         </a:lnSpc>
                       </a:pPr>
                       <a:r>
-                        <a:rPr sz="1150" b="0">
-                          <a:solidFill>
-                            <a:srgbClr val="1B2A4A"/>
-                          </a:solidFill>
-                          <a:latin typeface="Noto Sans CJK SC"/>
-                        </a:rPr>
-                        <a:t>320,000+ DWT、450 天数据：年燃油成本 −2.6%</a:t>
-                      </a:r>
-                    </a:p>
-                    <a:p>
-                      <a:pPr>
-                        <a:lnSpc>
-                          <a:spcPct val="105000"/>
-                        </a:lnSpc>
-                      </a:pPr>
-                      <a:r>
-                        <a:rPr sz="1150" b="0">
-                          <a:solidFill>
-                            <a:srgbClr val="1B2A4A"/>
-                          </a:solidFill>
-                          <a:latin typeface="Noto Sans CJK SC"/>
-                        </a:rPr>
-                        <a:t>（≈48.2 万美元 / 730 吨燃油）</a:t>
+                        <a:rPr sz="1200" b="0">
+                          <a:solidFill>
+                            <a:srgbClr val="1B2A4A"/>
+                          </a:solidFill>
+                          <a:latin typeface="Noto Sans CJK SC"/>
+                        </a:rPr>
+                        <a:t>双层 MPC 比传统 MPC 再省 17.2%（Zhang 2022）</a:t>
+                      </a:r>
+                    </a:p>
+                    <a:p>
+                      <a:pPr>
+                        <a:lnSpc>
+                          <a:spcPct val="105000"/>
+                        </a:lnSpc>
+                      </a:pPr>
+                      <a:r>
+                        <a:rPr sz="1200" b="0">
+                          <a:solidFill>
+                            <a:srgbClr val="1B2A4A"/>
+                          </a:solidFill>
+                          <a:latin typeface="Noto Sans CJK SC"/>
+                        </a:rPr>
+                        <a:t>客滚船 MPC-EMS 节油 4.85%（周妍 2024）</a:t>
                       </a:r>
                     </a:p>
                   </a:txBody>
@@ -6559,54 +6659,77 @@
                         </a:lnSpc>
                       </a:pPr>
                       <a:r>
-                        <a:rPr sz="1150" b="0">
-                          <a:solidFill>
-                            <a:srgbClr val="1B2A4A"/>
-                          </a:solidFill>
-                          <a:latin typeface="Noto Sans CJK SC"/>
-                        </a:rPr>
-                        <a:t>纵倾优化 + 污底评估</a:t>
+                        <a:rPr sz="1200" b="0">
+                          <a:solidFill>
+                            <a:srgbClr val="1B2A4A"/>
+                          </a:solidFill>
+                          <a:latin typeface="Noto Sans CJK SC"/>
+                        </a:rPr>
+                        <a:t>滚动时域天然适合负载预测；多目标可编码</a:t>
                       </a:r>
                     </a:p>
                   </a:txBody>
                   <a:tcPr marL="54864" marR="54864" marT="27432" marB="27432" anchor="ctr"/>
                 </a:tc>
+                <a:tc>
+                  <a:txBody>
+                    <a:bodyPr/>
+                    <a:lstStyle/>
+                    <a:p>
+                      <a:pPr>
+                        <a:lnSpc>
+                          <a:spcPct val="105000"/>
+                        </a:lnSpc>
+                      </a:pPr>
+                      <a:r>
+                        <a:rPr sz="1200" b="0">
+                          <a:solidFill>
+                            <a:srgbClr val="1B2A4A"/>
+                          </a:solidFill>
+                          <a:latin typeface="Noto Sans CJK SC"/>
+                        </a:rPr>
+                        <a:t>全部仿真验证无实船数据；仅限混合动力船型</a:t>
+                      </a:r>
+                    </a:p>
+                  </a:txBody>
+                  <a:tcPr marL="54864" marR="54864" marT="27432" marB="27432" anchor="ctr"/>
+                </a:tc>
               </a:tr>
-              <a:tr h="701040">
-                <a:tc>
-                  <a:txBody>
-                    <a:bodyPr/>
-                    <a:lstStyle/>
-                    <a:p>
-                      <a:pPr>
-                        <a:lnSpc>
-                          <a:spcPct val="105000"/>
-                        </a:lnSpc>
-                      </a:pPr>
-                      <a:r>
-                        <a:rPr sz="1150" b="0">
-                          <a:solidFill>
-                            <a:srgbClr val="1B2A4A"/>
-                          </a:solidFill>
-                          <a:latin typeface="Noto Sans CJK SC"/>
-                        </a:rPr>
-                        <a:t>Yara FuelOpt</a:t>
-                      </a:r>
-                    </a:p>
-                    <a:p>
-                      <a:pPr>
-                        <a:lnSpc>
-                          <a:spcPct val="105000"/>
-                        </a:lnSpc>
-                      </a:pPr>
-                      <a:r>
-                        <a:rPr sz="1150" b="0">
-                          <a:solidFill>
-                            <a:srgbClr val="1B2A4A"/>
-                          </a:solidFill>
-                          <a:latin typeface="Noto Sans CJK SC"/>
-                        </a:rPr>
-                        <a:t>（独立复核）</a:t>
+              <a:tr h="1211580">
+                <a:tc>
+                  <a:txBody>
+                    <a:bodyPr/>
+                    <a:lstStyle/>
+                    <a:p>
+                      <a:pPr>
+                        <a:lnSpc>
+                          <a:spcPct val="105000"/>
+                        </a:lnSpc>
+                      </a:pPr>
+                      <a:r>
+                        <a:rPr sz="1200" b="0">
+                          <a:solidFill>
+                            <a:srgbClr val="1B2A4A"/>
+                          </a:solidFill>
+                          <a:latin typeface="Noto Sans CJK SC"/>
+                        </a:rPr>
+                        <a:t>自动舵节能</a:t>
+                      </a:r>
+                    </a:p>
+                    <a:p>
+                      <a:pPr>
+                        <a:lnSpc>
+                          <a:spcPct val="105000"/>
+                        </a:lnSpc>
+                      </a:pPr>
+                      <a:r>
+                        <a:rPr sz="1200" b="0">
+                          <a:solidFill>
+                            <a:srgbClr val="1B2A4A"/>
+                          </a:solidFill>
+                          <a:latin typeface="Noto Sans CJK SC"/>
+                        </a:rPr>
+                        <a:t>(减少无效操舵)</a:t>
                       </a:r>
                     </a:p>
                   </a:txBody>
@@ -6627,29 +6750,29 @@
                         </a:lnSpc>
                       </a:pPr>
                       <a:r>
-                        <a:rPr sz="1150" b="0">
-                          <a:solidFill>
-                            <a:srgbClr val="1B2A4A"/>
-                          </a:solidFill>
-                          <a:latin typeface="Noto Sans CJK SC"/>
-                        </a:rPr>
-                        <a:t>NAPA 独立分析确认 10–18%：</a:t>
-                      </a:r>
-                    </a:p>
-                    <a:p>
-                      <a:pPr>
-                        <a:lnSpc>
-                          <a:spcPct val="105000"/>
-                        </a:lnSpc>
-                      </a:pPr>
-                      <a:r>
-                        <a:rPr sz="1150" b="0">
-                          <a:solidFill>
-                            <a:srgbClr val="1B2A4A"/>
-                          </a:solidFill>
-                          <a:latin typeface="Noto Sans CJK SC"/>
-                        </a:rPr>
-                        <a:t>Sten Bothnia 12 个月 17.9%、Ekfjord 24 个月 10.3%</a:t>
+                        <a:rPr sz="1200" b="0">
+                          <a:solidFill>
+                            <a:srgbClr val="1B2A4A"/>
+                          </a:solidFill>
+                          <a:latin typeface="Noto Sans CJK SC"/>
+                        </a:rPr>
+                        <a:t>IMO：0.1–1.0%；ABS：最高 1%、改造成本 $2 万</a:t>
+                      </a:r>
+                    </a:p>
+                    <a:p>
+                      <a:pPr>
+                        <a:lnSpc>
+                          <a:spcPct val="105000"/>
+                        </a:lnSpc>
+                      </a:pPr>
+                      <a:r>
+                        <a:rPr sz="1200" b="0">
+                          <a:solidFill>
+                            <a:srgbClr val="1B2A4A"/>
+                          </a:solidFill>
+                          <a:latin typeface="Noto Sans CJK SC"/>
+                        </a:rPr>
+                        <a:t>MRAS 实船试验 1–3%（van Amerongen 经典）</a:t>
                       </a:r>
                     </a:p>
                   </a:txBody>
@@ -6670,13 +6793,13 @@
                         </a:lnSpc>
                       </a:pPr>
                       <a:r>
-                        <a:rPr sz="1150" b="0">
-                          <a:solidFill>
-                            <a:srgbClr val="1B2A4A"/>
-                          </a:solidFill>
-                          <a:latin typeface="Noto Sans CJK SC"/>
-                        </a:rPr>
-                        <a:t>推进功率闭环优化</a:t>
+                        <a:rPr sz="1200" b="0">
+                          <a:solidFill>
+                            <a:srgbClr val="1B2A4A"/>
+                          </a:solidFill>
+                          <a:latin typeface="Noto Sans CJK SC"/>
+                        </a:rPr>
+                        <a:t>实施成本最低（软件级）；兼降舵机磨损</a:t>
                       </a:r>
                     </a:p>
                   </a:txBody>
@@ -6686,145 +6809,24 @@
                     </a:solidFill>
                   </a:tcPr>
                 </a:tc>
-              </a:tr>
-              <a:tr h="701040">
-                <a:tc>
-                  <a:txBody>
-                    <a:bodyPr/>
-                    <a:lstStyle/>
-                    <a:p>
-                      <a:pPr>
-                        <a:lnSpc>
-                          <a:spcPct val="105000"/>
-                        </a:lnSpc>
-                      </a:pPr>
-                      <a:r>
-                        <a:rPr sz="1150" b="0">
-                          <a:solidFill>
-                            <a:srgbClr val="1B2A4A"/>
-                          </a:solidFill>
-                          <a:latin typeface="Noto Sans CJK SC"/>
-                        </a:rPr>
-                        <a:t>NAPA × Norsepower</a:t>
-                      </a:r>
-                    </a:p>
-                    <a:p>
-                      <a:pPr>
-                        <a:lnSpc>
-                          <a:spcPct val="105000"/>
-                        </a:lnSpc>
-                      </a:pPr>
-                      <a:r>
-                        <a:rPr sz="1150" b="0">
-                          <a:solidFill>
-                            <a:srgbClr val="1B2A4A"/>
-                          </a:solidFill>
-                          <a:latin typeface="Noto Sans CJK SC"/>
-                        </a:rPr>
-                        <a:t>× SHI-ME</a:t>
-                      </a:r>
-                    </a:p>
-                  </a:txBody>
-                  <a:tcPr marL="54864" marR="54864" marT="27432" marB="27432" anchor="ctr"/>
-                </a:tc>
-                <a:tc>
-                  <a:txBody>
-                    <a:bodyPr/>
-                    <a:lstStyle/>
-                    <a:p>
-                      <a:pPr>
-                        <a:lnSpc>
-                          <a:spcPct val="105000"/>
-                        </a:lnSpc>
-                      </a:pPr>
-                      <a:r>
-                        <a:rPr sz="1150" b="0">
-                          <a:solidFill>
-                            <a:srgbClr val="1B2A4A"/>
-                          </a:solidFill>
-                          <a:latin typeface="Noto Sans CJK SC"/>
-                        </a:rPr>
-                        <a:t>转筒帆+航程优化六条航线平均 CO2 −19%</a:t>
-                      </a:r>
-                    </a:p>
-                    <a:p>
-                      <a:pPr>
-                        <a:lnSpc>
-                          <a:spcPct val="105000"/>
-                        </a:lnSpc>
-                      </a:pPr>
-                      <a:r>
-                        <a:rPr sz="1150" b="0">
-                          <a:solidFill>
-                            <a:srgbClr val="1B2A4A"/>
-                          </a:solidFill>
-                          <a:latin typeface="Noto Sans CJK SC"/>
-                        </a:rPr>
-                        <a:t>（纽约–阿姆斯特丹线 28%，NAPA 贡献 10–12 个百分点）</a:t>
-                      </a:r>
-                    </a:p>
-                  </a:txBody>
-                  <a:tcPr marL="54864" marR="54864" marT="27432" marB="27432" anchor="ctr"/>
-                </a:tc>
-                <a:tc>
-                  <a:txBody>
-                    <a:bodyPr/>
-                    <a:lstStyle/>
-                    <a:p>
-                      <a:pPr>
-                        <a:lnSpc>
-                          <a:spcPct val="105000"/>
-                        </a:lnSpc>
-                      </a:pPr>
-                      <a:r>
-                        <a:rPr sz="1150" b="0">
-                          <a:solidFill>
-                            <a:srgbClr val="1B2A4A"/>
-                          </a:solidFill>
-                          <a:latin typeface="Noto Sans CJK SC"/>
-                        </a:rPr>
-                        <a:t>风助推 + 航程优化</a:t>
-                      </a:r>
-                    </a:p>
-                  </a:txBody>
-                  <a:tcPr marL="54864" marR="54864" marT="27432" marB="27432" anchor="ctr"/>
-                </a:tc>
-              </a:tr>
-              <a:tr h="701040">
-                <a:tc>
-                  <a:txBody>
-                    <a:bodyPr/>
-                    <a:lstStyle/>
-                    <a:p>
-                      <a:pPr>
-                        <a:lnSpc>
-                          <a:spcPct val="105000"/>
-                        </a:lnSpc>
-                      </a:pPr>
-                      <a:r>
-                        <a:rPr sz="1150" b="0">
-                          <a:solidFill>
-                            <a:srgbClr val="1B2A4A"/>
-                          </a:solidFill>
-                          <a:latin typeface="Noto Sans CJK SC"/>
-                        </a:rPr>
-                        <a:t>Orca AI</a:t>
-                      </a:r>
-                    </a:p>
-                    <a:p>
-                      <a:pPr>
-                        <a:lnSpc>
-                          <a:spcPct val="105000"/>
-                        </a:lnSpc>
-                      </a:pPr>
-                      <a:r>
-                        <a:rPr sz="1150" b="0">
-                          <a:solidFill>
-                            <a:srgbClr val="1B2A4A"/>
-                          </a:solidFill>
-                          <a:latin typeface="Noto Sans CJK SC"/>
-                        </a:rPr>
-                        <a:t>（Seaspan）</a:t>
+                <a:tc>
+                  <a:txBody>
+                    <a:bodyPr/>
+                    <a:lstStyle/>
+                    <a:p>
+                      <a:pPr>
+                        <a:lnSpc>
+                          <a:spcPct val="105000"/>
+                        </a:lnSpc>
+                      </a:pPr>
+                      <a:r>
+                        <a:rPr sz="1200" b="0">
+                          <a:solidFill>
+                            <a:srgbClr val="1B2A4A"/>
+                          </a:solidFill>
+                          <a:latin typeface="Noto Sans CJK SC"/>
+                        </a:rPr>
+                        <a:t>单项幅度最小；收益依赖海况</a:t>
                       </a:r>
                     </a:p>
                   </a:txBody>
@@ -6834,112 +6836,42 @@
                     </a:solidFill>
                   </a:tcPr>
                 </a:tc>
-                <a:tc>
-                  <a:txBody>
-                    <a:bodyPr/>
-                    <a:lstStyle/>
-                    <a:p>
-                      <a:pPr>
-                        <a:lnSpc>
-                          <a:spcPct val="105000"/>
-                        </a:lnSpc>
-                      </a:pPr>
-                      <a:r>
-                        <a:rPr sz="1150" b="0">
-                          <a:solidFill>
-                            <a:srgbClr val="1B2A4A"/>
-                          </a:solidFill>
-                          <a:latin typeface="Noto Sans CJK SC"/>
-                        </a:rPr>
-                        <a:t>近距遭遇事件 −54%；2024 年合计减排约 19.5 万吨 CO2；</a:t>
-                      </a:r>
-                    </a:p>
-                    <a:p>
-                      <a:pPr>
-                        <a:lnSpc>
-                          <a:spcPct val="105000"/>
-                        </a:lnSpc>
-                      </a:pPr>
-                      <a:r>
-                        <a:rPr sz="1150" b="0">
-                          <a:solidFill>
-                            <a:srgbClr val="1B2A4A"/>
-                          </a:solidFill>
-                          <a:latin typeface="Noto Sans CJK SC"/>
-                        </a:rPr>
-                        <a:t>单船年省约 $10 万 / 减 500 t CO2</a:t>
-                      </a:r>
-                    </a:p>
-                  </a:txBody>
-                  <a:tcPr marL="54864" marR="54864" marT="27432" marB="27432" anchor="ctr">
-                    <a:solidFill>
-                      <a:srgbClr val="EEF3FA"/>
-                    </a:solidFill>
-                  </a:tcPr>
-                </a:tc>
-                <a:tc>
-                  <a:txBody>
-                    <a:bodyPr/>
-                    <a:lstStyle/>
-                    <a:p>
-                      <a:pPr>
-                        <a:lnSpc>
-                          <a:spcPct val="105000"/>
-                        </a:lnSpc>
-                      </a:pPr>
-                      <a:r>
-                        <a:rPr sz="1150" b="0">
-                          <a:solidFill>
-                            <a:srgbClr val="1B2A4A"/>
-                          </a:solidFill>
-                          <a:latin typeface="Noto Sans CJK SC"/>
-                        </a:rPr>
-                        <a:t>减少避碰机动与无谓变速</a:t>
-                      </a:r>
-                    </a:p>
-                  </a:txBody>
-                  <a:tcPr marL="54864" marR="54864" marT="27432" marB="27432" anchor="ctr">
-                    <a:solidFill>
-                      <a:srgbClr val="EEF3FA"/>
-                    </a:solidFill>
-                  </a:tcPr>
-                </a:tc>
               </a:tr>
-              <a:tr h="701040">
-                <a:tc>
-                  <a:txBody>
-                    <a:bodyPr/>
-                    <a:lstStyle/>
-                    <a:p>
-                      <a:pPr>
-                        <a:lnSpc>
-                          <a:spcPct val="105000"/>
-                        </a:lnSpc>
-                      </a:pPr>
-                      <a:r>
-                        <a:rPr sz="1150" b="0">
-                          <a:solidFill>
-                            <a:srgbClr val="1B2A4A"/>
-                          </a:solidFill>
-                          <a:latin typeface="Noto Sans CJK SC"/>
-                        </a:rPr>
-                        <a:t>Kongsberg</a:t>
-                      </a:r>
-                    </a:p>
-                    <a:p>
-                      <a:pPr>
-                        <a:lnSpc>
-                          <a:spcPct val="105000"/>
-                        </a:lnSpc>
-                      </a:pPr>
-                      <a:r>
-                        <a:rPr sz="1150" b="0">
-                          <a:solidFill>
-                            <a:srgbClr val="1B2A4A"/>
-                          </a:solidFill>
-                          <a:latin typeface="Noto Sans CJK SC"/>
-                        </a:rPr>
-                        <a:t>EcoAdvisor</a:t>
+              <a:tr h="1211580">
+                <a:tc>
+                  <a:txBody>
+                    <a:bodyPr/>
+                    <a:lstStyle/>
+                    <a:p>
+                      <a:pPr>
+                        <a:lnSpc>
+                          <a:spcPct val="105000"/>
+                        </a:lnSpc>
+                      </a:pPr>
+                      <a:r>
+                        <a:rPr sz="1200" b="0">
+                          <a:solidFill>
+                            <a:srgbClr val="1B2A4A"/>
+                          </a:solidFill>
+                          <a:latin typeface="Noto Sans CJK SC"/>
+                        </a:rPr>
+                        <a:t>双舵 Toe Angle</a:t>
+                      </a:r>
+                    </a:p>
+                    <a:p>
+                      <a:pPr>
+                        <a:lnSpc>
+                          <a:spcPct val="105000"/>
+                        </a:lnSpc>
+                      </a:pPr>
+                      <a:r>
+                        <a:rPr sz="1200" b="0">
+                          <a:solidFill>
+                            <a:srgbClr val="1B2A4A"/>
+                          </a:solidFill>
+                          <a:latin typeface="Noto Sans CJK SC"/>
+                        </a:rPr>
+                        <a:t>(舵系水动力优化)</a:t>
                       </a:r>
                     </a:p>
                   </a:txBody>
@@ -6956,29 +6888,29 @@
                         </a:lnSpc>
                       </a:pPr>
                       <a:r>
-                        <a:rPr sz="1150" b="0">
-                          <a:solidFill>
-                            <a:srgbClr val="1B2A4A"/>
-                          </a:solidFill>
-                          <a:latin typeface="Noto Sans CJK SC"/>
-                        </a:rPr>
-                        <a:t>DP 工况主机/推进器停机建议工具（DOF 试点）；</a:t>
-                      </a:r>
-                    </a:p>
-                    <a:p>
-                      <a:pPr>
-                        <a:lnSpc>
-                          <a:spcPct val="105000"/>
-                        </a:lnSpc>
-                      </a:pPr>
-                      <a:r>
-                        <a:rPr sz="1150" b="0">
-                          <a:solidFill>
-                            <a:srgbClr val="1B2A4A"/>
-                          </a:solidFill>
-                          <a:latin typeface="Noto Sans CJK SC"/>
-                        </a:rPr>
-                        <a:t>官方未公布定量节油数据（流传的 8–10% 无法证实，已弃用）</a:t>
+                        <a:rPr sz="1200" b="0">
+                          <a:solidFill>
+                            <a:srgbClr val="1B2A4A"/>
+                          </a:solidFill>
+                          <a:latin typeface="Noto Sans CJK SC"/>
+                        </a:rPr>
+                        <a:t>Anschütz 实测最大 4.7%、平均约 2%（宣称 ≤5%）</a:t>
+                      </a:r>
+                    </a:p>
+                    <a:p>
+                      <a:pPr>
+                        <a:lnSpc>
+                          <a:spcPct val="105000"/>
+                        </a:lnSpc>
+                      </a:pPr>
+                      <a:r>
+                        <a:rPr sz="1200" b="0">
+                          <a:solidFill>
+                            <a:srgbClr val="1B2A4A"/>
+                          </a:solidFill>
+                          <a:latin typeface="Noto Sans CJK SC"/>
+                        </a:rPr>
+                        <a:t>自适应模式平均减少舵动作 25%</a:t>
                       </a:r>
                     </a:p>
                   </a:txBody>
@@ -6995,13 +6927,36 @@
                         </a:lnSpc>
                       </a:pPr>
                       <a:r>
-                        <a:rPr sz="1150" b="0">
-                          <a:solidFill>
-                            <a:srgbClr val="1B2A4A"/>
-                          </a:solidFill>
-                          <a:latin typeface="Noto Sans CJK SC"/>
-                        </a:rPr>
-                        <a:t>动力定位能耗优化</a:t>
+                        <a:rPr sz="1200" b="0">
+                          <a:solidFill>
+                            <a:srgbClr val="1B2A4A"/>
+                          </a:solidFill>
+                          <a:latin typeface="Noto Sans CJK SC"/>
+                        </a:rPr>
+                        <a:t>双舵船额外收益；已有商用产品</a:t>
+                      </a:r>
+                    </a:p>
+                  </a:txBody>
+                  <a:tcPr marL="54864" marR="54864" marT="27432" marB="27432" anchor="ctr"/>
+                </a:tc>
+                <a:tc>
+                  <a:txBody>
+                    <a:bodyPr/>
+                    <a:lstStyle/>
+                    <a:p>
+                      <a:pPr>
+                        <a:lnSpc>
+                          <a:spcPct val="105000"/>
+                        </a:lnSpc>
+                      </a:pPr>
+                      <a:r>
+                        <a:rPr sz="1200" b="0">
+                          <a:solidFill>
+                            <a:srgbClr val="1B2A4A"/>
+                          </a:solidFill>
+                          <a:latin typeface="Noto Sans CJK SC"/>
+                        </a:rPr>
+                        <a:t>仅适用双舵船；厂商数据待第三方复核</a:t>
                       </a:r>
                     </a:p>
                   </a:txBody>
@@ -7014,49 +6969,7 @@
       </p:graphicFrame>
       <p:sp>
         <p:nvSpPr>
-          <p:cNvPr id="6" name="TextBox 5"/>
-          <p:cNvSpPr txBox="1"/>
-          <p:nvPr/>
-        </p:nvSpPr>
-        <p:spPr>
-          <a:xfrm>
-            <a:off x="457200" y="5897880"/>
-            <a:ext cx="11338560" cy="731520"/>
-          </a:xfrm>
-          <a:prstGeom prst="rect">
-            <a:avLst/>
-          </a:prstGeom>
-          <a:noFill/>
-        </p:spPr>
-        <p:txBody>
-          <a:bodyPr wrap="square" anchor="t">
-            <a:spAutoFit/>
-          </a:bodyPr>
-          <a:lstStyle/>
-          <a:p>
-            <a:pPr algn="l">
-              <a:lnSpc>
-                <a:spcPct val="115000"/>
-              </a:lnSpc>
-              <a:spcAft>
-                <a:spcPts val="600"/>
-              </a:spcAft>
-            </a:pPr>
-            <a:r>
-              <a:rPr sz="1300" b="0">
-                <a:solidFill>
-                  <a:srgbClr val="666666"/>
-                </a:solidFill>
-                <a:latin typeface="Noto Sans CJK SC"/>
-              </a:rPr>
-              <a:t>Anschütz 补充：自适应 ECO 模式平均减少舵动作约 25%（多年运营数据分析），案例折算节油约 4%。</a:t>
-            </a:r>
-          </a:p>
-        </p:txBody>
-      </p:sp>
-      <p:sp>
-        <p:nvSpPr>
-          <p:cNvPr id="7" name="TextBox 6"/>
+          <p:cNvPr id="5" name="TextBox 4"/>
           <p:cNvSpPr txBox="1"/>
           <p:nvPr/>
         </p:nvSpPr>
@@ -7091,14 +7004,14 @@
                 </a:solidFill>
                 <a:latin typeface="Noto Sans CJK SC"/>
               </a:rPr>
-              <a:t>15 / 19</a:t>
-            </a:r>
-          </a:p>
-        </p:txBody>
-      </p:sp>
-      <p:sp>
-        <p:nvSpPr>
-          <p:cNvPr id="8" name="TextBox 7"/>
+              <a:t>15 / 21</a:t>
+            </a:r>
+          </a:p>
+        </p:txBody>
+      </p:sp>
+      <p:sp>
+        <p:nvSpPr>
+          <p:cNvPr id="6" name="TextBox 5"/>
           <p:cNvSpPr txBox="1"/>
           <p:nvPr/>
         </p:nvSpPr>
@@ -7133,7 +7046,7 @@
                 </a:solidFill>
                 <a:latin typeface="Noto Sans CJK SC"/>
               </a:rPr>
-              <a:t>来源：https://www.rivieramm.com/news-content-hub/news-content-hub/yara-marines-fuelopt-demonstrates-significant-fuel-savings-75433 ｜ https://www.napa.fi/news/napa-norsepower-sumitomo-study/</a:t>
+              <a:t>来源：https://www.sciopen.com/article/10.19693/j.issn.1673-3185.03104 ｜ https://ww2.eagle.org/content/dam/eagle/advisories-and-debriefs/ABS_Energy_Efficiency_Advisory.pdf</a:t>
             </a:r>
           </a:p>
         </p:txBody>
@@ -7236,7 +7149,7 @@
                 </a:solidFill>
                 <a:latin typeface="Noto Sans CJK SC"/>
               </a:rPr>
-              <a:t>技术趋势判断</a:t>
+              <a:t>工业部署案例（一）：第三方实测集中在 3–10%</a:t>
             </a:r>
           </a:p>
         </p:txBody>
@@ -7278,21 +7191,45 @@
                 </a:solidFill>
                 <a:latin typeface="Noto Sans CJK SC"/>
               </a:rPr>
-              <a:t>基于两轮来源核对的四条判断</a:t>
-            </a:r>
-          </a:p>
-        </p:txBody>
-      </p:sp>
-      <p:sp>
-        <p:nvSpPr>
-          <p:cNvPr id="5" name="TextBox 4"/>
+              <a:t>厂商宣称值普遍高于实测，引用以船级社/试航数据为准</a:t>
+            </a:r>
+          </a:p>
+        </p:txBody>
+      </p:sp>
+      <p:pic>
+        <p:nvPicPr>
+          <p:cNvPr id="5" name="Picture 4" descr="fig5_deploy_cases.png"/>
+          <p:cNvPicPr>
+            <a:picLocks noChangeAspect="1"/>
+          </p:cNvPicPr>
+          <p:nvPr/>
+        </p:nvPicPr>
+        <p:blipFill>
+          <a:blip r:embed="rId2"/>
+          <a:stretch>
+            <a:fillRect/>
+          </a:stretch>
+        </p:blipFill>
+        <p:spPr>
+          <a:xfrm>
+            <a:off x="365760" y="2125066"/>
+            <a:ext cx="6949440" cy="3613708"/>
+          </a:xfrm>
+          <a:prstGeom prst="rect">
+            <a:avLst/>
+          </a:prstGeom>
+        </p:spPr>
+      </p:pic>
+      <p:sp>
+        <p:nvSpPr>
+          <p:cNvPr id="6" name="TextBox 5"/>
           <p:cNvSpPr txBox="1"/>
           <p:nvPr/>
         </p:nvSpPr>
         <p:spPr>
           <a:xfrm>
-            <a:off x="731520" y="1645920"/>
-            <a:ext cx="10789920" cy="4937760"/>
+            <a:off x="7498079" y="1554480"/>
+            <a:ext cx="4480560" cy="5120640"/>
           </a:xfrm>
           <a:prstGeom prst="rect">
             <a:avLst/>
@@ -7314,13 +7251,13 @@
               </a:spcAft>
             </a:pPr>
             <a:r>
-              <a:rPr sz="1600" b="1">
+              <a:rPr sz="1400" b="1">
                 <a:solidFill>
                   <a:srgbClr val="1F77B4"/>
                 </a:solidFill>
                 <a:latin typeface="Noto Sans CJK SC"/>
               </a:rPr>
-              <a:t>▪ ① 节能大头在决策层，控制层价值在「少损耗」</a:t>
+              <a:t>▪ 规模化部署</a:t>
             </a:r>
           </a:p>
           <a:p>
@@ -7333,13 +7270,13 @@
               </a:spcAft>
             </a:pPr>
             <a:r>
-              <a:rPr sz="1450" b="0">
+              <a:rPr sz="1250" b="0">
                 <a:solidFill>
                   <a:srgbClr val="1B2A4A"/>
                 </a:solidFill>
                 <a:latin typeface="Noto Sans CJK SC"/>
               </a:rPr>
-              <a:t>    – 自动舵贡献 0.1–1.0%（IMO 口径），但 7×24 在线、几乎零边际成本，兼降舵机磨损</a:t>
+              <a:t>    – ABB OCTOPUS：1000+ 船，回收期仅几个月</a:t>
             </a:r>
           </a:p>
           <a:p>
@@ -7348,17 +7285,55 @@
                 <a:spcPct val="115000"/>
               </a:lnSpc>
               <a:spcAft>
+                <a:spcPts val="400"/>
+              </a:spcAft>
+            </a:pPr>
+            <a:r>
+              <a:rPr sz="1250" b="0">
+                <a:solidFill>
+                  <a:srgbClr val="1B2A4A"/>
+                </a:solidFill>
+                <a:latin typeface="Noto Sans CJK SC"/>
+              </a:rPr>
+              <a:t>    – DeepSea：EPS 全船队 300 艘，油耗预报误差 0.8%</a:t>
+            </a:r>
+          </a:p>
+          <a:p>
+            <a:pPr algn="l">
+              <a:lnSpc>
+                <a:spcPct val="115000"/>
+              </a:lnSpc>
+              <a:spcAft>
+                <a:spcPts val="400"/>
+              </a:spcAft>
+            </a:pPr>
+            <a:r>
+              <a:rPr sz="1250" b="0">
+                <a:solidFill>
+                  <a:srgbClr val="1B2A4A"/>
+                </a:solidFill>
+                <a:latin typeface="Noto Sans CJK SC"/>
+              </a:rPr>
+              <a:t>    – Orca AI：Seaspan 267+ 船，单船年省约 $10 万</a:t>
+            </a:r>
+          </a:p>
+          <a:p>
+            <a:pPr algn="l">
+              <a:lnSpc>
+                <a:spcPct val="115000"/>
+              </a:lnSpc>
+              <a:spcAft>
                 <a:spcPts val="800"/>
               </a:spcAft>
             </a:pPr>
             <a:r>
-              <a:rPr sz="1600" b="1">
-                <a:solidFill>
-                  <a:srgbClr val="1F77B4"/>
-                </a:solidFill>
-                <a:latin typeface="Noto Sans CJK SC"/>
-              </a:rPr>
-              <a:t>▪ ② MPC 可行域正在打开，瓶颈不是算力</a:t>
+              <a:rPr sz="1400" b="1">
+                <a:solidFill>
+                  <a:srgbClr val="2CA02C"/>
+                </a:solidFill>
+                <a:latin typeface="Noto Sans CJK SC"/>
+              </a:rPr>
+              <a:t>▪ 控制层现状</a:t>
             </a:r>
           </a:p>
           <a:p>
@@ -7371,13 +7346,13 @@
               </a:spcAft>
             </a:pPr>
             <a:r>
-              <a:rPr sz="1450" b="0">
+              <a:rPr sz="1250" b="0">
                 <a:solidFill>
                   <a:srgbClr val="1B2A4A"/>
                 </a:solidFill>
                 <a:latin typeface="Noto Sans CJK SC"/>
               </a:rPr>
-              <a:t>    – 嵌入式求解器毫秒级（7 ms @ 20 Hz）；真正门槛是模型辨识与整定自动化</a:t>
+              <a:t>    – 节能自动舵 = 自适应+海浪滤波（Anschütz ECO）</a:t>
             </a:r>
           </a:p>
           <a:p>
@@ -7386,17 +7361,17 @@
                 <a:spcPct val="115000"/>
               </a:lnSpc>
               <a:spcAft>
-                <a:spcPts val="800"/>
-              </a:spcAft>
-            </a:pPr>
-            <a:r>
-              <a:rPr sz="1600" b="1">
-                <a:solidFill>
-                  <a:srgbClr val="1F77B4"/>
-                </a:solidFill>
-                <a:latin typeface="Noto Sans CJK SC"/>
-              </a:rPr>
-              <a:t>▪ ③ 数据驱动自学习模型成为商用标配</a:t>
+                <a:spcPts val="400"/>
+              </a:spcAft>
+            </a:pPr>
+            <a:r>
+              <a:rPr sz="1250" b="0">
+                <a:solidFill>
+                  <a:srgbClr val="1B2A4A"/>
+                </a:solidFill>
+                <a:latin typeface="Noto Sans CJK SC"/>
+              </a:rPr>
+              <a:t>    – 无公开的 MPC 实船自动舵部署案例</a:t>
             </a:r>
           </a:p>
           <a:p>
@@ -7409,58 +7384,20 @@
               </a:spcAft>
             </a:pPr>
             <a:r>
-              <a:rPr sz="1450" b="0">
+              <a:rPr sz="1250" b="0">
                 <a:solidFill>
                   <a:srgbClr val="1B2A4A"/>
                 </a:solidFill>
                 <a:latin typeface="Noto Sans CJK SC"/>
               </a:rPr>
-              <a:t>    – ClassNK-NAPA 油耗预测精度 99.6%；DeepSea 周油耗预报误差 0.8%；纯机理模型路线已少见</a:t>
-            </a:r>
-          </a:p>
-          <a:p>
-            <a:pPr algn="l">
-              <a:lnSpc>
-                <a:spcPct val="115000"/>
-              </a:lnSpc>
-              <a:spcAft>
-                <a:spcPts val="800"/>
-              </a:spcAft>
-            </a:pPr>
-            <a:r>
-              <a:rPr sz="1600" b="1">
-                <a:solidFill>
-                  <a:srgbClr val="1F77B4"/>
-                </a:solidFill>
-                <a:latin typeface="Noto Sans CJK SC"/>
-              </a:rPr>
-              <a:t>▪ ④ 分层协同：决策层优化与控制层执行正在打通</a:t>
-            </a:r>
-          </a:p>
-          <a:p>
-            <a:pPr algn="l">
-              <a:lnSpc>
-                <a:spcPct val="115000"/>
-              </a:lnSpc>
-              <a:spcAft>
-                <a:spcPts val="400"/>
-              </a:spcAft>
-            </a:pPr>
-            <a:r>
-              <a:rPr sz="1450" b="0">
-                <a:solidFill>
-                  <a:srgbClr val="1B2A4A"/>
-                </a:solidFill>
-                <a:latin typeface="Noto Sans CJK SC"/>
-              </a:rPr>
-              <a:t>    – MPC 代价函数可直接计入操舵能量项；自动舵可向上输出舵机磨损/能耗统计，形成闭环</a:t>
-            </a:r>
-          </a:p>
-        </p:txBody>
-      </p:sp>
-      <p:sp>
-        <p:nvSpPr>
-          <p:cNvPr id="6" name="TextBox 5"/>
+              <a:t>    – 印证：门槛不在算力，在模型获取与整定</a:t>
+            </a:r>
+          </a:p>
+        </p:txBody>
+      </p:sp>
+      <p:sp>
+        <p:nvSpPr>
+          <p:cNvPr id="7" name="TextBox 6"/>
           <p:cNvSpPr txBox="1"/>
           <p:nvPr/>
         </p:nvSpPr>
@@ -7495,14 +7432,14 @@
                 </a:solidFill>
                 <a:latin typeface="Noto Sans CJK SC"/>
               </a:rPr>
-              <a:t>16 / 19</a:t>
-            </a:r>
-          </a:p>
-        </p:txBody>
-      </p:sp>
-      <p:sp>
-        <p:nvSpPr>
-          <p:cNvPr id="7" name="TextBox 6"/>
+              <a:t>16 / 21</a:t>
+            </a:r>
+          </a:p>
+        </p:txBody>
+      </p:sp>
+      <p:sp>
+        <p:nvSpPr>
+          <p:cNvPr id="8" name="TextBox 7"/>
           <p:cNvSpPr txBox="1"/>
           <p:nvPr/>
         </p:nvSpPr>
@@ -7537,7 +7474,7 @@
                 </a:solidFill>
                 <a:latin typeface="Noto Sans CJK SC"/>
               </a:rPr>
-              <a:t>来源：https://www.classnk.or.jp/hp/en/hp_pressrelease.aspx?id=834&amp;layout=3 ｜ https://vesselperformance.info/2024/11/15/eastern-pacific-uses-deepsea-to-improve-fuel-consumption-forecasts-to-within-1-per-cent/</a:t>
+              <a:t>来源：https://library.e.abb.com/public/b92c10c2533647b08601322d2f9ffef4/Detailed%20Description_ABB%20Ability%20Marine%20Advisory%20Suite%20-%20OCTOPUS.pdf ｜ https://www.hellenicshippingnews.com/nabtesco-combines-telegraph-agent-and-cassandra-to-deliver-unmatched-fuel-optimisation-for-eastern-car-liner-co/</a:t>
             </a:r>
           </a:p>
         </p:txBody>
@@ -7640,14 +7577,56 @@
                 </a:solidFill>
                 <a:latin typeface="Noto Sans CJK SC"/>
               </a:rPr>
-              <a:t>对本项目（auto_rudder）的落地建议</a:t>
+              <a:t>工业部署案例（二）：实测细节与口径</a:t>
+            </a:r>
+          </a:p>
+        </p:txBody>
+      </p:sp>
+      <p:sp>
+        <p:nvSpPr>
+          <p:cNvPr id="4" name="TextBox 3"/>
+          <p:cNvSpPr txBox="1"/>
+          <p:nvPr/>
+        </p:nvSpPr>
+        <p:spPr>
+          <a:xfrm>
+            <a:off x="475488" y="914400"/>
+            <a:ext cx="11247120" cy="457200"/>
+          </a:xfrm>
+          <a:prstGeom prst="rect">
+            <a:avLst/>
+          </a:prstGeom>
+          <a:noFill/>
+        </p:spPr>
+        <p:txBody>
+          <a:bodyPr wrap="square" anchor="t">
+            <a:spAutoFit/>
+          </a:bodyPr>
+          <a:lstStyle/>
+          <a:p>
+            <a:pPr algn="l">
+              <a:lnSpc>
+                <a:spcPct val="115000"/>
+              </a:lnSpc>
+              <a:spcAft>
+                <a:spcPts val="600"/>
+              </a:spcAft>
+            </a:pPr>
+            <a:r>
+              <a:rPr sz="1400" b="0">
+                <a:solidFill>
+                  <a:srgbClr val="666666"/>
+                </a:solidFill>
+                <a:latin typeface="Noto Sans CJK SC"/>
+              </a:rPr>
+              <a:t>注意：各案例节油路径不同，不可直接横向比较</a:t>
             </a:r>
           </a:p>
         </p:txBody>
       </p:sp>
       <p:graphicFrame>
         <p:nvGraphicFramePr>
-          <p:cNvPr id="4" name="Table 3"/>
+          <p:cNvPr id="5" name="Table 4"/>
           <p:cNvGraphicFramePr>
             <a:graphicFrameLocks noGrp="1"/>
           </p:cNvGraphicFramePr>
@@ -7655,7 +7634,7 @@
         </p:nvGraphicFramePr>
         <p:xfrm>
           <a:off x="457200" y="1463040"/>
-          <a:ext cx="11338559" cy="3840480"/>
+          <a:ext cx="11338558" cy="4206240"/>
         </p:xfrm>
         <a:graphic>
           <a:graphicData uri="http://schemas.openxmlformats.org/drawingml/2006/table">
@@ -7664,29 +7643,29 @@
                 <a:tableStyleId>{5C22544A-7EE6-4342-B048-85BDC9FD1C3A}</a:tableStyleId>
               </a:tblPr>
               <a:tblGrid>
-                <a:gridCol w="1619794"/>
-                <a:gridCol w="2519680"/>
-                <a:gridCol w="7199085"/>
+                <a:gridCol w="2538483"/>
+                <a:gridCol w="6092360"/>
+                <a:gridCol w="2707715"/>
               </a:tblGrid>
-              <a:tr h="960120">
-                <a:tc>
-                  <a:txBody>
-                    <a:bodyPr/>
-                    <a:lstStyle/>
-                    <a:p>
-                      <a:pPr>
-                        <a:lnSpc>
-                          <a:spcPct val="105000"/>
-                        </a:lnSpc>
-                      </a:pPr>
-                      <a:r>
-                        <a:rPr sz="1350" b="1">
+              <a:tr h="701040">
+                <a:tc>
+                  <a:txBody>
+                    <a:bodyPr/>
+                    <a:lstStyle/>
+                    <a:p>
+                      <a:pPr>
+                        <a:lnSpc>
+                          <a:spcPct val="105000"/>
+                        </a:lnSpc>
+                      </a:pPr>
+                      <a:r>
+                        <a:rPr sz="1200" b="1">
                           <a:solidFill>
                             <a:srgbClr val="FFFFFF"/>
                           </a:solidFill>
                           <a:latin typeface="Noto Sans CJK SC"/>
                         </a:rPr>
-                        <a:t>阶段</a:t>
+                        <a:t>案例</a:t>
                       </a:r>
                     </a:p>
                   </a:txBody>
@@ -7707,13 +7686,13 @@
                         </a:lnSpc>
                       </a:pPr>
                       <a:r>
-                        <a:rPr sz="1350" b="1">
+                        <a:rPr sz="1200" b="1">
                           <a:solidFill>
                             <a:srgbClr val="FFFFFF"/>
                           </a:solidFill>
                           <a:latin typeface="Noto Sans CJK SC"/>
                         </a:rPr>
-                        <a:t>目标</a:t>
+                        <a:t>实测细节（已核对）</a:t>
                       </a:r>
                     </a:p>
                   </a:txBody>
@@ -7734,13 +7713,13 @@
                         </a:lnSpc>
                       </a:pPr>
                       <a:r>
-                        <a:rPr sz="1350" b="1">
+                        <a:rPr sz="1200" b="1">
                           <a:solidFill>
                             <a:srgbClr val="FFFFFF"/>
                           </a:solidFill>
                           <a:latin typeface="Noto Sans CJK SC"/>
                         </a:rPr>
-                        <a:t>关键动作</a:t>
+                        <a:t>节油路径</a:t>
                       </a:r>
                     </a:p>
                   </a:txBody>
@@ -7751,41 +7730,41 @@
                   </a:tcPr>
                 </a:tc>
               </a:tr>
-              <a:tr h="960120">
-                <a:tc>
-                  <a:txBody>
-                    <a:bodyPr/>
-                    <a:lstStyle/>
-                    <a:p>
-                      <a:pPr>
-                        <a:lnSpc>
-                          <a:spcPct val="105000"/>
-                        </a:lnSpc>
-                      </a:pPr>
-                      <a:r>
-                        <a:rPr sz="1300" b="0">
-                          <a:solidFill>
-                            <a:srgbClr val="1B2A4A"/>
-                          </a:solidFill>
-                          <a:latin typeface="Noto Sans CJK SC"/>
-                        </a:rPr>
-                        <a:t>短期</a:t>
-                      </a:r>
-                    </a:p>
-                    <a:p>
-                      <a:pPr>
-                        <a:lnSpc>
-                          <a:spcPct val="105000"/>
-                        </a:lnSpc>
-                      </a:pPr>
-                      <a:r>
-                        <a:rPr sz="1300" b="0">
-                          <a:solidFill>
-                            <a:srgbClr val="1B2A4A"/>
-                          </a:solidFill>
-                          <a:latin typeface="Noto Sans CJK SC"/>
-                        </a:rPr>
-                        <a:t>1–3 个月</a:t>
+              <a:tr h="701040">
+                <a:tc>
+                  <a:txBody>
+                    <a:bodyPr/>
+                    <a:lstStyle/>
+                    <a:p>
+                      <a:pPr>
+                        <a:lnSpc>
+                          <a:spcPct val="105000"/>
+                        </a:lnSpc>
+                      </a:pPr>
+                      <a:r>
+                        <a:rPr sz="1150" b="0">
+                          <a:solidFill>
+                            <a:srgbClr val="1B2A4A"/>
+                          </a:solidFill>
+                          <a:latin typeface="Noto Sans CJK SC"/>
+                        </a:rPr>
+                        <a:t>Wärtsilä/Eniram</a:t>
+                      </a:r>
+                    </a:p>
+                    <a:p>
+                      <a:pPr>
+                        <a:lnSpc>
+                          <a:spcPct val="105000"/>
+                        </a:lnSpc>
+                      </a:pPr>
+                      <a:r>
+                        <a:rPr sz="1150" b="0">
+                          <a:solidFill>
+                            <a:srgbClr val="1B2A4A"/>
+                          </a:solidFill>
+                          <a:latin typeface="Noto Sans CJK SC"/>
+                        </a:rPr>
+                        <a:t>VLCC 案例</a:t>
                       </a:r>
                     </a:p>
                   </a:txBody>
@@ -7802,13 +7781,29 @@
                         </a:lnSpc>
                       </a:pPr>
                       <a:r>
-                        <a:rPr sz="1300" b="0">
-                          <a:solidFill>
-                            <a:srgbClr val="1B2A4A"/>
-                          </a:solidFill>
-                          <a:latin typeface="Noto Sans CJK SC"/>
-                        </a:rPr>
-                        <a:t>PD 基线交付</a:t>
+                        <a:rPr sz="1150" b="0">
+                          <a:solidFill>
+                            <a:srgbClr val="1B2A4A"/>
+                          </a:solidFill>
+                          <a:latin typeface="Noto Sans CJK SC"/>
+                        </a:rPr>
+                        <a:t>320,000+ DWT、450 天数据：年燃油成本 −2.6%</a:t>
+                      </a:r>
+                    </a:p>
+                    <a:p>
+                      <a:pPr>
+                        <a:lnSpc>
+                          <a:spcPct val="105000"/>
+                        </a:lnSpc>
+                      </a:pPr>
+                      <a:r>
+                        <a:rPr sz="1150" b="0">
+                          <a:solidFill>
+                            <a:srgbClr val="1B2A4A"/>
+                          </a:solidFill>
+                          <a:latin typeface="Noto Sans CJK SC"/>
+                        </a:rPr>
+                        <a:t>（≈48.2 万美元 / 730 吨燃油）</a:t>
                       </a:r>
                     </a:p>
                   </a:txBody>
@@ -7825,70 +7820,54 @@
                         </a:lnSpc>
                       </a:pPr>
                       <a:r>
-                        <a:rPr sz="1300" b="0">
-                          <a:solidFill>
-                            <a:srgbClr val="1B2A4A"/>
-                          </a:solidFill>
-                          <a:latin typeface="Noto Sans CJK SC"/>
-                        </a:rPr>
-                        <a:t>Nomoto 极点配置整定（Kp=ωn²T/K，ζ≈1）；</a:t>
-                      </a:r>
-                    </a:p>
-                    <a:p>
-                      <a:pPr>
-                        <a:lnSpc>
-                          <a:spcPct val="105000"/>
-                        </a:lnSpc>
-                      </a:pPr>
-                      <a:r>
-                        <a:rPr sz="1300" b="0">
-                          <a:solidFill>
-                            <a:srgbClr val="1B2A4A"/>
-                          </a:solidFill>
-                          <a:latin typeface="Noto Sans CJK SC"/>
-                        </a:rPr>
-                        <a:t>海浪滤波+死区抑制无效操舵（对标 IMO 0.1–1.0% 收益）</a:t>
+                        <a:rPr sz="1150" b="0">
+                          <a:solidFill>
+                            <a:srgbClr val="1B2A4A"/>
+                          </a:solidFill>
+                          <a:latin typeface="Noto Sans CJK SC"/>
+                        </a:rPr>
+                        <a:t>纵倾优化 + 污底评估</a:t>
                       </a:r>
                     </a:p>
                   </a:txBody>
                   <a:tcPr marL="54864" marR="54864" marT="27432" marB="27432" anchor="ctr"/>
                 </a:tc>
               </a:tr>
-              <a:tr h="960120">
-                <a:tc>
-                  <a:txBody>
-                    <a:bodyPr/>
-                    <a:lstStyle/>
-                    <a:p>
-                      <a:pPr>
-                        <a:lnSpc>
-                          <a:spcPct val="105000"/>
-                        </a:lnSpc>
-                      </a:pPr>
-                      <a:r>
-                        <a:rPr sz="1300" b="0">
-                          <a:solidFill>
-                            <a:srgbClr val="1B2A4A"/>
-                          </a:solidFill>
-                          <a:latin typeface="Noto Sans CJK SC"/>
-                        </a:rPr>
-                        <a:t>中期</a:t>
-                      </a:r>
-                    </a:p>
-                    <a:p>
-                      <a:pPr>
-                        <a:lnSpc>
-                          <a:spcPct val="105000"/>
-                        </a:lnSpc>
-                      </a:pPr>
-                      <a:r>
-                        <a:rPr sz="1300" b="0">
-                          <a:solidFill>
-                            <a:srgbClr val="1B2A4A"/>
-                          </a:solidFill>
-                          <a:latin typeface="Noto Sans CJK SC"/>
-                        </a:rPr>
-                        <a:t>3–6 个月</a:t>
+              <a:tr h="701040">
+                <a:tc>
+                  <a:txBody>
+                    <a:bodyPr/>
+                    <a:lstStyle/>
+                    <a:p>
+                      <a:pPr>
+                        <a:lnSpc>
+                          <a:spcPct val="105000"/>
+                        </a:lnSpc>
+                      </a:pPr>
+                      <a:r>
+                        <a:rPr sz="1150" b="0">
+                          <a:solidFill>
+                            <a:srgbClr val="1B2A4A"/>
+                          </a:solidFill>
+                          <a:latin typeface="Noto Sans CJK SC"/>
+                        </a:rPr>
+                        <a:t>Yara FuelOpt</a:t>
+                      </a:r>
+                    </a:p>
+                    <a:p>
+                      <a:pPr>
+                        <a:lnSpc>
+                          <a:spcPct val="105000"/>
+                        </a:lnSpc>
+                      </a:pPr>
+                      <a:r>
+                        <a:rPr sz="1150" b="0">
+                          <a:solidFill>
+                            <a:srgbClr val="1B2A4A"/>
+                          </a:solidFill>
+                          <a:latin typeface="Noto Sans CJK SC"/>
+                        </a:rPr>
+                        <a:t>（独立复核）</a:t>
                       </a:r>
                     </a:p>
                   </a:txBody>
@@ -7909,13 +7888,29 @@
                         </a:lnSpc>
                       </a:pPr>
                       <a:r>
-                        <a:rPr sz="1300" b="0">
-                          <a:solidFill>
-                            <a:srgbClr val="1B2A4A"/>
-                          </a:solidFill>
-                          <a:latin typeface="Noto Sans CJK SC"/>
-                        </a:rPr>
-                        <a:t>MPC 增强层开发</a:t>
+                        <a:rPr sz="1150" b="0">
+                          <a:solidFill>
+                            <a:srgbClr val="1B2A4A"/>
+                          </a:solidFill>
+                          <a:latin typeface="Noto Sans CJK SC"/>
+                        </a:rPr>
+                        <a:t>NAPA 独立分析确认 10–18%：</a:t>
+                      </a:r>
+                    </a:p>
+                    <a:p>
+                      <a:pPr>
+                        <a:lnSpc>
+                          <a:spcPct val="105000"/>
+                        </a:lnSpc>
+                      </a:pPr>
+                      <a:r>
+                        <a:rPr sz="1150" b="0">
+                          <a:solidFill>
+                            <a:srgbClr val="1B2A4A"/>
+                          </a:solidFill>
+                          <a:latin typeface="Noto Sans CJK SC"/>
+                        </a:rPr>
+                        <a:t>Sten Bothnia 12 个月 17.9%、Ekfjord 24 个月 10.3%</a:t>
                       </a:r>
                     </a:p>
                   </a:txBody>
@@ -7936,29 +7931,13 @@
                         </a:lnSpc>
                       </a:pPr>
                       <a:r>
-                        <a:rPr sz="1300" b="0">
-                          <a:solidFill>
-                            <a:srgbClr val="1B2A4A"/>
-                          </a:solidFill>
-                          <a:latin typeface="Noto Sans CJK SC"/>
-                        </a:rPr>
-                        <a:t>攻克模型在线辨识与权重整定工具化；</a:t>
-                      </a:r>
-                    </a:p>
-                    <a:p>
-                      <a:pPr>
-                        <a:lnSpc>
-                          <a:spcPct val="105000"/>
-                        </a:lnSpc>
-                      </a:pPr>
-                      <a:r>
-                        <a:rPr sz="1300" b="0">
-                          <a:solidFill>
-                            <a:srgbClr val="1B2A4A"/>
-                          </a:solidFill>
-                          <a:latin typeface="Noto Sans CJK SC"/>
-                        </a:rPr>
-                        <a:t>嵌入式求解器选型（acados/OSQP）；与 PD 基线 A/B 对比</a:t>
+                        <a:rPr sz="1150" b="0">
+                          <a:solidFill>
+                            <a:srgbClr val="1B2A4A"/>
+                          </a:solidFill>
+                          <a:latin typeface="Noto Sans CJK SC"/>
+                        </a:rPr>
+                        <a:t>推进功率闭环优化</a:t>
                       </a:r>
                     </a:p>
                   </a:txBody>
@@ -7969,41 +7948,41 @@
                   </a:tcPr>
                 </a:tc>
               </a:tr>
-              <a:tr h="960120">
-                <a:tc>
-                  <a:txBody>
-                    <a:bodyPr/>
-                    <a:lstStyle/>
-                    <a:p>
-                      <a:pPr>
-                        <a:lnSpc>
-                          <a:spcPct val="105000"/>
-                        </a:lnSpc>
-                      </a:pPr>
-                      <a:r>
-                        <a:rPr sz="1300" b="0">
-                          <a:solidFill>
-                            <a:srgbClr val="1B2A4A"/>
-                          </a:solidFill>
-                          <a:latin typeface="Noto Sans CJK SC"/>
-                        </a:rPr>
-                        <a:t>长期</a:t>
-                      </a:r>
-                    </a:p>
-                    <a:p>
-                      <a:pPr>
-                        <a:lnSpc>
-                          <a:spcPct val="105000"/>
-                        </a:lnSpc>
-                      </a:pPr>
-                      <a:r>
-                        <a:rPr sz="1300" b="0">
-                          <a:solidFill>
-                            <a:srgbClr val="1B2A4A"/>
-                          </a:solidFill>
-                          <a:latin typeface="Noto Sans CJK SC"/>
-                        </a:rPr>
-                        <a:t>6–12 个月</a:t>
+              <a:tr h="701040">
+                <a:tc>
+                  <a:txBody>
+                    <a:bodyPr/>
+                    <a:lstStyle/>
+                    <a:p>
+                      <a:pPr>
+                        <a:lnSpc>
+                          <a:spcPct val="105000"/>
+                        </a:lnSpc>
+                      </a:pPr>
+                      <a:r>
+                        <a:rPr sz="1150" b="0">
+                          <a:solidFill>
+                            <a:srgbClr val="1B2A4A"/>
+                          </a:solidFill>
+                          <a:latin typeface="Noto Sans CJK SC"/>
+                        </a:rPr>
+                        <a:t>NAPA × Norsepower</a:t>
+                      </a:r>
+                    </a:p>
+                    <a:p>
+                      <a:pPr>
+                        <a:lnSpc>
+                          <a:spcPct val="105000"/>
+                        </a:lnSpc>
+                      </a:pPr>
+                      <a:r>
+                        <a:rPr sz="1150" b="0">
+                          <a:solidFill>
+                            <a:srgbClr val="1B2A4A"/>
+                          </a:solidFill>
+                          <a:latin typeface="Noto Sans CJK SC"/>
+                        </a:rPr>
+                        <a:t>× SHI-ME</a:t>
                       </a:r>
                     </a:p>
                   </a:txBody>
@@ -8020,13 +7999,29 @@
                         </a:lnSpc>
                       </a:pPr>
                       <a:r>
-                        <a:rPr sz="1300" b="0">
-                          <a:solidFill>
-                            <a:srgbClr val="1B2A4A"/>
-                          </a:solidFill>
-                          <a:latin typeface="Noto Sans CJK SC"/>
-                        </a:rPr>
-                        <a:t>分层节能架构</a:t>
+                        <a:rPr sz="1150" b="0">
+                          <a:solidFill>
+                            <a:srgbClr val="1B2A4A"/>
+                          </a:solidFill>
+                          <a:latin typeface="Noto Sans CJK SC"/>
+                        </a:rPr>
+                        <a:t>转筒帆+航程优化六条航线平均 CO2 −19%</a:t>
+                      </a:r>
+                    </a:p>
+                    <a:p>
+                      <a:pPr>
+                        <a:lnSpc>
+                          <a:spcPct val="105000"/>
+                        </a:lnSpc>
+                      </a:pPr>
+                      <a:r>
+                        <a:rPr sz="1150" b="0">
+                          <a:solidFill>
+                            <a:srgbClr val="1B2A4A"/>
+                          </a:solidFill>
+                          <a:latin typeface="Noto Sans CJK SC"/>
+                        </a:rPr>
+                        <a:t>（纽约–阿姆斯特丹线 28%，NAPA 贡献 10–12 个百分点）</a:t>
                       </a:r>
                     </a:p>
                   </a:txBody>
@@ -8043,29 +8038,231 @@
                         </a:lnSpc>
                       </a:pPr>
                       <a:r>
-                        <a:rPr sz="1300" b="0">
-                          <a:solidFill>
-                            <a:srgbClr val="1B2A4A"/>
-                          </a:solidFill>
-                          <a:latin typeface="Noto Sans CJK SC"/>
-                        </a:rPr>
-                        <a:t>MPC 代价函数计入操舵能量，对接航速/纵倾优化指令；</a:t>
-                      </a:r>
-                    </a:p>
-                    <a:p>
-                      <a:pPr>
-                        <a:lnSpc>
-                          <a:spcPct val="105000"/>
-                        </a:lnSpc>
-                      </a:pPr>
-                      <a:r>
-                        <a:rPr sz="1300" b="0">
-                          <a:solidFill>
-                            <a:srgbClr val="1B2A4A"/>
-                          </a:solidFill>
-                          <a:latin typeface="Noto Sans CJK SC"/>
-                        </a:rPr>
-                        <a:t>输出舵机磨损/能耗统计；Lyapunov-based MPC 保稳定性</a:t>
+                        <a:rPr sz="1150" b="0">
+                          <a:solidFill>
+                            <a:srgbClr val="1B2A4A"/>
+                          </a:solidFill>
+                          <a:latin typeface="Noto Sans CJK SC"/>
+                        </a:rPr>
+                        <a:t>风助推 + 航程优化</a:t>
+                      </a:r>
+                    </a:p>
+                  </a:txBody>
+                  <a:tcPr marL="54864" marR="54864" marT="27432" marB="27432" anchor="ctr"/>
+                </a:tc>
+              </a:tr>
+              <a:tr h="701040">
+                <a:tc>
+                  <a:txBody>
+                    <a:bodyPr/>
+                    <a:lstStyle/>
+                    <a:p>
+                      <a:pPr>
+                        <a:lnSpc>
+                          <a:spcPct val="105000"/>
+                        </a:lnSpc>
+                      </a:pPr>
+                      <a:r>
+                        <a:rPr sz="1150" b="0">
+                          <a:solidFill>
+                            <a:srgbClr val="1B2A4A"/>
+                          </a:solidFill>
+                          <a:latin typeface="Noto Sans CJK SC"/>
+                        </a:rPr>
+                        <a:t>Orca AI</a:t>
+                      </a:r>
+                    </a:p>
+                    <a:p>
+                      <a:pPr>
+                        <a:lnSpc>
+                          <a:spcPct val="105000"/>
+                        </a:lnSpc>
+                      </a:pPr>
+                      <a:r>
+                        <a:rPr sz="1150" b="0">
+                          <a:solidFill>
+                            <a:srgbClr val="1B2A4A"/>
+                          </a:solidFill>
+                          <a:latin typeface="Noto Sans CJK SC"/>
+                        </a:rPr>
+                        <a:t>（Seaspan）</a:t>
+                      </a:r>
+                    </a:p>
+                  </a:txBody>
+                  <a:tcPr marL="54864" marR="54864" marT="27432" marB="27432" anchor="ctr">
+                    <a:solidFill>
+                      <a:srgbClr val="EEF3FA"/>
+                    </a:solidFill>
+                  </a:tcPr>
+                </a:tc>
+                <a:tc>
+                  <a:txBody>
+                    <a:bodyPr/>
+                    <a:lstStyle/>
+                    <a:p>
+                      <a:pPr>
+                        <a:lnSpc>
+                          <a:spcPct val="105000"/>
+                        </a:lnSpc>
+                      </a:pPr>
+                      <a:r>
+                        <a:rPr sz="1150" b="0">
+                          <a:solidFill>
+                            <a:srgbClr val="1B2A4A"/>
+                          </a:solidFill>
+                          <a:latin typeface="Noto Sans CJK SC"/>
+                        </a:rPr>
+                        <a:t>近距遭遇事件 −54%；2024 年合计减排约 19.5 万吨 CO2；</a:t>
+                      </a:r>
+                    </a:p>
+                    <a:p>
+                      <a:pPr>
+                        <a:lnSpc>
+                          <a:spcPct val="105000"/>
+                        </a:lnSpc>
+                      </a:pPr>
+                      <a:r>
+                        <a:rPr sz="1150" b="0">
+                          <a:solidFill>
+                            <a:srgbClr val="1B2A4A"/>
+                          </a:solidFill>
+                          <a:latin typeface="Noto Sans CJK SC"/>
+                        </a:rPr>
+                        <a:t>单船年省约 $10 万 / 减 500 t CO2</a:t>
+                      </a:r>
+                    </a:p>
+                  </a:txBody>
+                  <a:tcPr marL="54864" marR="54864" marT="27432" marB="27432" anchor="ctr">
+                    <a:solidFill>
+                      <a:srgbClr val="EEF3FA"/>
+                    </a:solidFill>
+                  </a:tcPr>
+                </a:tc>
+                <a:tc>
+                  <a:txBody>
+                    <a:bodyPr/>
+                    <a:lstStyle/>
+                    <a:p>
+                      <a:pPr>
+                        <a:lnSpc>
+                          <a:spcPct val="105000"/>
+                        </a:lnSpc>
+                      </a:pPr>
+                      <a:r>
+                        <a:rPr sz="1150" b="0">
+                          <a:solidFill>
+                            <a:srgbClr val="1B2A4A"/>
+                          </a:solidFill>
+                          <a:latin typeface="Noto Sans CJK SC"/>
+                        </a:rPr>
+                        <a:t>减少避碰机动与无谓变速</a:t>
+                      </a:r>
+                    </a:p>
+                  </a:txBody>
+                  <a:tcPr marL="54864" marR="54864" marT="27432" marB="27432" anchor="ctr">
+                    <a:solidFill>
+                      <a:srgbClr val="EEF3FA"/>
+                    </a:solidFill>
+                  </a:tcPr>
+                </a:tc>
+              </a:tr>
+              <a:tr h="701040">
+                <a:tc>
+                  <a:txBody>
+                    <a:bodyPr/>
+                    <a:lstStyle/>
+                    <a:p>
+                      <a:pPr>
+                        <a:lnSpc>
+                          <a:spcPct val="105000"/>
+                        </a:lnSpc>
+                      </a:pPr>
+                      <a:r>
+                        <a:rPr sz="1150" b="0">
+                          <a:solidFill>
+                            <a:srgbClr val="1B2A4A"/>
+                          </a:solidFill>
+                          <a:latin typeface="Noto Sans CJK SC"/>
+                        </a:rPr>
+                        <a:t>Kongsberg</a:t>
+                      </a:r>
+                    </a:p>
+                    <a:p>
+                      <a:pPr>
+                        <a:lnSpc>
+                          <a:spcPct val="105000"/>
+                        </a:lnSpc>
+                      </a:pPr>
+                      <a:r>
+                        <a:rPr sz="1150" b="0">
+                          <a:solidFill>
+                            <a:srgbClr val="1B2A4A"/>
+                          </a:solidFill>
+                          <a:latin typeface="Noto Sans CJK SC"/>
+                        </a:rPr>
+                        <a:t>EcoAdvisor</a:t>
+                      </a:r>
+                    </a:p>
+                  </a:txBody>
+                  <a:tcPr marL="54864" marR="54864" marT="27432" marB="27432" anchor="ctr"/>
+                </a:tc>
+                <a:tc>
+                  <a:txBody>
+                    <a:bodyPr/>
+                    <a:lstStyle/>
+                    <a:p>
+                      <a:pPr>
+                        <a:lnSpc>
+                          <a:spcPct val="105000"/>
+                        </a:lnSpc>
+                      </a:pPr>
+                      <a:r>
+                        <a:rPr sz="1150" b="0">
+                          <a:solidFill>
+                            <a:srgbClr val="1B2A4A"/>
+                          </a:solidFill>
+                          <a:latin typeface="Noto Sans CJK SC"/>
+                        </a:rPr>
+                        <a:t>DP 工况主机/推进器停机建议工具（DOF 试点）；</a:t>
+                      </a:r>
+                    </a:p>
+                    <a:p>
+                      <a:pPr>
+                        <a:lnSpc>
+                          <a:spcPct val="105000"/>
+                        </a:lnSpc>
+                      </a:pPr>
+                      <a:r>
+                        <a:rPr sz="1150" b="0">
+                          <a:solidFill>
+                            <a:srgbClr val="1B2A4A"/>
+                          </a:solidFill>
+                          <a:latin typeface="Noto Sans CJK SC"/>
+                        </a:rPr>
+                        <a:t>官方未公布定量节油数据（流传的 8–10% 无法证实，已弃用）</a:t>
+                      </a:r>
+                    </a:p>
+                  </a:txBody>
+                  <a:tcPr marL="54864" marR="54864" marT="27432" marB="27432" anchor="ctr"/>
+                </a:tc>
+                <a:tc>
+                  <a:txBody>
+                    <a:bodyPr/>
+                    <a:lstStyle/>
+                    <a:p>
+                      <a:pPr>
+                        <a:lnSpc>
+                          <a:spcPct val="105000"/>
+                        </a:lnSpc>
+                      </a:pPr>
+                      <a:r>
+                        <a:rPr sz="1150" b="0">
+                          <a:solidFill>
+                            <a:srgbClr val="1B2A4A"/>
+                          </a:solidFill>
+                          <a:latin typeface="Noto Sans CJK SC"/>
+                        </a:rPr>
+                        <a:t>动力定位能耗优化</a:t>
                       </a:r>
                     </a:p>
                   </a:txBody>
@@ -8078,14 +8275,14 @@
       </p:graphicFrame>
       <p:sp>
         <p:nvSpPr>
-          <p:cNvPr id="5" name="TextBox 4"/>
+          <p:cNvPr id="6" name="TextBox 5"/>
           <p:cNvSpPr txBox="1"/>
           <p:nvPr/>
         </p:nvSpPr>
         <p:spPr>
           <a:xfrm>
-            <a:off x="457200" y="5577840"/>
-            <a:ext cx="11338560" cy="914400"/>
+            <a:off x="457200" y="5897880"/>
+            <a:ext cx="11338560" cy="731520"/>
           </a:xfrm>
           <a:prstGeom prst="rect">
             <a:avLst/>
@@ -8107,39 +8304,20 @@
               </a:spcAft>
             </a:pPr>
             <a:r>
-              <a:rPr sz="1500" b="0">
-                <a:solidFill>
-                  <a:srgbClr val="1B2A4A"/>
-                </a:solidFill>
-                <a:latin typeface="Noto Sans CJK SC"/>
-              </a:rPr>
-              <a:t>核心逻辑：节能大头在决策层（气象航线 3–10%、减速航行主机口径可达 50%），控制层贡献 0.1–1% 但几乎零成本；</a:t>
-            </a:r>
-          </a:p>
-          <a:p>
-            <a:pPr algn="l">
-              <a:lnSpc>
-                <a:spcPct val="115000"/>
-              </a:lnSpc>
-              <a:spcAft>
-                <a:spcPts val="600"/>
-              </a:spcAft>
-            </a:pPr>
-            <a:r>
-              <a:rPr sz="1500" b="0">
-                <a:solidFill>
-                  <a:srgbClr val="1B2A4A"/>
-                </a:solidFill>
-                <a:latin typeface="Noto Sans CJK SC"/>
-              </a:rPr>
-              <a:t>先把 PD 整定与辨识流程工具化，再让 MPC 平滑接管性能增强。</a:t>
-            </a:r>
-          </a:p>
-        </p:txBody>
-      </p:sp>
-      <p:sp>
-        <p:nvSpPr>
-          <p:cNvPr id="6" name="TextBox 5"/>
+              <a:rPr sz="1300" b="0">
+                <a:solidFill>
+                  <a:srgbClr val="666666"/>
+                </a:solidFill>
+                <a:latin typeface="Noto Sans CJK SC"/>
+              </a:rPr>
+              <a:t>Anschütz 补充：自适应 ECO 模式平均减少舵动作约 25%（多年运营数据分析），案例折算节油约 4%。</a:t>
+            </a:r>
+          </a:p>
+        </p:txBody>
+      </p:sp>
+      <p:sp>
+        <p:nvSpPr>
+          <p:cNvPr id="7" name="TextBox 6"/>
           <p:cNvSpPr txBox="1"/>
           <p:nvPr/>
         </p:nvSpPr>
@@ -8174,14 +8352,14 @@
                 </a:solidFill>
                 <a:latin typeface="Noto Sans CJK SC"/>
               </a:rPr>
-              <a:t>17 / 19</a:t>
-            </a:r>
-          </a:p>
-        </p:txBody>
-      </p:sp>
-      <p:sp>
-        <p:nvSpPr>
-          <p:cNvPr id="7" name="TextBox 6"/>
+              <a:t>17 / 21</a:t>
+            </a:r>
+          </a:p>
+        </p:txBody>
+      </p:sp>
+      <p:sp>
+        <p:nvSpPr>
+          <p:cNvPr id="8" name="TextBox 7"/>
           <p:cNvSpPr txBox="1"/>
           <p:nvPr/>
         </p:nvSpPr>
@@ -8216,7 +8394,7 @@
                 </a:solidFill>
                 <a:latin typeface="Noto Sans CJK SC"/>
               </a:rPr>
-              <a:t>来源：https://greenvoyage2050.imo.org/technology/autopilot-adjustment-and-use/ ｜ https://www.mdpi.com/2077-1312/12/1/94</a:t>
+              <a:t>来源：https://www.rivieramm.com/news-content-hub/news-content-hub/yara-marines-fuelopt-demonstrates-significant-fuel-savings-75433 ｜ https://www.napa.fi/news/napa-norsepower-sumitomo-study/</a:t>
             </a:r>
           </a:p>
         </p:txBody>
@@ -8319,7 +8497,7 @@
                 </a:solidFill>
                 <a:latin typeface="Noto Sans CJK SC"/>
               </a:rPr>
-              <a:t>主要数据来源</a:t>
+              <a:t>技术趋势判断</a:t>
             </a:r>
           </a:p>
         </p:txBody>
@@ -8361,6 +8539,1352 @@
                 </a:solidFill>
                 <a:latin typeface="Noto Sans CJK SC"/>
               </a:rPr>
+              <a:t>基于两轮来源核对的四条判断</a:t>
+            </a:r>
+          </a:p>
+        </p:txBody>
+      </p:sp>
+      <p:sp>
+        <p:nvSpPr>
+          <p:cNvPr id="5" name="TextBox 4"/>
+          <p:cNvSpPr txBox="1"/>
+          <p:nvPr/>
+        </p:nvSpPr>
+        <p:spPr>
+          <a:xfrm>
+            <a:off x="731520" y="1645920"/>
+            <a:ext cx="10789920" cy="4937760"/>
+          </a:xfrm>
+          <a:prstGeom prst="rect">
+            <a:avLst/>
+          </a:prstGeom>
+          <a:noFill/>
+        </p:spPr>
+        <p:txBody>
+          <a:bodyPr wrap="square" anchor="t">
+            <a:spAutoFit/>
+          </a:bodyPr>
+          <a:lstStyle/>
+          <a:p>
+            <a:pPr algn="l">
+              <a:lnSpc>
+                <a:spcPct val="115000"/>
+              </a:lnSpc>
+              <a:spcAft>
+                <a:spcPts val="800"/>
+              </a:spcAft>
+            </a:pPr>
+            <a:r>
+              <a:rPr sz="1600" b="1">
+                <a:solidFill>
+                  <a:srgbClr val="1F77B4"/>
+                </a:solidFill>
+                <a:latin typeface="Noto Sans CJK SC"/>
+              </a:rPr>
+              <a:t>▪ ① 节能大头在决策层，控制层价值在「少损耗」</a:t>
+            </a:r>
+          </a:p>
+          <a:p>
+            <a:pPr algn="l">
+              <a:lnSpc>
+                <a:spcPct val="115000"/>
+              </a:lnSpc>
+              <a:spcAft>
+                <a:spcPts val="400"/>
+              </a:spcAft>
+            </a:pPr>
+            <a:r>
+              <a:rPr sz="1450" b="0">
+                <a:solidFill>
+                  <a:srgbClr val="1B2A4A"/>
+                </a:solidFill>
+                <a:latin typeface="Noto Sans CJK SC"/>
+              </a:rPr>
+              <a:t>    – 自动舵贡献 0.1–1.0%（IMO 口径），但 7×24 在线、几乎零边际成本，兼降舵机磨损</a:t>
+            </a:r>
+          </a:p>
+          <a:p>
+            <a:pPr algn="l">
+              <a:lnSpc>
+                <a:spcPct val="115000"/>
+              </a:lnSpc>
+              <a:spcAft>
+                <a:spcPts val="800"/>
+              </a:spcAft>
+            </a:pPr>
+            <a:r>
+              <a:rPr sz="1600" b="1">
+                <a:solidFill>
+                  <a:srgbClr val="1F77B4"/>
+                </a:solidFill>
+                <a:latin typeface="Noto Sans CJK SC"/>
+              </a:rPr>
+              <a:t>▪ ② MPC 可行域正在打开，瓶颈不是算力</a:t>
+            </a:r>
+          </a:p>
+          <a:p>
+            <a:pPr algn="l">
+              <a:lnSpc>
+                <a:spcPct val="115000"/>
+              </a:lnSpc>
+              <a:spcAft>
+                <a:spcPts val="400"/>
+              </a:spcAft>
+            </a:pPr>
+            <a:r>
+              <a:rPr sz="1450" b="0">
+                <a:solidFill>
+                  <a:srgbClr val="1B2A4A"/>
+                </a:solidFill>
+                <a:latin typeface="Noto Sans CJK SC"/>
+              </a:rPr>
+              <a:t>    – 嵌入式求解器毫秒级（7 ms @ 20 Hz）；真正门槛是模型辨识与整定自动化</a:t>
+            </a:r>
+          </a:p>
+          <a:p>
+            <a:pPr algn="l">
+              <a:lnSpc>
+                <a:spcPct val="115000"/>
+              </a:lnSpc>
+              <a:spcAft>
+                <a:spcPts val="800"/>
+              </a:spcAft>
+            </a:pPr>
+            <a:r>
+              <a:rPr sz="1600" b="1">
+                <a:solidFill>
+                  <a:srgbClr val="1F77B4"/>
+                </a:solidFill>
+                <a:latin typeface="Noto Sans CJK SC"/>
+              </a:rPr>
+              <a:t>▪ ③ 数据驱动自学习模型成为商用标配</a:t>
+            </a:r>
+          </a:p>
+          <a:p>
+            <a:pPr algn="l">
+              <a:lnSpc>
+                <a:spcPct val="115000"/>
+              </a:lnSpc>
+              <a:spcAft>
+                <a:spcPts val="400"/>
+              </a:spcAft>
+            </a:pPr>
+            <a:r>
+              <a:rPr sz="1450" b="0">
+                <a:solidFill>
+                  <a:srgbClr val="1B2A4A"/>
+                </a:solidFill>
+                <a:latin typeface="Noto Sans CJK SC"/>
+              </a:rPr>
+              <a:t>    – ClassNK-NAPA 油耗预测精度 99.6%；DeepSea 周油耗预报误差 0.8%；纯机理模型路线已少见</a:t>
+            </a:r>
+          </a:p>
+          <a:p>
+            <a:pPr algn="l">
+              <a:lnSpc>
+                <a:spcPct val="115000"/>
+              </a:lnSpc>
+              <a:spcAft>
+                <a:spcPts val="800"/>
+              </a:spcAft>
+            </a:pPr>
+            <a:r>
+              <a:rPr sz="1600" b="1">
+                <a:solidFill>
+                  <a:srgbClr val="1F77B4"/>
+                </a:solidFill>
+                <a:latin typeface="Noto Sans CJK SC"/>
+              </a:rPr>
+              <a:t>▪ ④ 分层协同：决策层优化与控制层执行正在打通</a:t>
+            </a:r>
+          </a:p>
+          <a:p>
+            <a:pPr algn="l">
+              <a:lnSpc>
+                <a:spcPct val="115000"/>
+              </a:lnSpc>
+              <a:spcAft>
+                <a:spcPts val="400"/>
+              </a:spcAft>
+            </a:pPr>
+            <a:r>
+              <a:rPr sz="1450" b="0">
+                <a:solidFill>
+                  <a:srgbClr val="1B2A4A"/>
+                </a:solidFill>
+                <a:latin typeface="Noto Sans CJK SC"/>
+              </a:rPr>
+              <a:t>    – MPC 代价函数可直接计入操舵能量项；自动舵可向上输出舵机磨损/能耗统计，形成闭环</a:t>
+            </a:r>
+          </a:p>
+        </p:txBody>
+      </p:sp>
+      <p:sp>
+        <p:nvSpPr>
+          <p:cNvPr id="6" name="TextBox 5"/>
+          <p:cNvSpPr txBox="1"/>
+          <p:nvPr/>
+        </p:nvSpPr>
+        <p:spPr>
+          <a:xfrm>
+            <a:off x="11475720" y="6473952"/>
+            <a:ext cx="640080" cy="320040"/>
+          </a:xfrm>
+          <a:prstGeom prst="rect">
+            <a:avLst/>
+          </a:prstGeom>
+          <a:noFill/>
+        </p:spPr>
+        <p:txBody>
+          <a:bodyPr wrap="square" anchor="t">
+            <a:spAutoFit/>
+          </a:bodyPr>
+          <a:lstStyle/>
+          <a:p>
+            <a:pPr algn="r">
+              <a:lnSpc>
+                <a:spcPct val="115000"/>
+              </a:lnSpc>
+              <a:spcAft>
+                <a:spcPts val="600"/>
+              </a:spcAft>
+            </a:pPr>
+            <a:r>
+              <a:rPr sz="1100" b="0">
+                <a:solidFill>
+                  <a:srgbClr val="666666"/>
+                </a:solidFill>
+                <a:latin typeface="Noto Sans CJK SC"/>
+              </a:rPr>
+              <a:t>18 / 21</a:t>
+            </a:r>
+          </a:p>
+        </p:txBody>
+      </p:sp>
+      <p:sp>
+        <p:nvSpPr>
+          <p:cNvPr id="7" name="TextBox 6"/>
+          <p:cNvSpPr txBox="1"/>
+          <p:nvPr/>
+        </p:nvSpPr>
+        <p:spPr>
+          <a:xfrm>
+            <a:off x="457200" y="6492240"/>
+            <a:ext cx="10881360" cy="310896"/>
+          </a:xfrm>
+          <a:prstGeom prst="rect">
+            <a:avLst/>
+          </a:prstGeom>
+          <a:noFill/>
+        </p:spPr>
+        <p:txBody>
+          <a:bodyPr wrap="square" anchor="t">
+            <a:spAutoFit/>
+          </a:bodyPr>
+          <a:lstStyle/>
+          <a:p>
+            <a:pPr algn="l">
+              <a:lnSpc>
+                <a:spcPct val="115000"/>
+              </a:lnSpc>
+              <a:spcAft>
+                <a:spcPts val="600"/>
+              </a:spcAft>
+            </a:pPr>
+            <a:r>
+              <a:rPr sz="850" b="0">
+                <a:solidFill>
+                  <a:srgbClr val="666666"/>
+                </a:solidFill>
+                <a:latin typeface="Noto Sans CJK SC"/>
+              </a:rPr>
+              <a:t>来源：https://www.classnk.or.jp/hp/en/hp_pressrelease.aspx?id=834&amp;layout=3 ｜ https://vesselperformance.info/2024/11/15/eastern-pacific-uses-deepsea-to-improve-fuel-consumption-forecasts-to-within-1-per-cent/</a:t>
+            </a:r>
+          </a:p>
+        </p:txBody>
+      </p:sp>
+    </p:spTree>
+  </p:cSld>
+  <p:clrMapOvr>
+    <a:masterClrMapping/>
+  </p:clrMapOvr>
+</p:sld>
+</file>
+
+<file path=ppt/slides/slide19.xml><?xml version="1.0" encoding="utf-8"?>
+<p:sld xmlns:a="http://schemas.openxmlformats.org/drawingml/2006/main" xmlns:p="http://schemas.openxmlformats.org/presentationml/2006/main" xmlns:r="http://schemas.openxmlformats.org/officeDocument/2006/relationships">
+  <p:cSld>
+    <p:spTree>
+      <p:nvGrpSpPr>
+        <p:cNvPr id="1" name=""/>
+        <p:cNvGrpSpPr/>
+        <p:nvPr/>
+      </p:nvGrpSpPr>
+      <p:grpSpPr/>
+      <p:sp>
+        <p:nvSpPr>
+          <p:cNvPr id="2" name="Rectangle 1"/>
+          <p:cNvSpPr/>
+          <p:nvPr/>
+        </p:nvSpPr>
+        <p:spPr>
+          <a:xfrm>
+            <a:off x="0" y="0"/>
+            <a:ext cx="12191695" cy="109728"/>
+          </a:xfrm>
+          <a:prstGeom prst="rect">
+            <a:avLst/>
+          </a:prstGeom>
+          <a:solidFill>
+            <a:srgbClr val="1F77B4"/>
+          </a:solidFill>
+          <a:ln>
+            <a:noFill/>
+          </a:ln>
+        </p:spPr>
+        <p:style>
+          <a:lnRef idx="1">
+            <a:schemeClr val="accent1"/>
+          </a:lnRef>
+          <a:fillRef idx="3">
+            <a:schemeClr val="accent1"/>
+          </a:fillRef>
+          <a:effectRef idx="2">
+            <a:schemeClr val="accent1"/>
+          </a:effectRef>
+          <a:fontRef idx="minor">
+            <a:schemeClr val="lt1"/>
+          </a:fontRef>
+        </p:style>
+        <p:txBody>
+          <a:bodyPr rtlCol="0" anchor="ctr"/>
+          <a:lstStyle/>
+          <a:p>
+            <a:pPr algn="ctr"/>
+          </a:p>
+        </p:txBody>
+      </p:sp>
+      <p:sp>
+        <p:nvSpPr>
+          <p:cNvPr id="3" name="TextBox 2"/>
+          <p:cNvSpPr txBox="1"/>
+          <p:nvPr/>
+        </p:nvSpPr>
+        <p:spPr>
+          <a:xfrm>
+            <a:off x="457200" y="256032"/>
+            <a:ext cx="11247120" cy="822960"/>
+          </a:xfrm>
+          <a:prstGeom prst="rect">
+            <a:avLst/>
+          </a:prstGeom>
+          <a:noFill/>
+        </p:spPr>
+        <p:txBody>
+          <a:bodyPr wrap="square" anchor="t">
+            <a:spAutoFit/>
+          </a:bodyPr>
+          <a:lstStyle/>
+          <a:p>
+            <a:pPr algn="l">
+              <a:lnSpc>
+                <a:spcPct val="115000"/>
+              </a:lnSpc>
+              <a:spcAft>
+                <a:spcPts val="600"/>
+              </a:spcAft>
+            </a:pPr>
+            <a:r>
+              <a:rPr sz="3000" b="1">
+                <a:solidFill>
+                  <a:srgbClr val="1B2A4A"/>
+                </a:solidFill>
+                <a:latin typeface="Noto Sans CJK SC"/>
+              </a:rPr>
+              <a:t>对本项目（auto_rudder）的落地建议</a:t>
+            </a:r>
+          </a:p>
+        </p:txBody>
+      </p:sp>
+      <p:graphicFrame>
+        <p:nvGraphicFramePr>
+          <p:cNvPr id="4" name="Table 3"/>
+          <p:cNvGraphicFramePr>
+            <a:graphicFrameLocks noGrp="1"/>
+          </p:cNvGraphicFramePr>
+          <p:nvPr/>
+        </p:nvGraphicFramePr>
+        <p:xfrm>
+          <a:off x="457200" y="1463040"/>
+          <a:ext cx="11338559" cy="3840480"/>
+        </p:xfrm>
+        <a:graphic>
+          <a:graphicData uri="http://schemas.openxmlformats.org/drawingml/2006/table">
+            <a:tbl>
+              <a:tblPr firstRow="1" bandRow="1">
+                <a:tableStyleId>{5C22544A-7EE6-4342-B048-85BDC9FD1C3A}</a:tableStyleId>
+              </a:tblPr>
+              <a:tblGrid>
+                <a:gridCol w="1619794"/>
+                <a:gridCol w="2519680"/>
+                <a:gridCol w="7199085"/>
+              </a:tblGrid>
+              <a:tr h="960120">
+                <a:tc>
+                  <a:txBody>
+                    <a:bodyPr/>
+                    <a:lstStyle/>
+                    <a:p>
+                      <a:pPr>
+                        <a:lnSpc>
+                          <a:spcPct val="105000"/>
+                        </a:lnSpc>
+                      </a:pPr>
+                      <a:r>
+                        <a:rPr sz="1350" b="1">
+                          <a:solidFill>
+                            <a:srgbClr val="FFFFFF"/>
+                          </a:solidFill>
+                          <a:latin typeface="Noto Sans CJK SC"/>
+                        </a:rPr>
+                        <a:t>阶段</a:t>
+                      </a:r>
+                    </a:p>
+                  </a:txBody>
+                  <a:tcPr marL="54864" marR="54864" marT="27432" marB="27432" anchor="ctr">
+                    <a:solidFill>
+                      <a:srgbClr val="1F77B4"/>
+                    </a:solidFill>
+                  </a:tcPr>
+                </a:tc>
+                <a:tc>
+                  <a:txBody>
+                    <a:bodyPr/>
+                    <a:lstStyle/>
+                    <a:p>
+                      <a:pPr>
+                        <a:lnSpc>
+                          <a:spcPct val="105000"/>
+                        </a:lnSpc>
+                      </a:pPr>
+                      <a:r>
+                        <a:rPr sz="1350" b="1">
+                          <a:solidFill>
+                            <a:srgbClr val="FFFFFF"/>
+                          </a:solidFill>
+                          <a:latin typeface="Noto Sans CJK SC"/>
+                        </a:rPr>
+                        <a:t>目标</a:t>
+                      </a:r>
+                    </a:p>
+                  </a:txBody>
+                  <a:tcPr marL="54864" marR="54864" marT="27432" marB="27432" anchor="ctr">
+                    <a:solidFill>
+                      <a:srgbClr val="1F77B4"/>
+                    </a:solidFill>
+                  </a:tcPr>
+                </a:tc>
+                <a:tc>
+                  <a:txBody>
+                    <a:bodyPr/>
+                    <a:lstStyle/>
+                    <a:p>
+                      <a:pPr>
+                        <a:lnSpc>
+                          <a:spcPct val="105000"/>
+                        </a:lnSpc>
+                      </a:pPr>
+                      <a:r>
+                        <a:rPr sz="1350" b="1">
+                          <a:solidFill>
+                            <a:srgbClr val="FFFFFF"/>
+                          </a:solidFill>
+                          <a:latin typeface="Noto Sans CJK SC"/>
+                        </a:rPr>
+                        <a:t>关键动作</a:t>
+                      </a:r>
+                    </a:p>
+                  </a:txBody>
+                  <a:tcPr marL="54864" marR="54864" marT="27432" marB="27432" anchor="ctr">
+                    <a:solidFill>
+                      <a:srgbClr val="1F77B4"/>
+                    </a:solidFill>
+                  </a:tcPr>
+                </a:tc>
+              </a:tr>
+              <a:tr h="960120">
+                <a:tc>
+                  <a:txBody>
+                    <a:bodyPr/>
+                    <a:lstStyle/>
+                    <a:p>
+                      <a:pPr>
+                        <a:lnSpc>
+                          <a:spcPct val="105000"/>
+                        </a:lnSpc>
+                      </a:pPr>
+                      <a:r>
+                        <a:rPr sz="1300" b="0">
+                          <a:solidFill>
+                            <a:srgbClr val="1B2A4A"/>
+                          </a:solidFill>
+                          <a:latin typeface="Noto Sans CJK SC"/>
+                        </a:rPr>
+                        <a:t>短期</a:t>
+                      </a:r>
+                    </a:p>
+                    <a:p>
+                      <a:pPr>
+                        <a:lnSpc>
+                          <a:spcPct val="105000"/>
+                        </a:lnSpc>
+                      </a:pPr>
+                      <a:r>
+                        <a:rPr sz="1300" b="0">
+                          <a:solidFill>
+                            <a:srgbClr val="1B2A4A"/>
+                          </a:solidFill>
+                          <a:latin typeface="Noto Sans CJK SC"/>
+                        </a:rPr>
+                        <a:t>1–3 个月</a:t>
+                      </a:r>
+                    </a:p>
+                  </a:txBody>
+                  <a:tcPr marL="54864" marR="54864" marT="27432" marB="27432" anchor="ctr"/>
+                </a:tc>
+                <a:tc>
+                  <a:txBody>
+                    <a:bodyPr/>
+                    <a:lstStyle/>
+                    <a:p>
+                      <a:pPr>
+                        <a:lnSpc>
+                          <a:spcPct val="105000"/>
+                        </a:lnSpc>
+                      </a:pPr>
+                      <a:r>
+                        <a:rPr sz="1300" b="0">
+                          <a:solidFill>
+                            <a:srgbClr val="1B2A4A"/>
+                          </a:solidFill>
+                          <a:latin typeface="Noto Sans CJK SC"/>
+                        </a:rPr>
+                        <a:t>PD 基线交付</a:t>
+                      </a:r>
+                    </a:p>
+                  </a:txBody>
+                  <a:tcPr marL="54864" marR="54864" marT="27432" marB="27432" anchor="ctr"/>
+                </a:tc>
+                <a:tc>
+                  <a:txBody>
+                    <a:bodyPr/>
+                    <a:lstStyle/>
+                    <a:p>
+                      <a:pPr>
+                        <a:lnSpc>
+                          <a:spcPct val="105000"/>
+                        </a:lnSpc>
+                      </a:pPr>
+                      <a:r>
+                        <a:rPr sz="1300" b="0">
+                          <a:solidFill>
+                            <a:srgbClr val="1B2A4A"/>
+                          </a:solidFill>
+                          <a:latin typeface="Noto Sans CJK SC"/>
+                        </a:rPr>
+                        <a:t>Nomoto 极点配置整定（Kp=ωn²T/K，ζ≈1）；</a:t>
+                      </a:r>
+                    </a:p>
+                    <a:p>
+                      <a:pPr>
+                        <a:lnSpc>
+                          <a:spcPct val="105000"/>
+                        </a:lnSpc>
+                      </a:pPr>
+                      <a:r>
+                        <a:rPr sz="1300" b="0">
+                          <a:solidFill>
+                            <a:srgbClr val="1B2A4A"/>
+                          </a:solidFill>
+                          <a:latin typeface="Noto Sans CJK SC"/>
+                        </a:rPr>
+                        <a:t>海浪滤波+死区抑制无效操舵（对标 IMO 0.1–1.0% 收益）</a:t>
+                      </a:r>
+                    </a:p>
+                  </a:txBody>
+                  <a:tcPr marL="54864" marR="54864" marT="27432" marB="27432" anchor="ctr"/>
+                </a:tc>
+              </a:tr>
+              <a:tr h="960120">
+                <a:tc>
+                  <a:txBody>
+                    <a:bodyPr/>
+                    <a:lstStyle/>
+                    <a:p>
+                      <a:pPr>
+                        <a:lnSpc>
+                          <a:spcPct val="105000"/>
+                        </a:lnSpc>
+                      </a:pPr>
+                      <a:r>
+                        <a:rPr sz="1300" b="0">
+                          <a:solidFill>
+                            <a:srgbClr val="1B2A4A"/>
+                          </a:solidFill>
+                          <a:latin typeface="Noto Sans CJK SC"/>
+                        </a:rPr>
+                        <a:t>中期</a:t>
+                      </a:r>
+                    </a:p>
+                    <a:p>
+                      <a:pPr>
+                        <a:lnSpc>
+                          <a:spcPct val="105000"/>
+                        </a:lnSpc>
+                      </a:pPr>
+                      <a:r>
+                        <a:rPr sz="1300" b="0">
+                          <a:solidFill>
+                            <a:srgbClr val="1B2A4A"/>
+                          </a:solidFill>
+                          <a:latin typeface="Noto Sans CJK SC"/>
+                        </a:rPr>
+                        <a:t>3–6 个月</a:t>
+                      </a:r>
+                    </a:p>
+                  </a:txBody>
+                  <a:tcPr marL="54864" marR="54864" marT="27432" marB="27432" anchor="ctr">
+                    <a:solidFill>
+                      <a:srgbClr val="EEF3FA"/>
+                    </a:solidFill>
+                  </a:tcPr>
+                </a:tc>
+                <a:tc>
+                  <a:txBody>
+                    <a:bodyPr/>
+                    <a:lstStyle/>
+                    <a:p>
+                      <a:pPr>
+                        <a:lnSpc>
+                          <a:spcPct val="105000"/>
+                        </a:lnSpc>
+                      </a:pPr>
+                      <a:r>
+                        <a:rPr sz="1300" b="0">
+                          <a:solidFill>
+                            <a:srgbClr val="1B2A4A"/>
+                          </a:solidFill>
+                          <a:latin typeface="Noto Sans CJK SC"/>
+                        </a:rPr>
+                        <a:t>MPC 增强层开发</a:t>
+                      </a:r>
+                    </a:p>
+                  </a:txBody>
+                  <a:tcPr marL="54864" marR="54864" marT="27432" marB="27432" anchor="ctr">
+                    <a:solidFill>
+                      <a:srgbClr val="EEF3FA"/>
+                    </a:solidFill>
+                  </a:tcPr>
+                </a:tc>
+                <a:tc>
+                  <a:txBody>
+                    <a:bodyPr/>
+                    <a:lstStyle/>
+                    <a:p>
+                      <a:pPr>
+                        <a:lnSpc>
+                          <a:spcPct val="105000"/>
+                        </a:lnSpc>
+                      </a:pPr>
+                      <a:r>
+                        <a:rPr sz="1300" b="0">
+                          <a:solidFill>
+                            <a:srgbClr val="1B2A4A"/>
+                          </a:solidFill>
+                          <a:latin typeface="Noto Sans CJK SC"/>
+                        </a:rPr>
+                        <a:t>攻克模型在线辨识与权重整定工具化；</a:t>
+                      </a:r>
+                    </a:p>
+                    <a:p>
+                      <a:pPr>
+                        <a:lnSpc>
+                          <a:spcPct val="105000"/>
+                        </a:lnSpc>
+                      </a:pPr>
+                      <a:r>
+                        <a:rPr sz="1300" b="0">
+                          <a:solidFill>
+                            <a:srgbClr val="1B2A4A"/>
+                          </a:solidFill>
+                          <a:latin typeface="Noto Sans CJK SC"/>
+                        </a:rPr>
+                        <a:t>嵌入式求解器选型（acados/OSQP）；与 PD 基线 A/B 对比</a:t>
+                      </a:r>
+                    </a:p>
+                  </a:txBody>
+                  <a:tcPr marL="54864" marR="54864" marT="27432" marB="27432" anchor="ctr">
+                    <a:solidFill>
+                      <a:srgbClr val="EEF3FA"/>
+                    </a:solidFill>
+                  </a:tcPr>
+                </a:tc>
+              </a:tr>
+              <a:tr h="960120">
+                <a:tc>
+                  <a:txBody>
+                    <a:bodyPr/>
+                    <a:lstStyle/>
+                    <a:p>
+                      <a:pPr>
+                        <a:lnSpc>
+                          <a:spcPct val="105000"/>
+                        </a:lnSpc>
+                      </a:pPr>
+                      <a:r>
+                        <a:rPr sz="1300" b="0">
+                          <a:solidFill>
+                            <a:srgbClr val="1B2A4A"/>
+                          </a:solidFill>
+                          <a:latin typeface="Noto Sans CJK SC"/>
+                        </a:rPr>
+                        <a:t>长期</a:t>
+                      </a:r>
+                    </a:p>
+                    <a:p>
+                      <a:pPr>
+                        <a:lnSpc>
+                          <a:spcPct val="105000"/>
+                        </a:lnSpc>
+                      </a:pPr>
+                      <a:r>
+                        <a:rPr sz="1300" b="0">
+                          <a:solidFill>
+                            <a:srgbClr val="1B2A4A"/>
+                          </a:solidFill>
+                          <a:latin typeface="Noto Sans CJK SC"/>
+                        </a:rPr>
+                        <a:t>6–12 个月</a:t>
+                      </a:r>
+                    </a:p>
+                  </a:txBody>
+                  <a:tcPr marL="54864" marR="54864" marT="27432" marB="27432" anchor="ctr"/>
+                </a:tc>
+                <a:tc>
+                  <a:txBody>
+                    <a:bodyPr/>
+                    <a:lstStyle/>
+                    <a:p>
+                      <a:pPr>
+                        <a:lnSpc>
+                          <a:spcPct val="105000"/>
+                        </a:lnSpc>
+                      </a:pPr>
+                      <a:r>
+                        <a:rPr sz="1300" b="0">
+                          <a:solidFill>
+                            <a:srgbClr val="1B2A4A"/>
+                          </a:solidFill>
+                          <a:latin typeface="Noto Sans CJK SC"/>
+                        </a:rPr>
+                        <a:t>分层节能架构</a:t>
+                      </a:r>
+                    </a:p>
+                  </a:txBody>
+                  <a:tcPr marL="54864" marR="54864" marT="27432" marB="27432" anchor="ctr"/>
+                </a:tc>
+                <a:tc>
+                  <a:txBody>
+                    <a:bodyPr/>
+                    <a:lstStyle/>
+                    <a:p>
+                      <a:pPr>
+                        <a:lnSpc>
+                          <a:spcPct val="105000"/>
+                        </a:lnSpc>
+                      </a:pPr>
+                      <a:r>
+                        <a:rPr sz="1300" b="0">
+                          <a:solidFill>
+                            <a:srgbClr val="1B2A4A"/>
+                          </a:solidFill>
+                          <a:latin typeface="Noto Sans CJK SC"/>
+                        </a:rPr>
+                        <a:t>MPC 代价函数计入操舵能量，对接航速/纵倾优化指令；</a:t>
+                      </a:r>
+                    </a:p>
+                    <a:p>
+                      <a:pPr>
+                        <a:lnSpc>
+                          <a:spcPct val="105000"/>
+                        </a:lnSpc>
+                      </a:pPr>
+                      <a:r>
+                        <a:rPr sz="1300" b="0">
+                          <a:solidFill>
+                            <a:srgbClr val="1B2A4A"/>
+                          </a:solidFill>
+                          <a:latin typeface="Noto Sans CJK SC"/>
+                        </a:rPr>
+                        <a:t>输出舵机磨损/能耗统计；Lyapunov-based MPC 保稳定性</a:t>
+                      </a:r>
+                    </a:p>
+                  </a:txBody>
+                  <a:tcPr marL="54864" marR="54864" marT="27432" marB="27432" anchor="ctr"/>
+                </a:tc>
+              </a:tr>
+            </a:tbl>
+          </a:graphicData>
+        </a:graphic>
+      </p:graphicFrame>
+      <p:sp>
+        <p:nvSpPr>
+          <p:cNvPr id="5" name="TextBox 4"/>
+          <p:cNvSpPr txBox="1"/>
+          <p:nvPr/>
+        </p:nvSpPr>
+        <p:spPr>
+          <a:xfrm>
+            <a:off x="457200" y="5577840"/>
+            <a:ext cx="11338560" cy="914400"/>
+          </a:xfrm>
+          <a:prstGeom prst="rect">
+            <a:avLst/>
+          </a:prstGeom>
+          <a:noFill/>
+        </p:spPr>
+        <p:txBody>
+          <a:bodyPr wrap="square" anchor="t">
+            <a:spAutoFit/>
+          </a:bodyPr>
+          <a:lstStyle/>
+          <a:p>
+            <a:pPr algn="l">
+              <a:lnSpc>
+                <a:spcPct val="115000"/>
+              </a:lnSpc>
+              <a:spcAft>
+                <a:spcPts val="600"/>
+              </a:spcAft>
+            </a:pPr>
+            <a:r>
+              <a:rPr sz="1500" b="0">
+                <a:solidFill>
+                  <a:srgbClr val="1B2A4A"/>
+                </a:solidFill>
+                <a:latin typeface="Noto Sans CJK SC"/>
+              </a:rPr>
+              <a:t>核心逻辑：节能大头在决策层（气象航线 3–10%、减速航行主机口径可达 50%），控制层贡献 0.1–1% 但几乎零成本；</a:t>
+            </a:r>
+          </a:p>
+          <a:p>
+            <a:pPr algn="l">
+              <a:lnSpc>
+                <a:spcPct val="115000"/>
+              </a:lnSpc>
+              <a:spcAft>
+                <a:spcPts val="600"/>
+              </a:spcAft>
+            </a:pPr>
+            <a:r>
+              <a:rPr sz="1500" b="0">
+                <a:solidFill>
+                  <a:srgbClr val="1B2A4A"/>
+                </a:solidFill>
+                <a:latin typeface="Noto Sans CJK SC"/>
+              </a:rPr>
+              <a:t>先把 PD 整定与辨识流程工具化，再让 MPC 平滑接管性能增强。</a:t>
+            </a:r>
+          </a:p>
+        </p:txBody>
+      </p:sp>
+      <p:sp>
+        <p:nvSpPr>
+          <p:cNvPr id="6" name="TextBox 5"/>
+          <p:cNvSpPr txBox="1"/>
+          <p:nvPr/>
+        </p:nvSpPr>
+        <p:spPr>
+          <a:xfrm>
+            <a:off x="11475720" y="6473952"/>
+            <a:ext cx="640080" cy="320040"/>
+          </a:xfrm>
+          <a:prstGeom prst="rect">
+            <a:avLst/>
+          </a:prstGeom>
+          <a:noFill/>
+        </p:spPr>
+        <p:txBody>
+          <a:bodyPr wrap="square" anchor="t">
+            <a:spAutoFit/>
+          </a:bodyPr>
+          <a:lstStyle/>
+          <a:p>
+            <a:pPr algn="r">
+              <a:lnSpc>
+                <a:spcPct val="115000"/>
+              </a:lnSpc>
+              <a:spcAft>
+                <a:spcPts val="600"/>
+              </a:spcAft>
+            </a:pPr>
+            <a:r>
+              <a:rPr sz="1100" b="0">
+                <a:solidFill>
+                  <a:srgbClr val="666666"/>
+                </a:solidFill>
+                <a:latin typeface="Noto Sans CJK SC"/>
+              </a:rPr>
+              <a:t>19 / 21</a:t>
+            </a:r>
+          </a:p>
+        </p:txBody>
+      </p:sp>
+      <p:sp>
+        <p:nvSpPr>
+          <p:cNvPr id="7" name="TextBox 6"/>
+          <p:cNvSpPr txBox="1"/>
+          <p:nvPr/>
+        </p:nvSpPr>
+        <p:spPr>
+          <a:xfrm>
+            <a:off x="457200" y="6492240"/>
+            <a:ext cx="10881360" cy="310896"/>
+          </a:xfrm>
+          <a:prstGeom prst="rect">
+            <a:avLst/>
+          </a:prstGeom>
+          <a:noFill/>
+        </p:spPr>
+        <p:txBody>
+          <a:bodyPr wrap="square" anchor="t">
+            <a:spAutoFit/>
+          </a:bodyPr>
+          <a:lstStyle/>
+          <a:p>
+            <a:pPr algn="l">
+              <a:lnSpc>
+                <a:spcPct val="115000"/>
+              </a:lnSpc>
+              <a:spcAft>
+                <a:spcPts val="600"/>
+              </a:spcAft>
+            </a:pPr>
+            <a:r>
+              <a:rPr sz="850" b="0">
+                <a:solidFill>
+                  <a:srgbClr val="666666"/>
+                </a:solidFill>
+                <a:latin typeface="Noto Sans CJK SC"/>
+              </a:rPr>
+              <a:t>来源：https://greenvoyage2050.imo.org/technology/autopilot-adjustment-and-use/ ｜ https://www.mdpi.com/2077-1312/12/1/94</a:t>
+            </a:r>
+          </a:p>
+        </p:txBody>
+      </p:sp>
+    </p:spTree>
+  </p:cSld>
+  <p:clrMapOvr>
+    <a:masterClrMapping/>
+  </p:clrMapOvr>
+</p:sld>
+</file>
+
+<file path=ppt/slides/slide2.xml><?xml version="1.0" encoding="utf-8"?>
+<p:sld xmlns:a="http://schemas.openxmlformats.org/drawingml/2006/main" xmlns:p="http://schemas.openxmlformats.org/presentationml/2006/main" xmlns:r="http://schemas.openxmlformats.org/officeDocument/2006/relationships">
+  <p:cSld>
+    <p:spTree>
+      <p:nvGrpSpPr>
+        <p:cNvPr id="1" name=""/>
+        <p:cNvGrpSpPr/>
+        <p:nvPr/>
+      </p:nvGrpSpPr>
+      <p:grpSpPr/>
+      <p:sp>
+        <p:nvSpPr>
+          <p:cNvPr id="2" name="Rectangle 1"/>
+          <p:cNvSpPr/>
+          <p:nvPr/>
+        </p:nvSpPr>
+        <p:spPr>
+          <a:xfrm>
+            <a:off x="0" y="0"/>
+            <a:ext cx="12191695" cy="109728"/>
+          </a:xfrm>
+          <a:prstGeom prst="rect">
+            <a:avLst/>
+          </a:prstGeom>
+          <a:solidFill>
+            <a:srgbClr val="1F77B4"/>
+          </a:solidFill>
+          <a:ln>
+            <a:noFill/>
+          </a:ln>
+        </p:spPr>
+        <p:style>
+          <a:lnRef idx="1">
+            <a:schemeClr val="accent1"/>
+          </a:lnRef>
+          <a:fillRef idx="3">
+            <a:schemeClr val="accent1"/>
+          </a:fillRef>
+          <a:effectRef idx="2">
+            <a:schemeClr val="accent1"/>
+          </a:effectRef>
+          <a:fontRef idx="minor">
+            <a:schemeClr val="lt1"/>
+          </a:fontRef>
+        </p:style>
+        <p:txBody>
+          <a:bodyPr rtlCol="0" anchor="ctr"/>
+          <a:lstStyle/>
+          <a:p>
+            <a:pPr algn="ctr"/>
+          </a:p>
+        </p:txBody>
+      </p:sp>
+      <p:sp>
+        <p:nvSpPr>
+          <p:cNvPr id="3" name="TextBox 2"/>
+          <p:cNvSpPr txBox="1"/>
+          <p:nvPr/>
+        </p:nvSpPr>
+        <p:spPr>
+          <a:xfrm>
+            <a:off x="457200" y="256032"/>
+            <a:ext cx="11247120" cy="822960"/>
+          </a:xfrm>
+          <a:prstGeom prst="rect">
+            <a:avLst/>
+          </a:prstGeom>
+          <a:noFill/>
+        </p:spPr>
+        <p:txBody>
+          <a:bodyPr wrap="square" anchor="t">
+            <a:spAutoFit/>
+          </a:bodyPr>
+          <a:lstStyle/>
+          <a:p>
+            <a:pPr algn="l">
+              <a:lnSpc>
+                <a:spcPct val="115000"/>
+              </a:lnSpc>
+              <a:spcAft>
+                <a:spcPts val="600"/>
+              </a:spcAft>
+            </a:pPr>
+            <a:r>
+              <a:rPr sz="3000" b="1">
+                <a:solidFill>
+                  <a:srgbClr val="1B2A4A"/>
+                </a:solidFill>
+                <a:latin typeface="Noto Sans CJK SC"/>
+              </a:rPr>
+              <a:t>汇报提纲</a:t>
+            </a:r>
+          </a:p>
+        </p:txBody>
+      </p:sp>
+      <p:sp>
+        <p:nvSpPr>
+          <p:cNvPr id="4" name="TextBox 3"/>
+          <p:cNvSpPr txBox="1"/>
+          <p:nvPr/>
+        </p:nvSpPr>
+        <p:spPr>
+          <a:xfrm>
+            <a:off x="914400" y="1463040"/>
+            <a:ext cx="10058400" cy="5029200"/>
+          </a:xfrm>
+          <a:prstGeom prst="rect">
+            <a:avLst/>
+          </a:prstGeom>
+          <a:noFill/>
+        </p:spPr>
+        <p:txBody>
+          <a:bodyPr wrap="square" anchor="t">
+            <a:spAutoFit/>
+          </a:bodyPr>
+          <a:lstStyle/>
+          <a:p>
+            <a:pPr algn="l">
+              <a:lnSpc>
+                <a:spcPct val="115000"/>
+              </a:lnSpc>
+              <a:spcAft>
+                <a:spcPts val="800"/>
+              </a:spcAft>
+            </a:pPr>
+            <a:r>
+              <a:rPr sz="1900" b="0">
+                <a:solidFill>
+                  <a:srgbClr val="1B2A4A"/>
+                </a:solidFill>
+                <a:latin typeface="Noto Sans CJK SC"/>
+              </a:rPr>
+              <a:t>▪ 01  技术背景：船舶节能的能耗痛点与 MPC 控制的下沉机遇</a:t>
+            </a:r>
+          </a:p>
+          <a:p>
+            <a:pPr algn="l">
+              <a:lnSpc>
+                <a:spcPct val="115000"/>
+              </a:lnSpc>
+              <a:spcAft>
+                <a:spcPts val="800"/>
+              </a:spcAft>
+            </a:pPr>
+            <a:r>
+              <a:rPr sz="1900" b="0">
+                <a:solidFill>
+                  <a:srgbClr val="1B2A4A"/>
+                </a:solidFill>
+                <a:latin typeface="Noto Sans CJK SC"/>
+              </a:rPr>
+              <a:t>▪ 02  MPC vs PD 自动舵：原理、效果、调试难度、参数辨识流程、实时性与稳定性</a:t>
+            </a:r>
+          </a:p>
+          <a:p>
+            <a:pPr algn="l">
+              <a:lnSpc>
+                <a:spcPct val="115000"/>
+              </a:lnSpc>
+              <a:spcAft>
+                <a:spcPts val="800"/>
+              </a:spcAft>
+            </a:pPr>
+            <a:r>
+              <a:rPr sz="1900" b="0">
+                <a:solidFill>
+                  <a:srgbClr val="1B2A4A"/>
+                </a:solidFill>
+                <a:latin typeface="Noto Sans CJK SC"/>
+              </a:rPr>
+              <a:t>▪ 03  船舶节能五大算法路线：节能率、关键数据、优缺点</a:t>
+            </a:r>
+          </a:p>
+          <a:p>
+            <a:pPr algn="l">
+              <a:lnSpc>
+                <a:spcPct val="115000"/>
+              </a:lnSpc>
+              <a:spcAft>
+                <a:spcPts val="800"/>
+              </a:spcAft>
+            </a:pPr>
+            <a:r>
+              <a:rPr sz="1900" b="0">
+                <a:solidFill>
+                  <a:srgbClr val="1B2A4A"/>
+                </a:solidFill>
+                <a:latin typeface="Noto Sans CJK SC"/>
+              </a:rPr>
+              <a:t>▪ 04  工业部署案例：规模化部署与实测细节</a:t>
+            </a:r>
+          </a:p>
+          <a:p>
+            <a:pPr algn="l">
+              <a:lnSpc>
+                <a:spcPct val="115000"/>
+              </a:lnSpc>
+              <a:spcAft>
+                <a:spcPts val="800"/>
+              </a:spcAft>
+            </a:pPr>
+            <a:r>
+              <a:rPr sz="1900" b="0">
+                <a:solidFill>
+                  <a:srgbClr val="1B2A4A"/>
+                </a:solidFill>
+                <a:latin typeface="Noto Sans CJK SC"/>
+              </a:rPr>
+              <a:t>▪ 05  技术趋势判断与本项目落地建议</a:t>
+            </a:r>
+          </a:p>
+        </p:txBody>
+      </p:sp>
+      <p:sp>
+        <p:nvSpPr>
+          <p:cNvPr id="5" name="TextBox 4"/>
+          <p:cNvSpPr txBox="1"/>
+          <p:nvPr/>
+        </p:nvSpPr>
+        <p:spPr>
+          <a:xfrm>
+            <a:off x="11475720" y="6473952"/>
+            <a:ext cx="640080" cy="320040"/>
+          </a:xfrm>
+          <a:prstGeom prst="rect">
+            <a:avLst/>
+          </a:prstGeom>
+          <a:noFill/>
+        </p:spPr>
+        <p:txBody>
+          <a:bodyPr wrap="square" anchor="t">
+            <a:spAutoFit/>
+          </a:bodyPr>
+          <a:lstStyle/>
+          <a:p>
+            <a:pPr algn="r">
+              <a:lnSpc>
+                <a:spcPct val="115000"/>
+              </a:lnSpc>
+              <a:spcAft>
+                <a:spcPts val="600"/>
+              </a:spcAft>
+            </a:pPr>
+            <a:r>
+              <a:rPr sz="1100" b="0">
+                <a:solidFill>
+                  <a:srgbClr val="666666"/>
+                </a:solidFill>
+                <a:latin typeface="Noto Sans CJK SC"/>
+              </a:rPr>
+              <a:t>2 / 21</a:t>
+            </a:r>
+          </a:p>
+        </p:txBody>
+      </p:sp>
+    </p:spTree>
+  </p:cSld>
+  <p:clrMapOvr>
+    <a:masterClrMapping/>
+  </p:clrMapOvr>
+</p:sld>
+</file>
+
+<file path=ppt/slides/slide20.xml><?xml version="1.0" encoding="utf-8"?>
+<p:sld xmlns:a="http://schemas.openxmlformats.org/drawingml/2006/main" xmlns:p="http://schemas.openxmlformats.org/presentationml/2006/main" xmlns:r="http://schemas.openxmlformats.org/officeDocument/2006/relationships">
+  <p:cSld>
+    <p:spTree>
+      <p:nvGrpSpPr>
+        <p:cNvPr id="1" name=""/>
+        <p:cNvGrpSpPr/>
+        <p:nvPr/>
+      </p:nvGrpSpPr>
+      <p:grpSpPr/>
+      <p:sp>
+        <p:nvSpPr>
+          <p:cNvPr id="2" name="Rectangle 1"/>
+          <p:cNvSpPr/>
+          <p:nvPr/>
+        </p:nvSpPr>
+        <p:spPr>
+          <a:xfrm>
+            <a:off x="0" y="0"/>
+            <a:ext cx="12191695" cy="109728"/>
+          </a:xfrm>
+          <a:prstGeom prst="rect">
+            <a:avLst/>
+          </a:prstGeom>
+          <a:solidFill>
+            <a:srgbClr val="1F77B4"/>
+          </a:solidFill>
+          <a:ln>
+            <a:noFill/>
+          </a:ln>
+        </p:spPr>
+        <p:style>
+          <a:lnRef idx="1">
+            <a:schemeClr val="accent1"/>
+          </a:lnRef>
+          <a:fillRef idx="3">
+            <a:schemeClr val="accent1"/>
+          </a:fillRef>
+          <a:effectRef idx="2">
+            <a:schemeClr val="accent1"/>
+          </a:effectRef>
+          <a:fontRef idx="minor">
+            <a:schemeClr val="lt1"/>
+          </a:fontRef>
+        </p:style>
+        <p:txBody>
+          <a:bodyPr rtlCol="0" anchor="ctr"/>
+          <a:lstStyle/>
+          <a:p>
+            <a:pPr algn="ctr"/>
+          </a:p>
+        </p:txBody>
+      </p:sp>
+      <p:sp>
+        <p:nvSpPr>
+          <p:cNvPr id="3" name="TextBox 2"/>
+          <p:cNvSpPr txBox="1"/>
+          <p:nvPr/>
+        </p:nvSpPr>
+        <p:spPr>
+          <a:xfrm>
+            <a:off x="457200" y="256032"/>
+            <a:ext cx="11247120" cy="822960"/>
+          </a:xfrm>
+          <a:prstGeom prst="rect">
+            <a:avLst/>
+          </a:prstGeom>
+          <a:noFill/>
+        </p:spPr>
+        <p:txBody>
+          <a:bodyPr wrap="square" anchor="t">
+            <a:spAutoFit/>
+          </a:bodyPr>
+          <a:lstStyle/>
+          <a:p>
+            <a:pPr algn="l">
+              <a:lnSpc>
+                <a:spcPct val="115000"/>
+              </a:lnSpc>
+              <a:spcAft>
+                <a:spcPts val="600"/>
+              </a:spcAft>
+            </a:pPr>
+            <a:r>
+              <a:rPr sz="3000" b="1">
+                <a:solidFill>
+                  <a:srgbClr val="1B2A4A"/>
+                </a:solidFill>
+                <a:latin typeface="Noto Sans CJK SC"/>
+              </a:rPr>
+              <a:t>主要数据来源</a:t>
+            </a:r>
+          </a:p>
+        </p:txBody>
+      </p:sp>
+      <p:sp>
+        <p:nvSpPr>
+          <p:cNvPr id="4" name="TextBox 3"/>
+          <p:cNvSpPr txBox="1"/>
+          <p:nvPr/>
+        </p:nvSpPr>
+        <p:spPr>
+          <a:xfrm>
+            <a:off x="475488" y="914400"/>
+            <a:ext cx="11247120" cy="457200"/>
+          </a:xfrm>
+          <a:prstGeom prst="rect">
+            <a:avLst/>
+          </a:prstGeom>
+          <a:noFill/>
+        </p:spPr>
+        <p:txBody>
+          <a:bodyPr wrap="square" anchor="t">
+            <a:spAutoFit/>
+          </a:bodyPr>
+          <a:lstStyle/>
+          <a:p>
+            <a:pPr algn="l">
+              <a:lnSpc>
+                <a:spcPct val="115000"/>
+              </a:lnSpc>
+              <a:spcAft>
+                <a:spcPts val="600"/>
+              </a:spcAft>
+            </a:pPr>
+            <a:r>
+              <a:rPr sz="1400" b="0">
+                <a:solidFill>
+                  <a:srgbClr val="666666"/>
+                </a:solidFill>
+                <a:latin typeface="Noto Sans CJK SC"/>
+              </a:rPr>
               <a:t>完整 45 条参考文献见调研文档；所有定量数据经两轮原文核对</a:t>
             </a:r>
           </a:p>
@@ -8772,7 +10296,7 @@
                 </a:solidFill>
                 <a:latin typeface="Noto Sans CJK SC"/>
               </a:rPr>
-              <a:t>18 / 19</a:t>
+              <a:t>20 / 21</a:t>
             </a:r>
           </a:p>
         </p:txBody>
@@ -8785,7 +10309,7 @@
 </p:sld>
 </file>
 
-<file path=ppt/slides/slide19.xml><?xml version="1.0" encoding="utf-8"?>
+<file path=ppt/slides/slide21.xml><?xml version="1.0" encoding="utf-8"?>
 <p:sld xmlns:a="http://schemas.openxmlformats.org/drawingml/2006/main" xmlns:p="http://schemas.openxmlformats.org/presentationml/2006/main" xmlns:r="http://schemas.openxmlformats.org/officeDocument/2006/relationships">
   <p:cSld>
     <p:spTree>
@@ -8949,7 +10473,7 @@
 </p:sld>
 </file>
 
-<file path=ppt/slides/slide2.xml><?xml version="1.0" encoding="utf-8"?>
+<file path=ppt/slides/slide3.xml><?xml version="1.0" encoding="utf-8"?>
 <p:sld xmlns:a="http://schemas.openxmlformats.org/drawingml/2006/main" xmlns:p="http://schemas.openxmlformats.org/presentationml/2006/main" xmlns:r="http://schemas.openxmlformats.org/officeDocument/2006/relationships">
   <p:cSld>
     <p:spTree>
@@ -9039,7 +10563,7 @@
                 </a:solidFill>
                 <a:latin typeface="Noto Sans CJK SC"/>
               </a:rPr>
-              <a:t>汇报提纲</a:t>
+              <a:t>技术背景：船舶节能与先进控制的双重机遇</a:t>
             </a:r>
           </a:p>
         </p:txBody>
@@ -9052,8 +10576,8 @@
         </p:nvSpPr>
         <p:spPr>
           <a:xfrm>
-            <a:off x="914400" y="1463040"/>
-            <a:ext cx="10058400" cy="5029200"/>
+            <a:off x="475488" y="914400"/>
+            <a:ext cx="11247120" cy="457200"/>
           </a:xfrm>
           <a:prstGeom prst="rect">
             <a:avLst/>
@@ -9071,17 +10595,78 @@
                 <a:spcPct val="115000"/>
               </a:lnSpc>
               <a:spcAft>
+                <a:spcPts val="600"/>
+              </a:spcAft>
+            </a:pPr>
+            <a:r>
+              <a:rPr sz="1400" b="0">
+                <a:solidFill>
+                  <a:srgbClr val="666666"/>
+                </a:solidFill>
+                <a:latin typeface="Noto Sans CJK SC"/>
+              </a:rPr>
+              <a:t>能耗痛点 + 控制理论下沉</a:t>
+            </a:r>
+          </a:p>
+        </p:txBody>
+      </p:sp>
+      <p:sp>
+        <p:nvSpPr>
+          <p:cNvPr id="5" name="TextBox 4"/>
+          <p:cNvSpPr txBox="1"/>
+          <p:nvPr/>
+        </p:nvSpPr>
+        <p:spPr>
+          <a:xfrm>
+            <a:off x="548640" y="1554480"/>
+            <a:ext cx="5852160" cy="4937760"/>
+          </a:xfrm>
+          <a:prstGeom prst="rect">
+            <a:avLst/>
+          </a:prstGeom>
+          <a:noFill/>
+        </p:spPr>
+        <p:txBody>
+          <a:bodyPr wrap="square" anchor="t">
+            <a:spAutoFit/>
+          </a:bodyPr>
+          <a:lstStyle/>
+          <a:p>
+            <a:pPr algn="l">
+              <a:lnSpc>
+                <a:spcPct val="115000"/>
+              </a:lnSpc>
+              <a:spcAft>
                 <a:spcPts val="800"/>
               </a:spcAft>
             </a:pPr>
             <a:r>
-              <a:rPr sz="1900" b="0">
+              <a:rPr sz="1500" b="1">
+                <a:solidFill>
+                  <a:srgbClr val="1F77B4"/>
+                </a:solidFill>
+                <a:latin typeface="Noto Sans CJK SC"/>
+              </a:rPr>
+              <a:t>▪ 船舶运营中的能耗痛点</a:t>
+            </a:r>
+          </a:p>
+          <a:p>
+            <a:pPr algn="l">
+              <a:lnSpc>
+                <a:spcPct val="115000"/>
+              </a:lnSpc>
+              <a:spcAft>
+                <a:spcPts val="400"/>
+              </a:spcAft>
+            </a:pPr>
+            <a:r>
+              <a:rPr sz="1350" b="0">
                 <a:solidFill>
                   <a:srgbClr val="1B2A4A"/>
                 </a:solidFill>
                 <a:latin typeface="Noto Sans CJK SC"/>
               </a:rPr>
-              <a:t>▪ 01  技术背景：船舶节能的能耗痛点与 MPC 控制的下沉机遇</a:t>
+              <a:t>    – 推进能耗是船舶运营能耗的主体，效率提升直接折算为成本下降</a:t>
             </a:r>
           </a:p>
           <a:p>
@@ -9090,17 +10675,74 @@
                 <a:spcPct val="115000"/>
               </a:lnSpc>
               <a:spcAft>
+                <a:spcPts val="400"/>
+              </a:spcAft>
+            </a:pPr>
+            <a:r>
+              <a:rPr sz="1350" b="0">
+                <a:solidFill>
+                  <a:srgbClr val="1B2A4A"/>
+                </a:solidFill>
+                <a:latin typeface="Noto Sans CJK SC"/>
+              </a:rPr>
+              <a:t>    – 无效操舵增加舵致附加阻力与舵机磨损：自适应操舵平均减少舵动作约 25%（Anschütz 运营数据）</a:t>
+            </a:r>
+          </a:p>
+          <a:p>
+            <a:pPr algn="l">
+              <a:lnSpc>
+                <a:spcPct val="115000"/>
+              </a:lnSpc>
+              <a:spcAft>
+                <a:spcPts val="400"/>
+              </a:spcAft>
+            </a:pPr>
+            <a:r>
+              <a:rPr sz="1350" b="0">
+                <a:solidFill>
+                  <a:srgbClr val="1B2A4A"/>
+                </a:solidFill>
+                <a:latin typeface="Noto Sans CJK SC"/>
+              </a:rPr>
+              <a:t>    – 风浪流干扰下的航向/航迹偏差放大实际航程</a:t>
+            </a:r>
+          </a:p>
+          <a:p>
+            <a:pPr algn="l">
+              <a:lnSpc>
+                <a:spcPct val="115000"/>
+              </a:lnSpc>
+              <a:spcAft>
                 <a:spcPts val="800"/>
               </a:spcAft>
             </a:pPr>
             <a:r>
-              <a:rPr sz="1900" b="0">
+              <a:rPr sz="1500" b="1">
+                <a:solidFill>
+                  <a:srgbClr val="1F77B4"/>
+                </a:solidFill>
+                <a:latin typeface="Noto Sans CJK SC"/>
+              </a:rPr>
+              <a:t>▪ MPC 向船舶控制下沉</a:t>
+            </a:r>
+          </a:p>
+          <a:p>
+            <a:pPr algn="l">
+              <a:lnSpc>
+                <a:spcPct val="115000"/>
+              </a:lnSpc>
+              <a:spcAft>
+                <a:spcPts val="400"/>
+              </a:spcAft>
+            </a:pPr>
+            <a:r>
+              <a:rPr sz="1350" b="0">
                 <a:solidFill>
                   <a:srgbClr val="1B2A4A"/>
                 </a:solidFill>
                 <a:latin typeface="Noto Sans CJK SC"/>
               </a:rPr>
-              <a:t>▪ 02  MPC vs PD 自动舵：原理、控制效果、证据强度、调试难度、实时性与稳定性</a:t>
+              <a:t>    – 嵌入式 QP 求解器成熟：水下机器人实测 7 ms @ 20 Hz（acados，JMSE 2024）</a:t>
             </a:r>
           </a:p>
           <a:p>
@@ -9109,17 +10751,17 @@
                 <a:spcPct val="115000"/>
               </a:lnSpc>
               <a:spcAft>
-                <a:spcPts val="800"/>
-              </a:spcAft>
-            </a:pPr>
-            <a:r>
-              <a:rPr sz="1900" b="0">
+                <a:spcPts val="400"/>
+              </a:spcAft>
+            </a:pPr>
+            <a:r>
+              <a:rPr sz="1350" b="0">
                 <a:solidFill>
                   <a:srgbClr val="1B2A4A"/>
                 </a:solidFill>
                 <a:latin typeface="Noto Sans CJK SC"/>
               </a:rPr>
-              <a:t>▪ 03  船舶节能五大算法路线：节能率、关键数据、优缺点</a:t>
+              <a:t>    – 船舶航向动态慢（控制周期 0.1–0.2 s），算力足够</a:t>
             </a:r>
           </a:p>
           <a:p>
@@ -9128,43 +10770,90 @@
                 <a:spcPct val="115000"/>
               </a:lnSpc>
               <a:spcAft>
-                <a:spcPts val="800"/>
-              </a:spcAft>
-            </a:pPr>
-            <a:r>
-              <a:rPr sz="1900" b="0">
+                <a:spcPts val="400"/>
+              </a:spcAft>
+            </a:pPr>
+            <a:r>
+              <a:rPr sz="1350" b="0">
                 <a:solidFill>
                   <a:srgbClr val="1B2A4A"/>
                 </a:solidFill>
                 <a:latin typeface="Noto Sans CJK SC"/>
               </a:rPr>
-              <a:t>▪ 04  工业部署案例：规模化部署与实测细节</a:t>
-            </a:r>
-          </a:p>
-          <a:p>
-            <a:pPr algn="l">
-              <a:lnSpc>
-                <a:spcPct val="115000"/>
-              </a:lnSpc>
-              <a:spcAft>
-                <a:spcPts val="800"/>
-              </a:spcAft>
-            </a:pPr>
-            <a:r>
-              <a:rPr sz="1900" b="0">
-                <a:solidFill>
-                  <a:srgbClr val="1B2A4A"/>
-                </a:solidFill>
-                <a:latin typeface="Noto Sans CJK SC"/>
-              </a:rPr>
-              <a:t>▪ 05  技术趋势判断与本项目落地建议</a:t>
-            </a:r>
-          </a:p>
-        </p:txBody>
-      </p:sp>
-      <p:sp>
-        <p:nvSpPr>
-          <p:cNvPr id="5" name="TextBox 4"/>
+              <a:t>    – 学术界大量仿真/船模成果，实船落地仍少</a:t>
+            </a:r>
+          </a:p>
+        </p:txBody>
+      </p:sp>
+      <p:pic>
+        <p:nvPicPr>
+          <p:cNvPr id="6" name="Picture 5" descr="fig6_architecture.png"/>
+          <p:cNvPicPr>
+            <a:picLocks noChangeAspect="1"/>
+          </p:cNvPicPr>
+          <p:nvPr/>
+        </p:nvPicPr>
+        <p:blipFill>
+          <a:blip r:embed="rId2"/>
+          <a:stretch>
+            <a:fillRect/>
+          </a:stretch>
+        </p:blipFill>
+        <p:spPr>
+          <a:xfrm>
+            <a:off x="6492240" y="2359152"/>
+            <a:ext cx="5394960" cy="3236976"/>
+          </a:xfrm>
+          <a:prstGeom prst="rect">
+            <a:avLst/>
+          </a:prstGeom>
+        </p:spPr>
+      </p:pic>
+      <p:sp>
+        <p:nvSpPr>
+          <p:cNvPr id="7" name="TextBox 6"/>
+          <p:cNvSpPr txBox="1"/>
+          <p:nvPr/>
+        </p:nvSpPr>
+        <p:spPr>
+          <a:xfrm>
+            <a:off x="6492240" y="6309360"/>
+            <a:ext cx="5394960" cy="365760"/>
+          </a:xfrm>
+          <a:prstGeom prst="rect">
+            <a:avLst/>
+          </a:prstGeom>
+          <a:noFill/>
+        </p:spPr>
+        <p:txBody>
+          <a:bodyPr wrap="square" anchor="t">
+            <a:spAutoFit/>
+          </a:bodyPr>
+          <a:lstStyle/>
+          <a:p>
+            <a:pPr algn="ctr">
+              <a:lnSpc>
+                <a:spcPct val="115000"/>
+              </a:lnSpc>
+              <a:spcAft>
+                <a:spcPts val="600"/>
+              </a:spcAft>
+            </a:pPr>
+            <a:r>
+              <a:rPr sz="1200" b="0">
+                <a:solidFill>
+                  <a:srgbClr val="666666"/>
+                </a:solidFill>
+                <a:latin typeface="Noto Sans CJK SC"/>
+              </a:rPr>
+              <a:t>船舶节能分层架构总览</a:t>
+            </a:r>
+          </a:p>
+        </p:txBody>
+      </p:sp>
+      <p:sp>
+        <p:nvSpPr>
+          <p:cNvPr id="8" name="TextBox 7"/>
           <p:cNvSpPr txBox="1"/>
           <p:nvPr/>
         </p:nvSpPr>
@@ -9199,7 +10888,49 @@
                 </a:solidFill>
                 <a:latin typeface="Noto Sans CJK SC"/>
               </a:rPr>
-              <a:t>2 / 19</a:t>
+              <a:t>3 / 21</a:t>
+            </a:r>
+          </a:p>
+        </p:txBody>
+      </p:sp>
+      <p:sp>
+        <p:nvSpPr>
+          <p:cNvPr id="9" name="TextBox 8"/>
+          <p:cNvSpPr txBox="1"/>
+          <p:nvPr/>
+        </p:nvSpPr>
+        <p:spPr>
+          <a:xfrm>
+            <a:off x="457200" y="6492240"/>
+            <a:ext cx="10881360" cy="310896"/>
+          </a:xfrm>
+          <a:prstGeom prst="rect">
+            <a:avLst/>
+          </a:prstGeom>
+          <a:noFill/>
+        </p:spPr>
+        <p:txBody>
+          <a:bodyPr wrap="square" anchor="t">
+            <a:spAutoFit/>
+          </a:bodyPr>
+          <a:lstStyle/>
+          <a:p>
+            <a:pPr algn="l">
+              <a:lnSpc>
+                <a:spcPct val="115000"/>
+              </a:lnSpc>
+              <a:spcAft>
+                <a:spcPts val="600"/>
+              </a:spcAft>
+            </a:pPr>
+            <a:r>
+              <a:rPr sz="850" b="0">
+                <a:solidFill>
+                  <a:srgbClr val="666666"/>
+                </a:solidFill>
+                <a:latin typeface="Noto Sans CJK SC"/>
+              </a:rPr>
+              <a:t>来源：https://www.anschuetz.com/news/article/want-to-know-how-efficiently-your-ship-steers ｜ https://www.mdpi.com/2077-1312/12/1/94</a:t>
             </a:r>
           </a:p>
         </p:txBody>
@@ -9212,7 +10943,7 @@
 </p:sld>
 </file>
 
-<file path=ppt/slides/slide3.xml><?xml version="1.0" encoding="utf-8"?>
+<file path=ppt/slides/slide4.xml><?xml version="1.0" encoding="utf-8"?>
 <p:sld xmlns:a="http://schemas.openxmlformats.org/drawingml/2006/main" xmlns:p="http://schemas.openxmlformats.org/presentationml/2006/main" xmlns:r="http://schemas.openxmlformats.org/officeDocument/2006/relationships">
   <p:cSld>
     <p:spTree>
@@ -9302,476 +11033,6 @@
                 </a:solidFill>
                 <a:latin typeface="Noto Sans CJK SC"/>
               </a:rPr>
-              <a:t>技术背景：船舶节能与先进控制的双重机遇</a:t>
-            </a:r>
-          </a:p>
-        </p:txBody>
-      </p:sp>
-      <p:sp>
-        <p:nvSpPr>
-          <p:cNvPr id="4" name="TextBox 3"/>
-          <p:cNvSpPr txBox="1"/>
-          <p:nvPr/>
-        </p:nvSpPr>
-        <p:spPr>
-          <a:xfrm>
-            <a:off x="475488" y="914400"/>
-            <a:ext cx="11247120" cy="457200"/>
-          </a:xfrm>
-          <a:prstGeom prst="rect">
-            <a:avLst/>
-          </a:prstGeom>
-          <a:noFill/>
-        </p:spPr>
-        <p:txBody>
-          <a:bodyPr wrap="square" anchor="t">
-            <a:spAutoFit/>
-          </a:bodyPr>
-          <a:lstStyle/>
-          <a:p>
-            <a:pPr algn="l">
-              <a:lnSpc>
-                <a:spcPct val="115000"/>
-              </a:lnSpc>
-              <a:spcAft>
-                <a:spcPts val="600"/>
-              </a:spcAft>
-            </a:pPr>
-            <a:r>
-              <a:rPr sz="1400" b="0">
-                <a:solidFill>
-                  <a:srgbClr val="666666"/>
-                </a:solidFill>
-                <a:latin typeface="Noto Sans CJK SC"/>
-              </a:rPr>
-              <a:t>能耗痛点 + 控制理论下沉</a:t>
-            </a:r>
-          </a:p>
-        </p:txBody>
-      </p:sp>
-      <p:sp>
-        <p:nvSpPr>
-          <p:cNvPr id="5" name="TextBox 4"/>
-          <p:cNvSpPr txBox="1"/>
-          <p:nvPr/>
-        </p:nvSpPr>
-        <p:spPr>
-          <a:xfrm>
-            <a:off x="548640" y="1554480"/>
-            <a:ext cx="5852160" cy="4937760"/>
-          </a:xfrm>
-          <a:prstGeom prst="rect">
-            <a:avLst/>
-          </a:prstGeom>
-          <a:noFill/>
-        </p:spPr>
-        <p:txBody>
-          <a:bodyPr wrap="square" anchor="t">
-            <a:spAutoFit/>
-          </a:bodyPr>
-          <a:lstStyle/>
-          <a:p>
-            <a:pPr algn="l">
-              <a:lnSpc>
-                <a:spcPct val="115000"/>
-              </a:lnSpc>
-              <a:spcAft>
-                <a:spcPts val="800"/>
-              </a:spcAft>
-            </a:pPr>
-            <a:r>
-              <a:rPr sz="1500" b="1">
-                <a:solidFill>
-                  <a:srgbClr val="1F77B4"/>
-                </a:solidFill>
-                <a:latin typeface="Noto Sans CJK SC"/>
-              </a:rPr>
-              <a:t>▪ 船舶运营中的能耗痛点</a:t>
-            </a:r>
-          </a:p>
-          <a:p>
-            <a:pPr algn="l">
-              <a:lnSpc>
-                <a:spcPct val="115000"/>
-              </a:lnSpc>
-              <a:spcAft>
-                <a:spcPts val="400"/>
-              </a:spcAft>
-            </a:pPr>
-            <a:r>
-              <a:rPr sz="1350" b="0">
-                <a:solidFill>
-                  <a:srgbClr val="1B2A4A"/>
-                </a:solidFill>
-                <a:latin typeface="Noto Sans CJK SC"/>
-              </a:rPr>
-              <a:t>    – 推进能耗是船舶运营能耗的主体，效率提升直接折算为成本下降</a:t>
-            </a:r>
-          </a:p>
-          <a:p>
-            <a:pPr algn="l">
-              <a:lnSpc>
-                <a:spcPct val="115000"/>
-              </a:lnSpc>
-              <a:spcAft>
-                <a:spcPts val="400"/>
-              </a:spcAft>
-            </a:pPr>
-            <a:r>
-              <a:rPr sz="1350" b="0">
-                <a:solidFill>
-                  <a:srgbClr val="1B2A4A"/>
-                </a:solidFill>
-                <a:latin typeface="Noto Sans CJK SC"/>
-              </a:rPr>
-              <a:t>    – 无效操舵增加舵致附加阻力与舵机磨损：自适应操舵平均减少舵动作约 25%（Anschütz 运营数据）</a:t>
-            </a:r>
-          </a:p>
-          <a:p>
-            <a:pPr algn="l">
-              <a:lnSpc>
-                <a:spcPct val="115000"/>
-              </a:lnSpc>
-              <a:spcAft>
-                <a:spcPts val="400"/>
-              </a:spcAft>
-            </a:pPr>
-            <a:r>
-              <a:rPr sz="1350" b="0">
-                <a:solidFill>
-                  <a:srgbClr val="1B2A4A"/>
-                </a:solidFill>
-                <a:latin typeface="Noto Sans CJK SC"/>
-              </a:rPr>
-              <a:t>    – 风浪流干扰下的航向/航迹偏差放大实际航程</a:t>
-            </a:r>
-          </a:p>
-          <a:p>
-            <a:pPr algn="l">
-              <a:lnSpc>
-                <a:spcPct val="115000"/>
-              </a:lnSpc>
-              <a:spcAft>
-                <a:spcPts val="800"/>
-              </a:spcAft>
-            </a:pPr>
-            <a:r>
-              <a:rPr sz="1500" b="1">
-                <a:solidFill>
-                  <a:srgbClr val="1F77B4"/>
-                </a:solidFill>
-                <a:latin typeface="Noto Sans CJK SC"/>
-              </a:rPr>
-              <a:t>▪ MPC 向船舶控制下沉</a:t>
-            </a:r>
-          </a:p>
-          <a:p>
-            <a:pPr algn="l">
-              <a:lnSpc>
-                <a:spcPct val="115000"/>
-              </a:lnSpc>
-              <a:spcAft>
-                <a:spcPts val="400"/>
-              </a:spcAft>
-            </a:pPr>
-            <a:r>
-              <a:rPr sz="1350" b="0">
-                <a:solidFill>
-                  <a:srgbClr val="1B2A4A"/>
-                </a:solidFill>
-                <a:latin typeface="Noto Sans CJK SC"/>
-              </a:rPr>
-              <a:t>    – 嵌入式 QP 求解器成熟：水下机器人实测 7 ms @ 20 Hz（acados，JMSE 2024）</a:t>
-            </a:r>
-          </a:p>
-          <a:p>
-            <a:pPr algn="l">
-              <a:lnSpc>
-                <a:spcPct val="115000"/>
-              </a:lnSpc>
-              <a:spcAft>
-                <a:spcPts val="400"/>
-              </a:spcAft>
-            </a:pPr>
-            <a:r>
-              <a:rPr sz="1350" b="0">
-                <a:solidFill>
-                  <a:srgbClr val="1B2A4A"/>
-                </a:solidFill>
-                <a:latin typeface="Noto Sans CJK SC"/>
-              </a:rPr>
-              <a:t>    – 船舶航向动态慢（控制周期 0.1–0.2 s），算力足够</a:t>
-            </a:r>
-          </a:p>
-          <a:p>
-            <a:pPr algn="l">
-              <a:lnSpc>
-                <a:spcPct val="115000"/>
-              </a:lnSpc>
-              <a:spcAft>
-                <a:spcPts val="400"/>
-              </a:spcAft>
-            </a:pPr>
-            <a:r>
-              <a:rPr sz="1350" b="0">
-                <a:solidFill>
-                  <a:srgbClr val="1B2A4A"/>
-                </a:solidFill>
-                <a:latin typeface="Noto Sans CJK SC"/>
-              </a:rPr>
-              <a:t>    – 学术界大量仿真/船模成果，实船落地仍少</a:t>
-            </a:r>
-          </a:p>
-        </p:txBody>
-      </p:sp>
-      <p:pic>
-        <p:nvPicPr>
-          <p:cNvPr id="6" name="Picture 5" descr="fig6_architecture.png"/>
-          <p:cNvPicPr>
-            <a:picLocks noChangeAspect="1"/>
-          </p:cNvPicPr>
-          <p:nvPr/>
-        </p:nvPicPr>
-        <p:blipFill>
-          <a:blip r:embed="rId2"/>
-          <a:stretch>
-            <a:fillRect/>
-          </a:stretch>
-        </p:blipFill>
-        <p:spPr>
-          <a:xfrm>
-            <a:off x="6492240" y="2359152"/>
-            <a:ext cx="5394960" cy="3236976"/>
-          </a:xfrm>
-          <a:prstGeom prst="rect">
-            <a:avLst/>
-          </a:prstGeom>
-        </p:spPr>
-      </p:pic>
-      <p:sp>
-        <p:nvSpPr>
-          <p:cNvPr id="7" name="TextBox 6"/>
-          <p:cNvSpPr txBox="1"/>
-          <p:nvPr/>
-        </p:nvSpPr>
-        <p:spPr>
-          <a:xfrm>
-            <a:off x="6492240" y="6309360"/>
-            <a:ext cx="5394960" cy="365760"/>
-          </a:xfrm>
-          <a:prstGeom prst="rect">
-            <a:avLst/>
-          </a:prstGeom>
-          <a:noFill/>
-        </p:spPr>
-        <p:txBody>
-          <a:bodyPr wrap="square" anchor="t">
-            <a:spAutoFit/>
-          </a:bodyPr>
-          <a:lstStyle/>
-          <a:p>
-            <a:pPr algn="ctr">
-              <a:lnSpc>
-                <a:spcPct val="115000"/>
-              </a:lnSpc>
-              <a:spcAft>
-                <a:spcPts val="600"/>
-              </a:spcAft>
-            </a:pPr>
-            <a:r>
-              <a:rPr sz="1200" b="0">
-                <a:solidFill>
-                  <a:srgbClr val="666666"/>
-                </a:solidFill>
-                <a:latin typeface="Noto Sans CJK SC"/>
-              </a:rPr>
-              <a:t>船舶节能分层架构总览</a:t>
-            </a:r>
-          </a:p>
-        </p:txBody>
-      </p:sp>
-      <p:sp>
-        <p:nvSpPr>
-          <p:cNvPr id="8" name="TextBox 7"/>
-          <p:cNvSpPr txBox="1"/>
-          <p:nvPr/>
-        </p:nvSpPr>
-        <p:spPr>
-          <a:xfrm>
-            <a:off x="11475720" y="6473952"/>
-            <a:ext cx="640080" cy="320040"/>
-          </a:xfrm>
-          <a:prstGeom prst="rect">
-            <a:avLst/>
-          </a:prstGeom>
-          <a:noFill/>
-        </p:spPr>
-        <p:txBody>
-          <a:bodyPr wrap="square" anchor="t">
-            <a:spAutoFit/>
-          </a:bodyPr>
-          <a:lstStyle/>
-          <a:p>
-            <a:pPr algn="r">
-              <a:lnSpc>
-                <a:spcPct val="115000"/>
-              </a:lnSpc>
-              <a:spcAft>
-                <a:spcPts val="600"/>
-              </a:spcAft>
-            </a:pPr>
-            <a:r>
-              <a:rPr sz="1100" b="0">
-                <a:solidFill>
-                  <a:srgbClr val="666666"/>
-                </a:solidFill>
-                <a:latin typeface="Noto Sans CJK SC"/>
-              </a:rPr>
-              <a:t>3 / 19</a:t>
-            </a:r>
-          </a:p>
-        </p:txBody>
-      </p:sp>
-      <p:sp>
-        <p:nvSpPr>
-          <p:cNvPr id="9" name="TextBox 8"/>
-          <p:cNvSpPr txBox="1"/>
-          <p:nvPr/>
-        </p:nvSpPr>
-        <p:spPr>
-          <a:xfrm>
-            <a:off x="457200" y="6492240"/>
-            <a:ext cx="10881360" cy="310896"/>
-          </a:xfrm>
-          <a:prstGeom prst="rect">
-            <a:avLst/>
-          </a:prstGeom>
-          <a:noFill/>
-        </p:spPr>
-        <p:txBody>
-          <a:bodyPr wrap="square" anchor="t">
-            <a:spAutoFit/>
-          </a:bodyPr>
-          <a:lstStyle/>
-          <a:p>
-            <a:pPr algn="l">
-              <a:lnSpc>
-                <a:spcPct val="115000"/>
-              </a:lnSpc>
-              <a:spcAft>
-                <a:spcPts val="600"/>
-              </a:spcAft>
-            </a:pPr>
-            <a:r>
-              <a:rPr sz="850" b="0">
-                <a:solidFill>
-                  <a:srgbClr val="666666"/>
-                </a:solidFill>
-                <a:latin typeface="Noto Sans CJK SC"/>
-              </a:rPr>
-              <a:t>来源：https://www.anschuetz.com/news/article/want-to-know-how-efficiently-your-ship-steers ｜ https://www.mdpi.com/2077-1312/12/1/94</a:t>
-            </a:r>
-          </a:p>
-        </p:txBody>
-      </p:sp>
-    </p:spTree>
-  </p:cSld>
-  <p:clrMapOvr>
-    <a:masterClrMapping/>
-  </p:clrMapOvr>
-</p:sld>
-</file>
-
-<file path=ppt/slides/slide4.xml><?xml version="1.0" encoding="utf-8"?>
-<p:sld xmlns:a="http://schemas.openxmlformats.org/drawingml/2006/main" xmlns:p="http://schemas.openxmlformats.org/presentationml/2006/main" xmlns:r="http://schemas.openxmlformats.org/officeDocument/2006/relationships">
-  <p:cSld>
-    <p:spTree>
-      <p:nvGrpSpPr>
-        <p:cNvPr id="1" name=""/>
-        <p:cNvGrpSpPr/>
-        <p:nvPr/>
-      </p:nvGrpSpPr>
-      <p:grpSpPr/>
-      <p:sp>
-        <p:nvSpPr>
-          <p:cNvPr id="2" name="Rectangle 1"/>
-          <p:cNvSpPr/>
-          <p:nvPr/>
-        </p:nvSpPr>
-        <p:spPr>
-          <a:xfrm>
-            <a:off x="0" y="0"/>
-            <a:ext cx="12191695" cy="109728"/>
-          </a:xfrm>
-          <a:prstGeom prst="rect">
-            <a:avLst/>
-          </a:prstGeom>
-          <a:solidFill>
-            <a:srgbClr val="1F77B4"/>
-          </a:solidFill>
-          <a:ln>
-            <a:noFill/>
-          </a:ln>
-        </p:spPr>
-        <p:style>
-          <a:lnRef idx="1">
-            <a:schemeClr val="accent1"/>
-          </a:lnRef>
-          <a:fillRef idx="3">
-            <a:schemeClr val="accent1"/>
-          </a:fillRef>
-          <a:effectRef idx="2">
-            <a:schemeClr val="accent1"/>
-          </a:effectRef>
-          <a:fontRef idx="minor">
-            <a:schemeClr val="lt1"/>
-          </a:fontRef>
-        </p:style>
-        <p:txBody>
-          <a:bodyPr rtlCol="0" anchor="ctr"/>
-          <a:lstStyle/>
-          <a:p>
-            <a:pPr algn="ctr"/>
-          </a:p>
-        </p:txBody>
-      </p:sp>
-      <p:sp>
-        <p:nvSpPr>
-          <p:cNvPr id="3" name="TextBox 2"/>
-          <p:cNvSpPr txBox="1"/>
-          <p:nvPr/>
-        </p:nvSpPr>
-        <p:spPr>
-          <a:xfrm>
-            <a:off x="457200" y="256032"/>
-            <a:ext cx="11247120" cy="822960"/>
-          </a:xfrm>
-          <a:prstGeom prst="rect">
-            <a:avLst/>
-          </a:prstGeom>
-          <a:noFill/>
-        </p:spPr>
-        <p:txBody>
-          <a:bodyPr wrap="square" anchor="t">
-            <a:spAutoFit/>
-          </a:bodyPr>
-          <a:lstStyle/>
-          <a:p>
-            <a:pPr algn="l">
-              <a:lnSpc>
-                <a:spcPct val="115000"/>
-              </a:lnSpc>
-              <a:spcAft>
-                <a:spcPts val="600"/>
-              </a:spcAft>
-            </a:pPr>
-            <a:r>
-              <a:rPr sz="3000" b="1">
-                <a:solidFill>
-                  <a:srgbClr val="1B2A4A"/>
-                </a:solidFill>
-                <a:latin typeface="Noto Sans CJK SC"/>
-              </a:rPr>
               <a:t>MPC vs PD：原理差异</a:t>
             </a:r>
           </a:p>
@@ -10074,7 +11335,7 @@
                 </a:solidFill>
                 <a:latin typeface="Noto Sans CJK SC"/>
               </a:rPr>
-              <a:t>4 / 19</a:t>
+              <a:t>4 / 21</a:t>
             </a:r>
           </a:p>
         </p:txBody>
@@ -10806,7 +12067,7 @@
                 </a:solidFill>
                 <a:latin typeface="Noto Sans CJK SC"/>
               </a:rPr>
-              <a:t>5 / 19</a:t>
+              <a:t>5 / 21</a:t>
             </a:r>
           </a:p>
         </p:txBody>
@@ -11598,7 +12859,7 @@
                 </a:solidFill>
                 <a:latin typeface="Noto Sans CJK SC"/>
               </a:rPr>
-              <a:t>6 / 19</a:t>
+              <a:t>6 / 21</a:t>
             </a:r>
           </a:p>
         </p:txBody>
@@ -12045,7 +13306,7 @@
                 </a:solidFill>
                 <a:latin typeface="Noto Sans CJK SC"/>
               </a:rPr>
-              <a:t>7 / 19</a:t>
+              <a:t>7 / 21</a:t>
             </a:r>
           </a:p>
         </p:txBody>
@@ -12190,7 +13451,7 @@
                 </a:solidFill>
                 <a:latin typeface="Noto Sans CJK SC"/>
               </a:rPr>
-              <a:t>MPC 工程化两个关键问题：实时性与稳定性</a:t>
+              <a:t>参数辨识流程对比：PD（Nomoto）vs MPC（MMG）</a:t>
             </a:r>
           </a:p>
         </p:txBody>
@@ -12232,21 +13493,45 @@
                 </a:solidFill>
                 <a:latin typeface="Noto Sans CJK SC"/>
               </a:rPr>
-              <a:t>均有文献实测数据支撑</a:t>
-            </a:r>
-          </a:p>
-        </p:txBody>
-      </p:sp>
-      <p:sp>
-        <p:nvSpPr>
-          <p:cNvPr id="5" name="TextBox 4"/>
+              <a:t>上行：本项目已实现的 PD 整定链路；下行：基于 MMG 方程的 MPC 目标方案辨识链路</a:t>
+            </a:r>
+          </a:p>
+        </p:txBody>
+      </p:sp>
+      <p:pic>
+        <p:nvPicPr>
+          <p:cNvPr id="5" name="Picture 4" descr="fig7_ident_flows.png"/>
+          <p:cNvPicPr>
+            <a:picLocks noChangeAspect="1"/>
+          </p:cNvPicPr>
+          <p:nvPr/>
+        </p:nvPicPr>
+        <p:blipFill>
+          <a:blip r:embed="rId2"/>
+          <a:stretch>
+            <a:fillRect/>
+          </a:stretch>
+        </p:blipFill>
+        <p:spPr>
+          <a:xfrm>
+            <a:off x="1783080" y="1508760"/>
+            <a:ext cx="8595360" cy="4297680"/>
+          </a:xfrm>
+          <a:prstGeom prst="rect">
+            <a:avLst/>
+          </a:prstGeom>
+        </p:spPr>
+      </p:pic>
+      <p:sp>
+        <p:nvSpPr>
+          <p:cNvPr id="6" name="TextBox 5"/>
           <p:cNvSpPr txBox="1"/>
           <p:nvPr/>
         </p:nvSpPr>
         <p:spPr>
           <a:xfrm>
-            <a:off x="548640" y="1554480"/>
-            <a:ext cx="5669280" cy="5120640"/>
+            <a:off x="457200" y="5943600"/>
+            <a:ext cx="11338560" cy="502920"/>
           </a:xfrm>
           <a:prstGeom prst="rect">
             <a:avLst/>
@@ -12264,268 +13549,17 @@
                 <a:spcPct val="115000"/>
               </a:lnSpc>
               <a:spcAft>
-                <a:spcPts val="800"/>
-              </a:spcAft>
-            </a:pPr>
-            <a:r>
-              <a:rPr sz="1400" b="1">
-                <a:solidFill>
-                  <a:srgbClr val="1F77B4"/>
-                </a:solidFill>
-                <a:latin typeface="Noto Sans CJK SC"/>
-              </a:rPr>
-              <a:t>▪ 实时性：船舶慢动态下可满足</a:t>
-            </a:r>
-          </a:p>
-          <a:p>
-            <a:pPr algn="l">
-              <a:lnSpc>
-                <a:spcPct val="115000"/>
-              </a:lnSpc>
-              <a:spcAft>
-                <a:spcPts val="400"/>
-              </a:spcAft>
-            </a:pPr>
-            <a:r>
-              <a:rPr sz="1250" b="0">
+                <a:spcPts val="600"/>
+              </a:spcAft>
+            </a:pPr>
+            <a:r>
+              <a:rPr sz="1350" b="1">
                 <a:solidFill>
                   <a:srgbClr val="1B2A4A"/>
                 </a:solidFill>
                 <a:latin typeface="Noto Sans CJK SC"/>
               </a:rPr>
-              <a:t>    – 船舶航向控制周期 0.1–0.2 s 足够（He 2023 船模 8 Hz）</a:t>
-            </a:r>
-          </a:p>
-          <a:p>
-            <a:pPr algn="l">
-              <a:lnSpc>
-                <a:spcPct val="115000"/>
-              </a:lnSpc>
-              <a:spcAft>
-                <a:spcPts val="400"/>
-              </a:spcAft>
-            </a:pPr>
-            <a:r>
-              <a:rPr sz="1250" b="0">
-                <a:solidFill>
-                  <a:srgbClr val="1B2A4A"/>
-                </a:solidFill>
-                <a:latin typeface="Noto Sans CJK SC"/>
-              </a:rPr>
-              <a:t>    – acados 实测：预测时域 60、20 Hz 下平均求解 7 ms，仅占采样周期 14%（Hu 2024，JMSE）</a:t>
-            </a:r>
-          </a:p>
-          <a:p>
-            <a:pPr algn="l">
-              <a:lnSpc>
-                <a:spcPct val="115000"/>
-              </a:lnSpc>
-              <a:spcAft>
-                <a:spcPts val="400"/>
-              </a:spcAft>
-            </a:pPr>
-            <a:r>
-              <a:rPr sz="1250" b="0">
-                <a:solidFill>
-                  <a:srgbClr val="1B2A4A"/>
-                </a:solidFill>
-                <a:latin typeface="Noto Sans CJK SC"/>
-              </a:rPr>
-              <a:t>    – 嵌入式平台（x86/ARM）QP 求解器基准：HPIPM 长时域最快；OSQP 热启动稳定可用（arXiv 2510.21773）</a:t>
-            </a:r>
-          </a:p>
-          <a:p>
-            <a:pPr algn="l">
-              <a:lnSpc>
-                <a:spcPct val="115000"/>
-              </a:lnSpc>
-              <a:spcAft>
-                <a:spcPts val="400"/>
-              </a:spcAft>
-            </a:pPr>
-            <a:r>
-              <a:rPr sz="1250" b="0">
-                <a:solidFill>
-                  <a:srgbClr val="1B2A4A"/>
-                </a:solidFill>
-                <a:latin typeface="Noto Sans CJK SC"/>
-              </a:rPr>
-              <a:t>    – 可选求解器：OSQP / qpSWIFT / acados / HPIPM</a:t>
-            </a:r>
-          </a:p>
-          <a:p>
-            <a:pPr algn="l">
-              <a:lnSpc>
-                <a:spcPct val="115000"/>
-              </a:lnSpc>
-              <a:spcAft>
-                <a:spcPts val="400"/>
-              </a:spcAft>
-            </a:pPr>
-            <a:r>
-              <a:rPr sz="1250" b="0">
-                <a:solidFill>
-                  <a:srgbClr val="1B2A4A"/>
-                </a:solidFill>
-                <a:latin typeface="Noto Sans CJK SC"/>
-              </a:rPr>
-              <a:t>    – 自主拖船 MPC 采样 0.2 s（You et al., 2024，UCL）</a:t>
-            </a:r>
-          </a:p>
-        </p:txBody>
-      </p:sp>
-      <p:sp>
-        <p:nvSpPr>
-          <p:cNvPr id="6" name="TextBox 5"/>
-          <p:cNvSpPr txBox="1"/>
-          <p:nvPr/>
-        </p:nvSpPr>
-        <p:spPr>
-          <a:xfrm>
-            <a:off x="6400800" y="1554480"/>
-            <a:ext cx="5486400" cy="5120640"/>
-          </a:xfrm>
-          <a:prstGeom prst="rect">
-            <a:avLst/>
-          </a:prstGeom>
-          <a:noFill/>
-        </p:spPr>
-        <p:txBody>
-          <a:bodyPr wrap="square" anchor="t">
-            <a:spAutoFit/>
-          </a:bodyPr>
-          <a:lstStyle/>
-          <a:p>
-            <a:pPr algn="l">
-              <a:lnSpc>
-                <a:spcPct val="115000"/>
-              </a:lnSpc>
-              <a:spcAft>
-                <a:spcPts val="800"/>
-              </a:spcAft>
-            </a:pPr>
-            <a:r>
-              <a:rPr sz="1400" b="1">
-                <a:solidFill>
-                  <a:srgbClr val="E87D0D"/>
-                </a:solidFill>
-                <a:latin typeface="Noto Sans CJK SC"/>
-              </a:rPr>
-              <a:t>▪ 稳定性：需专门构造，不能默认获得</a:t>
-            </a:r>
-          </a:p>
-          <a:p>
-            <a:pPr algn="l">
-              <a:lnSpc>
-                <a:spcPct val="115000"/>
-              </a:lnSpc>
-              <a:spcAft>
-                <a:spcPts val="400"/>
-              </a:spcAft>
-            </a:pPr>
-            <a:r>
-              <a:rPr sz="1250" b="0">
-                <a:solidFill>
-                  <a:srgbClr val="1B2A4A"/>
-                </a:solidFill>
-                <a:latin typeface="Noto Sans CJK SC"/>
-              </a:rPr>
-              <a:t>    – PID：Nomoto 闭环分析成熟，频域裕度/极点配置直观</a:t>
-            </a:r>
-          </a:p>
-          <a:p>
-            <a:pPr algn="l">
-              <a:lnSpc>
-                <a:spcPct val="115000"/>
-              </a:lnSpc>
-              <a:spcAft>
-                <a:spcPts val="400"/>
-              </a:spcAft>
-            </a:pPr>
-            <a:r>
-              <a:rPr sz="1250" b="0">
-                <a:solidFill>
-                  <a:srgbClr val="1B2A4A"/>
-                </a:solidFill>
-                <a:latin typeface="Noto Sans CJK SC"/>
-              </a:rPr>
-              <a:t>    – MPC：有限时域优化不天然保证闭环稳定</a:t>
-            </a:r>
-          </a:p>
-          <a:p>
-            <a:pPr algn="l">
-              <a:lnSpc>
-                <a:spcPct val="115000"/>
-              </a:lnSpc>
-              <a:spcAft>
-                <a:spcPts val="400"/>
-              </a:spcAft>
-            </a:pPr>
-            <a:r>
-              <a:rPr sz="1250" b="0">
-                <a:solidFill>
-                  <a:srgbClr val="1B2A4A"/>
-                </a:solidFill>
-                <a:latin typeface="Noto Sans CJK SC"/>
-              </a:rPr>
-              <a:t>    – 经典框架：终端约束集 + 终端代价（Mayne et al., 2000, Automatica）</a:t>
-            </a:r>
-          </a:p>
-          <a:p>
-            <a:pPr algn="l">
-              <a:lnSpc>
-                <a:spcPct val="115000"/>
-              </a:lnSpc>
-              <a:spcAft>
-                <a:spcPts val="400"/>
-              </a:spcAft>
-            </a:pPr>
-            <a:r>
-              <a:rPr sz="1250" b="0">
-                <a:solidFill>
-                  <a:srgbClr val="1B2A4A"/>
-                </a:solidFill>
-                <a:latin typeface="Noto Sans CJK SC"/>
-              </a:rPr>
-              <a:t>    – 船舶落地形式：Lyapunov 约束嵌入优化问题</a:t>
-            </a:r>
-          </a:p>
-          <a:p>
-            <a:pPr algn="l">
-              <a:lnSpc>
-                <a:spcPct val="115000"/>
-              </a:lnSpc>
-              <a:spcAft>
-                <a:spcPts val="400"/>
-              </a:spcAft>
-            </a:pPr>
-            <a:r>
-              <a:rPr sz="1250" b="0">
-                <a:solidFill>
-                  <a:srgbClr val="1B2A4A"/>
-                </a:solidFill>
-                <a:latin typeface="Noto Sans CJK SC"/>
-              </a:rPr>
-              <a:t>    – Gong et al., 2021（AUV，Ocean Engineering）</a:t>
-            </a:r>
-          </a:p>
-          <a:p>
-            <a:pPr algn="l">
-              <a:lnSpc>
-                <a:spcPct val="115000"/>
-              </a:lnSpc>
-              <a:spcAft>
-                <a:spcPts val="400"/>
-              </a:spcAft>
-            </a:pPr>
-            <a:r>
-              <a:rPr sz="1250" b="0">
-                <a:solidFill>
-                  <a:srgbClr val="1B2A4A"/>
-                </a:solidFill>
-                <a:latin typeface="Noto Sans CJK SC"/>
-              </a:rPr>
-              <a:t>    – Zhang et al., 2023（DP 船，JMSE 11(2):281）</a:t>
+              <a:t>要点：PD 辨识是 2 个参数的线性问题，一次 Z 形试验 + 在线 RLS 即可闭环；MMG-MPC 辨识是数十个水动力导数的非线性问题，需多工况机动试验或 CFD/约束模支撑。</a:t>
             </a:r>
           </a:p>
         </p:txBody>
@@ -12567,7 +13601,7 @@
                 </a:solidFill>
                 <a:latin typeface="Noto Sans CJK SC"/>
               </a:rPr>
-              <a:t>8 / 19</a:t>
+              <a:t>8 / 21</a:t>
             </a:r>
           </a:p>
         </p:txBody>
@@ -12609,7 +13643,7 @@
                 </a:solidFill>
                 <a:latin typeface="Noto Sans CJK SC"/>
               </a:rPr>
-              <a:t>来源：https://arxiv.org/abs/2510.21773 ｜ https://www.mdpi.com/2077-1312/11/2/281（Lyapunov-based MPC，DP 船）</a:t>
+              <a:t>来源：本仓库 docs/auto_tuning/辨识流程原理推导与工作流程.md ｜ https://link.springer.com/article/10.1007/s00773-014-0293-y（Yasukawa &amp; Yoshimura 2015，MMG 标准方法）</a:t>
             </a:r>
           </a:p>
         </p:txBody>
@@ -12712,14 +13746,56 @@
                 </a:solidFill>
                 <a:latin typeface="Noto Sans CJK SC"/>
               </a:rPr>
-              <a:t>MPC vs PD 部署优缺点小结</a:t>
+              <a:t>参数辨识维度对比：MMG-MPC 辨识难在哪</a:t>
+            </a:r>
+          </a:p>
+        </p:txBody>
+      </p:sp>
+      <p:sp>
+        <p:nvSpPr>
+          <p:cNvPr id="4" name="TextBox 3"/>
+          <p:cNvSpPr txBox="1"/>
+          <p:nvPr/>
+        </p:nvSpPr>
+        <p:spPr>
+          <a:xfrm>
+            <a:off x="475488" y="914400"/>
+            <a:ext cx="11247120" cy="457200"/>
+          </a:xfrm>
+          <a:prstGeom prst="rect">
+            <a:avLst/>
+          </a:prstGeom>
+          <a:noFill/>
+        </p:spPr>
+        <p:txBody>
+          <a:bodyPr wrap="square" anchor="t">
+            <a:spAutoFit/>
+          </a:bodyPr>
+          <a:lstStyle/>
+          <a:p>
+            <a:pPr algn="l">
+              <a:lnSpc>
+                <a:spcPct val="115000"/>
+              </a:lnSpc>
+              <a:spcAft>
+                <a:spcPts val="600"/>
+              </a:spcAft>
+            </a:pPr>
+            <a:r>
+              <a:rPr sz="1400" b="0">
+                <a:solidFill>
+                  <a:srgbClr val="666666"/>
+                </a:solidFill>
+                <a:latin typeface="Noto Sans CJK SC"/>
+              </a:rPr>
+              <a:t>与本仓库 control/ 已实现代码一一对应</a:t>
             </a:r>
           </a:p>
         </p:txBody>
       </p:sp>
       <p:graphicFrame>
         <p:nvGraphicFramePr>
-          <p:cNvPr id="4" name="Table 3"/>
+          <p:cNvPr id="5" name="Table 4"/>
           <p:cNvGraphicFramePr>
             <a:graphicFrameLocks noGrp="1"/>
           </p:cNvGraphicFramePr>
@@ -12727,7 +13803,7 @@
         </p:nvGraphicFramePr>
         <p:xfrm>
           <a:off x="457200" y="1463040"/>
-          <a:ext cx="11338558" cy="3566160"/>
+          <a:ext cx="11338559" cy="4480560"/>
         </p:xfrm>
         <a:graphic>
           <a:graphicData uri="http://schemas.openxmlformats.org/drawingml/2006/table">
@@ -12736,23 +13812,23 @@
                 <a:tableStyleId>{5C22544A-7EE6-4342-B048-85BDC9FD1C3A}</a:tableStyleId>
               </a:tblPr>
               <a:tblGrid>
-                <a:gridCol w="1790298"/>
-                <a:gridCol w="4376286"/>
-                <a:gridCol w="5171974"/>
+                <a:gridCol w="1619794"/>
+                <a:gridCol w="4499428"/>
+                <a:gridCol w="5219337"/>
               </a:tblGrid>
-              <a:tr h="594360">
-                <a:tc>
-                  <a:txBody>
-                    <a:bodyPr/>
-                    <a:lstStyle/>
-                    <a:p>
-                      <a:pPr>
-                        <a:lnSpc>
-                          <a:spcPct val="105000"/>
-                        </a:lnSpc>
-                      </a:pPr>
-                      <a:r>
-                        <a:rPr sz="1350" b="1">
+              <a:tr h="497840">
+                <a:tc>
+                  <a:txBody>
+                    <a:bodyPr/>
+                    <a:lstStyle/>
+                    <a:p>
+                      <a:pPr>
+                        <a:lnSpc>
+                          <a:spcPct val="105000"/>
+                        </a:lnSpc>
+                      </a:pPr>
+                      <a:r>
+                        <a:rPr sz="1200" b="1">
                           <a:solidFill>
                             <a:srgbClr val="FFFFFF"/>
                           </a:solidFill>
@@ -12779,13 +13855,13 @@
                         </a:lnSpc>
                       </a:pPr>
                       <a:r>
-                        <a:rPr sz="1350" b="1">
+                        <a:rPr sz="1200" b="1">
                           <a:solidFill>
                             <a:srgbClr val="FFFFFF"/>
                           </a:solidFill>
                           <a:latin typeface="Noto Sans CJK SC"/>
                         </a:rPr>
-                        <a:t>传统 PD/PID</a:t>
+                        <a:t>PD 参数辨识（Nomoto，本仓已实现）</a:t>
                       </a:r>
                     </a:p>
                   </a:txBody>
@@ -12806,13 +13882,13 @@
                         </a:lnSpc>
                       </a:pPr>
                       <a:r>
-                        <a:rPr sz="1350" b="1">
+                        <a:rPr sz="1200" b="1">
                           <a:solidFill>
                             <a:srgbClr val="FFFFFF"/>
                           </a:solidFill>
                           <a:latin typeface="Noto Sans CJK SC"/>
                         </a:rPr>
-                        <a:t>MPC</a:t>
+                        <a:t>MPC 参数辨识（MMG，目标方案）</a:t>
                       </a:r>
                     </a:p>
                   </a:txBody>
@@ -12823,25 +13899,25 @@
                   </a:tcPr>
                 </a:tc>
               </a:tr>
-              <a:tr h="594360">
-                <a:tc>
-                  <a:txBody>
-                    <a:bodyPr/>
-                    <a:lstStyle/>
-                    <a:p>
-                      <a:pPr>
-                        <a:lnSpc>
-                          <a:spcPct val="105000"/>
-                        </a:lnSpc>
-                      </a:pPr>
-                      <a:r>
-                        <a:rPr sz="1300" b="0">
-                          <a:solidFill>
-                            <a:srgbClr val="1B2A4A"/>
-                          </a:solidFill>
-                          <a:latin typeface="Noto Sans CJK SC"/>
-                        </a:rPr>
-                        <a:t>控制效果</a:t>
+              <a:tr h="497840">
+                <a:tc>
+                  <a:txBody>
+                    <a:bodyPr/>
+                    <a:lstStyle/>
+                    <a:p>
+                      <a:pPr>
+                        <a:lnSpc>
+                          <a:spcPct val="105000"/>
+                        </a:lnSpc>
+                      </a:pPr>
+                      <a:r>
+                        <a:rPr sz="1150" b="0">
+                          <a:solidFill>
+                            <a:srgbClr val="1B2A4A"/>
+                          </a:solidFill>
+                          <a:latin typeface="Noto Sans CJK SC"/>
+                        </a:rPr>
+                        <a:t>模型</a:t>
                       </a:r>
                     </a:p>
                   </a:txBody>
@@ -12858,13 +13934,13 @@
                         </a:lnSpc>
                       </a:pPr>
                       <a:r>
-                        <a:rPr sz="1300" b="0">
-                          <a:solidFill>
-                            <a:srgbClr val="1B2A4A"/>
-                          </a:solidFill>
-                          <a:latin typeface="Noto Sans CJK SC"/>
-                        </a:rPr>
-                        <a:t>无前瞻、海浪下易无效操舵</a:t>
+                        <a:rPr sz="1150" b="0">
+                          <a:solidFill>
+                            <a:srgbClr val="1B2A4A"/>
+                          </a:solidFill>
+                          <a:latin typeface="Noto Sans CJK SC"/>
+                        </a:rPr>
+                        <a:t>Nomoto 一阶：T·ṙ+r=Kδ（单入单出）</a:t>
                       </a:r>
                     </a:p>
                   </a:txBody>
@@ -12881,38 +13957,38 @@
                         </a:lnSpc>
                       </a:pPr>
                       <a:r>
-                        <a:rPr sz="1300" b="0">
-                          <a:solidFill>
-                            <a:srgbClr val="1B2A4A"/>
-                          </a:solidFill>
-                          <a:latin typeface="Noto Sans CJK SC"/>
-                        </a:rPr>
-                        <a:t>响应快、超调小、抗扰强、特定工况舵动作更少</a:t>
+                        <a:rPr sz="1150" b="0">
+                          <a:solidFill>
+                            <a:srgbClr val="1B2A4A"/>
+                          </a:solidFill>
+                          <a:latin typeface="Noto Sans CJK SC"/>
+                        </a:rPr>
+                        <a:t>3-DOF MMG：船体/桨/舵分离，u/v/r 耦合</a:t>
                       </a:r>
                     </a:p>
                   </a:txBody>
                   <a:tcPr marL="54864" marR="54864" marT="27432" marB="27432" anchor="ctr"/>
                 </a:tc>
               </a:tr>
-              <a:tr h="594360">
-                <a:tc>
-                  <a:txBody>
-                    <a:bodyPr/>
-                    <a:lstStyle/>
-                    <a:p>
-                      <a:pPr>
-                        <a:lnSpc>
-                          <a:spcPct val="105000"/>
-                        </a:lnSpc>
-                      </a:pPr>
-                      <a:r>
-                        <a:rPr sz="1300" b="0">
-                          <a:solidFill>
-                            <a:srgbClr val="1B2A4A"/>
-                          </a:solidFill>
-                          <a:latin typeface="Noto Sans CJK SC"/>
-                        </a:rPr>
-                        <a:t>调试难度</a:t>
+              <a:tr h="497840">
+                <a:tc>
+                  <a:txBody>
+                    <a:bodyPr/>
+                    <a:lstStyle/>
+                    <a:p>
+                      <a:pPr>
+                        <a:lnSpc>
+                          <a:spcPct val="105000"/>
+                        </a:lnSpc>
+                      </a:pPr>
+                      <a:r>
+                        <a:rPr sz="1150" b="0">
+                          <a:solidFill>
+                            <a:srgbClr val="1B2A4A"/>
+                          </a:solidFill>
+                          <a:latin typeface="Noto Sans CJK SC"/>
+                        </a:rPr>
+                        <a:t>待辨识参数</a:t>
                       </a:r>
                     </a:p>
                   </a:txBody>
@@ -12933,13 +14009,13 @@
                         </a:lnSpc>
                       </a:pPr>
                       <a:r>
-                        <a:rPr sz="1300" b="0">
-                          <a:solidFill>
-                            <a:srgbClr val="1B2A4A"/>
-                          </a:solidFill>
-                          <a:latin typeface="Noto Sans CJK SC"/>
-                        </a:rPr>
-                        <a:t>整定规则成熟，船员可现场整定</a:t>
+                        <a:rPr sz="1150" b="0">
+                          <a:solidFill>
+                            <a:srgbClr val="1B2A4A"/>
+                          </a:solidFill>
+                          <a:latin typeface="Noto Sans CJK SC"/>
+                        </a:rPr>
+                        <a:t>2 个（K、T）</a:t>
                       </a:r>
                     </a:p>
                   </a:txBody>
@@ -12960,13 +14036,13 @@
                         </a:lnSpc>
                       </a:pPr>
                       <a:r>
-                        <a:rPr sz="1300" b="0">
-                          <a:solidFill>
-                            <a:srgbClr val="1B2A4A"/>
-                          </a:solidFill>
-                          <a:latin typeface="Noto Sans CJK SC"/>
-                        </a:rPr>
-                        <a:t>模型辨识是硬门槛；权重多靠 trial-and-error</a:t>
+                        <a:rPr sz="1150" b="0">
+                          <a:solidFill>
+                            <a:srgbClr val="1B2A4A"/>
+                          </a:solidFill>
+                          <a:latin typeface="Noto Sans CJK SC"/>
+                        </a:rPr>
+                        <a:t>数十个水动力导数 + 干扰项</a:t>
                       </a:r>
                     </a:p>
                   </a:txBody>
@@ -12977,25 +14053,25 @@
                   </a:tcPr>
                 </a:tc>
               </a:tr>
-              <a:tr h="594360">
-                <a:tc>
-                  <a:txBody>
-                    <a:bodyPr/>
-                    <a:lstStyle/>
-                    <a:p>
-                      <a:pPr>
-                        <a:lnSpc>
-                          <a:spcPct val="105000"/>
-                        </a:lnSpc>
-                      </a:pPr>
-                      <a:r>
-                        <a:rPr sz="1300" b="0">
-                          <a:solidFill>
-                            <a:srgbClr val="1B2A4A"/>
-                          </a:solidFill>
-                          <a:latin typeface="Noto Sans CJK SC"/>
-                        </a:rPr>
-                        <a:t>实时计算</a:t>
+              <a:tr h="497840">
+                <a:tc>
+                  <a:txBody>
+                    <a:bodyPr/>
+                    <a:lstStyle/>
+                    <a:p>
+                      <a:pPr>
+                        <a:lnSpc>
+                          <a:spcPct val="105000"/>
+                        </a:lnSpc>
+                      </a:pPr>
+                      <a:r>
+                        <a:rPr sz="1150" b="0">
+                          <a:solidFill>
+                            <a:srgbClr val="1B2A4A"/>
+                          </a:solidFill>
+                          <a:latin typeface="Noto Sans CJK SC"/>
+                        </a:rPr>
+                        <a:t>试验与数据</a:t>
                       </a:r>
                     </a:p>
                   </a:txBody>
@@ -13012,13 +14088,13 @@
                         </a:lnSpc>
                       </a:pPr>
                       <a:r>
-                        <a:rPr sz="1300" b="0">
-                          <a:solidFill>
-                            <a:srgbClr val="1B2A4A"/>
-                          </a:solidFill>
-                          <a:latin typeface="Noto Sans CJK SC"/>
-                        </a:rPr>
-                        <a:t>几次乘加，单片机即可</a:t>
+                        <a:rPr sz="1150" b="0">
+                          <a:solidFill>
+                            <a:srgbClr val="1B2A4A"/>
+                          </a:solidFill>
+                          <a:latin typeface="Noto Sans CJK SC"/>
+                        </a:rPr>
+                        <a:t>一次 Z 形试验或在线航行数据</a:t>
                       </a:r>
                     </a:p>
                   </a:txBody>
@@ -13035,38 +14111,38 @@
                         </a:lnSpc>
                       </a:pPr>
                       <a:r>
-                        <a:rPr sz="1300" b="0">
-                          <a:solidFill>
-                            <a:srgbClr val="1B2A4A"/>
-                          </a:solidFill>
-                          <a:latin typeface="Noto Sans CJK SC"/>
-                        </a:rPr>
-                        <a:t>每周期解 QP/NLP；船舶慢动态下可行（实测 7 ms）</a:t>
+                        <a:rPr sz="1150" b="0">
+                          <a:solidFill>
+                            <a:srgbClr val="1B2A4A"/>
+                          </a:solidFill>
+                          <a:latin typeface="Noto Sans CJK SC"/>
+                        </a:rPr>
+                        <a:t>Z 形/回转/螺旋多工况试验簇，或 CFD/约束模试验</a:t>
                       </a:r>
                     </a:p>
                   </a:txBody>
                   <a:tcPr marL="54864" marR="54864" marT="27432" marB="27432" anchor="ctr"/>
                 </a:tc>
               </a:tr>
-              <a:tr h="594360">
-                <a:tc>
-                  <a:txBody>
-                    <a:bodyPr/>
-                    <a:lstStyle/>
-                    <a:p>
-                      <a:pPr>
-                        <a:lnSpc>
-                          <a:spcPct val="105000"/>
-                        </a:lnSpc>
-                      </a:pPr>
-                      <a:r>
-                        <a:rPr sz="1300" b="0">
-                          <a:solidFill>
-                            <a:srgbClr val="1B2A4A"/>
-                          </a:solidFill>
-                          <a:latin typeface="Noto Sans CJK SC"/>
-                        </a:rPr>
-                        <a:t>约束/安全</a:t>
+              <a:tr h="497840">
+                <a:tc>
+                  <a:txBody>
+                    <a:bodyPr/>
+                    <a:lstStyle/>
+                    <a:p>
+                      <a:pPr>
+                        <a:lnSpc>
+                          <a:spcPct val="105000"/>
+                        </a:lnSpc>
+                      </a:pPr>
+                      <a:r>
+                        <a:rPr sz="1150" b="0">
+                          <a:solidFill>
+                            <a:srgbClr val="1B2A4A"/>
+                          </a:solidFill>
+                          <a:latin typeface="Noto Sans CJK SC"/>
+                        </a:rPr>
+                        <a:t>辨识算法</a:t>
                       </a:r>
                     </a:p>
                   </a:txBody>
@@ -13087,13 +14163,13 @@
                         </a:lnSpc>
                       </a:pPr>
                       <a:r>
-                        <a:rPr sz="1300" b="0">
-                          <a:solidFill>
-                            <a:srgbClr val="1B2A4A"/>
-                          </a:solidFill>
-                          <a:latin typeface="Noto Sans CJK SC"/>
-                        </a:rPr>
-                        <a:t>事后饱和截断，约束下退化</a:t>
+                        <a:rPr sz="1150" b="0">
+                          <a:solidFill>
+                            <a:srgbClr val="1B2A4A"/>
+                          </a:solidFill>
+                          <a:latin typeface="Noto Sans CJK SC"/>
+                        </a:rPr>
+                        <a:t>线性 RLS（闭式递推，λ=0.98）</a:t>
                       </a:r>
                     </a:p>
                   </a:txBody>
@@ -13114,13 +14190,13 @@
                         </a:lnSpc>
                       </a:pPr>
                       <a:r>
-                        <a:rPr sz="1300" b="0">
-                          <a:solidFill>
-                            <a:srgbClr val="1B2A4A"/>
-                          </a:solidFill>
-                          <a:latin typeface="Noto Sans CJK SC"/>
-                        </a:rPr>
-                        <a:t>舵角/舵速约束显式满足；稳定性需专门构造</a:t>
+                        <a:rPr sz="1150" b="0">
+                          <a:solidFill>
+                            <a:srgbClr val="1B2A4A"/>
+                          </a:solidFill>
+                          <a:latin typeface="Noto Sans CJK SC"/>
+                        </a:rPr>
+                        <a:t>非线性最小二乘 / EKF / 极大似然 / SVM</a:t>
                       </a:r>
                     </a:p>
                   </a:txBody>
@@ -13131,25 +14207,25 @@
                   </a:tcPr>
                 </a:tc>
               </a:tr>
-              <a:tr h="594360">
-                <a:tc>
-                  <a:txBody>
-                    <a:bodyPr/>
-                    <a:lstStyle/>
-                    <a:p>
-                      <a:pPr>
-                        <a:lnSpc>
-                          <a:spcPct val="105000"/>
-                        </a:lnSpc>
-                      </a:pPr>
-                      <a:r>
-                        <a:rPr sz="1300" b="0">
-                          <a:solidFill>
-                            <a:srgbClr val="1B2A4A"/>
-                          </a:solidFill>
-                          <a:latin typeface="Noto Sans CJK SC"/>
-                        </a:rPr>
-                        <a:t>认证与维护</a:t>
+              <a:tr h="497840">
+                <a:tc>
+                  <a:txBody>
+                    <a:bodyPr/>
+                    <a:lstStyle/>
+                    <a:p>
+                      <a:pPr>
+                        <a:lnSpc>
+                          <a:spcPct val="105000"/>
+                        </a:lnSpc>
+                      </a:pPr>
+                      <a:r>
+                        <a:rPr sz="1150" b="0">
+                          <a:solidFill>
+                            <a:srgbClr val="1B2A4A"/>
+                          </a:solidFill>
+                          <a:latin typeface="Noto Sans CJK SC"/>
+                        </a:rPr>
+                        <a:t>在线性</a:t>
                       </a:r>
                     </a:p>
                   </a:txBody>
@@ -13166,13 +14242,13 @@
                         </a:lnSpc>
                       </a:pPr>
                       <a:r>
-                        <a:rPr sz="1300" b="0">
-                          <a:solidFill>
-                            <a:srgbClr val="1B2A4A"/>
-                          </a:solidFill>
-                          <a:latin typeface="Noto Sans CJK SC"/>
-                        </a:rPr>
-                        <a:t>工业生态与船级社认证完备</a:t>
+                        <a:rPr sz="1150" b="0">
+                          <a:solidFill>
+                            <a:srgbClr val="1B2A4A"/>
+                          </a:solidFill>
+                          <a:latin typeface="Noto Sans CJK SC"/>
+                        </a:rPr>
+                        <a:t>在线实时跟踪，每秒一拍</a:t>
                       </a:r>
                     </a:p>
                   </a:txBody>
@@ -13189,17 +14265,254 @@
                         </a:lnSpc>
                       </a:pPr>
                       <a:r>
-                        <a:rPr sz="1300" b="0">
-                          <a:solidFill>
-                            <a:srgbClr val="1B2A4A"/>
-                          </a:solidFill>
-                          <a:latin typeface="Noto Sans CJK SC"/>
-                        </a:rPr>
-                        <a:t>认证路径不成熟；需控制工程师维护</a:t>
+                        <a:rPr sz="1150" b="0">
+                          <a:solidFill>
+                            <a:srgbClr val="1B2A4A"/>
+                          </a:solidFill>
+                          <a:latin typeface="Noto Sans CJK SC"/>
+                        </a:rPr>
+                        <a:t>多为离线辨识 + 定期重辨识</a:t>
                       </a:r>
                     </a:p>
                   </a:txBody>
                   <a:tcPr marL="54864" marR="54864" marT="27432" marB="27432" anchor="ctr"/>
+                </a:tc>
+              </a:tr>
+              <a:tr h="497840">
+                <a:tc>
+                  <a:txBody>
+                    <a:bodyPr/>
+                    <a:lstStyle/>
+                    <a:p>
+                      <a:pPr>
+                        <a:lnSpc>
+                          <a:spcPct val="105000"/>
+                        </a:lnSpc>
+                      </a:pPr>
+                      <a:r>
+                        <a:rPr sz="1150" b="0">
+                          <a:solidFill>
+                            <a:srgbClr val="1B2A4A"/>
+                          </a:solidFill>
+                          <a:latin typeface="Noto Sans CJK SC"/>
+                        </a:rPr>
+                        <a:t>输出用途</a:t>
+                      </a:r>
+                    </a:p>
+                  </a:txBody>
+                  <a:tcPr marL="54864" marR="54864" marT="27432" marB="27432" anchor="ctr">
+                    <a:solidFill>
+                      <a:srgbClr val="EEF3FA"/>
+                    </a:solidFill>
+                  </a:tcPr>
+                </a:tc>
+                <a:tc>
+                  <a:txBody>
+                    <a:bodyPr/>
+                    <a:lstStyle/>
+                    <a:p>
+                      <a:pPr>
+                        <a:lnSpc>
+                          <a:spcPct val="105000"/>
+                        </a:lnSpc>
+                      </a:pPr>
+                      <a:r>
+                        <a:rPr sz="1150" b="0">
+                          <a:solidFill>
+                            <a:srgbClr val="1B2A4A"/>
+                          </a:solidFill>
+                          <a:latin typeface="Noto Sans CJK SC"/>
+                        </a:rPr>
+                        <a:t>极点配置 PD 增益基线（+ESC 微调）</a:t>
+                      </a:r>
+                    </a:p>
+                  </a:txBody>
+                  <a:tcPr marL="54864" marR="54864" marT="27432" marB="27432" anchor="ctr">
+                    <a:solidFill>
+                      <a:srgbClr val="EEF3FA"/>
+                    </a:solidFill>
+                  </a:tcPr>
+                </a:tc>
+                <a:tc>
+                  <a:txBody>
+                    <a:bodyPr/>
+                    <a:lstStyle/>
+                    <a:p>
+                      <a:pPr>
+                        <a:lnSpc>
+                          <a:spcPct val="105000"/>
+                        </a:lnSpc>
+                      </a:pPr>
+                      <a:r>
+                        <a:rPr sz="1150" b="0">
+                          <a:solidFill>
+                            <a:srgbClr val="1B2A4A"/>
+                          </a:solidFill>
+                          <a:latin typeface="Noto Sans CJK SC"/>
+                        </a:rPr>
+                        <a:t>MPC 离散状态空间预测模型（Ts=0.1–0.2 s）</a:t>
+                      </a:r>
+                    </a:p>
+                  </a:txBody>
+                  <a:tcPr marL="54864" marR="54864" marT="27432" marB="27432" anchor="ctr">
+                    <a:solidFill>
+                      <a:srgbClr val="EEF3FA"/>
+                    </a:solidFill>
+                  </a:tcPr>
+                </a:tc>
+              </a:tr>
+              <a:tr h="497840">
+                <a:tc>
+                  <a:txBody>
+                    <a:bodyPr/>
+                    <a:lstStyle/>
+                    <a:p>
+                      <a:pPr>
+                        <a:lnSpc>
+                          <a:spcPct val="105000"/>
+                        </a:lnSpc>
+                      </a:pPr>
+                      <a:r>
+                        <a:rPr sz="1150" b="0">
+                          <a:solidFill>
+                            <a:srgbClr val="1B2A4A"/>
+                          </a:solidFill>
+                          <a:latin typeface="Noto Sans CJK SC"/>
+                        </a:rPr>
+                        <a:t>模型覆盖</a:t>
+                      </a:r>
+                    </a:p>
+                  </a:txBody>
+                  <a:tcPr marL="54864" marR="54864" marT="27432" marB="27432" anchor="ctr"/>
+                </a:tc>
+                <a:tc>
+                  <a:txBody>
+                    <a:bodyPr/>
+                    <a:lstStyle/>
+                    <a:p>
+                      <a:pPr>
+                        <a:lnSpc>
+                          <a:spcPct val="105000"/>
+                        </a:lnSpc>
+                      </a:pPr>
+                      <a:r>
+                        <a:rPr sz="1150" b="0">
+                          <a:solidFill>
+                            <a:srgbClr val="1B2A4A"/>
+                          </a:solidFill>
+                          <a:latin typeface="Noto Sans CJK SC"/>
+                        </a:rPr>
+                        <a:t>低频艏摇良好；不覆盖横荡/耦合模态</a:t>
+                      </a:r>
+                    </a:p>
+                  </a:txBody>
+                  <a:tcPr marL="54864" marR="54864" marT="27432" marB="27432" anchor="ctr"/>
+                </a:tc>
+                <a:tc>
+                  <a:txBody>
+                    <a:bodyPr/>
+                    <a:lstStyle/>
+                    <a:p>
+                      <a:pPr>
+                        <a:lnSpc>
+                          <a:spcPct val="105000"/>
+                        </a:lnSpc>
+                      </a:pPr>
+                      <a:r>
+                        <a:rPr sz="1150" b="0">
+                          <a:solidFill>
+                            <a:srgbClr val="1B2A4A"/>
+                          </a:solidFill>
+                          <a:latin typeface="Noto Sans CJK SC"/>
+                        </a:rPr>
+                        <a:t>全耦合覆盖，但导数误差会传播进预测</a:t>
+                      </a:r>
+                    </a:p>
+                  </a:txBody>
+                  <a:tcPr marL="54864" marR="54864" marT="27432" marB="27432" anchor="ctr"/>
+                </a:tc>
+              </a:tr>
+              <a:tr h="497840">
+                <a:tc>
+                  <a:txBody>
+                    <a:bodyPr/>
+                    <a:lstStyle/>
+                    <a:p>
+                      <a:pPr>
+                        <a:lnSpc>
+                          <a:spcPct val="105000"/>
+                        </a:lnSpc>
+                      </a:pPr>
+                      <a:r>
+                        <a:rPr sz="1150" b="0">
+                          <a:solidFill>
+                            <a:srgbClr val="1B2A4A"/>
+                          </a:solidFill>
+                          <a:latin typeface="Noto Sans CJK SC"/>
+                        </a:rPr>
+                        <a:t>工程成本</a:t>
+                      </a:r>
+                    </a:p>
+                  </a:txBody>
+                  <a:tcPr marL="54864" marR="54864" marT="27432" marB="27432" anchor="ctr">
+                    <a:solidFill>
+                      <a:srgbClr val="EEF3FA"/>
+                    </a:solidFill>
+                  </a:tcPr>
+                </a:tc>
+                <a:tc>
+                  <a:txBody>
+                    <a:bodyPr/>
+                    <a:lstStyle/>
+                    <a:p>
+                      <a:pPr>
+                        <a:lnSpc>
+                          <a:spcPct val="105000"/>
+                        </a:lnSpc>
+                      </a:pPr>
+                      <a:r>
+                        <a:rPr sz="1150" b="0">
+                          <a:solidFill>
+                            <a:srgbClr val="1B2A4A"/>
+                          </a:solidFill>
+                          <a:latin typeface="Noto Sans CJK SC"/>
+                        </a:rPr>
+                        <a:t>低：nomoto_identifier.hpp 已落地</a:t>
+                      </a:r>
+                    </a:p>
+                  </a:txBody>
+                  <a:tcPr marL="54864" marR="54864" marT="27432" marB="27432" anchor="ctr">
+                    <a:solidFill>
+                      <a:srgbClr val="EEF3FA"/>
+                    </a:solidFill>
+                  </a:tcPr>
+                </a:tc>
+                <a:tc>
+                  <a:txBody>
+                    <a:bodyPr/>
+                    <a:lstStyle/>
+                    <a:p>
+                      <a:pPr>
+                        <a:lnSpc>
+                          <a:spcPct val="105000"/>
+                        </a:lnSpc>
+                      </a:pPr>
+                      <a:r>
+                        <a:rPr sz="1150" b="0">
+                          <a:solidFill>
+                            <a:srgbClr val="1B2A4A"/>
+                          </a:solidFill>
+                          <a:latin typeface="Noto Sans CJK SC"/>
+                        </a:rPr>
+                        <a:t>高：试验资源 + 辨识工具链 + 整定流程</a:t>
+                      </a:r>
+                    </a:p>
+                  </a:txBody>
+                  <a:tcPr marL="54864" marR="54864" marT="27432" marB="27432" anchor="ctr">
+                    <a:solidFill>
+                      <a:srgbClr val="EEF3FA"/>
+                    </a:solidFill>
+                  </a:tcPr>
                 </a:tc>
               </a:tr>
             </a:tbl>
@@ -13208,14 +14521,14 @@
       </p:graphicFrame>
       <p:sp>
         <p:nvSpPr>
-          <p:cNvPr id="5" name="TextBox 4"/>
+          <p:cNvPr id="6" name="TextBox 5"/>
           <p:cNvSpPr txBox="1"/>
           <p:nvPr/>
         </p:nvSpPr>
         <p:spPr>
           <a:xfrm>
-            <a:off x="457200" y="5303520"/>
-            <a:ext cx="11338560" cy="1188720"/>
+            <a:off x="457200" y="6035040"/>
+            <a:ext cx="11338560" cy="457200"/>
           </a:xfrm>
           <a:prstGeom prst="rect">
             <a:avLst/>
@@ -13237,39 +14550,20 @@
               </a:spcAft>
             </a:pPr>
             <a:r>
-              <a:rPr sz="1700" b="1">
+              <a:rPr sz="1350" b="1">
                 <a:solidFill>
                   <a:srgbClr val="2CA02C"/>
                 </a:solidFill>
                 <a:latin typeface="Noto Sans CJK SC"/>
               </a:rPr>
-              <a:t>结论性判断：PD/PID 打底保证可靠性，MPC 作为性能增强层；</a:t>
-            </a:r>
-          </a:p>
-          <a:p>
-            <a:pPr algn="l">
-              <a:lnSpc>
-                <a:spcPct val="115000"/>
-              </a:lnSpc>
-              <a:spcAft>
-                <a:spcPts val="600"/>
-              </a:spcAft>
-            </a:pPr>
-            <a:r>
-              <a:rPr sz="1700" b="1">
-                <a:solidFill>
-                  <a:srgbClr val="2CA02C"/>
-                </a:solidFill>
-                <a:latin typeface="Noto Sans CJK SC"/>
-              </a:rPr>
-              <a:t>模型辨识与整定自动化（本仓库 auto_tuning 流程）是 MPC 能否落地的前置条件。</a:t>
-            </a:r>
-          </a:p>
-        </p:txBody>
-      </p:sp>
-      <p:sp>
-        <p:nvSpPr>
-          <p:cNvPr id="6" name="TextBox 5"/>
+              <a:t>工程判断：Nomoto 辨识是 MMG-MPC 的前置能力——先交付 PD 基线并跑通辨识数据链，再把同一数据链升级为 MMG 导数辨识。</a:t>
+            </a:r>
+          </a:p>
+        </p:txBody>
+      </p:sp>
+      <p:sp>
+        <p:nvSpPr>
+          <p:cNvPr id="7" name="TextBox 6"/>
           <p:cNvSpPr txBox="1"/>
           <p:nvPr/>
         </p:nvSpPr>
@@ -13304,14 +14598,14 @@
                 </a:solidFill>
                 <a:latin typeface="Noto Sans CJK SC"/>
               </a:rPr>
-              <a:t>9 / 19</a:t>
-            </a:r>
-          </a:p>
-        </p:txBody>
-      </p:sp>
-      <p:sp>
-        <p:nvSpPr>
-          <p:cNvPr id="7" name="TextBox 6"/>
+              <a:t>9 / 21</a:t>
+            </a:r>
+          </a:p>
+        </p:txBody>
+      </p:sp>
+      <p:sp>
+        <p:nvSpPr>
+          <p:cNvPr id="8" name="TextBox 7"/>
           <p:cNvSpPr txBox="1"/>
           <p:nvPr/>
         </p:nvSpPr>
@@ -13346,7 +14640,7 @@
                 </a:solidFill>
                 <a:latin typeface="Noto Sans CJK SC"/>
               </a:rPr>
-              <a:t>来源：https://www.sciencedirect.com/science/article/abs/pii/S0029801823023557（He 2023）｜ https://arxiv.org/abs/2509.11235</a:t>
+              <a:t>来源：本仓库 control/include/nomoto_identifier.hpp、auto_tuner.hpp ｜ https://arxiv.org/abs/2312.04224（MMG 实船数据参数微调）</a:t>
             </a:r>
           </a:p>
         </p:txBody>
